--- a/slides/TP557_5_Medindo_a_precisão_de_um_modelo_de_ML.pptx
+++ b/slides/TP557_5_Medindo_a_precisão_de_um_modelo_de_ML.pptx
@@ -5,10 +5,10 @@
     <p:sldMasterId id="2147483648" r:id="rId1"/>
   </p:sldMasterIdLst>
   <p:notesMasterIdLst>
-    <p:notesMasterId r:id="rId36"/>
+    <p:notesMasterId r:id="rId37"/>
   </p:notesMasterIdLst>
   <p:handoutMasterIdLst>
-    <p:handoutMasterId r:id="rId37"/>
+    <p:handoutMasterId r:id="rId38"/>
   </p:handoutMasterIdLst>
   <p:sldIdLst>
     <p:sldId id="256" r:id="rId2"/>
@@ -21,30 +21,31 @@
     <p:sldId id="425" r:id="rId9"/>
     <p:sldId id="426" r:id="rId10"/>
     <p:sldId id="427" r:id="rId11"/>
-    <p:sldId id="428" r:id="rId12"/>
-    <p:sldId id="432" r:id="rId13"/>
-    <p:sldId id="433" r:id="rId14"/>
-    <p:sldId id="443" r:id="rId15"/>
-    <p:sldId id="429" r:id="rId16"/>
-    <p:sldId id="439" r:id="rId17"/>
-    <p:sldId id="444" r:id="rId18"/>
-    <p:sldId id="440" r:id="rId19"/>
-    <p:sldId id="441" r:id="rId20"/>
-    <p:sldId id="445" r:id="rId21"/>
-    <p:sldId id="442" r:id="rId22"/>
-    <p:sldId id="436" r:id="rId23"/>
-    <p:sldId id="446" r:id="rId24"/>
-    <p:sldId id="438" r:id="rId25"/>
-    <p:sldId id="447" r:id="rId26"/>
-    <p:sldId id="435" r:id="rId27"/>
-    <p:sldId id="448" r:id="rId28"/>
-    <p:sldId id="434" r:id="rId29"/>
-    <p:sldId id="449" r:id="rId30"/>
-    <p:sldId id="431" r:id="rId31"/>
-    <p:sldId id="405" r:id="rId32"/>
-    <p:sldId id="293" r:id="rId33"/>
-    <p:sldId id="306" r:id="rId34"/>
-    <p:sldId id="430" r:id="rId35"/>
+    <p:sldId id="450" r:id="rId12"/>
+    <p:sldId id="428" r:id="rId13"/>
+    <p:sldId id="432" r:id="rId14"/>
+    <p:sldId id="433" r:id="rId15"/>
+    <p:sldId id="443" r:id="rId16"/>
+    <p:sldId id="429" r:id="rId17"/>
+    <p:sldId id="439" r:id="rId18"/>
+    <p:sldId id="444" r:id="rId19"/>
+    <p:sldId id="440" r:id="rId20"/>
+    <p:sldId id="441" r:id="rId21"/>
+    <p:sldId id="445" r:id="rId22"/>
+    <p:sldId id="442" r:id="rId23"/>
+    <p:sldId id="436" r:id="rId24"/>
+    <p:sldId id="446" r:id="rId25"/>
+    <p:sldId id="438" r:id="rId26"/>
+    <p:sldId id="447" r:id="rId27"/>
+    <p:sldId id="435" r:id="rId28"/>
+    <p:sldId id="448" r:id="rId29"/>
+    <p:sldId id="434" r:id="rId30"/>
+    <p:sldId id="449" r:id="rId31"/>
+    <p:sldId id="431" r:id="rId32"/>
+    <p:sldId id="405" r:id="rId33"/>
+    <p:sldId id="293" r:id="rId34"/>
+    <p:sldId id="306" r:id="rId35"/>
+    <p:sldId id="430" r:id="rId36"/>
   </p:sldIdLst>
   <p:sldSz cx="12192000" cy="6858000"/>
   <p:notesSz cx="7315200" cy="9601200"/>
@@ -308,7 +309,7 @@
           <a:p>
             <a:fld id="{144F1436-6906-4D93-B7A2-786C327BFA14}" type="datetimeFigureOut">
               <a:rPr lang="nl-BE" smtClean="0"/>
-              <a:t>1/09/2023</a:t>
+              <a:t>26/03/2025</a:t>
             </a:fld>
             <a:endParaRPr lang="nl-BE"/>
           </a:p>
@@ -374,7 +375,7 @@
           <a:p>
             <a:fld id="{F7E56D9B-79AD-444A-AFED-DEC23408F8B4}" type="slidenum">
               <a:rPr lang="nl-BE" smtClean="0"/>
-              <a:t>‹nº›</a:t>
+              <a:t>‹#›</a:t>
             </a:fld>
             <a:endParaRPr lang="nl-BE"/>
           </a:p>
@@ -473,7 +474,7 @@
           <a:p>
             <a:fld id="{AA8CD09E-2914-4F47-B6C1-51B2C31814C9}" type="datetimeFigureOut">
               <a:rPr lang="pt-BR" smtClean="0"/>
-              <a:t>01/09/2023</a:t>
+              <a:t>26/03/2025</a:t>
             </a:fld>
             <a:endParaRPr lang="pt-BR"/>
           </a:p>
@@ -631,7 +632,7 @@
           <a:p>
             <a:fld id="{6FC8D850-966F-45A6-8DE7-15B891E7D40D}" type="slidenum">
               <a:rPr lang="pt-BR" smtClean="0"/>
-              <a:t>‹nº›</a:t>
+              <a:t>‹#›</a:t>
             </a:fld>
             <a:endParaRPr lang="pt-BR"/>
           </a:p>
@@ -948,7 +949,7 @@
           <a:p>
             <a:fld id="{6FC8D850-966F-45A6-8DE7-15B891E7D40D}" type="slidenum">
               <a:rPr lang="pt-BR" smtClean="0"/>
-              <a:t>29</a:t>
+              <a:t>30</a:t>
             </a:fld>
             <a:endParaRPr lang="pt-BR"/>
           </a:p>
@@ -1035,7 +1036,7 @@
           <a:p>
             <a:fld id="{6FC8D850-966F-45A6-8DE7-15B891E7D40D}" type="slidenum">
               <a:rPr lang="pt-BR" smtClean="0"/>
-              <a:t>30</a:t>
+              <a:t>31</a:t>
             </a:fld>
             <a:endParaRPr lang="pt-BR"/>
           </a:p>
@@ -1122,7 +1123,7 @@
           <a:p>
             <a:fld id="{6FC8D850-966F-45A6-8DE7-15B891E7D40D}" type="slidenum">
               <a:rPr lang="pt-BR" smtClean="0"/>
-              <a:t>31</a:t>
+              <a:t>32</a:t>
             </a:fld>
             <a:endParaRPr lang="pt-BR"/>
           </a:p>
@@ -1293,7 +1294,7 @@
           <a:p>
             <a:fld id="{6FC8D850-966F-45A6-8DE7-15B891E7D40D}" type="slidenum">
               <a:rPr lang="pt-BR" smtClean="0"/>
-              <a:t>15</a:t>
+              <a:t>16</a:t>
             </a:fld>
             <a:endParaRPr lang="pt-BR"/>
           </a:p>
@@ -1429,7 +1430,7 @@
           <a:p>
             <a:fld id="{6FC8D850-966F-45A6-8DE7-15B891E7D40D}" type="slidenum">
               <a:rPr lang="pt-BR" smtClean="0"/>
-              <a:t>16</a:t>
+              <a:t>17</a:t>
             </a:fld>
             <a:endParaRPr lang="pt-BR"/>
           </a:p>
@@ -1565,7 +1566,7 @@
           <a:p>
             <a:fld id="{6FC8D850-966F-45A6-8DE7-15B891E7D40D}" type="slidenum">
               <a:rPr lang="pt-BR" smtClean="0"/>
-              <a:t>17</a:t>
+              <a:t>18</a:t>
             </a:fld>
             <a:endParaRPr lang="pt-BR"/>
           </a:p>
@@ -1701,7 +1702,7 @@
           <a:p>
             <a:fld id="{6FC8D850-966F-45A6-8DE7-15B891E7D40D}" type="slidenum">
               <a:rPr lang="pt-BR" smtClean="0"/>
-              <a:t>18</a:t>
+              <a:t>19</a:t>
             </a:fld>
             <a:endParaRPr lang="pt-BR"/>
           </a:p>
@@ -1837,7 +1838,7 @@
           <a:p>
             <a:fld id="{6FC8D850-966F-45A6-8DE7-15B891E7D40D}" type="slidenum">
               <a:rPr lang="pt-BR" smtClean="0"/>
-              <a:t>19</a:t>
+              <a:t>20</a:t>
             </a:fld>
             <a:endParaRPr lang="pt-BR"/>
           </a:p>
@@ -1973,7 +1974,7 @@
           <a:p>
             <a:fld id="{6FC8D850-966F-45A6-8DE7-15B891E7D40D}" type="slidenum">
               <a:rPr lang="pt-BR" smtClean="0"/>
-              <a:t>20</a:t>
+              <a:t>21</a:t>
             </a:fld>
             <a:endParaRPr lang="pt-BR"/>
           </a:p>
@@ -2116,7 +2117,7 @@
           <a:p>
             <a:fld id="{6FC8D850-966F-45A6-8DE7-15B891E7D40D}" type="slidenum">
               <a:rPr lang="pt-BR" smtClean="0"/>
-              <a:t>28</a:t>
+              <a:t>29</a:t>
             </a:fld>
             <a:endParaRPr lang="pt-BR"/>
           </a:p>
@@ -2282,7 +2283,7 @@
           <a:p>
             <a:fld id="{63289F7E-B80B-496E-81B4-D396C37C9454}" type="datetimeFigureOut">
               <a:rPr lang="pt-BR" smtClean="0"/>
-              <a:t>01/09/2023</a:t>
+              <a:t>26/03/2025</a:t>
             </a:fld>
             <a:endParaRPr lang="pt-BR"/>
           </a:p>
@@ -2336,7 +2337,7 @@
           <a:p>
             <a:fld id="{1A7E88B7-70CE-4035-AE73-13FA6FB985D4}" type="slidenum">
               <a:rPr lang="pt-BR" smtClean="0"/>
-              <a:t>‹nº›</a:t>
+              <a:t>‹#›</a:t>
             </a:fld>
             <a:endParaRPr lang="pt-BR"/>
           </a:p>
@@ -2480,7 +2481,7 @@
           <a:p>
             <a:fld id="{63289F7E-B80B-496E-81B4-D396C37C9454}" type="datetimeFigureOut">
               <a:rPr lang="pt-BR" smtClean="0"/>
-              <a:t>01/09/2023</a:t>
+              <a:t>26/03/2025</a:t>
             </a:fld>
             <a:endParaRPr lang="pt-BR"/>
           </a:p>
@@ -2534,7 +2535,7 @@
           <a:p>
             <a:fld id="{1A7E88B7-70CE-4035-AE73-13FA6FB985D4}" type="slidenum">
               <a:rPr lang="pt-BR" smtClean="0"/>
-              <a:t>‹nº›</a:t>
+              <a:t>‹#›</a:t>
             </a:fld>
             <a:endParaRPr lang="pt-BR"/>
           </a:p>
@@ -2688,7 +2689,7 @@
           <a:p>
             <a:fld id="{63289F7E-B80B-496E-81B4-D396C37C9454}" type="datetimeFigureOut">
               <a:rPr lang="pt-BR" smtClean="0"/>
-              <a:t>01/09/2023</a:t>
+              <a:t>26/03/2025</a:t>
             </a:fld>
             <a:endParaRPr lang="pt-BR"/>
           </a:p>
@@ -2742,7 +2743,7 @@
           <a:p>
             <a:fld id="{1A7E88B7-70CE-4035-AE73-13FA6FB985D4}" type="slidenum">
               <a:rPr lang="pt-BR" smtClean="0"/>
-              <a:t>‹nº›</a:t>
+              <a:t>‹#›</a:t>
             </a:fld>
             <a:endParaRPr lang="pt-BR"/>
           </a:p>
@@ -2886,7 +2887,7 @@
           <a:p>
             <a:fld id="{63289F7E-B80B-496E-81B4-D396C37C9454}" type="datetimeFigureOut">
               <a:rPr lang="pt-BR" smtClean="0"/>
-              <a:t>01/09/2023</a:t>
+              <a:t>26/03/2025</a:t>
             </a:fld>
             <a:endParaRPr lang="pt-BR"/>
           </a:p>
@@ -2940,7 +2941,7 @@
           <a:p>
             <a:fld id="{1A7E88B7-70CE-4035-AE73-13FA6FB985D4}" type="slidenum">
               <a:rPr lang="pt-BR" smtClean="0"/>
-              <a:t>‹nº›</a:t>
+              <a:t>‹#›</a:t>
             </a:fld>
             <a:endParaRPr lang="pt-BR"/>
           </a:p>
@@ -3161,7 +3162,7 @@
           <a:p>
             <a:fld id="{63289F7E-B80B-496E-81B4-D396C37C9454}" type="datetimeFigureOut">
               <a:rPr lang="pt-BR" smtClean="0"/>
-              <a:t>01/09/2023</a:t>
+              <a:t>26/03/2025</a:t>
             </a:fld>
             <a:endParaRPr lang="pt-BR"/>
           </a:p>
@@ -3215,7 +3216,7 @@
           <a:p>
             <a:fld id="{1A7E88B7-70CE-4035-AE73-13FA6FB985D4}" type="slidenum">
               <a:rPr lang="pt-BR" smtClean="0"/>
-              <a:t>‹nº›</a:t>
+              <a:t>‹#›</a:t>
             </a:fld>
             <a:endParaRPr lang="pt-BR"/>
           </a:p>
@@ -3426,7 +3427,7 @@
           <a:p>
             <a:fld id="{63289F7E-B80B-496E-81B4-D396C37C9454}" type="datetimeFigureOut">
               <a:rPr lang="pt-BR" smtClean="0"/>
-              <a:t>01/09/2023</a:t>
+              <a:t>26/03/2025</a:t>
             </a:fld>
             <a:endParaRPr lang="pt-BR"/>
           </a:p>
@@ -3480,7 +3481,7 @@
           <a:p>
             <a:fld id="{1A7E88B7-70CE-4035-AE73-13FA6FB985D4}" type="slidenum">
               <a:rPr lang="pt-BR" smtClean="0"/>
-              <a:t>‹nº›</a:t>
+              <a:t>‹#›</a:t>
             </a:fld>
             <a:endParaRPr lang="pt-BR"/>
           </a:p>
@@ -3838,7 +3839,7 @@
           <a:p>
             <a:fld id="{63289F7E-B80B-496E-81B4-D396C37C9454}" type="datetimeFigureOut">
               <a:rPr lang="pt-BR" smtClean="0"/>
-              <a:t>01/09/2023</a:t>
+              <a:t>26/03/2025</a:t>
             </a:fld>
             <a:endParaRPr lang="pt-BR"/>
           </a:p>
@@ -3892,7 +3893,7 @@
           <a:p>
             <a:fld id="{1A7E88B7-70CE-4035-AE73-13FA6FB985D4}" type="slidenum">
               <a:rPr lang="pt-BR" smtClean="0"/>
-              <a:t>‹nº›</a:t>
+              <a:t>‹#›</a:t>
             </a:fld>
             <a:endParaRPr lang="pt-BR"/>
           </a:p>
@@ -3979,7 +3980,7 @@
           <a:p>
             <a:fld id="{63289F7E-B80B-496E-81B4-D396C37C9454}" type="datetimeFigureOut">
               <a:rPr lang="pt-BR" smtClean="0"/>
-              <a:t>01/09/2023</a:t>
+              <a:t>26/03/2025</a:t>
             </a:fld>
             <a:endParaRPr lang="pt-BR"/>
           </a:p>
@@ -4033,7 +4034,7 @@
           <a:p>
             <a:fld id="{1A7E88B7-70CE-4035-AE73-13FA6FB985D4}" type="slidenum">
               <a:rPr lang="pt-BR" smtClean="0"/>
-              <a:t>‹nº›</a:t>
+              <a:t>‹#›</a:t>
             </a:fld>
             <a:endParaRPr lang="pt-BR"/>
           </a:p>
@@ -4092,7 +4093,7 @@
           <a:p>
             <a:fld id="{63289F7E-B80B-496E-81B4-D396C37C9454}" type="datetimeFigureOut">
               <a:rPr lang="pt-BR" smtClean="0"/>
-              <a:t>01/09/2023</a:t>
+              <a:t>26/03/2025</a:t>
             </a:fld>
             <a:endParaRPr lang="pt-BR"/>
           </a:p>
@@ -4146,7 +4147,7 @@
           <a:p>
             <a:fld id="{1A7E88B7-70CE-4035-AE73-13FA6FB985D4}" type="slidenum">
               <a:rPr lang="pt-BR" smtClean="0"/>
-              <a:t>‹nº›</a:t>
+              <a:t>‹#›</a:t>
             </a:fld>
             <a:endParaRPr lang="pt-BR"/>
           </a:p>
@@ -4403,7 +4404,7 @@
           <a:p>
             <a:fld id="{63289F7E-B80B-496E-81B4-D396C37C9454}" type="datetimeFigureOut">
               <a:rPr lang="pt-BR" smtClean="0"/>
-              <a:t>01/09/2023</a:t>
+              <a:t>26/03/2025</a:t>
             </a:fld>
             <a:endParaRPr lang="pt-BR"/>
           </a:p>
@@ -4457,7 +4458,7 @@
           <a:p>
             <a:fld id="{1A7E88B7-70CE-4035-AE73-13FA6FB985D4}" type="slidenum">
               <a:rPr lang="pt-BR" smtClean="0"/>
-              <a:t>‹nº›</a:t>
+              <a:t>‹#›</a:t>
             </a:fld>
             <a:endParaRPr lang="pt-BR"/>
           </a:p>
@@ -4691,7 +4692,7 @@
           <a:p>
             <a:fld id="{63289F7E-B80B-496E-81B4-D396C37C9454}" type="datetimeFigureOut">
               <a:rPr lang="pt-BR" smtClean="0"/>
-              <a:t>01/09/2023</a:t>
+              <a:t>26/03/2025</a:t>
             </a:fld>
             <a:endParaRPr lang="pt-BR"/>
           </a:p>
@@ -4745,7 +4746,7 @@
           <a:p>
             <a:fld id="{1A7E88B7-70CE-4035-AE73-13FA6FB985D4}" type="slidenum">
               <a:rPr lang="pt-BR" smtClean="0"/>
-              <a:t>‹nº›</a:t>
+              <a:t>‹#›</a:t>
             </a:fld>
             <a:endParaRPr lang="pt-BR"/>
           </a:p>
@@ -4932,7 +4933,7 @@
           <a:p>
             <a:fld id="{63289F7E-B80B-496E-81B4-D396C37C9454}" type="datetimeFigureOut">
               <a:rPr lang="pt-BR" smtClean="0"/>
-              <a:t>01/09/2023</a:t>
+              <a:t>26/03/2025</a:t>
             </a:fld>
             <a:endParaRPr lang="pt-BR"/>
           </a:p>
@@ -5022,7 +5023,7 @@
           <a:p>
             <a:fld id="{1A7E88B7-70CE-4035-AE73-13FA6FB985D4}" type="slidenum">
               <a:rPr lang="pt-BR" smtClean="0"/>
-              <a:t>‹nº›</a:t>
+              <a:t>‹#›</a:t>
             </a:fld>
             <a:endParaRPr lang="pt-BR"/>
           </a:p>
@@ -5657,7 +5658,7 @@
         </p:spPr>
         <p:txBody>
           <a:bodyPr>
-            <a:normAutofit lnSpcReduction="10000"/>
+            <a:normAutofit/>
           </a:bodyPr>
           <a:lstStyle/>
           <a:p>
@@ -5687,37 +5688,19 @@
           <a:p>
             <a:r>
               <a:rPr lang="pt-BR" dirty="0"/>
-              <a:t>Usando essa métrica de </a:t>
-            </a:r>
-            <a:r>
-              <a:rPr lang="pt-BR" b="1" i="1" dirty="0"/>
-              <a:t>erro médio</a:t>
+              <a:t>Essa métrica é chamada de </a:t>
+            </a:r>
+            <a:r>
+              <a:rPr lang="pt-BR" b="1" i="1" dirty="0">
+                <a:solidFill>
+                  <a:srgbClr val="7030A0"/>
+                </a:solidFill>
+              </a:rPr>
+              <a:t>erro quadrático médio (EQM)</a:t>
             </a:r>
             <a:r>
               <a:rPr lang="pt-BR" dirty="0"/>
-              <a:t>, vemos que </a:t>
-            </a:r>
-            <a:r>
-              <a:rPr lang="pt-BR" b="1" i="1" dirty="0"/>
-              <a:t>nossa função hipótese não é boa</a:t>
-            </a:r>
-            <a:r>
-              <a:rPr lang="pt-BR" dirty="0"/>
-              <a:t>, pois o </a:t>
-            </a:r>
-            <a:r>
-              <a:rPr lang="pt-BR" b="1" i="1" dirty="0"/>
-              <a:t>valor ainda está longe de zero</a:t>
-            </a:r>
-            <a:r>
-              <a:rPr lang="pt-BR" dirty="0"/>
-              <a:t>, que é o menor valor possível e nosso objetivo final.</a:t>
-            </a:r>
-          </a:p>
-          <a:p>
-            <a:r>
-              <a:rPr lang="pt-BR" dirty="0"/>
-              <a:t>O que devemos fazer?</a:t>
+              <a:t>.</a:t>
             </a:r>
           </a:p>
         </p:txBody>
@@ -6919,6 +6902,1306 @@
   <p:cSld>
     <p:spTree>
       <p:nvGrpSpPr>
+        <p:cNvPr id="1" name="">
+          <a:extLst>
+            <a:ext uri="{FF2B5EF4-FFF2-40B4-BE49-F238E27FC236}">
+              <a16:creationId xmlns:a16="http://schemas.microsoft.com/office/drawing/2014/main" id="{3505C21E-F99F-1F86-68FD-B54DA0D8F6EE}"/>
+            </a:ext>
+          </a:extLst>
+        </p:cNvPr>
+        <p:cNvGrpSpPr/>
+        <p:nvPr/>
+      </p:nvGrpSpPr>
+      <p:grpSpPr>
+        <a:xfrm>
+          <a:off x="0" y="0"/>
+          <a:ext cx="0" cy="0"/>
+          <a:chOff x="0" y="0"/>
+          <a:chExt cx="0" cy="0"/>
+        </a:xfrm>
+      </p:grpSpPr>
+      <p:sp>
+        <p:nvSpPr>
+          <p:cNvPr id="2" name="Título 1">
+            <a:extLst>
+              <a:ext uri="{FF2B5EF4-FFF2-40B4-BE49-F238E27FC236}">
+                <a16:creationId xmlns:a16="http://schemas.microsoft.com/office/drawing/2014/main" id="{F52C2310-D341-EF14-1295-8882EF1555F3}"/>
+              </a:ext>
+            </a:extLst>
+          </p:cNvPr>
+          <p:cNvSpPr>
+            <a:spLocks noGrp="1"/>
+          </p:cNvSpPr>
+          <p:nvPr>
+            <p:ph type="title"/>
+          </p:nvPr>
+        </p:nvSpPr>
+        <p:spPr/>
+        <p:txBody>
+          <a:bodyPr/>
+          <a:lstStyle/>
+          <a:p>
+            <a:r>
+              <a:rPr lang="pt-BR" dirty="0"/>
+              <a:t>Quadrado dos comprimentos</a:t>
+            </a:r>
+          </a:p>
+        </p:txBody>
+      </p:sp>
+      <p:sp>
+        <p:nvSpPr>
+          <p:cNvPr id="3" name="Espaço Reservado para Conteúdo 2">
+            <a:extLst>
+              <a:ext uri="{FF2B5EF4-FFF2-40B4-BE49-F238E27FC236}">
+                <a16:creationId xmlns:a16="http://schemas.microsoft.com/office/drawing/2014/main" id="{63ACD9A7-3967-6937-BAEE-BF163BE77966}"/>
+              </a:ext>
+            </a:extLst>
+          </p:cNvPr>
+          <p:cNvSpPr>
+            <a:spLocks noGrp="1"/>
+          </p:cNvSpPr>
+          <p:nvPr>
+            <p:ph idx="1"/>
+          </p:nvPr>
+        </p:nvSpPr>
+        <p:spPr>
+          <a:xfrm>
+            <a:off x="6358885" y="1825624"/>
+            <a:ext cx="5699166" cy="5032375"/>
+          </a:xfrm>
+        </p:spPr>
+        <p:txBody>
+          <a:bodyPr>
+            <a:normAutofit/>
+          </a:bodyPr>
+          <a:lstStyle/>
+          <a:p>
+            <a:r>
+              <a:rPr lang="pt-BR" dirty="0"/>
+              <a:t>Usando o EQM, vemos que </a:t>
+            </a:r>
+            <a:r>
+              <a:rPr lang="pt-BR" b="1" i="1" dirty="0"/>
+              <a:t>nossa função hipótese não é boa</a:t>
+            </a:r>
+            <a:r>
+              <a:rPr lang="pt-BR" dirty="0"/>
+              <a:t>, pois o </a:t>
+            </a:r>
+            <a:r>
+              <a:rPr lang="pt-BR" b="1" i="1" dirty="0"/>
+              <a:t>valor ainda está longe de zero</a:t>
+            </a:r>
+            <a:r>
+              <a:rPr lang="pt-BR" dirty="0"/>
+              <a:t>, que é o menor valor possível e nosso objetivo final.</a:t>
+            </a:r>
+          </a:p>
+          <a:p>
+            <a:r>
+              <a:rPr lang="pt-BR" dirty="0"/>
+              <a:t>O que devemos fazer?</a:t>
+            </a:r>
+          </a:p>
+        </p:txBody>
+      </p:sp>
+      <mc:AlternateContent xmlns:mc="http://schemas.openxmlformats.org/markup-compatibility/2006" xmlns:a14="http://schemas.microsoft.com/office/drawing/2010/main">
+        <mc:Choice Requires="a14">
+          <p:sp>
+            <p:nvSpPr>
+              <p:cNvPr id="18" name="CaixaDeTexto 17">
+                <a:extLst>
+                  <a:ext uri="{FF2B5EF4-FFF2-40B4-BE49-F238E27FC236}">
+                    <a16:creationId xmlns:a16="http://schemas.microsoft.com/office/drawing/2014/main" id="{A326554D-7061-A5A0-10D4-89EFE78EE532}"/>
+                  </a:ext>
+                </a:extLst>
+              </p:cNvPr>
+              <p:cNvSpPr txBox="1"/>
+              <p:nvPr/>
+            </p:nvSpPr>
+            <p:spPr>
+              <a:xfrm>
+                <a:off x="0" y="5966722"/>
+                <a:ext cx="6708641" cy="670568"/>
+              </a:xfrm>
+              <a:prstGeom prst="rect">
+                <a:avLst/>
+              </a:prstGeom>
+              <a:noFill/>
+            </p:spPr>
+            <p:txBody>
+              <a:bodyPr wrap="square" rtlCol="0">
+                <a:spAutoFit/>
+              </a:bodyPr>
+              <a:lstStyle/>
+              <a:p>
+                <a:pPr/>
+                <a14:m>
+                  <m:oMathPara xmlns:m="http://schemas.openxmlformats.org/officeDocument/2006/math">
+                    <m:oMathParaPr>
+                      <m:jc m:val="centerGroup"/>
+                    </m:oMathParaPr>
+                    <m:oMath xmlns:m="http://schemas.openxmlformats.org/officeDocument/2006/math">
+                      <m:r>
+                        <m:rPr>
+                          <m:sty m:val="p"/>
+                        </m:rPr>
+                        <a:rPr lang="pt-BR" sz="2000" b="0" i="0" smtClean="0">
+                          <a:latin typeface="Cambria Math" panose="02040503050406030204" pitchFamily="18" charset="0"/>
+                        </a:rPr>
+                        <m:t>EQM</m:t>
+                      </m:r>
+                      <m:r>
+                        <a:rPr lang="pt-BR" sz="2000" b="0" i="1" smtClean="0">
+                          <a:latin typeface="Cambria Math" panose="02040503050406030204" pitchFamily="18" charset="0"/>
+                        </a:rPr>
+                        <m:t>=</m:t>
+                      </m:r>
+                      <m:f>
+                        <m:fPr>
+                          <m:ctrlPr>
+                            <a:rPr lang="pt-BR" sz="2000" b="0" i="1" smtClean="0">
+                              <a:latin typeface="Cambria Math" panose="02040503050406030204" pitchFamily="18" charset="0"/>
+                            </a:rPr>
+                          </m:ctrlPr>
+                        </m:fPr>
+                        <m:num>
+                          <m:r>
+                            <a:rPr lang="pt-BR" sz="2000" i="1">
+                              <a:latin typeface="Cambria Math" panose="02040503050406030204" pitchFamily="18" charset="0"/>
+                            </a:rPr>
+                            <m:t>1+0+1+4+9+16</m:t>
+                          </m:r>
+                        </m:num>
+                        <m:den>
+                          <m:r>
+                            <a:rPr lang="pt-BR" sz="2000" b="0" i="1" smtClean="0">
+                              <a:latin typeface="Cambria Math" panose="02040503050406030204" pitchFamily="18" charset="0"/>
+                            </a:rPr>
+                            <m:t>6</m:t>
+                          </m:r>
+                        </m:den>
+                      </m:f>
+                      <m:r>
+                        <a:rPr lang="pt-BR" sz="2000" b="0" i="1" smtClean="0">
+                          <a:latin typeface="Cambria Math" panose="02040503050406030204" pitchFamily="18" charset="0"/>
+                        </a:rPr>
+                        <m:t>=</m:t>
+                      </m:r>
+                      <m:r>
+                        <a:rPr lang="pt-BR" sz="2000" i="1">
+                          <a:latin typeface="Cambria Math" panose="02040503050406030204" pitchFamily="18" charset="0"/>
+                        </a:rPr>
+                        <m:t>5.17</m:t>
+                      </m:r>
+                    </m:oMath>
+                  </m:oMathPara>
+                </a14:m>
+                <a:endParaRPr lang="pt-BR" sz="2000" dirty="0"/>
+              </a:p>
+            </p:txBody>
+          </p:sp>
+        </mc:Choice>
+        <mc:Fallback xmlns="">
+          <p:sp>
+            <p:nvSpPr>
+              <p:cNvPr id="18" name="CaixaDeTexto 17">
+                <a:extLst>
+                  <a:ext uri="{FF2B5EF4-FFF2-40B4-BE49-F238E27FC236}">
+                    <a16:creationId xmlns:a16="http://schemas.microsoft.com/office/drawing/2014/main" id="{FA05A557-7AB7-A40B-7A50-EB6EBA9FB964}"/>
+                  </a:ext>
+                </a:extLst>
+              </p:cNvPr>
+              <p:cNvSpPr txBox="1">
+                <a:spLocks noRot="1" noChangeAspect="1" noMove="1" noResize="1" noEditPoints="1" noAdjustHandles="1" noChangeArrowheads="1" noChangeShapeType="1" noTextEdit="1"/>
+              </p:cNvSpPr>
+              <p:nvPr/>
+            </p:nvSpPr>
+            <p:spPr>
+              <a:xfrm>
+                <a:off x="0" y="5966722"/>
+                <a:ext cx="6708641" cy="670568"/>
+              </a:xfrm>
+              <a:prstGeom prst="rect">
+                <a:avLst/>
+              </a:prstGeom>
+              <a:blipFill>
+                <a:blip r:embed="rId2"/>
+                <a:stretch>
+                  <a:fillRect/>
+                </a:stretch>
+              </a:blipFill>
+            </p:spPr>
+            <p:txBody>
+              <a:bodyPr/>
+              <a:lstStyle/>
+              <a:p>
+                <a:r>
+                  <a:rPr lang="pt-BR">
+                    <a:noFill/>
+                  </a:rPr>
+                  <a:t> </a:t>
+                </a:r>
+              </a:p>
+            </p:txBody>
+          </p:sp>
+        </mc:Fallback>
+      </mc:AlternateContent>
+      <p:sp>
+        <p:nvSpPr>
+          <p:cNvPr id="19" name="Elipse 18">
+            <a:extLst>
+              <a:ext uri="{FF2B5EF4-FFF2-40B4-BE49-F238E27FC236}">
+                <a16:creationId xmlns:a16="http://schemas.microsoft.com/office/drawing/2014/main" id="{4AF54D8E-6D21-A889-D883-2C9CBA6DEC92}"/>
+              </a:ext>
+            </a:extLst>
+          </p:cNvPr>
+          <p:cNvSpPr/>
+          <p:nvPr/>
+        </p:nvSpPr>
+        <p:spPr>
+          <a:xfrm>
+            <a:off x="1799763" y="5930777"/>
+            <a:ext cx="531524" cy="461665"/>
+          </a:xfrm>
+          <a:prstGeom prst="ellipse">
+            <a:avLst/>
+          </a:prstGeom>
+          <a:noFill/>
+          <a:ln w="19050">
+            <a:solidFill>
+              <a:srgbClr val="FF0000"/>
+            </a:solidFill>
+          </a:ln>
+        </p:spPr>
+        <p:style>
+          <a:lnRef idx="2">
+            <a:schemeClr val="accent1">
+              <a:shade val="15000"/>
+            </a:schemeClr>
+          </a:lnRef>
+          <a:fillRef idx="1">
+            <a:schemeClr val="accent1"/>
+          </a:fillRef>
+          <a:effectRef idx="0">
+            <a:schemeClr val="accent1"/>
+          </a:effectRef>
+          <a:fontRef idx="minor">
+            <a:schemeClr val="lt1"/>
+          </a:fontRef>
+        </p:style>
+        <p:txBody>
+          <a:bodyPr rtlCol="0" anchor="ctr"/>
+          <a:lstStyle/>
+          <a:p>
+            <a:pPr algn="ctr"/>
+            <a:endParaRPr lang="pt-BR"/>
+          </a:p>
+        </p:txBody>
+      </p:sp>
+      <p:sp>
+        <p:nvSpPr>
+          <p:cNvPr id="20" name="Elipse 19">
+            <a:extLst>
+              <a:ext uri="{FF2B5EF4-FFF2-40B4-BE49-F238E27FC236}">
+                <a16:creationId xmlns:a16="http://schemas.microsoft.com/office/drawing/2014/main" id="{B12F94EC-6AB6-B29E-0B90-67907ED6D9C5}"/>
+              </a:ext>
+            </a:extLst>
+          </p:cNvPr>
+          <p:cNvSpPr/>
+          <p:nvPr/>
+        </p:nvSpPr>
+        <p:spPr>
+          <a:xfrm>
+            <a:off x="2716631" y="5921975"/>
+            <a:ext cx="531524" cy="461665"/>
+          </a:xfrm>
+          <a:prstGeom prst="ellipse">
+            <a:avLst/>
+          </a:prstGeom>
+          <a:noFill/>
+          <a:ln w="19050">
+            <a:solidFill>
+              <a:srgbClr val="FF0000"/>
+            </a:solidFill>
+          </a:ln>
+        </p:spPr>
+        <p:style>
+          <a:lnRef idx="2">
+            <a:schemeClr val="accent1">
+              <a:shade val="15000"/>
+            </a:schemeClr>
+          </a:lnRef>
+          <a:fillRef idx="1">
+            <a:schemeClr val="accent1"/>
+          </a:fillRef>
+          <a:effectRef idx="0">
+            <a:schemeClr val="accent1"/>
+          </a:effectRef>
+          <a:fontRef idx="minor">
+            <a:schemeClr val="lt1"/>
+          </a:fontRef>
+        </p:style>
+        <p:txBody>
+          <a:bodyPr rtlCol="0" anchor="ctr"/>
+          <a:lstStyle/>
+          <a:p>
+            <a:pPr algn="ctr"/>
+            <a:endParaRPr lang="pt-BR"/>
+          </a:p>
+        </p:txBody>
+      </p:sp>
+      <p:grpSp>
+        <p:nvGrpSpPr>
+          <p:cNvPr id="25" name="Agrupar 24">
+            <a:extLst>
+              <a:ext uri="{FF2B5EF4-FFF2-40B4-BE49-F238E27FC236}">
+                <a16:creationId xmlns:a16="http://schemas.microsoft.com/office/drawing/2014/main" id="{4055DEAC-F07C-0C94-1B62-29A674AC1765}"/>
+              </a:ext>
+            </a:extLst>
+          </p:cNvPr>
+          <p:cNvGrpSpPr/>
+          <p:nvPr/>
+        </p:nvGrpSpPr>
+        <p:grpSpPr>
+          <a:xfrm>
+            <a:off x="838200" y="1547971"/>
+            <a:ext cx="4915689" cy="3568398"/>
+            <a:chOff x="400408" y="2051201"/>
+            <a:chExt cx="4915689" cy="3568398"/>
+          </a:xfrm>
+        </p:grpSpPr>
+        <p:grpSp>
+          <p:nvGrpSpPr>
+            <p:cNvPr id="17" name="Agrupar 16">
+              <a:extLst>
+                <a:ext uri="{FF2B5EF4-FFF2-40B4-BE49-F238E27FC236}">
+                  <a16:creationId xmlns:a16="http://schemas.microsoft.com/office/drawing/2014/main" id="{47C36D27-5523-8A36-BC43-EA2324C5E9A1}"/>
+                </a:ext>
+              </a:extLst>
+            </p:cNvPr>
+            <p:cNvGrpSpPr/>
+            <p:nvPr/>
+          </p:nvGrpSpPr>
+          <p:grpSpPr>
+            <a:xfrm>
+              <a:off x="400408" y="2051201"/>
+              <a:ext cx="4915689" cy="3568398"/>
+              <a:chOff x="336908" y="2375202"/>
+              <a:chExt cx="4915689" cy="3568398"/>
+            </a:xfrm>
+          </p:grpSpPr>
+          <p:grpSp>
+            <p:nvGrpSpPr>
+              <p:cNvPr id="4" name="Agrupar 3">
+                <a:extLst>
+                  <a:ext uri="{FF2B5EF4-FFF2-40B4-BE49-F238E27FC236}">
+                    <a16:creationId xmlns:a16="http://schemas.microsoft.com/office/drawing/2014/main" id="{CCE73537-384D-5509-B717-2E78CA6D2080}"/>
+                  </a:ext>
+                </a:extLst>
+              </p:cNvPr>
+              <p:cNvGrpSpPr/>
+              <p:nvPr/>
+            </p:nvGrpSpPr>
+            <p:grpSpPr>
+              <a:xfrm>
+                <a:off x="336908" y="2375202"/>
+                <a:ext cx="4654432" cy="3568398"/>
+                <a:chOff x="324492" y="2280864"/>
+                <a:chExt cx="4654432" cy="3568398"/>
+              </a:xfrm>
+            </p:grpSpPr>
+            <p:pic>
+              <p:nvPicPr>
+                <p:cNvPr id="5" name="Picture 2">
+                  <a:extLst>
+                    <a:ext uri="{FF2B5EF4-FFF2-40B4-BE49-F238E27FC236}">
+                      <a16:creationId xmlns:a16="http://schemas.microsoft.com/office/drawing/2014/main" id="{3C129BBF-B934-EAD6-F14D-F90A2EC5B5D5}"/>
+                    </a:ext>
+                  </a:extLst>
+                </p:cNvPr>
+                <p:cNvPicPr>
+                  <a:picLocks noChangeAspect="1" noChangeArrowheads="1"/>
+                </p:cNvPicPr>
+                <p:nvPr/>
+              </p:nvPicPr>
+              <p:blipFill>
+                <a:blip r:embed="rId3">
+                  <a:extLst>
+                    <a:ext uri="{28A0092B-C50C-407E-A947-70E740481C1C}">
+                      <a14:useLocalDpi xmlns:a14="http://schemas.microsoft.com/office/drawing/2010/main" val="0"/>
+                    </a:ext>
+                  </a:extLst>
+                </a:blip>
+                <a:srcRect/>
+                <a:stretch>
+                  <a:fillRect/>
+                </a:stretch>
+              </p:blipFill>
+              <p:spPr bwMode="auto">
+                <a:xfrm>
+                  <a:off x="324492" y="2280864"/>
+                  <a:ext cx="4654432" cy="3568398"/>
+                </a:xfrm>
+                <a:prstGeom prst="rect">
+                  <a:avLst/>
+                </a:prstGeom>
+                <a:noFill/>
+                <a:extLst>
+                  <a:ext uri="{909E8E84-426E-40DD-AFC4-6F175D3DCCD1}">
+                    <a14:hiddenFill xmlns:a14="http://schemas.microsoft.com/office/drawing/2010/main">
+                      <a:solidFill>
+                        <a:srgbClr val="FFFFFF"/>
+                      </a:solidFill>
+                    </a14:hiddenFill>
+                  </a:ext>
+                </a:extLst>
+              </p:spPr>
+            </p:pic>
+            <p:cxnSp>
+              <p:nvCxnSpPr>
+                <p:cNvPr id="6" name="Conector reto 5">
+                  <a:extLst>
+                    <a:ext uri="{FF2B5EF4-FFF2-40B4-BE49-F238E27FC236}">
+                      <a16:creationId xmlns:a16="http://schemas.microsoft.com/office/drawing/2014/main" id="{6AB0B0F9-7225-B610-9338-537D15745971}"/>
+                    </a:ext>
+                  </a:extLst>
+                </p:cNvPr>
+                <p:cNvCxnSpPr>
+                  <a:cxnSpLocks/>
+                </p:cNvCxnSpPr>
+                <p:nvPr/>
+              </p:nvCxnSpPr>
+              <p:spPr>
+                <a:xfrm>
+                  <a:off x="4719638" y="2488406"/>
+                  <a:ext cx="0" cy="757238"/>
+                </a:xfrm>
+                <a:prstGeom prst="line">
+                  <a:avLst/>
+                </a:prstGeom>
+                <a:ln w="19050">
+                  <a:solidFill>
+                    <a:srgbClr val="FF0000"/>
+                  </a:solidFill>
+                </a:ln>
+              </p:spPr>
+              <p:style>
+                <a:lnRef idx="1">
+                  <a:schemeClr val="accent1"/>
+                </a:lnRef>
+                <a:fillRef idx="0">
+                  <a:schemeClr val="accent1"/>
+                </a:fillRef>
+                <a:effectRef idx="0">
+                  <a:schemeClr val="accent1"/>
+                </a:effectRef>
+                <a:fontRef idx="minor">
+                  <a:schemeClr val="tx1"/>
+                </a:fontRef>
+              </p:style>
+            </p:cxnSp>
+            <p:cxnSp>
+              <p:nvCxnSpPr>
+                <p:cNvPr id="7" name="Conector reto 6">
+                  <a:extLst>
+                    <a:ext uri="{FF2B5EF4-FFF2-40B4-BE49-F238E27FC236}">
+                      <a16:creationId xmlns:a16="http://schemas.microsoft.com/office/drawing/2014/main" id="{E396CC0B-2247-923A-77B2-C4008FEB1D55}"/>
+                    </a:ext>
+                  </a:extLst>
+                </p:cNvPr>
+                <p:cNvCxnSpPr>
+                  <a:cxnSpLocks/>
+                </p:cNvCxnSpPr>
+                <p:nvPr/>
+              </p:nvCxnSpPr>
+              <p:spPr>
+                <a:xfrm>
+                  <a:off x="3988118" y="3038475"/>
+                  <a:ext cx="0" cy="559594"/>
+                </a:xfrm>
+                <a:prstGeom prst="line">
+                  <a:avLst/>
+                </a:prstGeom>
+                <a:ln w="19050">
+                  <a:solidFill>
+                    <a:srgbClr val="FF0000"/>
+                  </a:solidFill>
+                </a:ln>
+              </p:spPr>
+              <p:style>
+                <a:lnRef idx="1">
+                  <a:schemeClr val="accent1"/>
+                </a:lnRef>
+                <a:fillRef idx="0">
+                  <a:schemeClr val="accent1"/>
+                </a:fillRef>
+                <a:effectRef idx="0">
+                  <a:schemeClr val="accent1"/>
+                </a:effectRef>
+                <a:fontRef idx="minor">
+                  <a:schemeClr val="tx1"/>
+                </a:fontRef>
+              </p:style>
+            </p:cxnSp>
+            <p:cxnSp>
+              <p:nvCxnSpPr>
+                <p:cNvPr id="8" name="Conector reto 7">
+                  <a:extLst>
+                    <a:ext uri="{FF2B5EF4-FFF2-40B4-BE49-F238E27FC236}">
+                      <a16:creationId xmlns:a16="http://schemas.microsoft.com/office/drawing/2014/main" id="{11BB635E-03FB-37F5-DF1D-F2FCF1B3336B}"/>
+                    </a:ext>
+                  </a:extLst>
+                </p:cNvPr>
+                <p:cNvCxnSpPr>
+                  <a:cxnSpLocks/>
+                </p:cNvCxnSpPr>
+                <p:nvPr/>
+              </p:nvCxnSpPr>
+              <p:spPr>
+                <a:xfrm>
+                  <a:off x="3249931" y="3579019"/>
+                  <a:ext cx="0" cy="383382"/>
+                </a:xfrm>
+                <a:prstGeom prst="line">
+                  <a:avLst/>
+                </a:prstGeom>
+                <a:ln w="19050">
+                  <a:solidFill>
+                    <a:srgbClr val="FF0000"/>
+                  </a:solidFill>
+                </a:ln>
+              </p:spPr>
+              <p:style>
+                <a:lnRef idx="1">
+                  <a:schemeClr val="accent1"/>
+                </a:lnRef>
+                <a:fillRef idx="0">
+                  <a:schemeClr val="accent1"/>
+                </a:fillRef>
+                <a:effectRef idx="0">
+                  <a:schemeClr val="accent1"/>
+                </a:effectRef>
+                <a:fontRef idx="minor">
+                  <a:schemeClr val="tx1"/>
+                </a:fontRef>
+              </p:style>
+            </p:cxnSp>
+            <p:cxnSp>
+              <p:nvCxnSpPr>
+                <p:cNvPr id="9" name="Conector reto 8">
+                  <a:extLst>
+                    <a:ext uri="{FF2B5EF4-FFF2-40B4-BE49-F238E27FC236}">
+                      <a16:creationId xmlns:a16="http://schemas.microsoft.com/office/drawing/2014/main" id="{9F13B697-7B3A-6839-9052-9C4751A7E3D8}"/>
+                    </a:ext>
+                  </a:extLst>
+                </p:cNvPr>
+                <p:cNvCxnSpPr>
+                  <a:cxnSpLocks/>
+                </p:cNvCxnSpPr>
+                <p:nvPr/>
+              </p:nvCxnSpPr>
+              <p:spPr>
+                <a:xfrm>
+                  <a:off x="2516506" y="4143375"/>
+                  <a:ext cx="0" cy="195263"/>
+                </a:xfrm>
+                <a:prstGeom prst="line">
+                  <a:avLst/>
+                </a:prstGeom>
+                <a:ln w="19050">
+                  <a:solidFill>
+                    <a:srgbClr val="FF0000"/>
+                  </a:solidFill>
+                </a:ln>
+              </p:spPr>
+              <p:style>
+                <a:lnRef idx="1">
+                  <a:schemeClr val="accent1"/>
+                </a:lnRef>
+                <a:fillRef idx="0">
+                  <a:schemeClr val="accent1"/>
+                </a:fillRef>
+                <a:effectRef idx="0">
+                  <a:schemeClr val="accent1"/>
+                </a:effectRef>
+                <a:fontRef idx="minor">
+                  <a:schemeClr val="tx1"/>
+                </a:fontRef>
+              </p:style>
+            </p:cxnSp>
+            <p:cxnSp>
+              <p:nvCxnSpPr>
+                <p:cNvPr id="10" name="Conector reto 9">
+                  <a:extLst>
+                    <a:ext uri="{FF2B5EF4-FFF2-40B4-BE49-F238E27FC236}">
+                      <a16:creationId xmlns:a16="http://schemas.microsoft.com/office/drawing/2014/main" id="{F066DD7E-5D9F-DA1A-56AE-02BC13BAA04B}"/>
+                    </a:ext>
+                  </a:extLst>
+                </p:cNvPr>
+                <p:cNvCxnSpPr>
+                  <a:cxnSpLocks/>
+                </p:cNvCxnSpPr>
+                <p:nvPr/>
+              </p:nvCxnSpPr>
+              <p:spPr>
+                <a:xfrm>
+                  <a:off x="1037750" y="5050635"/>
+                  <a:ext cx="0" cy="195263"/>
+                </a:xfrm>
+                <a:prstGeom prst="line">
+                  <a:avLst/>
+                </a:prstGeom>
+                <a:ln w="19050">
+                  <a:solidFill>
+                    <a:srgbClr val="FF0000"/>
+                  </a:solidFill>
+                </a:ln>
+              </p:spPr>
+              <p:style>
+                <a:lnRef idx="1">
+                  <a:schemeClr val="accent1"/>
+                </a:lnRef>
+                <a:fillRef idx="0">
+                  <a:schemeClr val="accent1"/>
+                </a:fillRef>
+                <a:effectRef idx="0">
+                  <a:schemeClr val="accent1"/>
+                </a:effectRef>
+                <a:fontRef idx="minor">
+                  <a:schemeClr val="tx1"/>
+                </a:fontRef>
+              </p:style>
+            </p:cxnSp>
+          </p:grpSp>
+          <p:sp>
+            <p:nvSpPr>
+              <p:cNvPr id="11" name="CaixaDeTexto 10">
+                <a:extLst>
+                  <a:ext uri="{FF2B5EF4-FFF2-40B4-BE49-F238E27FC236}">
+                    <a16:creationId xmlns:a16="http://schemas.microsoft.com/office/drawing/2014/main" id="{D2655067-A26A-F9EC-FDD8-FA2359C9A643}"/>
+                  </a:ext>
+                </a:extLst>
+              </p:cNvPr>
+              <p:cNvSpPr txBox="1"/>
+              <p:nvPr/>
+            </p:nvSpPr>
+            <p:spPr>
+              <a:xfrm>
+                <a:off x="1050166" y="5012580"/>
+                <a:ext cx="531524" cy="369332"/>
+              </a:xfrm>
+              <a:prstGeom prst="rect">
+                <a:avLst/>
+              </a:prstGeom>
+              <a:noFill/>
+            </p:spPr>
+            <p:txBody>
+              <a:bodyPr wrap="square" rtlCol="0">
+                <a:spAutoFit/>
+              </a:bodyPr>
+              <a:lstStyle/>
+              <a:p>
+                <a:r>
+                  <a:rPr lang="pt-BR" dirty="0"/>
+                  <a:t>1</a:t>
+                </a:r>
+              </a:p>
+            </p:txBody>
+          </p:sp>
+          <p:sp>
+            <p:nvSpPr>
+              <p:cNvPr id="12" name="CaixaDeTexto 11">
+                <a:extLst>
+                  <a:ext uri="{FF2B5EF4-FFF2-40B4-BE49-F238E27FC236}">
+                    <a16:creationId xmlns:a16="http://schemas.microsoft.com/office/drawing/2014/main" id="{CA5B0A17-29B2-5A89-F63C-2420B13C5B68}"/>
+                  </a:ext>
+                </a:extLst>
+              </p:cNvPr>
+              <p:cNvSpPr txBox="1"/>
+              <p:nvPr/>
+            </p:nvSpPr>
+            <p:spPr>
+              <a:xfrm>
+                <a:off x="1794198" y="4598076"/>
+                <a:ext cx="531524" cy="369332"/>
+              </a:xfrm>
+              <a:prstGeom prst="rect">
+                <a:avLst/>
+              </a:prstGeom>
+              <a:noFill/>
+            </p:spPr>
+            <p:txBody>
+              <a:bodyPr wrap="square" rtlCol="0">
+                <a:spAutoFit/>
+              </a:bodyPr>
+              <a:lstStyle/>
+              <a:p>
+                <a:r>
+                  <a:rPr lang="pt-BR" dirty="0"/>
+                  <a:t>0</a:t>
+                </a:r>
+              </a:p>
+            </p:txBody>
+          </p:sp>
+          <p:sp>
+            <p:nvSpPr>
+              <p:cNvPr id="13" name="CaixaDeTexto 12">
+                <a:extLst>
+                  <a:ext uri="{FF2B5EF4-FFF2-40B4-BE49-F238E27FC236}">
+                    <a16:creationId xmlns:a16="http://schemas.microsoft.com/office/drawing/2014/main" id="{A5972850-3C6B-BDEB-976F-F13462FD2CF0}"/>
+                  </a:ext>
+                </a:extLst>
+              </p:cNvPr>
+              <p:cNvSpPr txBox="1"/>
+              <p:nvPr/>
+            </p:nvSpPr>
+            <p:spPr>
+              <a:xfrm>
+                <a:off x="2551446" y="4154017"/>
+                <a:ext cx="531524" cy="369332"/>
+              </a:xfrm>
+              <a:prstGeom prst="rect">
+                <a:avLst/>
+              </a:prstGeom>
+              <a:noFill/>
+            </p:spPr>
+            <p:txBody>
+              <a:bodyPr wrap="square" rtlCol="0">
+                <a:spAutoFit/>
+              </a:bodyPr>
+              <a:lstStyle/>
+              <a:p>
+                <a:r>
+                  <a:rPr lang="pt-BR" dirty="0"/>
+                  <a:t>1</a:t>
+                </a:r>
+              </a:p>
+            </p:txBody>
+          </p:sp>
+          <p:sp>
+            <p:nvSpPr>
+              <p:cNvPr id="14" name="CaixaDeTexto 13">
+                <a:extLst>
+                  <a:ext uri="{FF2B5EF4-FFF2-40B4-BE49-F238E27FC236}">
+                    <a16:creationId xmlns:a16="http://schemas.microsoft.com/office/drawing/2014/main" id="{53D3C7CC-7BC7-3D66-A6EE-218C6F1088CF}"/>
+                  </a:ext>
+                </a:extLst>
+              </p:cNvPr>
+              <p:cNvSpPr txBox="1"/>
+              <p:nvPr/>
+            </p:nvSpPr>
+            <p:spPr>
+              <a:xfrm>
+                <a:off x="3270315" y="3686733"/>
+                <a:ext cx="531524" cy="369332"/>
+              </a:xfrm>
+              <a:prstGeom prst="rect">
+                <a:avLst/>
+              </a:prstGeom>
+              <a:noFill/>
+            </p:spPr>
+            <p:txBody>
+              <a:bodyPr wrap="square" rtlCol="0">
+                <a:spAutoFit/>
+              </a:bodyPr>
+              <a:lstStyle/>
+              <a:p>
+                <a:r>
+                  <a:rPr lang="pt-BR" dirty="0"/>
+                  <a:t>4</a:t>
+                </a:r>
+              </a:p>
+            </p:txBody>
+          </p:sp>
+          <p:sp>
+            <p:nvSpPr>
+              <p:cNvPr id="15" name="CaixaDeTexto 14">
+                <a:extLst>
+                  <a:ext uri="{FF2B5EF4-FFF2-40B4-BE49-F238E27FC236}">
+                    <a16:creationId xmlns:a16="http://schemas.microsoft.com/office/drawing/2014/main" id="{F6175BF4-F7D5-2ECE-6349-5B53EF3E4F24}"/>
+                  </a:ext>
+                </a:extLst>
+              </p:cNvPr>
+              <p:cNvSpPr txBox="1"/>
+              <p:nvPr/>
+            </p:nvSpPr>
+            <p:spPr>
+              <a:xfrm>
+                <a:off x="4010104" y="3215801"/>
+                <a:ext cx="531524" cy="369332"/>
+              </a:xfrm>
+              <a:prstGeom prst="rect">
+                <a:avLst/>
+              </a:prstGeom>
+              <a:noFill/>
+            </p:spPr>
+            <p:txBody>
+              <a:bodyPr wrap="square" rtlCol="0">
+                <a:spAutoFit/>
+              </a:bodyPr>
+              <a:lstStyle/>
+              <a:p>
+                <a:r>
+                  <a:rPr lang="pt-BR" dirty="0"/>
+                  <a:t>9</a:t>
+                </a:r>
+              </a:p>
+            </p:txBody>
+          </p:sp>
+          <p:sp>
+            <p:nvSpPr>
+              <p:cNvPr id="16" name="CaixaDeTexto 15">
+                <a:extLst>
+                  <a:ext uri="{FF2B5EF4-FFF2-40B4-BE49-F238E27FC236}">
+                    <a16:creationId xmlns:a16="http://schemas.microsoft.com/office/drawing/2014/main" id="{0B11F692-A433-62D0-99B0-0668B48A6F65}"/>
+                  </a:ext>
+                </a:extLst>
+              </p:cNvPr>
+              <p:cNvSpPr txBox="1"/>
+              <p:nvPr/>
+            </p:nvSpPr>
+            <p:spPr>
+              <a:xfrm>
+                <a:off x="4721073" y="2763481"/>
+                <a:ext cx="531524" cy="369332"/>
+              </a:xfrm>
+              <a:prstGeom prst="rect">
+                <a:avLst/>
+              </a:prstGeom>
+              <a:noFill/>
+            </p:spPr>
+            <p:txBody>
+              <a:bodyPr wrap="square" rtlCol="0">
+                <a:spAutoFit/>
+              </a:bodyPr>
+              <a:lstStyle/>
+              <a:p>
+                <a:r>
+                  <a:rPr lang="pt-BR" dirty="0"/>
+                  <a:t>16</a:t>
+                </a:r>
+              </a:p>
+            </p:txBody>
+          </p:sp>
+        </p:grpSp>
+        <p:sp>
+          <p:nvSpPr>
+            <p:cNvPr id="21" name="Elipse 20">
+              <a:extLst>
+                <a:ext uri="{FF2B5EF4-FFF2-40B4-BE49-F238E27FC236}">
+                  <a16:creationId xmlns:a16="http://schemas.microsoft.com/office/drawing/2014/main" id="{345EFA2C-84B3-BA95-4F31-A95622D44401}"/>
+                </a:ext>
+              </a:extLst>
+            </p:cNvPr>
+            <p:cNvSpPr/>
+            <p:nvPr/>
+          </p:nvSpPr>
+          <p:spPr>
+            <a:xfrm>
+              <a:off x="954125" y="4643407"/>
+              <a:ext cx="531524" cy="461665"/>
+            </a:xfrm>
+            <a:prstGeom prst="ellipse">
+              <a:avLst/>
+            </a:prstGeom>
+            <a:noFill/>
+            <a:ln w="57150">
+              <a:solidFill>
+                <a:srgbClr val="FF0000"/>
+              </a:solidFill>
+            </a:ln>
+          </p:spPr>
+          <p:style>
+            <a:lnRef idx="2">
+              <a:schemeClr val="accent1">
+                <a:shade val="15000"/>
+              </a:schemeClr>
+            </a:lnRef>
+            <a:fillRef idx="1">
+              <a:schemeClr val="accent1"/>
+            </a:fillRef>
+            <a:effectRef idx="0">
+              <a:schemeClr val="accent1"/>
+            </a:effectRef>
+            <a:fontRef idx="minor">
+              <a:schemeClr val="lt1"/>
+            </a:fontRef>
+          </p:style>
+          <p:txBody>
+            <a:bodyPr rtlCol="0" anchor="ctr"/>
+            <a:lstStyle/>
+            <a:p>
+              <a:pPr algn="ctr"/>
+              <a:endParaRPr lang="pt-BR"/>
+            </a:p>
+          </p:txBody>
+        </p:sp>
+        <p:sp>
+          <p:nvSpPr>
+            <p:cNvPr id="22" name="Elipse 21">
+              <a:extLst>
+                <a:ext uri="{FF2B5EF4-FFF2-40B4-BE49-F238E27FC236}">
+                  <a16:creationId xmlns:a16="http://schemas.microsoft.com/office/drawing/2014/main" id="{3BE96C96-6D77-D2CE-511E-D7B0BDAD0D60}"/>
+                </a:ext>
+              </a:extLst>
+            </p:cNvPr>
+            <p:cNvSpPr/>
+            <p:nvPr/>
+          </p:nvSpPr>
+          <p:spPr>
+            <a:xfrm>
+              <a:off x="2361031" y="3804532"/>
+              <a:ext cx="531524" cy="461665"/>
+            </a:xfrm>
+            <a:prstGeom prst="ellipse">
+              <a:avLst/>
+            </a:prstGeom>
+            <a:noFill/>
+            <a:ln w="57150">
+              <a:solidFill>
+                <a:srgbClr val="FF0000"/>
+              </a:solidFill>
+            </a:ln>
+          </p:spPr>
+          <p:style>
+            <a:lnRef idx="2">
+              <a:schemeClr val="accent1">
+                <a:shade val="15000"/>
+              </a:schemeClr>
+            </a:lnRef>
+            <a:fillRef idx="1">
+              <a:schemeClr val="accent1"/>
+            </a:fillRef>
+            <a:effectRef idx="0">
+              <a:schemeClr val="accent1"/>
+            </a:effectRef>
+            <a:fontRef idx="minor">
+              <a:schemeClr val="lt1"/>
+            </a:fontRef>
+          </p:style>
+          <p:txBody>
+            <a:bodyPr rtlCol="0" anchor="ctr"/>
+            <a:lstStyle/>
+            <a:p>
+              <a:pPr algn="ctr"/>
+              <a:endParaRPr lang="pt-BR"/>
+            </a:p>
+          </p:txBody>
+        </p:sp>
+      </p:grpSp>
+      <mc:AlternateContent xmlns:mc="http://schemas.openxmlformats.org/markup-compatibility/2006" xmlns:a14="http://schemas.microsoft.com/office/drawing/2010/main">
+        <mc:Choice Requires="a14">
+          <p:sp>
+            <p:nvSpPr>
+              <p:cNvPr id="26" name="CaixaDeTexto 25">
+                <a:extLst>
+                  <a:ext uri="{FF2B5EF4-FFF2-40B4-BE49-F238E27FC236}">
+                    <a16:creationId xmlns:a16="http://schemas.microsoft.com/office/drawing/2014/main" id="{9EDE9D76-0D87-FBBD-A58D-3E1A554142D7}"/>
+                  </a:ext>
+                </a:extLst>
+              </p:cNvPr>
+              <p:cNvSpPr txBox="1"/>
+              <p:nvPr/>
+            </p:nvSpPr>
+            <p:spPr>
+              <a:xfrm>
+                <a:off x="0" y="4992143"/>
+                <a:ext cx="6358883" cy="990207"/>
+              </a:xfrm>
+              <a:prstGeom prst="rect">
+                <a:avLst/>
+              </a:prstGeom>
+              <a:noFill/>
+            </p:spPr>
+            <p:txBody>
+              <a:bodyPr wrap="square" rtlCol="0">
+                <a:spAutoFit/>
+              </a:bodyPr>
+              <a:lstStyle/>
+              <a:p>
+                <a:pPr/>
+                <a14:m>
+                  <m:oMathPara xmlns:m="http://schemas.openxmlformats.org/officeDocument/2006/math">
+                    <m:oMathParaPr>
+                      <m:jc m:val="centerGroup"/>
+                    </m:oMathParaPr>
+                    <m:oMath xmlns:m="http://schemas.openxmlformats.org/officeDocument/2006/math">
+                      <m:r>
+                        <m:rPr>
+                          <m:sty m:val="p"/>
+                        </m:rPr>
+                        <a:rPr lang="pt-BR" sz="2000" b="0" i="0" smtClean="0">
+                          <a:latin typeface="Cambria Math" panose="02040503050406030204" pitchFamily="18" charset="0"/>
+                        </a:rPr>
+                        <m:t>erro</m:t>
+                      </m:r>
+                      <m:r>
+                        <a:rPr lang="pt-BR" sz="2000" b="0" i="0" smtClean="0">
+                          <a:latin typeface="Cambria Math" panose="02040503050406030204" pitchFamily="18" charset="0"/>
+                        </a:rPr>
+                        <m:t> </m:t>
+                      </m:r>
+                      <m:r>
+                        <m:rPr>
+                          <m:sty m:val="p"/>
+                        </m:rPr>
+                        <a:rPr lang="pt-BR" sz="2000" b="0" i="0" smtClean="0">
+                          <a:latin typeface="Cambria Math" panose="02040503050406030204" pitchFamily="18" charset="0"/>
+                        </a:rPr>
+                        <m:t>quadr</m:t>
+                      </m:r>
+                      <m:r>
+                        <a:rPr lang="pt-BR" sz="2000" b="0" i="0" smtClean="0">
+                          <a:latin typeface="Cambria Math" panose="02040503050406030204" pitchFamily="18" charset="0"/>
+                        </a:rPr>
+                        <m:t>á</m:t>
+                      </m:r>
+                      <m:r>
+                        <m:rPr>
+                          <m:sty m:val="p"/>
+                        </m:rPr>
+                        <a:rPr lang="pt-BR" sz="2000" b="0" i="0" smtClean="0">
+                          <a:latin typeface="Cambria Math" panose="02040503050406030204" pitchFamily="18" charset="0"/>
+                        </a:rPr>
+                        <m:t>tico</m:t>
+                      </m:r>
+                      <m:r>
+                        <a:rPr lang="pt-BR" sz="2000" b="0" i="0" smtClean="0">
+                          <a:latin typeface="Cambria Math" panose="02040503050406030204" pitchFamily="18" charset="0"/>
+                        </a:rPr>
+                        <m:t> </m:t>
+                      </m:r>
+                      <m:r>
+                        <m:rPr>
+                          <m:sty m:val="p"/>
+                        </m:rPr>
+                        <a:rPr lang="pt-BR" sz="2000" b="0" i="0" smtClean="0">
+                          <a:latin typeface="Cambria Math" panose="02040503050406030204" pitchFamily="18" charset="0"/>
+                        </a:rPr>
+                        <m:t>m</m:t>
+                      </m:r>
+                      <m:r>
+                        <a:rPr lang="pt-BR" sz="2000" b="0" i="0" smtClean="0">
+                          <a:latin typeface="Cambria Math" panose="02040503050406030204" pitchFamily="18" charset="0"/>
+                        </a:rPr>
+                        <m:t>é</m:t>
+                      </m:r>
+                      <m:r>
+                        <m:rPr>
+                          <m:sty m:val="p"/>
+                        </m:rPr>
+                        <a:rPr lang="pt-BR" sz="2000" b="0" i="0" smtClean="0">
+                          <a:latin typeface="Cambria Math" panose="02040503050406030204" pitchFamily="18" charset="0"/>
+                        </a:rPr>
+                        <m:t>dio</m:t>
+                      </m:r>
+                      <m:r>
+                        <a:rPr lang="pt-BR" sz="2000" b="0" i="0" smtClean="0">
+                          <a:latin typeface="Cambria Math" panose="02040503050406030204" pitchFamily="18" charset="0"/>
+                        </a:rPr>
+                        <m:t> (</m:t>
+                      </m:r>
+                      <m:r>
+                        <m:rPr>
+                          <m:sty m:val="p"/>
+                        </m:rPr>
+                        <a:rPr lang="pt-BR" sz="2000" b="0" i="0" smtClean="0">
+                          <a:latin typeface="Cambria Math" panose="02040503050406030204" pitchFamily="18" charset="0"/>
+                        </a:rPr>
+                        <m:t>EQM</m:t>
+                      </m:r>
+                      <m:r>
+                        <a:rPr lang="pt-BR" sz="2000" b="0" i="0" smtClean="0">
+                          <a:latin typeface="Cambria Math" panose="02040503050406030204" pitchFamily="18" charset="0"/>
+                        </a:rPr>
+                        <m:t>) </m:t>
+                      </m:r>
+                      <m:r>
+                        <a:rPr lang="pt-BR" sz="2000" b="0" i="1" smtClean="0">
+                          <a:latin typeface="Cambria Math" panose="02040503050406030204" pitchFamily="18" charset="0"/>
+                        </a:rPr>
+                        <m:t>=</m:t>
+                      </m:r>
+                      <m:f>
+                        <m:fPr>
+                          <m:ctrlPr>
+                            <a:rPr lang="pt-BR" sz="2000" b="0" i="1" smtClean="0">
+                              <a:latin typeface="Cambria Math" panose="02040503050406030204" pitchFamily="18" charset="0"/>
+                            </a:rPr>
+                          </m:ctrlPr>
+                        </m:fPr>
+                        <m:num>
+                          <m:r>
+                            <a:rPr lang="pt-BR" sz="2000" b="0" i="1" smtClean="0">
+                              <a:latin typeface="Cambria Math" panose="02040503050406030204" pitchFamily="18" charset="0"/>
+                            </a:rPr>
+                            <m:t>1</m:t>
+                          </m:r>
+                        </m:num>
+                        <m:den>
+                          <m:r>
+                            <a:rPr lang="pt-BR" sz="2000" b="0" i="1" smtClean="0">
+                              <a:latin typeface="Cambria Math" panose="02040503050406030204" pitchFamily="18" charset="0"/>
+                            </a:rPr>
+                            <m:t>6</m:t>
+                          </m:r>
+                        </m:den>
+                      </m:f>
+                      <m:nary>
+                        <m:naryPr>
+                          <m:chr m:val="∑"/>
+                          <m:ctrlPr>
+                            <a:rPr lang="pt-BR" sz="2000" b="0" i="1" smtClean="0">
+                              <a:latin typeface="Cambria Math" panose="02040503050406030204" pitchFamily="18" charset="0"/>
+                            </a:rPr>
+                          </m:ctrlPr>
+                        </m:naryPr>
+                        <m:sub>
+                          <m:r>
+                            <m:rPr>
+                              <m:brk m:alnAt="23"/>
+                            </m:rPr>
+                            <a:rPr lang="pt-BR" sz="2000" b="0" i="1" smtClean="0">
+                              <a:latin typeface="Cambria Math" panose="02040503050406030204" pitchFamily="18" charset="0"/>
+                            </a:rPr>
+                            <m:t>𝑛</m:t>
+                          </m:r>
+                          <m:r>
+                            <a:rPr lang="pt-BR" sz="2000" b="0" i="1" smtClean="0">
+                              <a:latin typeface="Cambria Math" panose="02040503050406030204" pitchFamily="18" charset="0"/>
+                            </a:rPr>
+                            <m:t>=0</m:t>
+                          </m:r>
+                        </m:sub>
+                        <m:sup>
+                          <m:r>
+                            <a:rPr lang="pt-BR" sz="2000" b="0" i="1" smtClean="0">
+                              <a:latin typeface="Cambria Math" panose="02040503050406030204" pitchFamily="18" charset="0"/>
+                            </a:rPr>
+                            <m:t>5</m:t>
+                          </m:r>
+                        </m:sup>
+                        <m:e>
+                          <m:sSup>
+                            <m:sSupPr>
+                              <m:ctrlPr>
+                                <a:rPr lang="pt-BR" sz="2000" i="1">
+                                  <a:latin typeface="Cambria Math" panose="02040503050406030204" pitchFamily="18" charset="0"/>
+                                </a:rPr>
+                              </m:ctrlPr>
+                            </m:sSupPr>
+                            <m:e>
+                              <m:r>
+                                <m:rPr>
+                                  <m:sty m:val="p"/>
+                                </m:rPr>
+                                <a:rPr lang="pt-BR" sz="2000">
+                                  <a:latin typeface="Cambria Math" panose="02040503050406030204" pitchFamily="18" charset="0"/>
+                                </a:rPr>
+                                <m:t>diff</m:t>
+                              </m:r>
+                              <m:r>
+                                <a:rPr lang="pt-BR" sz="2000" b="0" i="1" smtClean="0">
+                                  <a:latin typeface="Cambria Math" panose="02040503050406030204" pitchFamily="18" charset="0"/>
+                                </a:rPr>
+                                <m:t>[</m:t>
+                              </m:r>
+                              <m:r>
+                                <a:rPr lang="pt-BR" sz="2000" b="0" i="1" smtClean="0">
+                                  <a:latin typeface="Cambria Math" panose="02040503050406030204" pitchFamily="18" charset="0"/>
+                                </a:rPr>
+                                <m:t>𝑛</m:t>
+                              </m:r>
+                              <m:r>
+                                <a:rPr lang="pt-BR" sz="2000" b="0" i="1" smtClean="0">
+                                  <a:latin typeface="Cambria Math" panose="02040503050406030204" pitchFamily="18" charset="0"/>
+                                </a:rPr>
+                                <m:t>]</m:t>
+                              </m:r>
+                            </m:e>
+                            <m:sup>
+                              <m:r>
+                                <a:rPr lang="pt-BR" sz="2000" i="1">
+                                  <a:latin typeface="Cambria Math" panose="02040503050406030204" pitchFamily="18" charset="0"/>
+                                </a:rPr>
+                                <m:t>2</m:t>
+                              </m:r>
+                            </m:sup>
+                          </m:sSup>
+                        </m:e>
+                      </m:nary>
+                    </m:oMath>
+                  </m:oMathPara>
+                </a14:m>
+                <a:endParaRPr lang="pt-BR" sz="2000" dirty="0"/>
+              </a:p>
+            </p:txBody>
+          </p:sp>
+        </mc:Choice>
+        <mc:Fallback xmlns="">
+          <p:sp>
+            <p:nvSpPr>
+              <p:cNvPr id="26" name="CaixaDeTexto 25">
+                <a:extLst>
+                  <a:ext uri="{FF2B5EF4-FFF2-40B4-BE49-F238E27FC236}">
+                    <a16:creationId xmlns:a16="http://schemas.microsoft.com/office/drawing/2014/main" id="{EA0B3A29-D4D6-FCDB-D400-00DDC5DD35B0}"/>
+                  </a:ext>
+                </a:extLst>
+              </p:cNvPr>
+              <p:cNvSpPr txBox="1">
+                <a:spLocks noRot="1" noChangeAspect="1" noMove="1" noResize="1" noEditPoints="1" noAdjustHandles="1" noChangeArrowheads="1" noChangeShapeType="1" noTextEdit="1"/>
+              </p:cNvSpPr>
+              <p:nvPr/>
+            </p:nvSpPr>
+            <p:spPr>
+              <a:xfrm>
+                <a:off x="0" y="4992143"/>
+                <a:ext cx="6358883" cy="990207"/>
+              </a:xfrm>
+              <a:prstGeom prst="rect">
+                <a:avLst/>
+              </a:prstGeom>
+              <a:blipFill>
+                <a:blip r:embed="rId4"/>
+                <a:stretch>
+                  <a:fillRect/>
+                </a:stretch>
+              </a:blipFill>
+            </p:spPr>
+            <p:txBody>
+              <a:bodyPr/>
+              <a:lstStyle/>
+              <a:p>
+                <a:r>
+                  <a:rPr lang="pt-BR">
+                    <a:noFill/>
+                  </a:rPr>
+                  <a:t> </a:t>
+                </a:r>
+              </a:p>
+            </p:txBody>
+          </p:sp>
+        </mc:Fallback>
+      </mc:AlternateContent>
+    </p:spTree>
+    <p:extLst>
+      <p:ext uri="{BB962C8B-B14F-4D97-AF65-F5344CB8AC3E}">
+        <p14:creationId xmlns:p14="http://schemas.microsoft.com/office/powerpoint/2010/main" val="3328653116"/>
+      </p:ext>
+    </p:extLst>
+  </p:cSld>
+  <p:clrMapOvr>
+    <a:masterClrMapping/>
+  </p:clrMapOvr>
+</p:sld>
+</file>
+
+<file path=ppt/slides/slide12.xml><?xml version="1.0" encoding="utf-8"?>
+<p:sld xmlns:a="http://schemas.openxmlformats.org/drawingml/2006/main" xmlns:r="http://schemas.openxmlformats.org/officeDocument/2006/relationships" xmlns:p="http://schemas.openxmlformats.org/presentationml/2006/main">
+  <p:cSld>
+    <p:spTree>
+      <p:nvGrpSpPr>
         <p:cNvPr id="1" name=""/>
         <p:cNvGrpSpPr/>
         <p:nvPr/>
@@ -8176,7 +9459,7 @@
 </p:sld>
 </file>
 
-<file path=ppt/slides/slide12.xml><?xml version="1.0" encoding="utf-8"?>
+<file path=ppt/slides/slide13.xml><?xml version="1.0" encoding="utf-8"?>
 <p:sld xmlns:a="http://schemas.openxmlformats.org/drawingml/2006/main" xmlns:r="http://schemas.openxmlformats.org/officeDocument/2006/relationships" xmlns:p="http://schemas.openxmlformats.org/presentationml/2006/main">
   <p:cSld>
     <p:spTree>
@@ -8974,7 +10257,7 @@
 </p:sld>
 </file>
 
-<file path=ppt/slides/slide13.xml><?xml version="1.0" encoding="utf-8"?>
+<file path=ppt/slides/slide14.xml><?xml version="1.0" encoding="utf-8"?>
 <p:sld xmlns:a="http://schemas.openxmlformats.org/drawingml/2006/main" xmlns:r="http://schemas.openxmlformats.org/officeDocument/2006/relationships" xmlns:p="http://schemas.openxmlformats.org/presentationml/2006/main">
   <p:cSld>
     <p:spTree>
@@ -10432,7 +11715,7 @@
 </p:sld>
 </file>
 
-<file path=ppt/slides/slide14.xml><?xml version="1.0" encoding="utf-8"?>
+<file path=ppt/slides/slide15.xml><?xml version="1.0" encoding="utf-8"?>
 <p:sld xmlns:a="http://schemas.openxmlformats.org/drawingml/2006/main" xmlns:r="http://schemas.openxmlformats.org/officeDocument/2006/relationships" xmlns:p="http://schemas.openxmlformats.org/presentationml/2006/main">
   <p:cSld>
     <p:spTree>
@@ -10501,7 +11784,7 @@
         </p:spPr>
         <p:txBody>
           <a:bodyPr>
-            <a:normAutofit/>
+            <a:normAutofit lnSpcReduction="10000"/>
           </a:bodyPr>
           <a:lstStyle/>
           <a:p>
@@ -10519,7 +11802,19 @@
             </a:r>
             <a:r>
               <a:rPr lang="pt-BR" dirty="0"/>
-              <a:t>(ou atualização) dos pesos será sempre esse:</a:t>
+              <a:t>(ou </a:t>
+            </a:r>
+            <a:r>
+              <a:rPr lang="pt-BR" b="1" i="1" dirty="0">
+                <a:solidFill>
+                  <a:srgbClr val="7030A0"/>
+                </a:solidFill>
+              </a:rPr>
+              <a:t>atualização</a:t>
+            </a:r>
+            <a:r>
+              <a:rPr lang="pt-BR" dirty="0"/>
+              <a:t>) dos pesos será sempre esse:</a:t>
             </a:r>
           </a:p>
           <a:p>
@@ -10670,7 +11965,7 @@
 </p:sld>
 </file>
 
-<file path=ppt/slides/slide15.xml><?xml version="1.0" encoding="utf-8"?>
+<file path=ppt/slides/slide16.xml><?xml version="1.0" encoding="utf-8"?>
 <p:sld xmlns:a="http://schemas.openxmlformats.org/drawingml/2006/main" xmlns:r="http://schemas.openxmlformats.org/officeDocument/2006/relationships" xmlns:p="http://schemas.openxmlformats.org/presentationml/2006/main">
   <p:cSld>
     <p:spTree>
@@ -12202,7 +13497,7 @@
 </p:sld>
 </file>
 
-<file path=ppt/slides/slide16.xml><?xml version="1.0" encoding="utf-8"?>
+<file path=ppt/slides/slide17.xml><?xml version="1.0" encoding="utf-8"?>
 <p:sld xmlns:a="http://schemas.openxmlformats.org/drawingml/2006/main" xmlns:r="http://schemas.openxmlformats.org/officeDocument/2006/relationships" xmlns:p="http://schemas.openxmlformats.org/presentationml/2006/main">
   <p:cSld>
     <p:spTree>
@@ -12656,7 +13951,7 @@
 </p:sld>
 </file>
 
-<file path=ppt/slides/slide17.xml><?xml version="1.0" encoding="utf-8"?>
+<file path=ppt/slides/slide18.xml><?xml version="1.0" encoding="utf-8"?>
 <p:sld xmlns:a="http://schemas.openxmlformats.org/drawingml/2006/main" xmlns:r="http://schemas.openxmlformats.org/officeDocument/2006/relationships" xmlns:p="http://schemas.openxmlformats.org/presentationml/2006/main">
   <p:cSld>
     <p:spTree>
@@ -13474,7 +14769,7 @@
 </p:sld>
 </file>
 
-<file path=ppt/slides/slide18.xml><?xml version="1.0" encoding="utf-8"?>
+<file path=ppt/slides/slide19.xml><?xml version="1.0" encoding="utf-8"?>
 <p:sld xmlns:a="http://schemas.openxmlformats.org/drawingml/2006/main" xmlns:r="http://schemas.openxmlformats.org/officeDocument/2006/relationships" xmlns:p="http://schemas.openxmlformats.org/presentationml/2006/main">
   <p:cSld>
     <p:spTree>
@@ -13921,7 +15216,220 @@
 </p:sld>
 </file>
 
-<file path=ppt/slides/slide19.xml><?xml version="1.0" encoding="utf-8"?>
+<file path=ppt/slides/slide2.xml><?xml version="1.0" encoding="utf-8"?>
+<p:sld xmlns:a="http://schemas.openxmlformats.org/drawingml/2006/main" xmlns:r="http://schemas.openxmlformats.org/officeDocument/2006/relationships" xmlns:p="http://schemas.openxmlformats.org/presentationml/2006/main">
+  <p:cSld>
+    <p:spTree>
+      <p:nvGrpSpPr>
+        <p:cNvPr id="1" name=""/>
+        <p:cNvGrpSpPr/>
+        <p:nvPr/>
+      </p:nvGrpSpPr>
+      <p:grpSpPr>
+        <a:xfrm>
+          <a:off x="0" y="0"/>
+          <a:ext cx="0" cy="0"/>
+          <a:chOff x="0" y="0"/>
+          <a:chExt cx="0" cy="0"/>
+        </a:xfrm>
+      </p:grpSpPr>
+      <p:sp>
+        <p:nvSpPr>
+          <p:cNvPr id="2" name="Título 1">
+            <a:extLst>
+              <a:ext uri="{FF2B5EF4-FFF2-40B4-BE49-F238E27FC236}">
+                <a16:creationId xmlns:a16="http://schemas.microsoft.com/office/drawing/2014/main" id="{EECB3FED-5D1A-7084-5333-A3B2FA75F608}"/>
+              </a:ext>
+            </a:extLst>
+          </p:cNvPr>
+          <p:cNvSpPr>
+            <a:spLocks noGrp="1"/>
+          </p:cNvSpPr>
+          <p:nvPr>
+            <p:ph type="title"/>
+          </p:nvPr>
+        </p:nvSpPr>
+        <p:spPr/>
+        <p:txBody>
+          <a:bodyPr/>
+          <a:lstStyle/>
+          <a:p>
+            <a:r>
+              <a:rPr lang="pt-BR" dirty="0"/>
+              <a:t>O que vamos ver?</a:t>
+            </a:r>
+          </a:p>
+        </p:txBody>
+      </p:sp>
+      <p:sp>
+        <p:nvSpPr>
+          <p:cNvPr id="3" name="Espaço Reservado para Conteúdo 2">
+            <a:extLst>
+              <a:ext uri="{FF2B5EF4-FFF2-40B4-BE49-F238E27FC236}">
+                <a16:creationId xmlns:a16="http://schemas.microsoft.com/office/drawing/2014/main" id="{25FE7774-7186-A846-D8DE-518B2CBF4EBD}"/>
+              </a:ext>
+            </a:extLst>
+          </p:cNvPr>
+          <p:cNvSpPr>
+            <a:spLocks noGrp="1"/>
+          </p:cNvSpPr>
+          <p:nvPr>
+            <p:ph idx="1"/>
+          </p:nvPr>
+        </p:nvSpPr>
+        <p:spPr>
+          <a:xfrm>
+            <a:off x="838199" y="1825624"/>
+            <a:ext cx="11110646" cy="5032376"/>
+          </a:xfrm>
+        </p:spPr>
+        <p:txBody>
+          <a:bodyPr>
+            <a:normAutofit/>
+          </a:bodyPr>
+          <a:lstStyle/>
+          <a:p>
+            <a:r>
+              <a:rPr lang="pt-BR" dirty="0"/>
+              <a:t>Neste tópico vamos ver como </a:t>
+            </a:r>
+            <a:r>
+              <a:rPr lang="pt-BR" b="1" i="1" dirty="0">
+                <a:solidFill>
+                  <a:srgbClr val="7030A0"/>
+                </a:solidFill>
+              </a:rPr>
+              <a:t>medir o desempenho </a:t>
+            </a:r>
+            <a:r>
+              <a:rPr lang="pt-BR" dirty="0"/>
+              <a:t>de um </a:t>
+            </a:r>
+            <a:r>
+              <a:rPr lang="pt-BR" b="1" i="1" dirty="0">
+                <a:solidFill>
+                  <a:srgbClr val="00B050"/>
+                </a:solidFill>
+              </a:rPr>
+              <a:t>modelo de aprendizado de máquina</a:t>
+            </a:r>
+            <a:r>
+              <a:rPr lang="pt-BR" dirty="0"/>
+              <a:t> ao longo do seu processo de aprendizagem.</a:t>
+            </a:r>
+          </a:p>
+          <a:p>
+            <a:r>
+              <a:rPr lang="pt-BR" dirty="0"/>
+              <a:t>Para isso, como já discutido brevemente antes, usaremos uma função chamada de </a:t>
+            </a:r>
+            <a:r>
+              <a:rPr lang="pt-BR" b="1" i="1" dirty="0">
+                <a:solidFill>
+                  <a:srgbClr val="00B050"/>
+                </a:solidFill>
+              </a:rPr>
+              <a:t>função de erro </a:t>
+            </a:r>
+            <a:r>
+              <a:rPr lang="pt-BR" dirty="0"/>
+              <a:t>ou de </a:t>
+            </a:r>
+            <a:r>
+              <a:rPr lang="pt-BR" b="1" i="1" dirty="0">
+                <a:solidFill>
+                  <a:srgbClr val="00B050"/>
+                </a:solidFill>
+              </a:rPr>
+              <a:t>perda</a:t>
+            </a:r>
+            <a:r>
+              <a:rPr lang="pt-BR" dirty="0"/>
+              <a:t>.</a:t>
+            </a:r>
+          </a:p>
+          <a:p>
+            <a:r>
+              <a:rPr lang="pt-BR" dirty="0"/>
+              <a:t>Idealmente, o </a:t>
+            </a:r>
+            <a:r>
+              <a:rPr lang="pt-BR" b="1" i="1" dirty="0">
+                <a:solidFill>
+                  <a:srgbClr val="00B050"/>
+                </a:solidFill>
+              </a:rPr>
+              <a:t>processo de treinamento </a:t>
+            </a:r>
+            <a:r>
+              <a:rPr lang="pt-BR" dirty="0"/>
+              <a:t>tem como </a:t>
+            </a:r>
+            <a:r>
+              <a:rPr lang="pt-BR" b="1" i="1" dirty="0">
+                <a:solidFill>
+                  <a:srgbClr val="00B050"/>
+                </a:solidFill>
+              </a:rPr>
+              <a:t>objetivo minimizar o erro</a:t>
+            </a:r>
+            <a:r>
+              <a:rPr lang="pt-BR" dirty="0"/>
+              <a:t> e, consequentemente, </a:t>
+            </a:r>
+            <a:r>
+              <a:rPr lang="pt-BR" b="1" i="1" dirty="0">
+                <a:solidFill>
+                  <a:srgbClr val="00B050"/>
+                </a:solidFill>
+              </a:rPr>
+              <a:t>melhorar o desempenho do modelo</a:t>
+            </a:r>
+            <a:r>
+              <a:rPr lang="pt-BR" dirty="0"/>
+              <a:t>.</a:t>
+            </a:r>
+          </a:p>
+          <a:p>
+            <a:r>
+              <a:rPr lang="pt-BR" dirty="0"/>
+              <a:t>Além disso, veremos em breve </a:t>
+            </a:r>
+            <a:r>
+              <a:rPr lang="pt-BR" b="1" i="1" dirty="0">
+                <a:solidFill>
+                  <a:srgbClr val="00B050"/>
+                </a:solidFill>
+              </a:rPr>
+              <a:t>diferentes estratégias para minimizar o erro</a:t>
+            </a:r>
+            <a:r>
+              <a:rPr lang="pt-BR" dirty="0"/>
+              <a:t>.</a:t>
+            </a:r>
+          </a:p>
+          <a:p>
+            <a:r>
+              <a:rPr lang="pt-BR" dirty="0"/>
+              <a:t>Porém, primeiro, vamos aprender como calcular o erro.</a:t>
+            </a:r>
+          </a:p>
+        </p:txBody>
+      </p:sp>
+    </p:spTree>
+    <p:extLst>
+      <p:ext uri="{BB962C8B-B14F-4D97-AF65-F5344CB8AC3E}">
+        <p14:creationId xmlns:p14="http://schemas.microsoft.com/office/powerpoint/2010/main" val="529739951"/>
+      </p:ext>
+    </p:extLst>
+  </p:cSld>
+  <p:clrMapOvr>
+    <a:masterClrMapping/>
+  </p:clrMapOvr>
+</p:sld>
+</file>
+
+<file path=ppt/slides/slide20.xml><?xml version="1.0" encoding="utf-8"?>
 <p:sld xmlns:a="http://schemas.openxmlformats.org/drawingml/2006/main" xmlns:r="http://schemas.openxmlformats.org/officeDocument/2006/relationships" xmlns:p="http://schemas.openxmlformats.org/presentationml/2006/main">
   <p:cSld>
     <p:spTree>
@@ -14347,220 +15855,7 @@
 </p:sld>
 </file>
 
-<file path=ppt/slides/slide2.xml><?xml version="1.0" encoding="utf-8"?>
-<p:sld xmlns:a="http://schemas.openxmlformats.org/drawingml/2006/main" xmlns:r="http://schemas.openxmlformats.org/officeDocument/2006/relationships" xmlns:p="http://schemas.openxmlformats.org/presentationml/2006/main">
-  <p:cSld>
-    <p:spTree>
-      <p:nvGrpSpPr>
-        <p:cNvPr id="1" name=""/>
-        <p:cNvGrpSpPr/>
-        <p:nvPr/>
-      </p:nvGrpSpPr>
-      <p:grpSpPr>
-        <a:xfrm>
-          <a:off x="0" y="0"/>
-          <a:ext cx="0" cy="0"/>
-          <a:chOff x="0" y="0"/>
-          <a:chExt cx="0" cy="0"/>
-        </a:xfrm>
-      </p:grpSpPr>
-      <p:sp>
-        <p:nvSpPr>
-          <p:cNvPr id="2" name="Título 1">
-            <a:extLst>
-              <a:ext uri="{FF2B5EF4-FFF2-40B4-BE49-F238E27FC236}">
-                <a16:creationId xmlns:a16="http://schemas.microsoft.com/office/drawing/2014/main" id="{EECB3FED-5D1A-7084-5333-A3B2FA75F608}"/>
-              </a:ext>
-            </a:extLst>
-          </p:cNvPr>
-          <p:cNvSpPr>
-            <a:spLocks noGrp="1"/>
-          </p:cNvSpPr>
-          <p:nvPr>
-            <p:ph type="title"/>
-          </p:nvPr>
-        </p:nvSpPr>
-        <p:spPr/>
-        <p:txBody>
-          <a:bodyPr/>
-          <a:lstStyle/>
-          <a:p>
-            <a:r>
-              <a:rPr lang="pt-BR" dirty="0"/>
-              <a:t>O que vamos ver?</a:t>
-            </a:r>
-          </a:p>
-        </p:txBody>
-      </p:sp>
-      <p:sp>
-        <p:nvSpPr>
-          <p:cNvPr id="3" name="Espaço Reservado para Conteúdo 2">
-            <a:extLst>
-              <a:ext uri="{FF2B5EF4-FFF2-40B4-BE49-F238E27FC236}">
-                <a16:creationId xmlns:a16="http://schemas.microsoft.com/office/drawing/2014/main" id="{25FE7774-7186-A846-D8DE-518B2CBF4EBD}"/>
-              </a:ext>
-            </a:extLst>
-          </p:cNvPr>
-          <p:cNvSpPr>
-            <a:spLocks noGrp="1"/>
-          </p:cNvSpPr>
-          <p:nvPr>
-            <p:ph idx="1"/>
-          </p:nvPr>
-        </p:nvSpPr>
-        <p:spPr>
-          <a:xfrm>
-            <a:off x="838199" y="1825624"/>
-            <a:ext cx="11110646" cy="5032376"/>
-          </a:xfrm>
-        </p:spPr>
-        <p:txBody>
-          <a:bodyPr>
-            <a:normAutofit/>
-          </a:bodyPr>
-          <a:lstStyle/>
-          <a:p>
-            <a:r>
-              <a:rPr lang="pt-BR" dirty="0"/>
-              <a:t>Neste tópico vamos ver como </a:t>
-            </a:r>
-            <a:r>
-              <a:rPr lang="pt-BR" b="1" i="1" dirty="0">
-                <a:solidFill>
-                  <a:srgbClr val="00B050"/>
-                </a:solidFill>
-              </a:rPr>
-              <a:t>medir o desempenho </a:t>
-            </a:r>
-            <a:r>
-              <a:rPr lang="pt-BR" dirty="0"/>
-              <a:t>de um </a:t>
-            </a:r>
-            <a:r>
-              <a:rPr lang="pt-BR" b="1" i="1" dirty="0">
-                <a:solidFill>
-                  <a:srgbClr val="00B050"/>
-                </a:solidFill>
-              </a:rPr>
-              <a:t>modelo de aprendizado de máquina</a:t>
-            </a:r>
-            <a:r>
-              <a:rPr lang="pt-BR" dirty="0"/>
-              <a:t> ao longo do seu processo de aprendizagem.</a:t>
-            </a:r>
-          </a:p>
-          <a:p>
-            <a:r>
-              <a:rPr lang="pt-BR" dirty="0"/>
-              <a:t>Para isso, como já discutido brevemente antes, usaremos uma função chamada de </a:t>
-            </a:r>
-            <a:r>
-              <a:rPr lang="pt-BR" b="1" i="1" dirty="0">
-                <a:solidFill>
-                  <a:srgbClr val="00B050"/>
-                </a:solidFill>
-              </a:rPr>
-              <a:t>função de erro </a:t>
-            </a:r>
-            <a:r>
-              <a:rPr lang="pt-BR" dirty="0"/>
-              <a:t>ou de </a:t>
-            </a:r>
-            <a:r>
-              <a:rPr lang="pt-BR" b="1" i="1" dirty="0">
-                <a:solidFill>
-                  <a:srgbClr val="00B050"/>
-                </a:solidFill>
-              </a:rPr>
-              <a:t>perda</a:t>
-            </a:r>
-            <a:r>
-              <a:rPr lang="pt-BR" dirty="0"/>
-              <a:t>.</a:t>
-            </a:r>
-          </a:p>
-          <a:p>
-            <a:r>
-              <a:rPr lang="pt-BR" dirty="0"/>
-              <a:t>Idealmente, o </a:t>
-            </a:r>
-            <a:r>
-              <a:rPr lang="pt-BR" b="1" i="1" dirty="0">
-                <a:solidFill>
-                  <a:srgbClr val="00B050"/>
-                </a:solidFill>
-              </a:rPr>
-              <a:t>processo de treinamento </a:t>
-            </a:r>
-            <a:r>
-              <a:rPr lang="pt-BR" dirty="0"/>
-              <a:t>tem como </a:t>
-            </a:r>
-            <a:r>
-              <a:rPr lang="pt-BR" b="1" i="1" dirty="0">
-                <a:solidFill>
-                  <a:srgbClr val="00B050"/>
-                </a:solidFill>
-              </a:rPr>
-              <a:t>objetivo minimizar o erro</a:t>
-            </a:r>
-            <a:r>
-              <a:rPr lang="pt-BR" dirty="0"/>
-              <a:t> e, consequentemente, </a:t>
-            </a:r>
-            <a:r>
-              <a:rPr lang="pt-BR" b="1" i="1" dirty="0">
-                <a:solidFill>
-                  <a:srgbClr val="00B050"/>
-                </a:solidFill>
-              </a:rPr>
-              <a:t>aumentar a precisão do modelo</a:t>
-            </a:r>
-            <a:r>
-              <a:rPr lang="pt-BR" dirty="0"/>
-              <a:t>.</a:t>
-            </a:r>
-          </a:p>
-          <a:p>
-            <a:r>
-              <a:rPr lang="pt-BR" dirty="0"/>
-              <a:t>Além disso, veremos em breve </a:t>
-            </a:r>
-            <a:r>
-              <a:rPr lang="pt-BR" b="1" i="1" dirty="0">
-                <a:solidFill>
-                  <a:srgbClr val="00B050"/>
-                </a:solidFill>
-              </a:rPr>
-              <a:t>diferentes estratégias para minimizar o erro</a:t>
-            </a:r>
-            <a:r>
-              <a:rPr lang="pt-BR" dirty="0"/>
-              <a:t>.</a:t>
-            </a:r>
-          </a:p>
-          <a:p>
-            <a:r>
-              <a:rPr lang="pt-BR" dirty="0"/>
-              <a:t>Porém, primeiro, vamos aprender como calcular o erro.</a:t>
-            </a:r>
-          </a:p>
-        </p:txBody>
-      </p:sp>
-    </p:spTree>
-    <p:extLst>
-      <p:ext uri="{BB962C8B-B14F-4D97-AF65-F5344CB8AC3E}">
-        <p14:creationId xmlns:p14="http://schemas.microsoft.com/office/powerpoint/2010/main" val="529739951"/>
-      </p:ext>
-    </p:extLst>
-  </p:cSld>
-  <p:clrMapOvr>
-    <a:masterClrMapping/>
-  </p:clrMapOvr>
-</p:sld>
-</file>
-
-<file path=ppt/slides/slide20.xml><?xml version="1.0" encoding="utf-8"?>
+<file path=ppt/slides/slide21.xml><?xml version="1.0" encoding="utf-8"?>
 <p:sld xmlns:a="http://schemas.openxmlformats.org/drawingml/2006/main" xmlns:r="http://schemas.openxmlformats.org/officeDocument/2006/relationships" xmlns:p="http://schemas.openxmlformats.org/presentationml/2006/main">
   <p:cSld>
     <p:spTree>
@@ -14977,7 +16272,7 @@
 </p:sld>
 </file>
 
-<file path=ppt/slides/slide21.xml><?xml version="1.0" encoding="utf-8"?>
+<file path=ppt/slides/slide22.xml><?xml version="1.0" encoding="utf-8"?>
 <p:sld xmlns:a="http://schemas.openxmlformats.org/drawingml/2006/main" xmlns:r="http://schemas.openxmlformats.org/officeDocument/2006/relationships" xmlns:p="http://schemas.openxmlformats.org/presentationml/2006/main">
   <p:cSld>
     <p:spTree>
@@ -15134,7 +16429,7 @@
 </p:sld>
 </file>
 
-<file path=ppt/slides/slide22.xml><?xml version="1.0" encoding="utf-8"?>
+<file path=ppt/slides/slide23.xml><?xml version="1.0" encoding="utf-8"?>
 <p:sld xmlns:a="http://schemas.openxmlformats.org/drawingml/2006/main" xmlns:r="http://schemas.openxmlformats.org/officeDocument/2006/relationships" xmlns:p="http://schemas.openxmlformats.org/presentationml/2006/main">
   <p:cSld>
     <p:spTree>
@@ -16583,7 +17878,7 @@
 </p:sld>
 </file>
 
-<file path=ppt/slides/slide23.xml><?xml version="1.0" encoding="utf-8"?>
+<file path=ppt/slides/slide24.xml><?xml version="1.0" encoding="utf-8"?>
 <p:sld xmlns:a="http://schemas.openxmlformats.org/drawingml/2006/main" xmlns:r="http://schemas.openxmlformats.org/officeDocument/2006/relationships" xmlns:p="http://schemas.openxmlformats.org/presentationml/2006/main">
   <p:cSld>
     <p:spTree>
@@ -17976,7 +19271,7 @@
 </p:sld>
 </file>
 
-<file path=ppt/slides/slide24.xml><?xml version="1.0" encoding="utf-8"?>
+<file path=ppt/slides/slide25.xml><?xml version="1.0" encoding="utf-8"?>
 <p:sld xmlns:a="http://schemas.openxmlformats.org/drawingml/2006/main" xmlns:r="http://schemas.openxmlformats.org/officeDocument/2006/relationships" xmlns:p="http://schemas.openxmlformats.org/presentationml/2006/main">
   <p:cSld>
     <p:spTree>
@@ -18858,7 +20153,7 @@
 </p:sld>
 </file>
 
-<file path=ppt/slides/slide25.xml><?xml version="1.0" encoding="utf-8"?>
+<file path=ppt/slides/slide26.xml><?xml version="1.0" encoding="utf-8"?>
 <p:sld xmlns:a="http://schemas.openxmlformats.org/drawingml/2006/main" xmlns:r="http://schemas.openxmlformats.org/officeDocument/2006/relationships" xmlns:p="http://schemas.openxmlformats.org/presentationml/2006/main">
   <p:cSld>
     <p:spTree>
@@ -20207,7 +21502,7 @@
 </p:sld>
 </file>
 
-<file path=ppt/slides/slide26.xml><?xml version="1.0" encoding="utf-8"?>
+<file path=ppt/slides/slide27.xml><?xml version="1.0" encoding="utf-8"?>
 <p:sld xmlns:a="http://schemas.openxmlformats.org/drawingml/2006/main" xmlns:r="http://schemas.openxmlformats.org/officeDocument/2006/relationships" xmlns:p="http://schemas.openxmlformats.org/presentationml/2006/main">
   <p:cSld>
     <p:spTree>
@@ -21373,7 +22668,7 @@
 </p:sld>
 </file>
 
-<file path=ppt/slides/slide27.xml><?xml version="1.0" encoding="utf-8"?>
+<file path=ppt/slides/slide28.xml><?xml version="1.0" encoding="utf-8"?>
 <p:sld xmlns:a="http://schemas.openxmlformats.org/drawingml/2006/main" xmlns:r="http://schemas.openxmlformats.org/officeDocument/2006/relationships" xmlns:p="http://schemas.openxmlformats.org/presentationml/2006/main">
   <p:cSld>
     <p:spTree>
@@ -22503,7 +23798,7 @@
 </p:sld>
 </file>
 
-<file path=ppt/slides/slide28.xml><?xml version="1.0" encoding="utf-8"?>
+<file path=ppt/slides/slide29.xml><?xml version="1.0" encoding="utf-8"?>
 <p:sld xmlns:a="http://schemas.openxmlformats.org/drawingml/2006/main" xmlns:r="http://schemas.openxmlformats.org/officeDocument/2006/relationships" xmlns:p="http://schemas.openxmlformats.org/presentationml/2006/main">
   <p:cSld>
     <p:spTree>
@@ -23893,374 +25188,6 @@
 </p:sld>
 </file>
 
-<file path=ppt/slides/slide29.xml><?xml version="1.0" encoding="utf-8"?>
-<p:sld xmlns:a="http://schemas.openxmlformats.org/drawingml/2006/main" xmlns:r="http://schemas.openxmlformats.org/officeDocument/2006/relationships" xmlns:p="http://schemas.openxmlformats.org/presentationml/2006/main">
-  <p:cSld>
-    <p:spTree>
-      <p:nvGrpSpPr>
-        <p:cNvPr id="1" name=""/>
-        <p:cNvGrpSpPr/>
-        <p:nvPr/>
-      </p:nvGrpSpPr>
-      <p:grpSpPr>
-        <a:xfrm>
-          <a:off x="0" y="0"/>
-          <a:ext cx="0" cy="0"/>
-          <a:chOff x="0" y="0"/>
-          <a:chExt cx="0" cy="0"/>
-        </a:xfrm>
-      </p:grpSpPr>
-      <p:sp>
-        <p:nvSpPr>
-          <p:cNvPr id="2" name="Título 1">
-            <a:extLst>
-              <a:ext uri="{FF2B5EF4-FFF2-40B4-BE49-F238E27FC236}">
-                <a16:creationId xmlns:a16="http://schemas.microsoft.com/office/drawing/2014/main" id="{ABEFD801-7E8D-0885-F1AD-8DAF6F77CEEE}"/>
-              </a:ext>
-            </a:extLst>
-          </p:cNvPr>
-          <p:cNvSpPr>
-            <a:spLocks noGrp="1"/>
-          </p:cNvSpPr>
-          <p:nvPr>
-            <p:ph type="title"/>
-          </p:nvPr>
-        </p:nvSpPr>
-        <p:spPr/>
-        <p:txBody>
-          <a:bodyPr/>
-          <a:lstStyle/>
-          <a:p>
-            <a:r>
-              <a:rPr lang="pt-BR" dirty="0"/>
-              <a:t>Gradiente descendente</a:t>
-            </a:r>
-          </a:p>
-        </p:txBody>
-      </p:sp>
-      <p:sp>
-        <p:nvSpPr>
-          <p:cNvPr id="3" name="Espaço Reservado para Conteúdo 2">
-            <a:extLst>
-              <a:ext uri="{FF2B5EF4-FFF2-40B4-BE49-F238E27FC236}">
-                <a16:creationId xmlns:a16="http://schemas.microsoft.com/office/drawing/2014/main" id="{9BA6276C-11C7-FBDF-9CC4-A84A195D7527}"/>
-              </a:ext>
-            </a:extLst>
-          </p:cNvPr>
-          <p:cNvSpPr>
-            <a:spLocks noGrp="1"/>
-          </p:cNvSpPr>
-          <p:nvPr>
-            <p:ph idx="1"/>
-          </p:nvPr>
-        </p:nvSpPr>
-        <p:spPr>
-          <a:xfrm>
-            <a:off x="5147353" y="1690688"/>
-            <a:ext cx="6905280" cy="5167312"/>
-          </a:xfrm>
-        </p:spPr>
-        <p:txBody>
-          <a:bodyPr>
-            <a:normAutofit/>
-          </a:bodyPr>
-          <a:lstStyle/>
-          <a:p>
-            <a:r>
-              <a:rPr lang="pt-BR" dirty="0"/>
-              <a:t>A figura ao lado ilustra o processo iterativo de otimização realizado pelo GD.</a:t>
-            </a:r>
-          </a:p>
-          <a:p>
-            <a:pPr lvl="1">
-              <a:buFont typeface="Wingdings" panose="05000000000000000000" pitchFamily="2" charset="2"/>
-              <a:buChar char="§"/>
-            </a:pPr>
-            <a:r>
-              <a:rPr lang="pt-BR" dirty="0"/>
-              <a:t>A partir de um </a:t>
-            </a:r>
-            <a:r>
-              <a:rPr lang="pt-BR" b="1" i="1" dirty="0">
-                <a:solidFill>
-                  <a:srgbClr val="00B050"/>
-                </a:solidFill>
-              </a:rPr>
-              <a:t>ponto inicial </a:t>
-            </a:r>
-            <a:r>
-              <a:rPr lang="pt-BR" dirty="0"/>
-              <a:t>(i.e., uma </a:t>
-            </a:r>
-            <a:r>
-              <a:rPr lang="pt-BR" b="1" i="1" dirty="0">
-                <a:solidFill>
-                  <a:srgbClr val="00B050"/>
-                </a:solidFill>
-              </a:rPr>
-              <a:t>suposição aleatória</a:t>
-            </a:r>
-            <a:r>
-              <a:rPr lang="pt-BR" dirty="0"/>
-              <a:t> de pesos), o algoritmo </a:t>
-            </a:r>
-            <a:r>
-              <a:rPr lang="pt-BR" b="1" i="1" dirty="0">
-                <a:solidFill>
-                  <a:srgbClr val="00B050"/>
-                </a:solidFill>
-              </a:rPr>
-              <a:t>extrai a informação de direção do ponto de mínimo a partir da função de erro</a:t>
-            </a:r>
-            <a:r>
-              <a:rPr lang="pt-BR" dirty="0"/>
-              <a:t> e a usa para </a:t>
-            </a:r>
-            <a:r>
-              <a:rPr lang="pt-BR" b="1" i="1" dirty="0">
-                <a:solidFill>
-                  <a:srgbClr val="00B050"/>
-                </a:solidFill>
-              </a:rPr>
-              <a:t>atualizar o ponto atual</a:t>
-            </a:r>
-            <a:r>
-              <a:rPr lang="pt-BR" dirty="0"/>
-              <a:t> (i.e., otimizar a suposição atual).</a:t>
-            </a:r>
-          </a:p>
-          <a:p>
-            <a:pPr lvl="1">
-              <a:buFont typeface="Wingdings" panose="05000000000000000000" pitchFamily="2" charset="2"/>
-              <a:buChar char="§"/>
-            </a:pPr>
-            <a:r>
-              <a:rPr lang="pt-BR" dirty="0"/>
-              <a:t>Em geral, o </a:t>
-            </a:r>
-            <a:r>
-              <a:rPr lang="pt-BR" b="1" i="1" dirty="0">
-                <a:solidFill>
-                  <a:srgbClr val="00B050"/>
-                </a:solidFill>
-              </a:rPr>
-              <a:t>novo ponto </a:t>
-            </a:r>
-            <a:r>
-              <a:rPr lang="pt-BR" dirty="0"/>
-              <a:t>(i.e., conjunto de pesos atualizado) resulta em um </a:t>
-            </a:r>
-            <a:r>
-              <a:rPr lang="pt-BR" b="1" i="1" dirty="0">
-                <a:solidFill>
-                  <a:srgbClr val="00B050"/>
-                </a:solidFill>
-              </a:rPr>
-              <a:t>erro menor do que o anterior</a:t>
-            </a:r>
-            <a:r>
-              <a:rPr lang="pt-BR" dirty="0"/>
-              <a:t>.</a:t>
-            </a:r>
-          </a:p>
-          <a:p>
-            <a:pPr lvl="1">
-              <a:buFont typeface="Wingdings" panose="05000000000000000000" pitchFamily="2" charset="2"/>
-              <a:buChar char="§"/>
-            </a:pPr>
-            <a:r>
-              <a:rPr lang="pt-BR" dirty="0"/>
-              <a:t>Esse processo é repetido a partir do novo ponto até que algum critério de parada seja atingido.</a:t>
-            </a:r>
-          </a:p>
-        </p:txBody>
-      </p:sp>
-      <p:pic>
-        <p:nvPicPr>
-          <p:cNvPr id="32" name="animated_linear_regression">
-            <a:hlinkClick r:id="" action="ppaction://media"/>
-            <a:extLst>
-              <a:ext uri="{FF2B5EF4-FFF2-40B4-BE49-F238E27FC236}">
-                <a16:creationId xmlns:a16="http://schemas.microsoft.com/office/drawing/2014/main" id="{66D25972-58E8-79DB-2476-AFDFC171820F}"/>
-              </a:ext>
-            </a:extLst>
-          </p:cNvPr>
-          <p:cNvPicPr>
-            <a:picLocks noChangeAspect="1"/>
-          </p:cNvPicPr>
-          <p:nvPr>
-            <a:videoFile r:link="rId2"/>
-            <p:extLst>
-              <p:ext uri="{DAA4B4D4-6D71-4841-9C94-3DE7FCFB9230}">
-                <p14:media xmlns:p14="http://schemas.microsoft.com/office/powerpoint/2010/main" r:embed="rId1"/>
-              </p:ext>
-            </p:extLst>
-          </p:nvPr>
-        </p:nvPicPr>
-        <p:blipFill>
-          <a:blip r:embed="rId5"/>
-          <a:stretch>
-            <a:fillRect/>
-          </a:stretch>
-        </p:blipFill>
-        <p:spPr>
-          <a:xfrm>
-            <a:off x="164387" y="2052479"/>
-            <a:ext cx="5095982" cy="3821987"/>
-          </a:xfrm>
-          <a:prstGeom prst="rect">
-            <a:avLst/>
-          </a:prstGeom>
-        </p:spPr>
-      </p:pic>
-    </p:spTree>
-    <p:extLst>
-      <p:ext uri="{BB962C8B-B14F-4D97-AF65-F5344CB8AC3E}">
-        <p14:creationId xmlns:p14="http://schemas.microsoft.com/office/powerpoint/2010/main" val="3437548077"/>
-      </p:ext>
-    </p:extLst>
-  </p:cSld>
-  <p:clrMapOvr>
-    <a:masterClrMapping/>
-  </p:clrMapOvr>
-  <p:timing>
-    <p:tnLst>
-      <p:par>
-        <p:cTn id="1" dur="indefinite" restart="never" nodeType="tmRoot">
-          <p:childTnLst>
-            <p:seq concurrent="1" nextAc="seek">
-              <p:cTn id="2" dur="indefinite" nodeType="mainSeq">
-                <p:childTnLst>
-                  <p:par>
-                    <p:cTn id="3" fill="hold">
-                      <p:stCondLst>
-                        <p:cond delay="indefinite"/>
-                      </p:stCondLst>
-                      <p:childTnLst>
-                        <p:par>
-                          <p:cTn id="4" fill="hold">
-                            <p:stCondLst>
-                              <p:cond delay="0"/>
-                            </p:stCondLst>
-                            <p:childTnLst>
-                              <p:par>
-                                <p:cTn id="5" presetID="1" presetClass="mediacall" presetSubtype="0" fill="hold" nodeType="clickEffect">
-                                  <p:stCondLst>
-                                    <p:cond delay="0"/>
-                                  </p:stCondLst>
-                                  <p:childTnLst>
-                                    <p:cmd type="call" cmd="playFrom(0.0)">
-                                      <p:cBhvr>
-                                        <p:cTn id="6" dur="200000" fill="hold"/>
-                                        <p:tgtEl>
-                                          <p:spTgt spid="32"/>
-                                        </p:tgtEl>
-                                      </p:cBhvr>
-                                    </p:cmd>
-                                  </p:childTnLst>
-                                </p:cTn>
-                              </p:par>
-                            </p:childTnLst>
-                          </p:cTn>
-                        </p:par>
-                      </p:childTnLst>
-                    </p:cTn>
-                  </p:par>
-                </p:childTnLst>
-              </p:cTn>
-              <p:prevCondLst>
-                <p:cond evt="onPrev" delay="0">
-                  <p:tgtEl>
-                    <p:sldTgt/>
-                  </p:tgtEl>
-                </p:cond>
-              </p:prevCondLst>
-              <p:nextCondLst>
-                <p:cond evt="onNext" delay="0">
-                  <p:tgtEl>
-                    <p:sldTgt/>
-                  </p:tgtEl>
-                </p:cond>
-              </p:nextCondLst>
-            </p:seq>
-            <p:video>
-              <p:cMediaNode vol="80000">
-                <p:cTn id="7" fill="hold" display="0">
-                  <p:stCondLst>
-                    <p:cond delay="indefinite"/>
-                  </p:stCondLst>
-                </p:cTn>
-                <p:tgtEl>
-                  <p:spTgt spid="32"/>
-                </p:tgtEl>
-              </p:cMediaNode>
-            </p:video>
-            <p:seq concurrent="1" nextAc="seek">
-              <p:cTn id="8" restart="whenNotActive" fill="hold" evtFilter="cancelBubble" nodeType="interactiveSeq">
-                <p:stCondLst>
-                  <p:cond evt="onClick" delay="0">
-                    <p:tgtEl>
-                      <p:spTgt spid="32"/>
-                    </p:tgtEl>
-                  </p:cond>
-                </p:stCondLst>
-                <p:endSync evt="end" delay="0">
-                  <p:rtn val="all"/>
-                </p:endSync>
-                <p:childTnLst>
-                  <p:par>
-                    <p:cTn id="9" fill="hold">
-                      <p:stCondLst>
-                        <p:cond delay="0"/>
-                      </p:stCondLst>
-                      <p:childTnLst>
-                        <p:par>
-                          <p:cTn id="10" fill="hold">
-                            <p:stCondLst>
-                              <p:cond delay="0"/>
-                            </p:stCondLst>
-                            <p:childTnLst>
-                              <p:par>
-                                <p:cTn id="11" presetID="2" presetClass="mediacall" presetSubtype="0" fill="hold" nodeType="clickEffect">
-                                  <p:stCondLst>
-                                    <p:cond delay="0"/>
-                                  </p:stCondLst>
-                                  <p:childTnLst>
-                                    <p:cmd type="call" cmd="togglePause">
-                                      <p:cBhvr>
-                                        <p:cTn id="12" dur="1" fill="hold"/>
-                                        <p:tgtEl>
-                                          <p:spTgt spid="32"/>
-                                        </p:tgtEl>
-                                      </p:cBhvr>
-                                    </p:cmd>
-                                  </p:childTnLst>
-                                </p:cTn>
-                              </p:par>
-                            </p:childTnLst>
-                          </p:cTn>
-                        </p:par>
-                      </p:childTnLst>
-                    </p:cTn>
-                  </p:par>
-                </p:childTnLst>
-              </p:cTn>
-              <p:nextCondLst>
-                <p:cond evt="onClick" delay="0">
-                  <p:tgtEl>
-                    <p:spTgt spid="32"/>
-                  </p:tgtEl>
-                </p:cond>
-              </p:nextCondLst>
-            </p:seq>
-          </p:childTnLst>
-        </p:cTn>
-      </p:par>
-    </p:tnLst>
-  </p:timing>
-</p:sld>
-</file>
-
 <file path=ppt/slides/slide3.xml><?xml version="1.0" encoding="utf-8"?>
 <p:sld xmlns:a="http://schemas.openxmlformats.org/drawingml/2006/main" xmlns:r="http://schemas.openxmlformats.org/officeDocument/2006/relationships" xmlns:p="http://schemas.openxmlformats.org/presentationml/2006/main">
   <p:cSld>
@@ -24374,8 +25301,8 @@
           </p:sp>
         </mc:Fallback>
       </mc:AlternateContent>
-      <mc:AlternateContent xmlns:mc="http://schemas.openxmlformats.org/markup-compatibility/2006" xmlns:a14="http://schemas.microsoft.com/office/drawing/2010/main">
-        <mc:Choice Requires="a14">
+      <mc:AlternateContent xmlns:mc="http://schemas.openxmlformats.org/markup-compatibility/2006">
+        <mc:Choice xmlns:a14="http://schemas.microsoft.com/office/drawing/2010/main" Requires="a14">
           <p:sp>
             <p:nvSpPr>
               <p:cNvPr id="3" name="Espaço Reservado para Conteúdo 2">
@@ -24407,6 +25334,16 @@
                 <a:r>
                   <a:rPr lang="pt-BR" dirty="0"/>
                   <a:t>Considerem esses dois conjuntos de números.</a:t>
+                </a:r>
+              </a:p>
+              <a:p>
+                <a:pPr lvl="1">
+                  <a:buFont typeface="Wingdings" panose="05000000000000000000" pitchFamily="2" charset="2"/>
+                  <a:buChar char="§"/>
+                </a:pPr>
+                <a:r>
+                  <a:rPr lang="pt-BR" dirty="0"/>
+                  <a:t>Entradas e suas respectivas saídas esperadas.</a:t>
                 </a:r>
               </a:p>
               <a:p>
@@ -24508,7 +25445,7 @@
             </p:txBody>
           </p:sp>
         </mc:Choice>
-        <mc:Fallback xmlns="">
+        <mc:Fallback>
           <p:sp>
             <p:nvSpPr>
               <p:cNvPr id="3" name="Espaço Reservado para Conteúdo 2">
@@ -24542,7 +25479,7 @@
               <a:lstStyle/>
               <a:p>
                 <a:r>
-                  <a:rPr lang="pt-BR">
+                  <a:rPr lang="en-US">
                     <a:noFill/>
                   </a:rPr>
                   <a:t> </a:t>
@@ -24754,6 +25691,374 @@
           <p:cNvPr id="2" name="Título 1">
             <a:extLst>
               <a:ext uri="{FF2B5EF4-FFF2-40B4-BE49-F238E27FC236}">
+                <a16:creationId xmlns:a16="http://schemas.microsoft.com/office/drawing/2014/main" id="{ABEFD801-7E8D-0885-F1AD-8DAF6F77CEEE}"/>
+              </a:ext>
+            </a:extLst>
+          </p:cNvPr>
+          <p:cNvSpPr>
+            <a:spLocks noGrp="1"/>
+          </p:cNvSpPr>
+          <p:nvPr>
+            <p:ph type="title"/>
+          </p:nvPr>
+        </p:nvSpPr>
+        <p:spPr/>
+        <p:txBody>
+          <a:bodyPr/>
+          <a:lstStyle/>
+          <a:p>
+            <a:r>
+              <a:rPr lang="pt-BR" dirty="0"/>
+              <a:t>Gradiente descendente</a:t>
+            </a:r>
+          </a:p>
+        </p:txBody>
+      </p:sp>
+      <p:sp>
+        <p:nvSpPr>
+          <p:cNvPr id="3" name="Espaço Reservado para Conteúdo 2">
+            <a:extLst>
+              <a:ext uri="{FF2B5EF4-FFF2-40B4-BE49-F238E27FC236}">
+                <a16:creationId xmlns:a16="http://schemas.microsoft.com/office/drawing/2014/main" id="{9BA6276C-11C7-FBDF-9CC4-A84A195D7527}"/>
+              </a:ext>
+            </a:extLst>
+          </p:cNvPr>
+          <p:cNvSpPr>
+            <a:spLocks noGrp="1"/>
+          </p:cNvSpPr>
+          <p:nvPr>
+            <p:ph idx="1"/>
+          </p:nvPr>
+        </p:nvSpPr>
+        <p:spPr>
+          <a:xfrm>
+            <a:off x="5147353" y="1690688"/>
+            <a:ext cx="6905280" cy="5167312"/>
+          </a:xfrm>
+        </p:spPr>
+        <p:txBody>
+          <a:bodyPr>
+            <a:normAutofit/>
+          </a:bodyPr>
+          <a:lstStyle/>
+          <a:p>
+            <a:r>
+              <a:rPr lang="pt-BR" dirty="0"/>
+              <a:t>A figura ao lado ilustra o processo iterativo de otimização realizado pelo GD.</a:t>
+            </a:r>
+          </a:p>
+          <a:p>
+            <a:pPr lvl="1">
+              <a:buFont typeface="Wingdings" panose="05000000000000000000" pitchFamily="2" charset="2"/>
+              <a:buChar char="§"/>
+            </a:pPr>
+            <a:r>
+              <a:rPr lang="pt-BR" dirty="0"/>
+              <a:t>A partir de um </a:t>
+            </a:r>
+            <a:r>
+              <a:rPr lang="pt-BR" b="1" i="1" dirty="0">
+                <a:solidFill>
+                  <a:srgbClr val="00B050"/>
+                </a:solidFill>
+              </a:rPr>
+              <a:t>ponto inicial </a:t>
+            </a:r>
+            <a:r>
+              <a:rPr lang="pt-BR" dirty="0"/>
+              <a:t>(i.e., uma </a:t>
+            </a:r>
+            <a:r>
+              <a:rPr lang="pt-BR" b="1" i="1" dirty="0">
+                <a:solidFill>
+                  <a:srgbClr val="00B050"/>
+                </a:solidFill>
+              </a:rPr>
+              <a:t>suposição aleatória</a:t>
+            </a:r>
+            <a:r>
+              <a:rPr lang="pt-BR" dirty="0"/>
+              <a:t> de pesos), o algoritmo </a:t>
+            </a:r>
+            <a:r>
+              <a:rPr lang="pt-BR" b="1" i="1" dirty="0">
+                <a:solidFill>
+                  <a:srgbClr val="00B050"/>
+                </a:solidFill>
+              </a:rPr>
+              <a:t>extrai a informação de direção do ponto de mínimo a partir da função de erro</a:t>
+            </a:r>
+            <a:r>
+              <a:rPr lang="pt-BR" dirty="0"/>
+              <a:t> e a usa para </a:t>
+            </a:r>
+            <a:r>
+              <a:rPr lang="pt-BR" b="1" i="1" dirty="0">
+                <a:solidFill>
+                  <a:srgbClr val="00B050"/>
+                </a:solidFill>
+              </a:rPr>
+              <a:t>atualizar o ponto atual</a:t>
+            </a:r>
+            <a:r>
+              <a:rPr lang="pt-BR" dirty="0"/>
+              <a:t> (i.e., otimizar a suposição atual).</a:t>
+            </a:r>
+          </a:p>
+          <a:p>
+            <a:pPr lvl="1">
+              <a:buFont typeface="Wingdings" panose="05000000000000000000" pitchFamily="2" charset="2"/>
+              <a:buChar char="§"/>
+            </a:pPr>
+            <a:r>
+              <a:rPr lang="pt-BR" dirty="0"/>
+              <a:t>Em geral, o </a:t>
+            </a:r>
+            <a:r>
+              <a:rPr lang="pt-BR" b="1" i="1" dirty="0">
+                <a:solidFill>
+                  <a:srgbClr val="00B050"/>
+                </a:solidFill>
+              </a:rPr>
+              <a:t>novo ponto </a:t>
+            </a:r>
+            <a:r>
+              <a:rPr lang="pt-BR" dirty="0"/>
+              <a:t>(i.e., conjunto de pesos atualizado) resulta em um </a:t>
+            </a:r>
+            <a:r>
+              <a:rPr lang="pt-BR" b="1" i="1" dirty="0">
+                <a:solidFill>
+                  <a:srgbClr val="00B050"/>
+                </a:solidFill>
+              </a:rPr>
+              <a:t>erro menor do que o anterior</a:t>
+            </a:r>
+            <a:r>
+              <a:rPr lang="pt-BR" dirty="0"/>
+              <a:t>.</a:t>
+            </a:r>
+          </a:p>
+          <a:p>
+            <a:pPr lvl="1">
+              <a:buFont typeface="Wingdings" panose="05000000000000000000" pitchFamily="2" charset="2"/>
+              <a:buChar char="§"/>
+            </a:pPr>
+            <a:r>
+              <a:rPr lang="pt-BR" dirty="0"/>
+              <a:t>Esse processo é repetido a partir do novo ponto até que algum critério de parada seja atingido.</a:t>
+            </a:r>
+          </a:p>
+        </p:txBody>
+      </p:sp>
+      <p:pic>
+        <p:nvPicPr>
+          <p:cNvPr id="32" name="animated_linear_regression">
+            <a:hlinkClick r:id="" action="ppaction://media"/>
+            <a:extLst>
+              <a:ext uri="{FF2B5EF4-FFF2-40B4-BE49-F238E27FC236}">
+                <a16:creationId xmlns:a16="http://schemas.microsoft.com/office/drawing/2014/main" id="{66D25972-58E8-79DB-2476-AFDFC171820F}"/>
+              </a:ext>
+            </a:extLst>
+          </p:cNvPr>
+          <p:cNvPicPr>
+            <a:picLocks noChangeAspect="1"/>
+          </p:cNvPicPr>
+          <p:nvPr>
+            <a:videoFile r:link="rId2"/>
+            <p:extLst>
+              <p:ext uri="{DAA4B4D4-6D71-4841-9C94-3DE7FCFB9230}">
+                <p14:media xmlns:p14="http://schemas.microsoft.com/office/powerpoint/2010/main" r:embed="rId1"/>
+              </p:ext>
+            </p:extLst>
+          </p:nvPr>
+        </p:nvPicPr>
+        <p:blipFill>
+          <a:blip r:embed="rId5"/>
+          <a:stretch>
+            <a:fillRect/>
+          </a:stretch>
+        </p:blipFill>
+        <p:spPr>
+          <a:xfrm>
+            <a:off x="164387" y="2052479"/>
+            <a:ext cx="5095982" cy="3821987"/>
+          </a:xfrm>
+          <a:prstGeom prst="rect">
+            <a:avLst/>
+          </a:prstGeom>
+        </p:spPr>
+      </p:pic>
+    </p:spTree>
+    <p:extLst>
+      <p:ext uri="{BB962C8B-B14F-4D97-AF65-F5344CB8AC3E}">
+        <p14:creationId xmlns:p14="http://schemas.microsoft.com/office/powerpoint/2010/main" val="3437548077"/>
+      </p:ext>
+    </p:extLst>
+  </p:cSld>
+  <p:clrMapOvr>
+    <a:masterClrMapping/>
+  </p:clrMapOvr>
+  <p:timing>
+    <p:tnLst>
+      <p:par>
+        <p:cTn id="1" dur="indefinite" restart="never" nodeType="tmRoot">
+          <p:childTnLst>
+            <p:seq concurrent="1" nextAc="seek">
+              <p:cTn id="2" dur="indefinite" nodeType="mainSeq">
+                <p:childTnLst>
+                  <p:par>
+                    <p:cTn id="3" fill="hold">
+                      <p:stCondLst>
+                        <p:cond delay="indefinite"/>
+                      </p:stCondLst>
+                      <p:childTnLst>
+                        <p:par>
+                          <p:cTn id="4" fill="hold">
+                            <p:stCondLst>
+                              <p:cond delay="0"/>
+                            </p:stCondLst>
+                            <p:childTnLst>
+                              <p:par>
+                                <p:cTn id="5" presetID="1" presetClass="mediacall" presetSubtype="0" fill="hold" nodeType="clickEffect">
+                                  <p:stCondLst>
+                                    <p:cond delay="0"/>
+                                  </p:stCondLst>
+                                  <p:childTnLst>
+                                    <p:cmd type="call" cmd="playFrom(0.0)">
+                                      <p:cBhvr>
+                                        <p:cTn id="6" dur="200000" fill="hold"/>
+                                        <p:tgtEl>
+                                          <p:spTgt spid="32"/>
+                                        </p:tgtEl>
+                                      </p:cBhvr>
+                                    </p:cmd>
+                                  </p:childTnLst>
+                                </p:cTn>
+                              </p:par>
+                            </p:childTnLst>
+                          </p:cTn>
+                        </p:par>
+                      </p:childTnLst>
+                    </p:cTn>
+                  </p:par>
+                </p:childTnLst>
+              </p:cTn>
+              <p:prevCondLst>
+                <p:cond evt="onPrev" delay="0">
+                  <p:tgtEl>
+                    <p:sldTgt/>
+                  </p:tgtEl>
+                </p:cond>
+              </p:prevCondLst>
+              <p:nextCondLst>
+                <p:cond evt="onNext" delay="0">
+                  <p:tgtEl>
+                    <p:sldTgt/>
+                  </p:tgtEl>
+                </p:cond>
+              </p:nextCondLst>
+            </p:seq>
+            <p:video>
+              <p:cMediaNode vol="80000">
+                <p:cTn id="7" fill="hold" display="0">
+                  <p:stCondLst>
+                    <p:cond delay="indefinite"/>
+                  </p:stCondLst>
+                </p:cTn>
+                <p:tgtEl>
+                  <p:spTgt spid="32"/>
+                </p:tgtEl>
+              </p:cMediaNode>
+            </p:video>
+            <p:seq concurrent="1" nextAc="seek">
+              <p:cTn id="8" restart="whenNotActive" fill="hold" evtFilter="cancelBubble" nodeType="interactiveSeq">
+                <p:stCondLst>
+                  <p:cond evt="onClick" delay="0">
+                    <p:tgtEl>
+                      <p:spTgt spid="32"/>
+                    </p:tgtEl>
+                  </p:cond>
+                </p:stCondLst>
+                <p:endSync evt="end" delay="0">
+                  <p:rtn val="all"/>
+                </p:endSync>
+                <p:childTnLst>
+                  <p:par>
+                    <p:cTn id="9" fill="hold">
+                      <p:stCondLst>
+                        <p:cond delay="0"/>
+                      </p:stCondLst>
+                      <p:childTnLst>
+                        <p:par>
+                          <p:cTn id="10" fill="hold">
+                            <p:stCondLst>
+                              <p:cond delay="0"/>
+                            </p:stCondLst>
+                            <p:childTnLst>
+                              <p:par>
+                                <p:cTn id="11" presetID="2" presetClass="mediacall" presetSubtype="0" fill="hold" nodeType="clickEffect">
+                                  <p:stCondLst>
+                                    <p:cond delay="0"/>
+                                  </p:stCondLst>
+                                  <p:childTnLst>
+                                    <p:cmd type="call" cmd="togglePause">
+                                      <p:cBhvr>
+                                        <p:cTn id="12" dur="1" fill="hold"/>
+                                        <p:tgtEl>
+                                          <p:spTgt spid="32"/>
+                                        </p:tgtEl>
+                                      </p:cBhvr>
+                                    </p:cmd>
+                                  </p:childTnLst>
+                                </p:cTn>
+                              </p:par>
+                            </p:childTnLst>
+                          </p:cTn>
+                        </p:par>
+                      </p:childTnLst>
+                    </p:cTn>
+                  </p:par>
+                </p:childTnLst>
+              </p:cTn>
+              <p:nextCondLst>
+                <p:cond evt="onClick" delay="0">
+                  <p:tgtEl>
+                    <p:spTgt spid="32"/>
+                  </p:tgtEl>
+                </p:cond>
+              </p:nextCondLst>
+            </p:seq>
+          </p:childTnLst>
+        </p:cTn>
+      </p:par>
+    </p:tnLst>
+  </p:timing>
+</p:sld>
+</file>
+
+<file path=ppt/slides/slide31.xml><?xml version="1.0" encoding="utf-8"?>
+<p:sld xmlns:a="http://schemas.openxmlformats.org/drawingml/2006/main" xmlns:r="http://schemas.openxmlformats.org/officeDocument/2006/relationships" xmlns:p="http://schemas.openxmlformats.org/presentationml/2006/main">
+  <p:cSld>
+    <p:spTree>
+      <p:nvGrpSpPr>
+        <p:cNvPr id="1" name=""/>
+        <p:cNvGrpSpPr/>
+        <p:nvPr/>
+      </p:nvGrpSpPr>
+      <p:grpSpPr>
+        <a:xfrm>
+          <a:off x="0" y="0"/>
+          <a:ext cx="0" cy="0"/>
+          <a:chOff x="0" y="0"/>
+          <a:chExt cx="0" cy="0"/>
+        </a:xfrm>
+      </p:grpSpPr>
+      <p:sp>
+        <p:nvSpPr>
+          <p:cNvPr id="2" name="Título 1">
+            <a:extLst>
+              <a:ext uri="{FF2B5EF4-FFF2-40B4-BE49-F238E27FC236}">
                 <a16:creationId xmlns:a16="http://schemas.microsoft.com/office/drawing/2014/main" id="{A9BB36A8-6590-17D8-1A21-CACFBD100B4A}"/>
               </a:ext>
             </a:extLst>
@@ -24971,7 +26276,7 @@
 </p:sld>
 </file>
 
-<file path=ppt/slides/slide31.xml><?xml version="1.0" encoding="utf-8"?>
+<file path=ppt/slides/slide32.xml><?xml version="1.0" encoding="utf-8"?>
 <p:sld xmlns:a="http://schemas.openxmlformats.org/drawingml/2006/main" xmlns:r="http://schemas.openxmlformats.org/officeDocument/2006/relationships" xmlns:p="http://schemas.openxmlformats.org/presentationml/2006/main">
   <p:cSld>
     <p:spTree>
@@ -25072,92 +26377,6 @@
     <p:extLst>
       <p:ext uri="{BB962C8B-B14F-4D97-AF65-F5344CB8AC3E}">
         <p14:creationId xmlns:p14="http://schemas.microsoft.com/office/powerpoint/2010/main" val="2918520294"/>
-      </p:ext>
-    </p:extLst>
-  </p:cSld>
-  <p:clrMapOvr>
-    <a:masterClrMapping/>
-  </p:clrMapOvr>
-</p:sld>
-</file>
-
-<file path=ppt/slides/slide32.xml><?xml version="1.0" encoding="utf-8"?>
-<p:sld xmlns:a="http://schemas.openxmlformats.org/drawingml/2006/main" xmlns:r="http://schemas.openxmlformats.org/officeDocument/2006/relationships" xmlns:p="http://schemas.openxmlformats.org/presentationml/2006/main">
-  <p:cSld>
-    <p:spTree>
-      <p:nvGrpSpPr>
-        <p:cNvPr id="1" name=""/>
-        <p:cNvGrpSpPr/>
-        <p:nvPr/>
-      </p:nvGrpSpPr>
-      <p:grpSpPr>
-        <a:xfrm>
-          <a:off x="0" y="0"/>
-          <a:ext cx="0" cy="0"/>
-          <a:chOff x="0" y="0"/>
-          <a:chExt cx="0" cy="0"/>
-        </a:xfrm>
-      </p:grpSpPr>
-      <p:sp>
-        <p:nvSpPr>
-          <p:cNvPr id="4" name="Título 1">
-            <a:extLst>
-              <a:ext uri="{FF2B5EF4-FFF2-40B4-BE49-F238E27FC236}">
-                <a16:creationId xmlns:a16="http://schemas.microsoft.com/office/drawing/2014/main" id="{32666AC8-2E17-4DB4-B0F5-60C640CCFD2E}"/>
-              </a:ext>
-            </a:extLst>
-          </p:cNvPr>
-          <p:cNvSpPr txBox="1">
-            <a:spLocks/>
-          </p:cNvSpPr>
-          <p:nvPr/>
-        </p:nvSpPr>
-        <p:spPr>
-          <a:xfrm>
-            <a:off x="1431533" y="2720526"/>
-            <a:ext cx="9144000" cy="1029541"/>
-          </a:xfrm>
-          <a:prstGeom prst="rect">
-            <a:avLst/>
-          </a:prstGeom>
-        </p:spPr>
-        <p:txBody>
-          <a:bodyPr vert="horz" lIns="91440" tIns="45720" rIns="91440" bIns="45720" rtlCol="0" anchor="ctr">
-            <a:normAutofit/>
-          </a:bodyPr>
-          <a:lstStyle>
-            <a:lvl1pPr algn="l" defTabSz="914400" rtl="0" eaLnBrk="1" latinLnBrk="0" hangingPunct="1">
-              <a:lnSpc>
-                <a:spcPct val="90000"/>
-              </a:lnSpc>
-              <a:spcBef>
-                <a:spcPct val="0"/>
-              </a:spcBef>
-              <a:buNone/>
-              <a:defRPr sz="4400" kern="1200">
-                <a:solidFill>
-                  <a:schemeClr val="tx1"/>
-                </a:solidFill>
-                <a:latin typeface="+mj-lt"/>
-                <a:ea typeface="+mj-ea"/>
-                <a:cs typeface="+mj-cs"/>
-              </a:defRPr>
-            </a:lvl1pPr>
-          </a:lstStyle>
-          <a:p>
-            <a:pPr algn="ctr"/>
-            <a:r>
-              <a:rPr lang="pt-BR" sz="6600" dirty="0"/>
-              <a:t>Perguntas?</a:t>
-            </a:r>
-            <a:endParaRPr lang="pt-BR" sz="6600" b="1" i="1" dirty="0"/>
-          </a:p>
-        </p:txBody>
-      </p:sp>
-    </p:spTree>
-    <p:extLst>
-      <p:ext uri="{BB962C8B-B14F-4D97-AF65-F5344CB8AC3E}">
-        <p14:creationId xmlns:p14="http://schemas.microsoft.com/office/powerpoint/2010/main" val="1975981511"/>
       </p:ext>
     </p:extLst>
   </p:cSld>
@@ -25234,6 +26453,92 @@
             <a:pPr algn="ctr"/>
             <a:r>
               <a:rPr lang="pt-BR" sz="6600" dirty="0"/>
+              <a:t>Perguntas?</a:t>
+            </a:r>
+            <a:endParaRPr lang="pt-BR" sz="6600" b="1" i="1" dirty="0"/>
+          </a:p>
+        </p:txBody>
+      </p:sp>
+    </p:spTree>
+    <p:extLst>
+      <p:ext uri="{BB962C8B-B14F-4D97-AF65-F5344CB8AC3E}">
+        <p14:creationId xmlns:p14="http://schemas.microsoft.com/office/powerpoint/2010/main" val="1975981511"/>
+      </p:ext>
+    </p:extLst>
+  </p:cSld>
+  <p:clrMapOvr>
+    <a:masterClrMapping/>
+  </p:clrMapOvr>
+</p:sld>
+</file>
+
+<file path=ppt/slides/slide34.xml><?xml version="1.0" encoding="utf-8"?>
+<p:sld xmlns:a="http://schemas.openxmlformats.org/drawingml/2006/main" xmlns:r="http://schemas.openxmlformats.org/officeDocument/2006/relationships" xmlns:p="http://schemas.openxmlformats.org/presentationml/2006/main">
+  <p:cSld>
+    <p:spTree>
+      <p:nvGrpSpPr>
+        <p:cNvPr id="1" name=""/>
+        <p:cNvGrpSpPr/>
+        <p:nvPr/>
+      </p:nvGrpSpPr>
+      <p:grpSpPr>
+        <a:xfrm>
+          <a:off x="0" y="0"/>
+          <a:ext cx="0" cy="0"/>
+          <a:chOff x="0" y="0"/>
+          <a:chExt cx="0" cy="0"/>
+        </a:xfrm>
+      </p:grpSpPr>
+      <p:sp>
+        <p:nvSpPr>
+          <p:cNvPr id="4" name="Título 1">
+            <a:extLst>
+              <a:ext uri="{FF2B5EF4-FFF2-40B4-BE49-F238E27FC236}">
+                <a16:creationId xmlns:a16="http://schemas.microsoft.com/office/drawing/2014/main" id="{32666AC8-2E17-4DB4-B0F5-60C640CCFD2E}"/>
+              </a:ext>
+            </a:extLst>
+          </p:cNvPr>
+          <p:cNvSpPr txBox="1">
+            <a:spLocks/>
+          </p:cNvSpPr>
+          <p:nvPr/>
+        </p:nvSpPr>
+        <p:spPr>
+          <a:xfrm>
+            <a:off x="1431533" y="2720526"/>
+            <a:ext cx="9144000" cy="1029541"/>
+          </a:xfrm>
+          <a:prstGeom prst="rect">
+            <a:avLst/>
+          </a:prstGeom>
+        </p:spPr>
+        <p:txBody>
+          <a:bodyPr vert="horz" lIns="91440" tIns="45720" rIns="91440" bIns="45720" rtlCol="0" anchor="ctr">
+            <a:normAutofit/>
+          </a:bodyPr>
+          <a:lstStyle>
+            <a:lvl1pPr algn="l" defTabSz="914400" rtl="0" eaLnBrk="1" latinLnBrk="0" hangingPunct="1">
+              <a:lnSpc>
+                <a:spcPct val="90000"/>
+              </a:lnSpc>
+              <a:spcBef>
+                <a:spcPct val="0"/>
+              </a:spcBef>
+              <a:buNone/>
+              <a:defRPr sz="4400" kern="1200">
+                <a:solidFill>
+                  <a:schemeClr val="tx1"/>
+                </a:solidFill>
+                <a:latin typeface="+mj-lt"/>
+                <a:ea typeface="+mj-ea"/>
+                <a:cs typeface="+mj-cs"/>
+              </a:defRPr>
+            </a:lvl1pPr>
+          </a:lstStyle>
+          <a:p>
+            <a:pPr algn="ctr"/>
+            <a:r>
+              <a:rPr lang="pt-BR" sz="6600" dirty="0"/>
               <a:t>Obrigado!</a:t>
             </a:r>
             <a:endParaRPr lang="pt-BR" sz="6600" b="1" i="1" dirty="0"/>
@@ -25253,7 +26558,7 @@
 </p:sld>
 </file>
 
-<file path=ppt/slides/slide34.xml><?xml version="1.0" encoding="utf-8"?>
+<file path=ppt/slides/slide35.xml><?xml version="1.0" encoding="utf-8"?>
 <p:sld xmlns:a="http://schemas.openxmlformats.org/drawingml/2006/main" xmlns:r="http://schemas.openxmlformats.org/officeDocument/2006/relationships" xmlns:p="http://schemas.openxmlformats.org/presentationml/2006/main">
   <p:cSld>
     <p:spTree>
@@ -26552,8 +27857,8 @@
           </p:sp>
         </mc:Fallback>
       </mc:AlternateContent>
-      <mc:AlternateContent xmlns:mc="http://schemas.openxmlformats.org/markup-compatibility/2006" xmlns:a14="http://schemas.microsoft.com/office/drawing/2010/main">
-        <mc:Choice Requires="a14">
+      <mc:AlternateContent xmlns:mc="http://schemas.openxmlformats.org/markup-compatibility/2006">
+        <mc:Choice xmlns:a14="http://schemas.microsoft.com/office/drawing/2010/main" Requires="a14">
           <p:sp>
             <p:nvSpPr>
               <p:cNvPr id="3" name="Espaço Reservado para Conteúdo 2">
@@ -26602,19 +27907,19 @@
               <a:p>
                 <a:r>
                   <a:rPr lang="pt-BR" dirty="0"/>
-                  <a:t>Podemos criar a </a:t>
+                  <a:t>Podemos </a:t>
                 </a:r>
                 <a:r>
-                  <a:rPr lang="pt-BR" b="1" i="1" dirty="0">
+                  <a:rPr lang="pt-BR" b="1" i="1" dirty="0" err="1">
                     <a:solidFill>
                       <a:srgbClr val="00B050"/>
                     </a:solidFill>
                   </a:rPr>
-                  <a:t>hipótese</a:t>
+                  <a:t>hipotetizar</a:t>
                 </a:r>
                 <a:r>
                   <a:rPr lang="pt-BR" dirty="0"/>
-                  <a:t> de que uma </a:t>
+                  <a:t> que uma </a:t>
                 </a:r>
                 <a:r>
                   <a:rPr lang="pt-BR" b="1" i="1" dirty="0">
@@ -26805,7 +28110,7 @@
             </p:txBody>
           </p:sp>
         </mc:Choice>
-        <mc:Fallback xmlns="">
+        <mc:Fallback>
           <p:sp>
             <p:nvSpPr>
               <p:cNvPr id="3" name="Espaço Reservado para Conteúdo 2">
@@ -26839,7 +28144,7 @@
               <a:lstStyle/>
               <a:p>
                 <a:r>
-                  <a:rPr lang="pt-BR">
+                  <a:rPr lang="en-US">
                     <a:noFill/>
                   </a:rPr>
                   <a:t> </a:t>
@@ -28124,7 +29429,7 @@
             <a:r>
               <a:rPr lang="pt-BR" b="1" i="1" dirty="0">
                 <a:solidFill>
-                  <a:srgbClr val="00B050"/>
+                  <a:srgbClr val="7030A0"/>
                 </a:solidFill>
               </a:rPr>
               <a:t>formalizarmos</a:t>
@@ -28913,8 +30218,8 @@
           </a:p>
         </p:txBody>
       </p:sp>
-      <mc:AlternateContent xmlns:mc="http://schemas.openxmlformats.org/markup-compatibility/2006" xmlns:a14="http://schemas.microsoft.com/office/drawing/2010/main">
-        <mc:Choice Requires="a14">
+      <mc:AlternateContent xmlns:mc="http://schemas.openxmlformats.org/markup-compatibility/2006">
+        <mc:Choice xmlns:a14="http://schemas.microsoft.com/office/drawing/2010/main" Requires="a14">
           <p:sp>
             <p:nvSpPr>
               <p:cNvPr id="3" name="Espaço Reservado para Conteúdo 2">
@@ -28943,7 +30248,7 @@
               <a:p>
                 <a:r>
                   <a:rPr lang="pt-BR" dirty="0"/>
-                  <a:t>Talvez nós possamos definir uma métrica de desempenho plotando os valores esperados e preditos. </a:t>
+                  <a:t>Talvez nós possamos definir uma métrica de desempenho analisando o gráfico com os valores esperados e preditos. </a:t>
                 </a:r>
               </a:p>
               <a:p>
@@ -28969,7 +30274,7 @@
             </p:txBody>
           </p:sp>
         </mc:Choice>
-        <mc:Fallback xmlns="">
+        <mc:Fallback>
           <p:sp>
             <p:nvSpPr>
               <p:cNvPr id="3" name="Espaço Reservado para Conteúdo 2">
@@ -28994,7 +30299,7 @@
               <a:blipFill>
                 <a:blip r:embed="rId2"/>
                 <a:stretch>
-                  <a:fillRect l="-1837" t="-1937"/>
+                  <a:fillRect l="-1837" t="-1937" r="-1122"/>
                 </a:stretch>
               </a:blipFill>
             </p:spPr>
@@ -29003,7 +30308,7 @@
               <a:lstStyle/>
               <a:p>
                 <a:r>
-                  <a:rPr lang="pt-BR">
+                  <a:rPr lang="en-US">
                     <a:noFill/>
                   </a:rPr>
                   <a:t> </a:t>
@@ -29153,10 +30458,18 @@
             <a:r>
               <a:rPr lang="pt-BR" b="1" i="1" dirty="0">
                 <a:solidFill>
+                  <a:srgbClr val="7030A0"/>
+                </a:solidFill>
+              </a:rPr>
+              <a:t>diferença/distância </a:t>
+            </a:r>
+            <a:r>
+              <a:rPr lang="pt-BR" b="1" i="1" dirty="0">
+                <a:solidFill>
                   <a:srgbClr val="00B050"/>
                 </a:solidFill>
               </a:rPr>
-              <a:t>diferença entre os pontos</a:t>
+              <a:t>entre os pontos</a:t>
             </a:r>
             <a:r>
               <a:rPr lang="pt-BR" dirty="0"/>

--- a/slides/TP557_5_Medindo_a_precisão_de_um_modelo_de_ML.pptx
+++ b/slides/TP557_5_Medindo_a_precisão_de_um_modelo_de_ML.pptx
@@ -5,10 +5,10 @@
     <p:sldMasterId id="2147483648" r:id="rId1"/>
   </p:sldMasterIdLst>
   <p:notesMasterIdLst>
-    <p:notesMasterId r:id="rId37"/>
+    <p:notesMasterId r:id="rId39"/>
   </p:notesMasterIdLst>
   <p:handoutMasterIdLst>
-    <p:handoutMasterId r:id="rId38"/>
+    <p:handoutMasterId r:id="rId40"/>
   </p:handoutMasterIdLst>
   <p:sldIdLst>
     <p:sldId id="256" r:id="rId2"/>
@@ -29,23 +29,25 @@
     <p:sldId id="429" r:id="rId17"/>
     <p:sldId id="439" r:id="rId18"/>
     <p:sldId id="444" r:id="rId19"/>
-    <p:sldId id="440" r:id="rId20"/>
-    <p:sldId id="441" r:id="rId21"/>
-    <p:sldId id="445" r:id="rId22"/>
-    <p:sldId id="442" r:id="rId23"/>
-    <p:sldId id="436" r:id="rId24"/>
-    <p:sldId id="446" r:id="rId25"/>
-    <p:sldId id="438" r:id="rId26"/>
-    <p:sldId id="447" r:id="rId27"/>
-    <p:sldId id="435" r:id="rId28"/>
-    <p:sldId id="448" r:id="rId29"/>
-    <p:sldId id="434" r:id="rId30"/>
-    <p:sldId id="449" r:id="rId31"/>
-    <p:sldId id="431" r:id="rId32"/>
-    <p:sldId id="405" r:id="rId33"/>
-    <p:sldId id="293" r:id="rId34"/>
-    <p:sldId id="306" r:id="rId35"/>
-    <p:sldId id="430" r:id="rId36"/>
+    <p:sldId id="451" r:id="rId20"/>
+    <p:sldId id="440" r:id="rId21"/>
+    <p:sldId id="441" r:id="rId22"/>
+    <p:sldId id="445" r:id="rId23"/>
+    <p:sldId id="442" r:id="rId24"/>
+    <p:sldId id="436" r:id="rId25"/>
+    <p:sldId id="446" r:id="rId26"/>
+    <p:sldId id="438" r:id="rId27"/>
+    <p:sldId id="447" r:id="rId28"/>
+    <p:sldId id="452" r:id="rId29"/>
+    <p:sldId id="435" r:id="rId30"/>
+    <p:sldId id="448" r:id="rId31"/>
+    <p:sldId id="434" r:id="rId32"/>
+    <p:sldId id="449" r:id="rId33"/>
+    <p:sldId id="431" r:id="rId34"/>
+    <p:sldId id="405" r:id="rId35"/>
+    <p:sldId id="293" r:id="rId36"/>
+    <p:sldId id="306" r:id="rId37"/>
+    <p:sldId id="430" r:id="rId38"/>
   </p:sldIdLst>
   <p:sldSz cx="12192000" cy="6858000"/>
   <p:notesSz cx="7315200" cy="9601200"/>
@@ -309,7 +311,7 @@
           <a:p>
             <a:fld id="{144F1436-6906-4D93-B7A2-786C327BFA14}" type="datetimeFigureOut">
               <a:rPr lang="nl-BE" smtClean="0"/>
-              <a:t>26/03/2025</a:t>
+              <a:t>31/03/2025</a:t>
             </a:fld>
             <a:endParaRPr lang="nl-BE"/>
           </a:p>
@@ -474,7 +476,7 @@
           <a:p>
             <a:fld id="{AA8CD09E-2914-4F47-B6C1-51B2C31814C9}" type="datetimeFigureOut">
               <a:rPr lang="pt-BR" smtClean="0"/>
-              <a:t>26/03/2025</a:t>
+              <a:t>31/03/2025</a:t>
             </a:fld>
             <a:endParaRPr lang="pt-BR"/>
           </a:p>
@@ -949,7 +951,7 @@
           <a:p>
             <a:fld id="{6FC8D850-966F-45A6-8DE7-15B891E7D40D}" type="slidenum">
               <a:rPr lang="pt-BR" smtClean="0"/>
-              <a:t>30</a:t>
+              <a:t>31</a:t>
             </a:fld>
             <a:endParaRPr lang="pt-BR"/>
           </a:p>
@@ -958,7 +960,7 @@
     </p:spTree>
     <p:extLst>
       <p:ext uri="{BB962C8B-B14F-4D97-AF65-F5344CB8AC3E}">
-        <p14:creationId xmlns:p14="http://schemas.microsoft.com/office/powerpoint/2010/main" val="4280410287"/>
+        <p14:creationId xmlns:p14="http://schemas.microsoft.com/office/powerpoint/2010/main" val="973718594"/>
       </p:ext>
     </p:extLst>
   </p:cSld>
@@ -1014,7 +1016,63 @@
           <a:p>
             <a:r>
               <a:rPr lang="pt-BR" dirty="0"/>
-              <a:t>https://colab.research.google.com/github/zz4fap/tp557-iot-ml/blob/master/examples/Explorando_a_fun%C3%A7%C3%A3o_de_erro.ipynb</a:t>
+              <a:t>A partir de um ponto inicial (i.e., uma suposição aleatória de pesos), o algoritmo extrai a informação de direção do ponto de mínimo a partir da função de erro e a usa para atualizar o ponto (i.e., otimizar a suposição atual) </a:t>
+            </a:r>
+          </a:p>
+          <a:p>
+            <a:r>
+              <a:rPr lang="pt-BR" dirty="0"/>
+              <a:t>Em geral, o novo ponto (i.e., conjunto de pesos) resulta em um erro menor do que o anterior.</a:t>
+            </a:r>
+          </a:p>
+          <a:p>
+            <a:r>
+              <a:rPr lang="pt-BR" dirty="0"/>
+              <a:t>Esse processo é repetido a partir do ponto corrente até que o erro seja minimizado.</a:t>
+            </a:r>
+          </a:p>
+          <a:p>
+            <a:endParaRPr lang="pt-BR" dirty="0"/>
+          </a:p>
+          <a:p>
+            <a:pPr marL="0" marR="0" lvl="0" indent="0" algn="l" defTabSz="914400" rtl="0" eaLnBrk="1" fontAlgn="auto" latinLnBrk="0" hangingPunct="1">
+              <a:lnSpc>
+                <a:spcPct val="100000"/>
+              </a:lnSpc>
+              <a:spcBef>
+                <a:spcPts val="0"/>
+              </a:spcBef>
+              <a:spcAft>
+                <a:spcPts val="0"/>
+              </a:spcAft>
+              <a:buClrTx/>
+              <a:buSzTx/>
+              <a:buFontTx/>
+              <a:buNone/>
+              <a:tabLst/>
+              <a:defRPr/>
+            </a:pPr>
+            <a:r>
+              <a:rPr lang="pt-BR" dirty="0"/>
+              <a:t>A partir de um ponto inicial (i.e., conjunto de pesos aleatórios), a cada iteração (i.e., suposição) do algoritmo, tem-se, em geral, um conjunto de pesos que resulta em um erro menor do que o anterior.</a:t>
+            </a:r>
+          </a:p>
+          <a:p>
+            <a:endParaRPr lang="pt-BR" dirty="0"/>
+          </a:p>
+          <a:p>
+            <a:endParaRPr lang="pt-BR" dirty="0"/>
+          </a:p>
+          <a:p>
+            <a:endParaRPr lang="pt-BR" dirty="0"/>
+          </a:p>
+          <a:p>
+            <a:endParaRPr lang="pt-BR" dirty="0"/>
+          </a:p>
+          <a:p>
+            <a:r>
+              <a:rPr lang="pt-BR" dirty="0"/>
+              <a:t>(i.e., conjunto de pesos aleatórios), a cada iteração (i.e., suposição) do algoritmo, tem-se, em geral, um conjunto de pesos que resulta em um erro menor do que o anterior.</a:t>
             </a:r>
           </a:p>
         </p:txBody>
@@ -1036,7 +1094,94 @@
           <a:p>
             <a:fld id="{6FC8D850-966F-45A6-8DE7-15B891E7D40D}" type="slidenum">
               <a:rPr lang="pt-BR" smtClean="0"/>
-              <a:t>31</a:t>
+              <a:t>32</a:t>
+            </a:fld>
+            <a:endParaRPr lang="pt-BR"/>
+          </a:p>
+        </p:txBody>
+      </p:sp>
+    </p:spTree>
+    <p:extLst>
+      <p:ext uri="{BB962C8B-B14F-4D97-AF65-F5344CB8AC3E}">
+        <p14:creationId xmlns:p14="http://schemas.microsoft.com/office/powerpoint/2010/main" val="4280410287"/>
+      </p:ext>
+    </p:extLst>
+  </p:cSld>
+  <p:clrMapOvr>
+    <a:masterClrMapping/>
+  </p:clrMapOvr>
+</p:notes>
+</file>
+
+<file path=ppt/notesSlides/notesSlide12.xml><?xml version="1.0" encoding="utf-8"?>
+<p:notes xmlns:a="http://schemas.openxmlformats.org/drawingml/2006/main" xmlns:r="http://schemas.openxmlformats.org/officeDocument/2006/relationships" xmlns:p="http://schemas.openxmlformats.org/presentationml/2006/main">
+  <p:cSld>
+    <p:spTree>
+      <p:nvGrpSpPr>
+        <p:cNvPr id="1" name=""/>
+        <p:cNvGrpSpPr/>
+        <p:nvPr/>
+      </p:nvGrpSpPr>
+      <p:grpSpPr>
+        <a:xfrm>
+          <a:off x="0" y="0"/>
+          <a:ext cx="0" cy="0"/>
+          <a:chOff x="0" y="0"/>
+          <a:chExt cx="0" cy="0"/>
+        </a:xfrm>
+      </p:grpSpPr>
+      <p:sp>
+        <p:nvSpPr>
+          <p:cNvPr id="2" name="Espaço Reservado para Imagem de Slide 1"/>
+          <p:cNvSpPr>
+            <a:spLocks noGrp="1" noRot="1" noChangeAspect="1"/>
+          </p:cNvSpPr>
+          <p:nvPr>
+            <p:ph type="sldImg"/>
+          </p:nvPr>
+        </p:nvSpPr>
+        <p:spPr/>
+      </p:sp>
+      <p:sp>
+        <p:nvSpPr>
+          <p:cNvPr id="3" name="Espaço Reservado para Anotações 2"/>
+          <p:cNvSpPr>
+            <a:spLocks noGrp="1"/>
+          </p:cNvSpPr>
+          <p:nvPr>
+            <p:ph type="body" idx="1"/>
+          </p:nvPr>
+        </p:nvSpPr>
+        <p:spPr/>
+        <p:txBody>
+          <a:bodyPr/>
+          <a:lstStyle/>
+          <a:p>
+            <a:r>
+              <a:rPr lang="pt-BR" dirty="0"/>
+              <a:t>https://colab.research.google.com/github/zz4fap/tp557-iot-ml/blob/master/examples/Explorando_a_fun%C3%A7%C3%A3o_de_erro.ipynb</a:t>
+            </a:r>
+          </a:p>
+        </p:txBody>
+      </p:sp>
+      <p:sp>
+        <p:nvSpPr>
+          <p:cNvPr id="4" name="Espaço Reservado para Número de Slide 3"/>
+          <p:cNvSpPr>
+            <a:spLocks noGrp="1"/>
+          </p:cNvSpPr>
+          <p:nvPr>
+            <p:ph type="sldNum" sz="quarter" idx="5"/>
+          </p:nvPr>
+        </p:nvSpPr>
+        <p:spPr/>
+        <p:txBody>
+          <a:bodyPr/>
+          <a:lstStyle/>
+          <a:p>
+            <a:fld id="{6FC8D850-966F-45A6-8DE7-15B891E7D40D}" type="slidenum">
+              <a:rPr lang="pt-BR" smtClean="0"/>
+              <a:t>33</a:t>
             </a:fld>
             <a:endParaRPr lang="pt-BR"/>
           </a:p>
@@ -1055,7 +1200,7 @@
 </p:notes>
 </file>
 
-<file path=ppt/notesSlides/notesSlide12.xml><?xml version="1.0" encoding="utf-8"?>
+<file path=ppt/notesSlides/notesSlide13.xml><?xml version="1.0" encoding="utf-8"?>
 <p:notes xmlns:a="http://schemas.openxmlformats.org/drawingml/2006/main" xmlns:r="http://schemas.openxmlformats.org/officeDocument/2006/relationships" xmlns:p="http://schemas.openxmlformats.org/presentationml/2006/main">
   <p:cSld>
     <p:spTree>
@@ -1123,7 +1268,7 @@
           <a:p>
             <a:fld id="{6FC8D850-966F-45A6-8DE7-15B891E7D40D}" type="slidenum">
               <a:rPr lang="pt-BR" smtClean="0"/>
-              <a:t>32</a:t>
+              <a:t>34</a:t>
             </a:fld>
             <a:endParaRPr lang="pt-BR"/>
           </a:p>
@@ -1590,7 +1735,13 @@
   <p:cSld>
     <p:spTree>
       <p:nvGrpSpPr>
-        <p:cNvPr id="1" name=""/>
+        <p:cNvPr id="1" name="">
+          <a:extLst>
+            <a:ext uri="{FF2B5EF4-FFF2-40B4-BE49-F238E27FC236}">
+              <a16:creationId xmlns:a16="http://schemas.microsoft.com/office/drawing/2014/main" id="{9717057F-33FB-32C9-4D28-AB2F769E5E4A}"/>
+            </a:ext>
+          </a:extLst>
+        </p:cNvPr>
         <p:cNvGrpSpPr/>
         <p:nvPr/>
       </p:nvGrpSpPr>
@@ -1604,7 +1755,13 @@
       </p:grpSpPr>
       <p:sp>
         <p:nvSpPr>
-          <p:cNvPr id="2" name="Espaço Reservado para Imagem de Slide 1"/>
+          <p:cNvPr id="2" name="Espaço Reservado para Imagem de Slide 1">
+            <a:extLst>
+              <a:ext uri="{FF2B5EF4-FFF2-40B4-BE49-F238E27FC236}">
+                <a16:creationId xmlns:a16="http://schemas.microsoft.com/office/drawing/2014/main" id="{5C400566-A9E9-338F-076D-30D05E744DD9}"/>
+              </a:ext>
+            </a:extLst>
+          </p:cNvPr>
           <p:cNvSpPr>
             <a:spLocks noGrp="1" noRot="1" noChangeAspect="1"/>
           </p:cNvSpPr>
@@ -1616,7 +1773,13 @@
       </p:sp>
       <p:sp>
         <p:nvSpPr>
-          <p:cNvPr id="3" name="Espaço Reservado para Anotações 2"/>
+          <p:cNvPr id="3" name="Espaço Reservado para Anotações 2">
+            <a:extLst>
+              <a:ext uri="{FF2B5EF4-FFF2-40B4-BE49-F238E27FC236}">
+                <a16:creationId xmlns:a16="http://schemas.microsoft.com/office/drawing/2014/main" id="{D38315AD-8819-944D-0D8A-FB1058C702A8}"/>
+              </a:ext>
+            </a:extLst>
+          </p:cNvPr>
           <p:cNvSpPr>
             <a:spLocks noGrp="1"/>
           </p:cNvSpPr>
@@ -1687,7 +1850,13 @@
       </p:sp>
       <p:sp>
         <p:nvSpPr>
-          <p:cNvPr id="4" name="Espaço Reservado para Número de Slide 3"/>
+          <p:cNvPr id="4" name="Espaço Reservado para Número de Slide 3">
+            <a:extLst>
+              <a:ext uri="{FF2B5EF4-FFF2-40B4-BE49-F238E27FC236}">
+                <a16:creationId xmlns:a16="http://schemas.microsoft.com/office/drawing/2014/main" id="{5569DC30-6F49-0875-C9D3-9E42CDE9E266}"/>
+              </a:ext>
+            </a:extLst>
+          </p:cNvPr>
           <p:cNvSpPr>
             <a:spLocks noGrp="1"/>
           </p:cNvSpPr>
@@ -1711,7 +1880,7 @@
     </p:spTree>
     <p:extLst>
       <p:ext uri="{BB962C8B-B14F-4D97-AF65-F5344CB8AC3E}">
-        <p14:creationId xmlns:p14="http://schemas.microsoft.com/office/powerpoint/2010/main" val="2882472263"/>
+        <p14:creationId xmlns:p14="http://schemas.microsoft.com/office/powerpoint/2010/main" val="1231869208"/>
       </p:ext>
     </p:extLst>
   </p:cSld>
@@ -1847,7 +2016,7 @@
     </p:spTree>
     <p:extLst>
       <p:ext uri="{BB962C8B-B14F-4D97-AF65-F5344CB8AC3E}">
-        <p14:creationId xmlns:p14="http://schemas.microsoft.com/office/powerpoint/2010/main" val="1336249224"/>
+        <p14:creationId xmlns:p14="http://schemas.microsoft.com/office/powerpoint/2010/main" val="2882472263"/>
       </p:ext>
     </p:extLst>
   </p:cSld>
@@ -1983,7 +2152,7 @@
     </p:spTree>
     <p:extLst>
       <p:ext uri="{BB962C8B-B14F-4D97-AF65-F5344CB8AC3E}">
-        <p14:creationId xmlns:p14="http://schemas.microsoft.com/office/powerpoint/2010/main" val="157567215"/>
+        <p14:creationId xmlns:p14="http://schemas.microsoft.com/office/powerpoint/2010/main" val="1336249224"/>
       </p:ext>
     </p:extLst>
   </p:cSld>
@@ -2038,65 +2207,58 @@
           <a:lstStyle/>
           <a:p>
             <a:r>
-              <a:rPr lang="pt-BR" dirty="0"/>
-              <a:t>A partir de um ponto inicial (i.e., uma suposição aleatória de pesos), o algoritmo extrai a informação de direção do ponto de mínimo a partir da função de erro e a usa para atualizar o ponto (i.e., otimizar a suposição atual) </a:t>
-            </a:r>
-          </a:p>
-          <a:p>
-            <a:r>
-              <a:rPr lang="pt-BR" dirty="0"/>
-              <a:t>Em geral, o novo ponto (i.e., conjunto de pesos) resulta em um erro menor do que o anterior.</a:t>
-            </a:r>
-          </a:p>
-          <a:p>
-            <a:r>
-              <a:rPr lang="pt-BR" dirty="0"/>
-              <a:t>Esse processo é repetido a partir do ponto corrente até que o erro seja minimizado.</a:t>
-            </a:r>
-          </a:p>
-          <a:p>
+              <a:rPr lang="pt-BR" b="1" i="0" dirty="0" err="1">
+                <a:effectLst/>
+                <a:latin typeface="Söhne"/>
+              </a:rPr>
+              <a:t>Mean</a:t>
+            </a:r>
+            <a:r>
+              <a:rPr lang="pt-BR" b="1" i="0" dirty="0">
+                <a:effectLst/>
+                <a:latin typeface="Söhne"/>
+              </a:rPr>
+              <a:t> </a:t>
+            </a:r>
+            <a:r>
+              <a:rPr lang="pt-BR" b="1" i="0" dirty="0" err="1">
+                <a:effectLst/>
+                <a:latin typeface="Söhne"/>
+              </a:rPr>
+              <a:t>Squared</a:t>
+            </a:r>
+            <a:r>
+              <a:rPr lang="pt-BR" b="1" i="0" dirty="0">
+                <a:effectLst/>
+                <a:latin typeface="Söhne"/>
+              </a:rPr>
+              <a:t> </a:t>
+            </a:r>
+            <a:r>
+              <a:rPr lang="pt-BR" b="1" i="0" dirty="0" err="1">
+                <a:effectLst/>
+                <a:latin typeface="Söhne"/>
+              </a:rPr>
+              <a:t>Error</a:t>
+            </a:r>
+            <a:r>
+              <a:rPr lang="pt-BR" b="1" i="0" dirty="0">
+                <a:effectLst/>
+                <a:latin typeface="Söhne"/>
+              </a:rPr>
+              <a:t> (MSE):</a:t>
+            </a:r>
+            <a:r>
+              <a:rPr lang="pt-BR" b="0" i="0" dirty="0">
+                <a:solidFill>
+                  <a:srgbClr val="374151"/>
+                </a:solidFill>
+                <a:effectLst/>
+                <a:latin typeface="Söhne"/>
+              </a:rPr>
+              <a:t> O MSE é a escolha tradicional para problemas de regressão. Ele calcula a média dos quadrados das diferenças entre as previsões do modelo e os valores reais. O MSE penaliza mais erros maiores, o que pode ser útil se você deseja que o modelo seja mais sensível a erros maiores. No entanto, como o erro é elevado ao quadrado, o MSE pode amplificar a influência de outliers.</a:t>
+            </a:r>
             <a:endParaRPr lang="pt-BR" dirty="0"/>
-          </a:p>
-          <a:p>
-            <a:pPr marL="0" marR="0" lvl="0" indent="0" algn="l" defTabSz="914400" rtl="0" eaLnBrk="1" fontAlgn="auto" latinLnBrk="0" hangingPunct="1">
-              <a:lnSpc>
-                <a:spcPct val="100000"/>
-              </a:lnSpc>
-              <a:spcBef>
-                <a:spcPts val="0"/>
-              </a:spcBef>
-              <a:spcAft>
-                <a:spcPts val="0"/>
-              </a:spcAft>
-              <a:buClrTx/>
-              <a:buSzTx/>
-              <a:buFontTx/>
-              <a:buNone/>
-              <a:tabLst/>
-              <a:defRPr/>
-            </a:pPr>
-            <a:r>
-              <a:rPr lang="pt-BR" dirty="0"/>
-              <a:t>A partir de um ponto inicial (i.e., conjunto de pesos aleatórios), a cada iteração (i.e., suposição) do algoritmo, tem-se, em geral, um conjunto de pesos que resulta em um erro menor do que o anterior.</a:t>
-            </a:r>
-          </a:p>
-          <a:p>
-            <a:endParaRPr lang="pt-BR" dirty="0"/>
-          </a:p>
-          <a:p>
-            <a:endParaRPr lang="pt-BR" dirty="0"/>
-          </a:p>
-          <a:p>
-            <a:endParaRPr lang="pt-BR" dirty="0"/>
-          </a:p>
-          <a:p>
-            <a:endParaRPr lang="pt-BR" dirty="0"/>
-          </a:p>
-          <a:p>
-            <a:r>
-              <a:rPr lang="pt-BR" dirty="0"/>
-              <a:t>(i.e., conjunto de pesos aleatórios), a cada iteração (i.e., suposição) do algoritmo, tem-se, em geral, um conjunto de pesos que resulta em um erro menor do que o anterior.</a:t>
-            </a:r>
           </a:p>
         </p:txBody>
       </p:sp>
@@ -2117,7 +2279,7 @@
           <a:p>
             <a:fld id="{6FC8D850-966F-45A6-8DE7-15B891E7D40D}" type="slidenum">
               <a:rPr lang="pt-BR" smtClean="0"/>
-              <a:t>29</a:t>
+              <a:t>22</a:t>
             </a:fld>
             <a:endParaRPr lang="pt-BR"/>
           </a:p>
@@ -2126,7 +2288,7 @@
     </p:spTree>
     <p:extLst>
       <p:ext uri="{BB962C8B-B14F-4D97-AF65-F5344CB8AC3E}">
-        <p14:creationId xmlns:p14="http://schemas.microsoft.com/office/powerpoint/2010/main" val="973718594"/>
+        <p14:creationId xmlns:p14="http://schemas.microsoft.com/office/powerpoint/2010/main" val="157567215"/>
       </p:ext>
     </p:extLst>
   </p:cSld>
@@ -2283,7 +2445,7 @@
           <a:p>
             <a:fld id="{63289F7E-B80B-496E-81B4-D396C37C9454}" type="datetimeFigureOut">
               <a:rPr lang="pt-BR" smtClean="0"/>
-              <a:t>26/03/2025</a:t>
+              <a:t>31/03/2025</a:t>
             </a:fld>
             <a:endParaRPr lang="pt-BR"/>
           </a:p>
@@ -2481,7 +2643,7 @@
           <a:p>
             <a:fld id="{63289F7E-B80B-496E-81B4-D396C37C9454}" type="datetimeFigureOut">
               <a:rPr lang="pt-BR" smtClean="0"/>
-              <a:t>26/03/2025</a:t>
+              <a:t>31/03/2025</a:t>
             </a:fld>
             <a:endParaRPr lang="pt-BR"/>
           </a:p>
@@ -2689,7 +2851,7 @@
           <a:p>
             <a:fld id="{63289F7E-B80B-496E-81B4-D396C37C9454}" type="datetimeFigureOut">
               <a:rPr lang="pt-BR" smtClean="0"/>
-              <a:t>26/03/2025</a:t>
+              <a:t>31/03/2025</a:t>
             </a:fld>
             <a:endParaRPr lang="pt-BR"/>
           </a:p>
@@ -2887,7 +3049,7 @@
           <a:p>
             <a:fld id="{63289F7E-B80B-496E-81B4-D396C37C9454}" type="datetimeFigureOut">
               <a:rPr lang="pt-BR" smtClean="0"/>
-              <a:t>26/03/2025</a:t>
+              <a:t>31/03/2025</a:t>
             </a:fld>
             <a:endParaRPr lang="pt-BR"/>
           </a:p>
@@ -3162,7 +3324,7 @@
           <a:p>
             <a:fld id="{63289F7E-B80B-496E-81B4-D396C37C9454}" type="datetimeFigureOut">
               <a:rPr lang="pt-BR" smtClean="0"/>
-              <a:t>26/03/2025</a:t>
+              <a:t>31/03/2025</a:t>
             </a:fld>
             <a:endParaRPr lang="pt-BR"/>
           </a:p>
@@ -3427,7 +3589,7 @@
           <a:p>
             <a:fld id="{63289F7E-B80B-496E-81B4-D396C37C9454}" type="datetimeFigureOut">
               <a:rPr lang="pt-BR" smtClean="0"/>
-              <a:t>26/03/2025</a:t>
+              <a:t>31/03/2025</a:t>
             </a:fld>
             <a:endParaRPr lang="pt-BR"/>
           </a:p>
@@ -3839,7 +4001,7 @@
           <a:p>
             <a:fld id="{63289F7E-B80B-496E-81B4-D396C37C9454}" type="datetimeFigureOut">
               <a:rPr lang="pt-BR" smtClean="0"/>
-              <a:t>26/03/2025</a:t>
+              <a:t>31/03/2025</a:t>
             </a:fld>
             <a:endParaRPr lang="pt-BR"/>
           </a:p>
@@ -3980,7 +4142,7 @@
           <a:p>
             <a:fld id="{63289F7E-B80B-496E-81B4-D396C37C9454}" type="datetimeFigureOut">
               <a:rPr lang="pt-BR" smtClean="0"/>
-              <a:t>26/03/2025</a:t>
+              <a:t>31/03/2025</a:t>
             </a:fld>
             <a:endParaRPr lang="pt-BR"/>
           </a:p>
@@ -4093,7 +4255,7 @@
           <a:p>
             <a:fld id="{63289F7E-B80B-496E-81B4-D396C37C9454}" type="datetimeFigureOut">
               <a:rPr lang="pt-BR" smtClean="0"/>
-              <a:t>26/03/2025</a:t>
+              <a:t>31/03/2025</a:t>
             </a:fld>
             <a:endParaRPr lang="pt-BR"/>
           </a:p>
@@ -4404,7 +4566,7 @@
           <a:p>
             <a:fld id="{63289F7E-B80B-496E-81B4-D396C37C9454}" type="datetimeFigureOut">
               <a:rPr lang="pt-BR" smtClean="0"/>
-              <a:t>26/03/2025</a:t>
+              <a:t>31/03/2025</a:t>
             </a:fld>
             <a:endParaRPr lang="pt-BR"/>
           </a:p>
@@ -4692,7 +4854,7 @@
           <a:p>
             <a:fld id="{63289F7E-B80B-496E-81B4-D396C37C9454}" type="datetimeFigureOut">
               <a:rPr lang="pt-BR" smtClean="0"/>
-              <a:t>26/03/2025</a:t>
+              <a:t>31/03/2025</a:t>
             </a:fld>
             <a:endParaRPr lang="pt-BR"/>
           </a:p>
@@ -4933,7 +5095,7 @@
           <a:p>
             <a:fld id="{63289F7E-B80B-496E-81B4-D396C37C9454}" type="datetimeFigureOut">
               <a:rPr lang="pt-BR" smtClean="0"/>
-              <a:t>26/03/2025</a:t>
+              <a:t>31/03/2025</a:t>
             </a:fld>
             <a:endParaRPr lang="pt-BR"/>
           </a:p>
@@ -14020,234 +14182,107 @@
           </a:p>
         </p:txBody>
       </p:sp>
-      <mc:AlternateContent xmlns:mc="http://schemas.openxmlformats.org/markup-compatibility/2006" xmlns:a14="http://schemas.microsoft.com/office/drawing/2010/main">
-        <mc:Choice Requires="a14">
-          <p:sp>
-            <p:nvSpPr>
-              <p:cNvPr id="3" name="Espaço Reservado para Conteúdo 2">
-                <a:extLst>
-                  <a:ext uri="{FF2B5EF4-FFF2-40B4-BE49-F238E27FC236}">
-                    <a16:creationId xmlns:a16="http://schemas.microsoft.com/office/drawing/2014/main" id="{996BF4C0-7E55-8111-D7D7-035EB9474E11}"/>
-                  </a:ext>
-                </a:extLst>
-              </p:cNvPr>
-              <p:cNvSpPr>
-                <a:spLocks noGrp="1"/>
-              </p:cNvSpPr>
-              <p:nvPr>
-                <p:ph idx="1"/>
-              </p:nvPr>
-            </p:nvSpPr>
-            <p:spPr>
-              <a:xfrm>
-                <a:off x="5147352" y="1825624"/>
-                <a:ext cx="6904235" cy="5032375"/>
-              </a:xfrm>
-            </p:spPr>
-            <p:txBody>
-              <a:bodyPr>
-                <a:normAutofit/>
-              </a:bodyPr>
-              <a:lstStyle/>
-              <a:p>
-                <a:r>
-                  <a:rPr lang="pt-BR" dirty="0"/>
-                  <a:t>Porém, como a diferença é elevada ao quadrado, ele </a:t>
-                </a:r>
-                <a:r>
-                  <a:rPr lang="pt-BR" b="1" i="1" dirty="0">
-                    <a:solidFill>
-                      <a:srgbClr val="00B050"/>
-                    </a:solidFill>
-                  </a:rPr>
-                  <a:t>pode amplificar a influência de outliers</a:t>
-                </a:r>
-                <a:r>
-                  <a:rPr lang="pt-BR" dirty="0"/>
-                  <a:t>.</a:t>
-                </a:r>
-              </a:p>
-              <a:p>
-                <a:pPr lvl="1">
-                  <a:buFont typeface="Wingdings" panose="05000000000000000000" pitchFamily="2" charset="2"/>
-                  <a:buChar char="§"/>
-                </a:pPr>
-                <a:r>
-                  <a:rPr lang="pt-BR" b="0" i="0" dirty="0">
-                    <a:effectLst/>
-                  </a:rPr>
-                  <a:t>Outliers podem </a:t>
-                </a:r>
-                <a:r>
-                  <a:rPr lang="pt-BR" b="1" i="1" dirty="0">
-                    <a:solidFill>
-                      <a:srgbClr val="00B050"/>
-                    </a:solidFill>
-                    <a:effectLst/>
-                  </a:rPr>
-                  <a:t>distorcer ou deslocar a função hipótese</a:t>
-                </a:r>
-                <a:r>
-                  <a:rPr lang="pt-BR" b="0" i="0" dirty="0">
-                    <a:effectLst/>
-                  </a:rPr>
-                  <a:t>, fazendo com que ela se distancie de um mapeamento que represente o comportamento dos dados “</a:t>
-                </a:r>
-                <a:r>
-                  <a:rPr lang="pt-BR" b="0" i="1" dirty="0">
-                    <a:effectLst/>
-                  </a:rPr>
-                  <a:t>normais</a:t>
-                </a:r>
-                <a:r>
-                  <a:rPr lang="pt-BR" b="0" i="0" dirty="0">
-                    <a:effectLst/>
-                  </a:rPr>
-                  <a:t>”.</a:t>
-                </a:r>
-                <a:endParaRPr lang="pt-BR" dirty="0"/>
-              </a:p>
-              <a:p>
-                <a:r>
-                  <a:rPr lang="pt-BR" b="0" i="0" dirty="0">
-                    <a:effectLst/>
-                  </a:rPr>
-                  <a:t>Por usar o quadrad</a:t>
-                </a:r>
-                <a:r>
-                  <a:rPr lang="pt-BR" dirty="0"/>
-                  <a:t>o da diferença, </a:t>
-                </a:r>
-                <a:r>
-                  <a:rPr lang="pt-BR" b="1" i="1" dirty="0">
-                    <a:solidFill>
-                      <a:srgbClr val="00B050"/>
-                    </a:solidFill>
-                  </a:rPr>
-                  <a:t>a métrica não fica na mesma escala dos dados originais</a:t>
-                </a:r>
-                <a:r>
-                  <a:rPr lang="pt-BR" dirty="0"/>
-                  <a:t>.</a:t>
-                </a:r>
-              </a:p>
-              <a:p>
-                <a:pPr lvl="1">
-                  <a:buFont typeface="Wingdings" panose="05000000000000000000" pitchFamily="2" charset="2"/>
-                  <a:buChar char="§"/>
-                </a:pPr>
-                <a:r>
-                  <a:rPr lang="pt-BR" b="0" i="0" dirty="0">
-                    <a:effectLst/>
-                  </a:rPr>
-                  <a:t>Por exemplo, se estivermos predizendo o preço de casas em dólares, os erros estarão em </a:t>
-                </a:r>
-                <a14:m>
-                  <m:oMath xmlns:m="http://schemas.openxmlformats.org/officeDocument/2006/math">
-                    <m:sSup>
-                      <m:sSupPr>
-                        <m:ctrlPr>
-                          <a:rPr lang="pt-BR" b="0" i="1" smtClean="0">
-                            <a:effectLst/>
-                            <a:latin typeface="Cambria Math" panose="02040503050406030204" pitchFamily="18" charset="0"/>
-                          </a:rPr>
-                        </m:ctrlPr>
-                      </m:sSupPr>
-                      <m:e>
-                        <m:r>
-                          <m:rPr>
-                            <m:sty m:val="p"/>
-                          </m:rPr>
-                          <a:rPr lang="pt-BR" b="0" i="0" smtClean="0">
-                            <a:effectLst/>
-                            <a:latin typeface="Cambria Math" panose="02040503050406030204" pitchFamily="18" charset="0"/>
-                          </a:rPr>
-                          <m:t>d</m:t>
-                        </m:r>
-                        <m:r>
-                          <a:rPr lang="pt-BR" b="0" i="0" smtClean="0">
-                            <a:effectLst/>
-                            <a:latin typeface="Cambria Math" panose="02040503050406030204" pitchFamily="18" charset="0"/>
-                          </a:rPr>
-                          <m:t>ó</m:t>
-                        </m:r>
-                        <m:r>
-                          <m:rPr>
-                            <m:sty m:val="p"/>
-                          </m:rPr>
-                          <a:rPr lang="pt-BR" b="0" i="0" smtClean="0">
-                            <a:effectLst/>
-                            <a:latin typeface="Cambria Math" panose="02040503050406030204" pitchFamily="18" charset="0"/>
-                          </a:rPr>
-                          <m:t>lares</m:t>
-                        </m:r>
-                      </m:e>
-                      <m:sup>
-                        <m:r>
-                          <a:rPr lang="pt-BR" b="0" i="1" smtClean="0">
-                            <a:effectLst/>
-                            <a:latin typeface="Cambria Math" panose="02040503050406030204" pitchFamily="18" charset="0"/>
-                          </a:rPr>
-                          <m:t>2</m:t>
-                        </m:r>
-                      </m:sup>
-                    </m:sSup>
-                  </m:oMath>
-                </a14:m>
-                <a:r>
-                  <a:rPr lang="pt-BR" b="0" i="0" dirty="0">
-                    <a:effectLst/>
-                  </a:rPr>
-                  <a:t>.</a:t>
-                </a:r>
-              </a:p>
-            </p:txBody>
-          </p:sp>
-        </mc:Choice>
-        <mc:Fallback xmlns="">
-          <p:sp>
-            <p:nvSpPr>
-              <p:cNvPr id="3" name="Espaço Reservado para Conteúdo 2">
-                <a:extLst>
-                  <a:ext uri="{FF2B5EF4-FFF2-40B4-BE49-F238E27FC236}">
-                    <a16:creationId xmlns:a16="http://schemas.microsoft.com/office/drawing/2014/main" id="{996BF4C0-7E55-8111-D7D7-035EB9474E11}"/>
-                  </a:ext>
-                </a:extLst>
-              </p:cNvPr>
-              <p:cNvSpPr>
-                <a:spLocks noGrp="1" noRot="1" noChangeAspect="1" noMove="1" noResize="1" noEditPoints="1" noAdjustHandles="1" noChangeArrowheads="1" noChangeShapeType="1" noTextEdit="1"/>
-              </p:cNvSpPr>
-              <p:nvPr>
-                <p:ph idx="1"/>
-              </p:nvPr>
-            </p:nvSpPr>
-            <p:spPr>
-              <a:xfrm>
-                <a:off x="5147352" y="1825624"/>
-                <a:ext cx="6904235" cy="5032375"/>
-              </a:xfrm>
-              <a:blipFill>
-                <a:blip r:embed="rId3"/>
-                <a:stretch>
-                  <a:fillRect l="-1589" t="-1937" r="-1059" b="-1211"/>
-                </a:stretch>
-              </a:blipFill>
-            </p:spPr>
-            <p:txBody>
-              <a:bodyPr/>
-              <a:lstStyle/>
-              <a:p>
-                <a:r>
-                  <a:rPr lang="pt-BR">
-                    <a:noFill/>
-                  </a:rPr>
-                  <a:t> </a:t>
-                </a:r>
-              </a:p>
-            </p:txBody>
-          </p:sp>
-        </mc:Fallback>
-      </mc:AlternateContent>
+      <p:sp>
+        <p:nvSpPr>
+          <p:cNvPr id="3" name="Espaço Reservado para Conteúdo 2">
+            <a:extLst>
+              <a:ext uri="{FF2B5EF4-FFF2-40B4-BE49-F238E27FC236}">
+                <a16:creationId xmlns:a16="http://schemas.microsoft.com/office/drawing/2014/main" id="{996BF4C0-7E55-8111-D7D7-035EB9474E11}"/>
+              </a:ext>
+            </a:extLst>
+          </p:cNvPr>
+          <p:cNvSpPr>
+            <a:spLocks noGrp="1"/>
+          </p:cNvSpPr>
+          <p:nvPr>
+            <p:ph idx="1"/>
+          </p:nvPr>
+        </p:nvSpPr>
+        <p:spPr>
+          <a:xfrm>
+            <a:off x="5147352" y="1825624"/>
+            <a:ext cx="6904235" cy="5032375"/>
+          </a:xfrm>
+        </p:spPr>
+        <p:txBody>
+          <a:bodyPr>
+            <a:normAutofit/>
+          </a:bodyPr>
+          <a:lstStyle/>
+          <a:p>
+            <a:r>
+              <a:rPr lang="pt-BR" dirty="0"/>
+              <a:t>Porém, como a diferença é elevada ao quadrado, ele </a:t>
+            </a:r>
+            <a:r>
+              <a:rPr lang="pt-BR" b="1" i="1" dirty="0">
+                <a:solidFill>
+                  <a:srgbClr val="00B050"/>
+                </a:solidFill>
+              </a:rPr>
+              <a:t>pode amplificar a influência de outliers</a:t>
+            </a:r>
+            <a:r>
+              <a:rPr lang="pt-BR" dirty="0"/>
+              <a:t>.</a:t>
+            </a:r>
+          </a:p>
+          <a:p>
+            <a:r>
+              <a:rPr lang="pt-BR" b="1" i="1" dirty="0">
+                <a:solidFill>
+                  <a:srgbClr val="7030A0"/>
+                </a:solidFill>
+              </a:rPr>
+              <a:t>Outliers</a:t>
+            </a:r>
+            <a:r>
+              <a:rPr lang="pt-BR" dirty="0"/>
+              <a:t> podem levar o modelo a se concentrar demais em reduzir os erros grandes, em detrimento de um bom ajuste geral.</a:t>
+            </a:r>
+          </a:p>
+          <a:p>
+            <a:r>
+              <a:rPr lang="pt-BR" dirty="0"/>
+              <a:t>A consequência disso é a</a:t>
+            </a:r>
+            <a:r>
+              <a:rPr lang="pt-BR" b="0" i="0" dirty="0">
+                <a:effectLst/>
+              </a:rPr>
+              <a:t> </a:t>
+            </a:r>
+            <a:r>
+              <a:rPr lang="pt-BR" b="1" i="1" dirty="0">
+                <a:solidFill>
+                  <a:srgbClr val="00B050"/>
+                </a:solidFill>
+                <a:effectLst/>
+              </a:rPr>
+              <a:t>distorção da função hipótese</a:t>
+            </a:r>
+            <a:r>
+              <a:rPr lang="pt-BR" b="0" i="0" dirty="0">
+                <a:effectLst/>
+              </a:rPr>
+              <a:t>, fazendo com que ela se distancie de um mapeamento que represente o comportamento dos dados “</a:t>
+            </a:r>
+            <a:r>
+              <a:rPr lang="pt-BR" b="0" i="1" dirty="0">
+                <a:effectLst/>
+              </a:rPr>
+              <a:t>normais</a:t>
+            </a:r>
+            <a:r>
+              <a:rPr lang="pt-BR" b="0" i="0" dirty="0">
+                <a:effectLst/>
+              </a:rPr>
+              <a:t>”.</a:t>
+            </a:r>
+            <a:endParaRPr lang="pt-BR" dirty="0"/>
+          </a:p>
+        </p:txBody>
+      </p:sp>
       <mc:AlternateContent xmlns:mc="http://schemas.openxmlformats.org/markup-compatibility/2006" xmlns:a14="http://schemas.microsoft.com/office/drawing/2010/main">
         <mc:Choice Requires="a14">
           <p:sp>
@@ -14774,6 +14809,985 @@
   <p:cSld>
     <p:spTree>
       <p:nvGrpSpPr>
+        <p:cNvPr id="1" name="">
+          <a:extLst>
+            <a:ext uri="{FF2B5EF4-FFF2-40B4-BE49-F238E27FC236}">
+              <a16:creationId xmlns:a16="http://schemas.microsoft.com/office/drawing/2014/main" id="{C2F83E0F-01C0-1627-646F-CD1F7DACD0D4}"/>
+            </a:ext>
+          </a:extLst>
+        </p:cNvPr>
+        <p:cNvGrpSpPr/>
+        <p:nvPr/>
+      </p:nvGrpSpPr>
+      <p:grpSpPr>
+        <a:xfrm>
+          <a:off x="0" y="0"/>
+          <a:ext cx="0" cy="0"/>
+          <a:chOff x="0" y="0"/>
+          <a:chExt cx="0" cy="0"/>
+        </a:xfrm>
+      </p:grpSpPr>
+      <p:sp>
+        <p:nvSpPr>
+          <p:cNvPr id="2" name="Título 1">
+            <a:extLst>
+              <a:ext uri="{FF2B5EF4-FFF2-40B4-BE49-F238E27FC236}">
+                <a16:creationId xmlns:a16="http://schemas.microsoft.com/office/drawing/2014/main" id="{D5093881-35CA-729E-21B6-C476D0963BC3}"/>
+              </a:ext>
+            </a:extLst>
+          </p:cNvPr>
+          <p:cNvSpPr>
+            <a:spLocks noGrp="1"/>
+          </p:cNvSpPr>
+          <p:nvPr>
+            <p:ph type="title"/>
+          </p:nvPr>
+        </p:nvSpPr>
+        <p:spPr/>
+        <p:txBody>
+          <a:bodyPr/>
+          <a:lstStyle/>
+          <a:p>
+            <a:r>
+              <a:rPr lang="pt-BR" i="1" dirty="0" err="1"/>
+              <a:t>Mean</a:t>
+            </a:r>
+            <a:r>
+              <a:rPr lang="pt-BR" i="1" dirty="0"/>
+              <a:t> </a:t>
+            </a:r>
+            <a:r>
+              <a:rPr lang="pt-BR" i="1" dirty="0" err="1"/>
+              <a:t>Squared</a:t>
+            </a:r>
+            <a:r>
+              <a:rPr lang="pt-BR" i="1" dirty="0"/>
+              <a:t> </a:t>
+            </a:r>
+            <a:r>
+              <a:rPr lang="pt-BR" i="1" dirty="0" err="1"/>
+              <a:t>Error</a:t>
+            </a:r>
+            <a:r>
+              <a:rPr lang="pt-BR" i="1" dirty="0"/>
+              <a:t> </a:t>
+            </a:r>
+            <a:r>
+              <a:rPr lang="pt-BR" dirty="0"/>
+              <a:t>– MSE</a:t>
+            </a:r>
+          </a:p>
+        </p:txBody>
+      </p:sp>
+      <mc:AlternateContent xmlns:mc="http://schemas.openxmlformats.org/markup-compatibility/2006">
+        <mc:Choice xmlns:a14="http://schemas.microsoft.com/office/drawing/2010/main" Requires="a14">
+          <p:sp>
+            <p:nvSpPr>
+              <p:cNvPr id="3" name="Espaço Reservado para Conteúdo 2">
+                <a:extLst>
+                  <a:ext uri="{FF2B5EF4-FFF2-40B4-BE49-F238E27FC236}">
+                    <a16:creationId xmlns:a16="http://schemas.microsoft.com/office/drawing/2014/main" id="{389BE13C-73AE-50AC-806C-E5A1971F2D4E}"/>
+                  </a:ext>
+                </a:extLst>
+              </p:cNvPr>
+              <p:cNvSpPr>
+                <a:spLocks noGrp="1"/>
+              </p:cNvSpPr>
+              <p:nvPr>
+                <p:ph idx="1"/>
+              </p:nvPr>
+            </p:nvSpPr>
+            <p:spPr>
+              <a:xfrm>
+                <a:off x="5147352" y="1825624"/>
+                <a:ext cx="6904235" cy="5032375"/>
+              </a:xfrm>
+            </p:spPr>
+            <p:txBody>
+              <a:bodyPr>
+                <a:normAutofit/>
+              </a:bodyPr>
+              <a:lstStyle/>
+              <a:p>
+                <a:r>
+                  <a:rPr lang="pt-BR" b="0" i="0" dirty="0">
+                    <a:effectLst/>
+                  </a:rPr>
+                  <a:t>Por usar o quadrad</a:t>
+                </a:r>
+                <a:r>
+                  <a:rPr lang="pt-BR" dirty="0"/>
+                  <a:t>o da diferença, </a:t>
+                </a:r>
+                <a:r>
+                  <a:rPr lang="pt-BR" b="1" i="1" dirty="0">
+                    <a:solidFill>
+                      <a:srgbClr val="00B050"/>
+                    </a:solidFill>
+                  </a:rPr>
+                  <a:t>a métrica não fica na mesma escala dos dados originais</a:t>
+                </a:r>
+                <a:r>
+                  <a:rPr lang="pt-BR" dirty="0"/>
+                  <a:t>.</a:t>
+                </a:r>
+              </a:p>
+              <a:p>
+                <a:pPr lvl="1">
+                  <a:buFont typeface="Wingdings" panose="05000000000000000000" pitchFamily="2" charset="2"/>
+                  <a:buChar char="§"/>
+                </a:pPr>
+                <a:r>
+                  <a:rPr lang="pt-BR" b="0" i="0" dirty="0">
+                    <a:effectLst/>
+                  </a:rPr>
+                  <a:t>Por exemplo, se estivermos predizendo o preço de casas em dólares, os erros estarão em </a:t>
+                </a:r>
+                <a14:m>
+                  <m:oMath xmlns:m="http://schemas.openxmlformats.org/officeDocument/2006/math">
+                    <m:sSup>
+                      <m:sSupPr>
+                        <m:ctrlPr>
+                          <a:rPr lang="pt-BR" b="0" i="1" smtClean="0">
+                            <a:effectLst/>
+                            <a:latin typeface="Cambria Math" panose="02040503050406030204" pitchFamily="18" charset="0"/>
+                          </a:rPr>
+                        </m:ctrlPr>
+                      </m:sSupPr>
+                      <m:e>
+                        <m:r>
+                          <m:rPr>
+                            <m:sty m:val="p"/>
+                          </m:rPr>
+                          <a:rPr lang="pt-BR" b="0" i="0" smtClean="0">
+                            <a:effectLst/>
+                            <a:latin typeface="Cambria Math" panose="02040503050406030204" pitchFamily="18" charset="0"/>
+                          </a:rPr>
+                          <m:t>d</m:t>
+                        </m:r>
+                        <m:r>
+                          <a:rPr lang="pt-BR" b="0" i="0" smtClean="0">
+                            <a:effectLst/>
+                            <a:latin typeface="Cambria Math" panose="02040503050406030204" pitchFamily="18" charset="0"/>
+                          </a:rPr>
+                          <m:t>ó</m:t>
+                        </m:r>
+                        <m:r>
+                          <m:rPr>
+                            <m:sty m:val="p"/>
+                          </m:rPr>
+                          <a:rPr lang="pt-BR" b="0" i="0" smtClean="0">
+                            <a:effectLst/>
+                            <a:latin typeface="Cambria Math" panose="02040503050406030204" pitchFamily="18" charset="0"/>
+                          </a:rPr>
+                          <m:t>lares</m:t>
+                        </m:r>
+                      </m:e>
+                      <m:sup>
+                        <m:r>
+                          <a:rPr lang="pt-BR" b="0" i="1" smtClean="0">
+                            <a:effectLst/>
+                            <a:latin typeface="Cambria Math" panose="02040503050406030204" pitchFamily="18" charset="0"/>
+                          </a:rPr>
+                          <m:t>2</m:t>
+                        </m:r>
+                      </m:sup>
+                    </m:sSup>
+                  </m:oMath>
+                </a14:m>
+                <a:r>
+                  <a:rPr lang="pt-BR" b="0" i="0" dirty="0">
+                    <a:effectLst/>
+                  </a:rPr>
+                  <a:t>.</a:t>
+                </a:r>
+              </a:p>
+            </p:txBody>
+          </p:sp>
+        </mc:Choice>
+        <mc:Fallback>
+          <p:sp>
+            <p:nvSpPr>
+              <p:cNvPr id="3" name="Espaço Reservado para Conteúdo 2">
+                <a:extLst>
+                  <a:ext uri="{FF2B5EF4-FFF2-40B4-BE49-F238E27FC236}">
+                    <a16:creationId xmlns:a16="http://schemas.microsoft.com/office/drawing/2014/main" id="{389BE13C-73AE-50AC-806C-E5A1971F2D4E}"/>
+                  </a:ext>
+                </a:extLst>
+              </p:cNvPr>
+              <p:cNvSpPr>
+                <a:spLocks noGrp="1" noRot="1" noChangeAspect="1" noMove="1" noResize="1" noEditPoints="1" noAdjustHandles="1" noChangeArrowheads="1" noChangeShapeType="1" noTextEdit="1"/>
+              </p:cNvSpPr>
+              <p:nvPr>
+                <p:ph idx="1"/>
+              </p:nvPr>
+            </p:nvSpPr>
+            <p:spPr>
+              <a:xfrm>
+                <a:off x="5147352" y="1825624"/>
+                <a:ext cx="6904235" cy="5032375"/>
+              </a:xfrm>
+              <a:blipFill>
+                <a:blip r:embed="rId3"/>
+                <a:stretch>
+                  <a:fillRect l="-1589" t="-1937" r="-1059"/>
+                </a:stretch>
+              </a:blipFill>
+            </p:spPr>
+            <p:txBody>
+              <a:bodyPr/>
+              <a:lstStyle/>
+              <a:p>
+                <a:r>
+                  <a:rPr lang="en-US">
+                    <a:noFill/>
+                  </a:rPr>
+                  <a:t> </a:t>
+                </a:r>
+              </a:p>
+            </p:txBody>
+          </p:sp>
+        </mc:Fallback>
+      </mc:AlternateContent>
+      <mc:AlternateContent xmlns:mc="http://schemas.openxmlformats.org/markup-compatibility/2006" xmlns:a14="http://schemas.microsoft.com/office/drawing/2010/main">
+        <mc:Choice Requires="a14">
+          <p:sp>
+            <p:nvSpPr>
+              <p:cNvPr id="4" name="CaixaDeTexto 3">
+                <a:extLst>
+                  <a:ext uri="{FF2B5EF4-FFF2-40B4-BE49-F238E27FC236}">
+                    <a16:creationId xmlns:a16="http://schemas.microsoft.com/office/drawing/2014/main" id="{610B69BF-F67C-90E1-3919-D53C00CF2173}"/>
+                  </a:ext>
+                </a:extLst>
+              </p:cNvPr>
+              <p:cNvSpPr txBox="1"/>
+              <p:nvPr/>
+            </p:nvSpPr>
+            <p:spPr>
+              <a:xfrm>
+                <a:off x="838200" y="2006187"/>
+                <a:ext cx="3941614" cy="1131143"/>
+              </a:xfrm>
+              <a:prstGeom prst="rect">
+                <a:avLst/>
+              </a:prstGeom>
+              <a:noFill/>
+            </p:spPr>
+            <p:txBody>
+              <a:bodyPr wrap="square" rtlCol="0">
+                <a:spAutoFit/>
+              </a:bodyPr>
+              <a:lstStyle/>
+              <a:p>
+                <a:pPr/>
+                <a14:m>
+                  <m:oMathPara xmlns:m="http://schemas.openxmlformats.org/officeDocument/2006/math">
+                    <m:oMathParaPr>
+                      <m:jc m:val="left"/>
+                    </m:oMathParaPr>
+                    <m:oMath xmlns:m="http://schemas.openxmlformats.org/officeDocument/2006/math">
+                      <m:r>
+                        <m:rPr>
+                          <m:sty m:val="p"/>
+                        </m:rPr>
+                        <a:rPr lang="pt-BR" sz="2400">
+                          <a:latin typeface="Cambria Math" panose="02040503050406030204" pitchFamily="18" charset="0"/>
+                        </a:rPr>
+                        <m:t>MSE</m:t>
+                      </m:r>
+                      <m:r>
+                        <a:rPr lang="pt-BR" sz="2400" i="1">
+                          <a:latin typeface="Cambria Math" panose="02040503050406030204" pitchFamily="18" charset="0"/>
+                        </a:rPr>
+                        <m:t>=</m:t>
+                      </m:r>
+                      <m:f>
+                        <m:fPr>
+                          <m:ctrlPr>
+                            <a:rPr lang="pt-BR" sz="2400" i="1">
+                              <a:latin typeface="Cambria Math" panose="02040503050406030204" pitchFamily="18" charset="0"/>
+                            </a:rPr>
+                          </m:ctrlPr>
+                        </m:fPr>
+                        <m:num>
+                          <m:r>
+                            <a:rPr lang="pt-BR" sz="2400" i="1">
+                              <a:latin typeface="Cambria Math" panose="02040503050406030204" pitchFamily="18" charset="0"/>
+                            </a:rPr>
+                            <m:t>1</m:t>
+                          </m:r>
+                        </m:num>
+                        <m:den>
+                          <m:r>
+                            <a:rPr lang="pt-BR" sz="2400" i="1">
+                              <a:latin typeface="Cambria Math" panose="02040503050406030204" pitchFamily="18" charset="0"/>
+                            </a:rPr>
+                            <m:t>𝑁</m:t>
+                          </m:r>
+                        </m:den>
+                      </m:f>
+                      <m:nary>
+                        <m:naryPr>
+                          <m:chr m:val="∑"/>
+                          <m:ctrlPr>
+                            <a:rPr lang="pt-BR" sz="2400" i="1">
+                              <a:latin typeface="Cambria Math" panose="02040503050406030204" pitchFamily="18" charset="0"/>
+                            </a:rPr>
+                          </m:ctrlPr>
+                        </m:naryPr>
+                        <m:sub>
+                          <m:r>
+                            <m:rPr>
+                              <m:brk m:alnAt="23"/>
+                            </m:rPr>
+                            <a:rPr lang="pt-BR" sz="2400" i="1">
+                              <a:latin typeface="Cambria Math" panose="02040503050406030204" pitchFamily="18" charset="0"/>
+                            </a:rPr>
+                            <m:t>𝑛</m:t>
+                          </m:r>
+                          <m:r>
+                            <a:rPr lang="pt-BR" sz="2400" i="1">
+                              <a:latin typeface="Cambria Math" panose="02040503050406030204" pitchFamily="18" charset="0"/>
+                            </a:rPr>
+                            <m:t>=0</m:t>
+                          </m:r>
+                        </m:sub>
+                        <m:sup>
+                          <m:r>
+                            <a:rPr lang="pt-BR" sz="2400" i="1">
+                              <a:latin typeface="Cambria Math" panose="02040503050406030204" pitchFamily="18" charset="0"/>
+                            </a:rPr>
+                            <m:t>𝑁</m:t>
+                          </m:r>
+                          <m:r>
+                            <a:rPr lang="pt-BR" sz="2400" i="1">
+                              <a:latin typeface="Cambria Math" panose="02040503050406030204" pitchFamily="18" charset="0"/>
+                            </a:rPr>
+                            <m:t>−1</m:t>
+                          </m:r>
+                        </m:sup>
+                        <m:e>
+                          <m:sSup>
+                            <m:sSupPr>
+                              <m:ctrlPr>
+                                <a:rPr lang="pt-BR" sz="2400" i="1">
+                                  <a:latin typeface="Cambria Math" panose="02040503050406030204" pitchFamily="18" charset="0"/>
+                                </a:rPr>
+                              </m:ctrlPr>
+                            </m:sSupPr>
+                            <m:e>
+                              <m:d>
+                                <m:dPr>
+                                  <m:ctrlPr>
+                                    <a:rPr lang="pt-BR" sz="2400" i="1">
+                                      <a:latin typeface="Cambria Math" panose="02040503050406030204" pitchFamily="18" charset="0"/>
+                                    </a:rPr>
+                                  </m:ctrlPr>
+                                </m:dPr>
+                                <m:e>
+                                  <m:acc>
+                                    <m:accPr>
+                                      <m:chr m:val="̂"/>
+                                      <m:ctrlPr>
+                                        <a:rPr lang="pt-BR" sz="2400" i="1">
+                                          <a:latin typeface="Cambria Math" panose="02040503050406030204" pitchFamily="18" charset="0"/>
+                                        </a:rPr>
+                                      </m:ctrlPr>
+                                    </m:accPr>
+                                    <m:e>
+                                      <m:r>
+                                        <a:rPr lang="pt-BR" sz="2400" i="1">
+                                          <a:latin typeface="Cambria Math" panose="02040503050406030204" pitchFamily="18" charset="0"/>
+                                        </a:rPr>
+                                        <m:t>𝑦</m:t>
+                                      </m:r>
+                                    </m:e>
+                                  </m:acc>
+                                  <m:r>
+                                    <a:rPr lang="pt-BR" sz="2400" i="1">
+                                      <a:latin typeface="Cambria Math" panose="02040503050406030204" pitchFamily="18" charset="0"/>
+                                    </a:rPr>
+                                    <m:t>[</m:t>
+                                  </m:r>
+                                  <m:r>
+                                    <a:rPr lang="pt-BR" sz="2400" i="1">
+                                      <a:latin typeface="Cambria Math" panose="02040503050406030204" pitchFamily="18" charset="0"/>
+                                    </a:rPr>
+                                    <m:t>𝑛</m:t>
+                                  </m:r>
+                                  <m:r>
+                                    <a:rPr lang="pt-BR" sz="2400" i="1">
+                                      <a:latin typeface="Cambria Math" panose="02040503050406030204" pitchFamily="18" charset="0"/>
+                                    </a:rPr>
+                                    <m:t>]−</m:t>
+                                  </m:r>
+                                  <m:r>
+                                    <a:rPr lang="pt-BR" sz="2400" i="1">
+                                      <a:latin typeface="Cambria Math" panose="02040503050406030204" pitchFamily="18" charset="0"/>
+                                    </a:rPr>
+                                    <m:t>𝑦</m:t>
+                                  </m:r>
+                                  <m:r>
+                                    <a:rPr lang="pt-BR" sz="2400" i="1">
+                                      <a:latin typeface="Cambria Math" panose="02040503050406030204" pitchFamily="18" charset="0"/>
+                                    </a:rPr>
+                                    <m:t>[</m:t>
+                                  </m:r>
+                                  <m:r>
+                                    <a:rPr lang="pt-BR" sz="2400" i="1">
+                                      <a:latin typeface="Cambria Math" panose="02040503050406030204" pitchFamily="18" charset="0"/>
+                                    </a:rPr>
+                                    <m:t>𝑛</m:t>
+                                  </m:r>
+                                  <m:r>
+                                    <a:rPr lang="pt-BR" sz="2400" i="1">
+                                      <a:latin typeface="Cambria Math" panose="02040503050406030204" pitchFamily="18" charset="0"/>
+                                    </a:rPr>
+                                    <m:t>]</m:t>
+                                  </m:r>
+                                </m:e>
+                              </m:d>
+                            </m:e>
+                            <m:sup>
+                              <m:r>
+                                <a:rPr lang="pt-BR" sz="2400" i="1">
+                                  <a:latin typeface="Cambria Math" panose="02040503050406030204" pitchFamily="18" charset="0"/>
+                                </a:rPr>
+                                <m:t>2</m:t>
+                              </m:r>
+                            </m:sup>
+                          </m:sSup>
+                        </m:e>
+                      </m:nary>
+                    </m:oMath>
+                  </m:oMathPara>
+                </a14:m>
+                <a:endParaRPr lang="pt-BR" sz="2400" dirty="0"/>
+              </a:p>
+            </p:txBody>
+          </p:sp>
+        </mc:Choice>
+        <mc:Fallback xmlns="">
+          <p:sp>
+            <p:nvSpPr>
+              <p:cNvPr id="4" name="CaixaDeTexto 3">
+                <a:extLst>
+                  <a:ext uri="{FF2B5EF4-FFF2-40B4-BE49-F238E27FC236}">
+                    <a16:creationId xmlns:a16="http://schemas.microsoft.com/office/drawing/2014/main" id="{912EE77C-6A3E-1677-40E5-D9887B8F1F1E}"/>
+                  </a:ext>
+                </a:extLst>
+              </p:cNvPr>
+              <p:cNvSpPr txBox="1">
+                <a:spLocks noRot="1" noChangeAspect="1" noMove="1" noResize="1" noEditPoints="1" noAdjustHandles="1" noChangeArrowheads="1" noChangeShapeType="1" noTextEdit="1"/>
+              </p:cNvSpPr>
+              <p:nvPr/>
+            </p:nvSpPr>
+            <p:spPr>
+              <a:xfrm>
+                <a:off x="838200" y="2006187"/>
+                <a:ext cx="3941614" cy="1131143"/>
+              </a:xfrm>
+              <a:prstGeom prst="rect">
+                <a:avLst/>
+              </a:prstGeom>
+              <a:blipFill>
+                <a:blip r:embed="rId4"/>
+                <a:stretch>
+                  <a:fillRect/>
+                </a:stretch>
+              </a:blipFill>
+            </p:spPr>
+            <p:txBody>
+              <a:bodyPr/>
+              <a:lstStyle/>
+              <a:p>
+                <a:r>
+                  <a:rPr lang="pt-BR">
+                    <a:noFill/>
+                  </a:rPr>
+                  <a:t> </a:t>
+                </a:r>
+              </a:p>
+            </p:txBody>
+          </p:sp>
+        </mc:Fallback>
+      </mc:AlternateContent>
+      <p:pic>
+        <p:nvPicPr>
+          <p:cNvPr id="1026" name="Picture 2">
+            <a:extLst>
+              <a:ext uri="{FF2B5EF4-FFF2-40B4-BE49-F238E27FC236}">
+                <a16:creationId xmlns:a16="http://schemas.microsoft.com/office/drawing/2014/main" id="{B6E9DA0A-3478-5BEB-E669-9FF6C1670820}"/>
+              </a:ext>
+            </a:extLst>
+          </p:cNvPr>
+          <p:cNvPicPr>
+            <a:picLocks noChangeAspect="1" noChangeArrowheads="1"/>
+          </p:cNvPicPr>
+          <p:nvPr/>
+        </p:nvPicPr>
+        <p:blipFill>
+          <a:blip r:embed="rId5">
+            <a:extLst>
+              <a:ext uri="{28A0092B-C50C-407E-A947-70E740481C1C}">
+                <a14:useLocalDpi xmlns:a14="http://schemas.microsoft.com/office/drawing/2010/main" val="0"/>
+              </a:ext>
+            </a:extLst>
+          </a:blip>
+          <a:srcRect/>
+          <a:stretch>
+            <a:fillRect/>
+          </a:stretch>
+        </p:blipFill>
+        <p:spPr bwMode="auto">
+          <a:xfrm>
+            <a:off x="838200" y="3593384"/>
+            <a:ext cx="3753596" cy="2847780"/>
+          </a:xfrm>
+          <a:prstGeom prst="rect">
+            <a:avLst/>
+          </a:prstGeom>
+          <a:noFill/>
+          <a:extLst>
+            <a:ext uri="{909E8E84-426E-40DD-AFC4-6F175D3DCCD1}">
+              <a14:hiddenFill xmlns:a14="http://schemas.microsoft.com/office/drawing/2010/main">
+                <a:solidFill>
+                  <a:srgbClr val="FFFFFF"/>
+                </a:solidFill>
+              </a14:hiddenFill>
+            </a:ext>
+          </a:extLst>
+        </p:spPr>
+      </p:pic>
+      <p:sp>
+        <p:nvSpPr>
+          <p:cNvPr id="5" name="Elipse 4">
+            <a:extLst>
+              <a:ext uri="{FF2B5EF4-FFF2-40B4-BE49-F238E27FC236}">
+                <a16:creationId xmlns:a16="http://schemas.microsoft.com/office/drawing/2014/main" id="{46EBF986-4948-B37D-0075-CEADC3D35257}"/>
+              </a:ext>
+            </a:extLst>
+          </p:cNvPr>
+          <p:cNvSpPr/>
+          <p:nvPr/>
+        </p:nvSpPr>
+        <p:spPr>
+          <a:xfrm>
+            <a:off x="2412510" y="3593384"/>
+            <a:ext cx="410966" cy="321487"/>
+          </a:xfrm>
+          <a:prstGeom prst="ellipse">
+            <a:avLst/>
+          </a:prstGeom>
+          <a:noFill/>
+          <a:ln w="38100">
+            <a:solidFill>
+              <a:srgbClr val="FF0000"/>
+            </a:solidFill>
+          </a:ln>
+        </p:spPr>
+        <p:style>
+          <a:lnRef idx="2">
+            <a:schemeClr val="accent1">
+              <a:shade val="15000"/>
+            </a:schemeClr>
+          </a:lnRef>
+          <a:fillRef idx="1">
+            <a:schemeClr val="accent1"/>
+          </a:fillRef>
+          <a:effectRef idx="0">
+            <a:schemeClr val="accent1"/>
+          </a:effectRef>
+          <a:fontRef idx="minor">
+            <a:schemeClr val="lt1"/>
+          </a:fontRef>
+        </p:style>
+        <p:txBody>
+          <a:bodyPr rtlCol="0" anchor="ctr"/>
+          <a:lstStyle/>
+          <a:p>
+            <a:pPr algn="ctr"/>
+            <a:endParaRPr lang="pt-BR"/>
+          </a:p>
+        </p:txBody>
+      </p:sp>
+      <mc:AlternateContent xmlns:mc="http://schemas.openxmlformats.org/markup-compatibility/2006" xmlns:a14="http://schemas.microsoft.com/office/drawing/2010/main">
+        <mc:Choice Requires="a14">
+          <p:sp>
+            <p:nvSpPr>
+              <p:cNvPr id="6" name="CaixaDeTexto 5">
+                <a:extLst>
+                  <a:ext uri="{FF2B5EF4-FFF2-40B4-BE49-F238E27FC236}">
+                    <a16:creationId xmlns:a16="http://schemas.microsoft.com/office/drawing/2014/main" id="{51669CE3-4548-5F00-F826-E55C20306092}"/>
+                  </a:ext>
+                </a:extLst>
+              </p:cNvPr>
+              <p:cNvSpPr txBox="1"/>
+              <p:nvPr/>
+            </p:nvSpPr>
+            <p:spPr>
+              <a:xfrm>
+                <a:off x="1197419" y="6482208"/>
+                <a:ext cx="3672155" cy="369332"/>
+              </a:xfrm>
+              <a:prstGeom prst="rect">
+                <a:avLst/>
+              </a:prstGeom>
+              <a:noFill/>
+            </p:spPr>
+            <p:txBody>
+              <a:bodyPr wrap="square" rtlCol="0">
+                <a:spAutoFit/>
+              </a:bodyPr>
+              <a:lstStyle/>
+              <a:p>
+                <a:r>
+                  <a:rPr lang="pt-BR" dirty="0"/>
+                  <a:t>Função original: </a:t>
+                </a:r>
+                <a14:m>
+                  <m:oMath xmlns:m="http://schemas.openxmlformats.org/officeDocument/2006/math">
+                    <m:r>
+                      <m:rPr>
+                        <m:sty m:val="p"/>
+                      </m:rPr>
+                      <a:rPr lang="pt-BR" b="0" i="0" smtClean="0">
+                        <a:latin typeface="Cambria Math" panose="02040503050406030204" pitchFamily="18" charset="0"/>
+                      </a:rPr>
+                      <m:t>y</m:t>
+                    </m:r>
+                    <m:r>
+                      <a:rPr lang="pt-BR" b="0" i="0" smtClean="0">
+                        <a:latin typeface="Cambria Math" panose="02040503050406030204" pitchFamily="18" charset="0"/>
+                      </a:rPr>
+                      <m:t>=</m:t>
+                    </m:r>
+                    <m:r>
+                      <a:rPr lang="pt-BR" b="0" i="1" smtClean="0">
+                        <a:latin typeface="Cambria Math" panose="02040503050406030204" pitchFamily="18" charset="0"/>
+                      </a:rPr>
+                      <m:t>1+</m:t>
+                    </m:r>
+                    <m:r>
+                      <a:rPr lang="pt-BR" b="0" i="1" smtClean="0">
+                        <a:latin typeface="Cambria Math" panose="02040503050406030204" pitchFamily="18" charset="0"/>
+                      </a:rPr>
+                      <m:t>𝑥</m:t>
+                    </m:r>
+                    <m:r>
+                      <a:rPr lang="pt-BR" b="0" i="1" smtClean="0">
+                        <a:latin typeface="Cambria Math" panose="02040503050406030204" pitchFamily="18" charset="0"/>
+                      </a:rPr>
+                      <m:t>+2</m:t>
+                    </m:r>
+                    <m:sSup>
+                      <m:sSupPr>
+                        <m:ctrlPr>
+                          <a:rPr lang="pt-BR" b="0" i="1" smtClean="0">
+                            <a:latin typeface="Cambria Math" panose="02040503050406030204" pitchFamily="18" charset="0"/>
+                          </a:rPr>
+                        </m:ctrlPr>
+                      </m:sSupPr>
+                      <m:e>
+                        <m:r>
+                          <a:rPr lang="pt-BR" b="0" i="1" smtClean="0">
+                            <a:latin typeface="Cambria Math" panose="02040503050406030204" pitchFamily="18" charset="0"/>
+                          </a:rPr>
+                          <m:t>𝑥</m:t>
+                        </m:r>
+                      </m:e>
+                      <m:sup>
+                        <m:r>
+                          <a:rPr lang="pt-BR" b="0" i="1" smtClean="0">
+                            <a:latin typeface="Cambria Math" panose="02040503050406030204" pitchFamily="18" charset="0"/>
+                          </a:rPr>
+                          <m:t>2</m:t>
+                        </m:r>
+                      </m:sup>
+                    </m:sSup>
+                  </m:oMath>
+                </a14:m>
+                <a:endParaRPr lang="pt-BR" dirty="0"/>
+              </a:p>
+            </p:txBody>
+          </p:sp>
+        </mc:Choice>
+        <mc:Fallback xmlns="">
+          <p:sp>
+            <p:nvSpPr>
+              <p:cNvPr id="6" name="CaixaDeTexto 5">
+                <a:extLst>
+                  <a:ext uri="{FF2B5EF4-FFF2-40B4-BE49-F238E27FC236}">
+                    <a16:creationId xmlns:a16="http://schemas.microsoft.com/office/drawing/2014/main" id="{97EA9FFC-A8FC-FBFD-695A-DC546F50941B}"/>
+                  </a:ext>
+                </a:extLst>
+              </p:cNvPr>
+              <p:cNvSpPr txBox="1">
+                <a:spLocks noRot="1" noChangeAspect="1" noMove="1" noResize="1" noEditPoints="1" noAdjustHandles="1" noChangeArrowheads="1" noChangeShapeType="1" noTextEdit="1"/>
+              </p:cNvSpPr>
+              <p:nvPr/>
+            </p:nvSpPr>
+            <p:spPr>
+              <a:xfrm>
+                <a:off x="1197419" y="6482208"/>
+                <a:ext cx="3672155" cy="369332"/>
+              </a:xfrm>
+              <a:prstGeom prst="rect">
+                <a:avLst/>
+              </a:prstGeom>
+              <a:blipFill>
+                <a:blip r:embed="rId6"/>
+                <a:stretch>
+                  <a:fillRect l="-1327" t="-8197" b="-24590"/>
+                </a:stretch>
+              </a:blipFill>
+            </p:spPr>
+            <p:txBody>
+              <a:bodyPr/>
+              <a:lstStyle/>
+              <a:p>
+                <a:r>
+                  <a:rPr lang="pt-BR">
+                    <a:noFill/>
+                  </a:rPr>
+                  <a:t> </a:t>
+                </a:r>
+              </a:p>
+            </p:txBody>
+          </p:sp>
+        </mc:Fallback>
+      </mc:AlternateContent>
+    </p:spTree>
+    <p:extLst>
+      <p:ext uri="{BB962C8B-B14F-4D97-AF65-F5344CB8AC3E}">
+        <p14:creationId xmlns:p14="http://schemas.microsoft.com/office/powerpoint/2010/main" val="632539629"/>
+      </p:ext>
+    </p:extLst>
+  </p:cSld>
+  <p:clrMapOvr>
+    <a:masterClrMapping/>
+  </p:clrMapOvr>
+</p:sld>
+</file>
+
+<file path=ppt/slides/slide2.xml><?xml version="1.0" encoding="utf-8"?>
+<p:sld xmlns:a="http://schemas.openxmlformats.org/drawingml/2006/main" xmlns:r="http://schemas.openxmlformats.org/officeDocument/2006/relationships" xmlns:p="http://schemas.openxmlformats.org/presentationml/2006/main">
+  <p:cSld>
+    <p:spTree>
+      <p:nvGrpSpPr>
+        <p:cNvPr id="1" name=""/>
+        <p:cNvGrpSpPr/>
+        <p:nvPr/>
+      </p:nvGrpSpPr>
+      <p:grpSpPr>
+        <a:xfrm>
+          <a:off x="0" y="0"/>
+          <a:ext cx="0" cy="0"/>
+          <a:chOff x="0" y="0"/>
+          <a:chExt cx="0" cy="0"/>
+        </a:xfrm>
+      </p:grpSpPr>
+      <p:sp>
+        <p:nvSpPr>
+          <p:cNvPr id="2" name="Título 1">
+            <a:extLst>
+              <a:ext uri="{FF2B5EF4-FFF2-40B4-BE49-F238E27FC236}">
+                <a16:creationId xmlns:a16="http://schemas.microsoft.com/office/drawing/2014/main" id="{EECB3FED-5D1A-7084-5333-A3B2FA75F608}"/>
+              </a:ext>
+            </a:extLst>
+          </p:cNvPr>
+          <p:cNvSpPr>
+            <a:spLocks noGrp="1"/>
+          </p:cNvSpPr>
+          <p:nvPr>
+            <p:ph type="title"/>
+          </p:nvPr>
+        </p:nvSpPr>
+        <p:spPr/>
+        <p:txBody>
+          <a:bodyPr/>
+          <a:lstStyle/>
+          <a:p>
+            <a:r>
+              <a:rPr lang="pt-BR" dirty="0"/>
+              <a:t>O que vamos ver?</a:t>
+            </a:r>
+          </a:p>
+        </p:txBody>
+      </p:sp>
+      <p:sp>
+        <p:nvSpPr>
+          <p:cNvPr id="3" name="Espaço Reservado para Conteúdo 2">
+            <a:extLst>
+              <a:ext uri="{FF2B5EF4-FFF2-40B4-BE49-F238E27FC236}">
+                <a16:creationId xmlns:a16="http://schemas.microsoft.com/office/drawing/2014/main" id="{25FE7774-7186-A846-D8DE-518B2CBF4EBD}"/>
+              </a:ext>
+            </a:extLst>
+          </p:cNvPr>
+          <p:cNvSpPr>
+            <a:spLocks noGrp="1"/>
+          </p:cNvSpPr>
+          <p:nvPr>
+            <p:ph idx="1"/>
+          </p:nvPr>
+        </p:nvSpPr>
+        <p:spPr>
+          <a:xfrm>
+            <a:off x="838199" y="1825624"/>
+            <a:ext cx="11110646" cy="5032376"/>
+          </a:xfrm>
+        </p:spPr>
+        <p:txBody>
+          <a:bodyPr>
+            <a:normAutofit/>
+          </a:bodyPr>
+          <a:lstStyle/>
+          <a:p>
+            <a:r>
+              <a:rPr lang="pt-BR" dirty="0"/>
+              <a:t>Neste tópico vamos ver como </a:t>
+            </a:r>
+            <a:r>
+              <a:rPr lang="pt-BR" b="1" i="1" dirty="0">
+                <a:solidFill>
+                  <a:srgbClr val="7030A0"/>
+                </a:solidFill>
+              </a:rPr>
+              <a:t>medir o desempenho </a:t>
+            </a:r>
+            <a:r>
+              <a:rPr lang="pt-BR" dirty="0"/>
+              <a:t>de um </a:t>
+            </a:r>
+            <a:r>
+              <a:rPr lang="pt-BR" b="1" i="1" dirty="0">
+                <a:solidFill>
+                  <a:srgbClr val="00B050"/>
+                </a:solidFill>
+              </a:rPr>
+              <a:t>modelo de aprendizado de máquina</a:t>
+            </a:r>
+            <a:r>
+              <a:rPr lang="pt-BR" dirty="0"/>
+              <a:t> ao longo do seu processo de aprendizagem.</a:t>
+            </a:r>
+          </a:p>
+          <a:p>
+            <a:r>
+              <a:rPr lang="pt-BR" dirty="0"/>
+              <a:t>Para isso, como já discutido brevemente antes, usaremos uma função chamada de </a:t>
+            </a:r>
+            <a:r>
+              <a:rPr lang="pt-BR" b="1" i="1" dirty="0">
+                <a:solidFill>
+                  <a:srgbClr val="00B050"/>
+                </a:solidFill>
+              </a:rPr>
+              <a:t>função de erro </a:t>
+            </a:r>
+            <a:r>
+              <a:rPr lang="pt-BR" dirty="0"/>
+              <a:t>ou de </a:t>
+            </a:r>
+            <a:r>
+              <a:rPr lang="pt-BR" b="1" i="1" dirty="0">
+                <a:solidFill>
+                  <a:srgbClr val="00B050"/>
+                </a:solidFill>
+              </a:rPr>
+              <a:t>perda</a:t>
+            </a:r>
+            <a:r>
+              <a:rPr lang="pt-BR" dirty="0"/>
+              <a:t>.</a:t>
+            </a:r>
+          </a:p>
+          <a:p>
+            <a:r>
+              <a:rPr lang="pt-BR" dirty="0"/>
+              <a:t>Idealmente, o </a:t>
+            </a:r>
+            <a:r>
+              <a:rPr lang="pt-BR" b="1" i="1" dirty="0">
+                <a:solidFill>
+                  <a:srgbClr val="00B050"/>
+                </a:solidFill>
+              </a:rPr>
+              <a:t>processo de treinamento </a:t>
+            </a:r>
+            <a:r>
+              <a:rPr lang="pt-BR" dirty="0"/>
+              <a:t>tem como </a:t>
+            </a:r>
+            <a:r>
+              <a:rPr lang="pt-BR" b="1" i="1" dirty="0">
+                <a:solidFill>
+                  <a:srgbClr val="00B050"/>
+                </a:solidFill>
+              </a:rPr>
+              <a:t>objetivo minimizar o erro</a:t>
+            </a:r>
+            <a:r>
+              <a:rPr lang="pt-BR" dirty="0"/>
+              <a:t> e, consequentemente, </a:t>
+            </a:r>
+            <a:r>
+              <a:rPr lang="pt-BR" b="1" i="1" dirty="0">
+                <a:solidFill>
+                  <a:srgbClr val="00B050"/>
+                </a:solidFill>
+              </a:rPr>
+              <a:t>melhorar o desempenho do modelo</a:t>
+            </a:r>
+            <a:r>
+              <a:rPr lang="pt-BR" dirty="0"/>
+              <a:t>.</a:t>
+            </a:r>
+          </a:p>
+          <a:p>
+            <a:r>
+              <a:rPr lang="pt-BR" dirty="0"/>
+              <a:t>Além disso, veremos em breve </a:t>
+            </a:r>
+            <a:r>
+              <a:rPr lang="pt-BR" b="1" i="1" dirty="0">
+                <a:solidFill>
+                  <a:srgbClr val="00B050"/>
+                </a:solidFill>
+              </a:rPr>
+              <a:t>diferentes estratégias para minimizar o erro</a:t>
+            </a:r>
+            <a:r>
+              <a:rPr lang="pt-BR" dirty="0"/>
+              <a:t>.</a:t>
+            </a:r>
+          </a:p>
+          <a:p>
+            <a:r>
+              <a:rPr lang="pt-BR" dirty="0"/>
+              <a:t>Porém, primeiro, vamos aprender como calcular o erro.</a:t>
+            </a:r>
+          </a:p>
+        </p:txBody>
+      </p:sp>
+    </p:spTree>
+    <p:extLst>
+      <p:ext uri="{BB962C8B-B14F-4D97-AF65-F5344CB8AC3E}">
+        <p14:creationId xmlns:p14="http://schemas.microsoft.com/office/powerpoint/2010/main" val="529739951"/>
+      </p:ext>
+    </p:extLst>
+  </p:cSld>
+  <p:clrMapOvr>
+    <a:masterClrMapping/>
+  </p:clrMapOvr>
+</p:sld>
+</file>
+
+<file path=ppt/slides/slide20.xml><?xml version="1.0" encoding="utf-8"?>
+<p:sld xmlns:a="http://schemas.openxmlformats.org/drawingml/2006/main" xmlns:r="http://schemas.openxmlformats.org/officeDocument/2006/relationships" xmlns:p="http://schemas.openxmlformats.org/presentationml/2006/main">
+  <p:cSld>
+    <p:spTree>
+      <p:nvGrpSpPr>
         <p:cNvPr id="1" name=""/>
         <p:cNvGrpSpPr/>
         <p:nvPr/>
@@ -15216,220 +16230,7 @@
 </p:sld>
 </file>
 
-<file path=ppt/slides/slide2.xml><?xml version="1.0" encoding="utf-8"?>
-<p:sld xmlns:a="http://schemas.openxmlformats.org/drawingml/2006/main" xmlns:r="http://schemas.openxmlformats.org/officeDocument/2006/relationships" xmlns:p="http://schemas.openxmlformats.org/presentationml/2006/main">
-  <p:cSld>
-    <p:spTree>
-      <p:nvGrpSpPr>
-        <p:cNvPr id="1" name=""/>
-        <p:cNvGrpSpPr/>
-        <p:nvPr/>
-      </p:nvGrpSpPr>
-      <p:grpSpPr>
-        <a:xfrm>
-          <a:off x="0" y="0"/>
-          <a:ext cx="0" cy="0"/>
-          <a:chOff x="0" y="0"/>
-          <a:chExt cx="0" cy="0"/>
-        </a:xfrm>
-      </p:grpSpPr>
-      <p:sp>
-        <p:nvSpPr>
-          <p:cNvPr id="2" name="Título 1">
-            <a:extLst>
-              <a:ext uri="{FF2B5EF4-FFF2-40B4-BE49-F238E27FC236}">
-                <a16:creationId xmlns:a16="http://schemas.microsoft.com/office/drawing/2014/main" id="{EECB3FED-5D1A-7084-5333-A3B2FA75F608}"/>
-              </a:ext>
-            </a:extLst>
-          </p:cNvPr>
-          <p:cNvSpPr>
-            <a:spLocks noGrp="1"/>
-          </p:cNvSpPr>
-          <p:nvPr>
-            <p:ph type="title"/>
-          </p:nvPr>
-        </p:nvSpPr>
-        <p:spPr/>
-        <p:txBody>
-          <a:bodyPr/>
-          <a:lstStyle/>
-          <a:p>
-            <a:r>
-              <a:rPr lang="pt-BR" dirty="0"/>
-              <a:t>O que vamos ver?</a:t>
-            </a:r>
-          </a:p>
-        </p:txBody>
-      </p:sp>
-      <p:sp>
-        <p:nvSpPr>
-          <p:cNvPr id="3" name="Espaço Reservado para Conteúdo 2">
-            <a:extLst>
-              <a:ext uri="{FF2B5EF4-FFF2-40B4-BE49-F238E27FC236}">
-                <a16:creationId xmlns:a16="http://schemas.microsoft.com/office/drawing/2014/main" id="{25FE7774-7186-A846-D8DE-518B2CBF4EBD}"/>
-              </a:ext>
-            </a:extLst>
-          </p:cNvPr>
-          <p:cNvSpPr>
-            <a:spLocks noGrp="1"/>
-          </p:cNvSpPr>
-          <p:nvPr>
-            <p:ph idx="1"/>
-          </p:nvPr>
-        </p:nvSpPr>
-        <p:spPr>
-          <a:xfrm>
-            <a:off x="838199" y="1825624"/>
-            <a:ext cx="11110646" cy="5032376"/>
-          </a:xfrm>
-        </p:spPr>
-        <p:txBody>
-          <a:bodyPr>
-            <a:normAutofit/>
-          </a:bodyPr>
-          <a:lstStyle/>
-          <a:p>
-            <a:r>
-              <a:rPr lang="pt-BR" dirty="0"/>
-              <a:t>Neste tópico vamos ver como </a:t>
-            </a:r>
-            <a:r>
-              <a:rPr lang="pt-BR" b="1" i="1" dirty="0">
-                <a:solidFill>
-                  <a:srgbClr val="7030A0"/>
-                </a:solidFill>
-              </a:rPr>
-              <a:t>medir o desempenho </a:t>
-            </a:r>
-            <a:r>
-              <a:rPr lang="pt-BR" dirty="0"/>
-              <a:t>de um </a:t>
-            </a:r>
-            <a:r>
-              <a:rPr lang="pt-BR" b="1" i="1" dirty="0">
-                <a:solidFill>
-                  <a:srgbClr val="00B050"/>
-                </a:solidFill>
-              </a:rPr>
-              <a:t>modelo de aprendizado de máquina</a:t>
-            </a:r>
-            <a:r>
-              <a:rPr lang="pt-BR" dirty="0"/>
-              <a:t> ao longo do seu processo de aprendizagem.</a:t>
-            </a:r>
-          </a:p>
-          <a:p>
-            <a:r>
-              <a:rPr lang="pt-BR" dirty="0"/>
-              <a:t>Para isso, como já discutido brevemente antes, usaremos uma função chamada de </a:t>
-            </a:r>
-            <a:r>
-              <a:rPr lang="pt-BR" b="1" i="1" dirty="0">
-                <a:solidFill>
-                  <a:srgbClr val="00B050"/>
-                </a:solidFill>
-              </a:rPr>
-              <a:t>função de erro </a:t>
-            </a:r>
-            <a:r>
-              <a:rPr lang="pt-BR" dirty="0"/>
-              <a:t>ou de </a:t>
-            </a:r>
-            <a:r>
-              <a:rPr lang="pt-BR" b="1" i="1" dirty="0">
-                <a:solidFill>
-                  <a:srgbClr val="00B050"/>
-                </a:solidFill>
-              </a:rPr>
-              <a:t>perda</a:t>
-            </a:r>
-            <a:r>
-              <a:rPr lang="pt-BR" dirty="0"/>
-              <a:t>.</a:t>
-            </a:r>
-          </a:p>
-          <a:p>
-            <a:r>
-              <a:rPr lang="pt-BR" dirty="0"/>
-              <a:t>Idealmente, o </a:t>
-            </a:r>
-            <a:r>
-              <a:rPr lang="pt-BR" b="1" i="1" dirty="0">
-                <a:solidFill>
-                  <a:srgbClr val="00B050"/>
-                </a:solidFill>
-              </a:rPr>
-              <a:t>processo de treinamento </a:t>
-            </a:r>
-            <a:r>
-              <a:rPr lang="pt-BR" dirty="0"/>
-              <a:t>tem como </a:t>
-            </a:r>
-            <a:r>
-              <a:rPr lang="pt-BR" b="1" i="1" dirty="0">
-                <a:solidFill>
-                  <a:srgbClr val="00B050"/>
-                </a:solidFill>
-              </a:rPr>
-              <a:t>objetivo minimizar o erro</a:t>
-            </a:r>
-            <a:r>
-              <a:rPr lang="pt-BR" dirty="0"/>
-              <a:t> e, consequentemente, </a:t>
-            </a:r>
-            <a:r>
-              <a:rPr lang="pt-BR" b="1" i="1" dirty="0">
-                <a:solidFill>
-                  <a:srgbClr val="00B050"/>
-                </a:solidFill>
-              </a:rPr>
-              <a:t>melhorar o desempenho do modelo</a:t>
-            </a:r>
-            <a:r>
-              <a:rPr lang="pt-BR" dirty="0"/>
-              <a:t>.</a:t>
-            </a:r>
-          </a:p>
-          <a:p>
-            <a:r>
-              <a:rPr lang="pt-BR" dirty="0"/>
-              <a:t>Além disso, veremos em breve </a:t>
-            </a:r>
-            <a:r>
-              <a:rPr lang="pt-BR" b="1" i="1" dirty="0">
-                <a:solidFill>
-                  <a:srgbClr val="00B050"/>
-                </a:solidFill>
-              </a:rPr>
-              <a:t>diferentes estratégias para minimizar o erro</a:t>
-            </a:r>
-            <a:r>
-              <a:rPr lang="pt-BR" dirty="0"/>
-              <a:t>.</a:t>
-            </a:r>
-          </a:p>
-          <a:p>
-            <a:r>
-              <a:rPr lang="pt-BR" dirty="0"/>
-              <a:t>Porém, primeiro, vamos aprender como calcular o erro.</a:t>
-            </a:r>
-          </a:p>
-        </p:txBody>
-      </p:sp>
-    </p:spTree>
-    <p:extLst>
-      <p:ext uri="{BB962C8B-B14F-4D97-AF65-F5344CB8AC3E}">
-        <p14:creationId xmlns:p14="http://schemas.microsoft.com/office/powerpoint/2010/main" val="529739951"/>
-      </p:ext>
-    </p:extLst>
-  </p:cSld>
-  <p:clrMapOvr>
-    <a:masterClrMapping/>
-  </p:clrMapOvr>
-</p:sld>
-</file>
-
-<file path=ppt/slides/slide20.xml><?xml version="1.0" encoding="utf-8"?>
+<file path=ppt/slides/slide21.xml><?xml version="1.0" encoding="utf-8"?>
 <p:sld xmlns:a="http://schemas.openxmlformats.org/drawingml/2006/main" xmlns:r="http://schemas.openxmlformats.org/officeDocument/2006/relationships" xmlns:p="http://schemas.openxmlformats.org/presentationml/2006/main">
   <p:cSld>
     <p:spTree>
@@ -15558,7 +16359,7 @@
             <a:r>
               <a:rPr lang="pt-BR" b="1" i="1" dirty="0">
                 <a:solidFill>
-                  <a:srgbClr val="00B050"/>
+                  <a:srgbClr val="7030A0"/>
                 </a:solidFill>
                 <a:effectLst/>
               </a:rPr>
@@ -15581,7 +16382,7 @@
             <a:r>
               <a:rPr lang="pt-BR" b="1" i="1" dirty="0">
                 <a:solidFill>
-                  <a:srgbClr val="00B050"/>
+                  <a:schemeClr val="accent2"/>
                 </a:solidFill>
                 <a:effectLst/>
               </a:rPr>
@@ -15855,7 +16656,7 @@
 </p:sld>
 </file>
 
-<file path=ppt/slides/slide21.xml><?xml version="1.0" encoding="utf-8"?>
+<file path=ppt/slides/slide22.xml><?xml version="1.0" encoding="utf-8"?>
 <p:sld xmlns:a="http://schemas.openxmlformats.org/drawingml/2006/main" xmlns:r="http://schemas.openxmlformats.org/officeDocument/2006/relationships" xmlns:p="http://schemas.openxmlformats.org/presentationml/2006/main">
   <p:cSld>
     <p:spTree>
@@ -16272,7 +17073,7 @@
 </p:sld>
 </file>
 
-<file path=ppt/slides/slide22.xml><?xml version="1.0" encoding="utf-8"?>
+<file path=ppt/slides/slide23.xml><?xml version="1.0" encoding="utf-8"?>
 <p:sld xmlns:a="http://schemas.openxmlformats.org/drawingml/2006/main" xmlns:r="http://schemas.openxmlformats.org/officeDocument/2006/relationships" xmlns:p="http://schemas.openxmlformats.org/presentationml/2006/main">
   <p:cSld>
     <p:spTree>
@@ -16429,7 +17230,7 @@
 </p:sld>
 </file>
 
-<file path=ppt/slides/slide23.xml><?xml version="1.0" encoding="utf-8"?>
+<file path=ppt/slides/slide24.xml><?xml version="1.0" encoding="utf-8"?>
 <p:sld xmlns:a="http://schemas.openxmlformats.org/drawingml/2006/main" xmlns:r="http://schemas.openxmlformats.org/officeDocument/2006/relationships" xmlns:p="http://schemas.openxmlformats.org/presentationml/2006/main">
   <p:cSld>
     <p:spTree>
@@ -16507,7 +17308,11 @@
               <a:t>O problema que estamos vendo neste tópico é conhecido como </a:t>
             </a:r>
             <a:r>
-              <a:rPr lang="pt-BR" b="1" i="1" dirty="0"/>
+              <a:rPr lang="pt-BR" b="1" i="1" dirty="0">
+                <a:solidFill>
+                  <a:srgbClr val="0070C0"/>
+                </a:solidFill>
+              </a:rPr>
               <a:t>regressão</a:t>
             </a:r>
             <a:r>
@@ -16515,7 +17320,11 @@
               <a:t> ou </a:t>
             </a:r>
             <a:r>
-              <a:rPr lang="pt-BR" b="1" i="1" dirty="0"/>
+              <a:rPr lang="pt-BR" b="1" i="1" dirty="0">
+                <a:solidFill>
+                  <a:schemeClr val="accent2"/>
+                </a:solidFill>
+              </a:rPr>
               <a:t>aproximação de funções</a:t>
             </a:r>
             <a:r>
@@ -17878,7 +18687,7 @@
 </p:sld>
 </file>
 
-<file path=ppt/slides/slide24.xml><?xml version="1.0" encoding="utf-8"?>
+<file path=ppt/slides/slide25.xml><?xml version="1.0" encoding="utf-8"?>
 <p:sld xmlns:a="http://schemas.openxmlformats.org/drawingml/2006/main" xmlns:r="http://schemas.openxmlformats.org/officeDocument/2006/relationships" xmlns:p="http://schemas.openxmlformats.org/presentationml/2006/main">
   <p:cSld>
     <p:spTree>
@@ -17957,7 +18766,41 @@
             </a:r>
             <a:r>
               <a:rPr lang="pt-BR" sz="2800" dirty="0"/>
-              <a:t>.: No exemplo que vimos nesse tópico, conseguimos visualizar os dados e, facilmente, identificar a equação (ou formato) da função hipótese, mas em outros casos, além dos pesos, temos que descobrir o formato da função.</a:t>
+              <a:t>.: No exemplo que vimos nesse tópico, conseguimos </a:t>
+            </a:r>
+            <a:r>
+              <a:rPr lang="pt-BR" sz="2800" b="1" i="1" dirty="0">
+                <a:solidFill>
+                  <a:srgbClr val="00B050"/>
+                </a:solidFill>
+              </a:rPr>
+              <a:t>visualizar os dados </a:t>
+            </a:r>
+            <a:r>
+              <a:rPr lang="pt-BR" sz="2800" dirty="0"/>
+              <a:t>e </a:t>
+            </a:r>
+            <a:r>
+              <a:rPr lang="pt-BR" sz="2800" b="1" i="1" dirty="0">
+                <a:solidFill>
+                  <a:srgbClr val="7030A0"/>
+                </a:solidFill>
+              </a:rPr>
+              <a:t>identificar a equação</a:t>
+            </a:r>
+            <a:r>
+              <a:rPr lang="pt-BR" sz="2800" dirty="0"/>
+              <a:t> (ou formato) da função hipótese facilmente. </a:t>
+            </a:r>
+          </a:p>
+          <a:p>
+            <a:r>
+              <a:rPr lang="pt-BR" dirty="0"/>
+              <a:t>Porém,</a:t>
+            </a:r>
+            <a:r>
+              <a:rPr lang="pt-BR" sz="2800" dirty="0"/>
+              <a:t> em outros casos, além dos pesos, temos que descobrir o formato da função.</a:t>
             </a:r>
           </a:p>
           <a:p>
@@ -19271,7 +20114,7 @@
 </p:sld>
 </file>
 
-<file path=ppt/slides/slide25.xml><?xml version="1.0" encoding="utf-8"?>
+<file path=ppt/slides/slide26.xml><?xml version="1.0" encoding="utf-8"?>
 <p:sld xmlns:a="http://schemas.openxmlformats.org/drawingml/2006/main" xmlns:r="http://schemas.openxmlformats.org/officeDocument/2006/relationships" xmlns:p="http://schemas.openxmlformats.org/presentationml/2006/main">
   <p:cSld>
     <p:spTree>
@@ -20153,7 +20996,7 @@
 </p:sld>
 </file>
 
-<file path=ppt/slides/slide26.xml><?xml version="1.0" encoding="utf-8"?>
+<file path=ppt/slides/slide27.xml><?xml version="1.0" encoding="utf-8"?>
 <p:sld xmlns:a="http://schemas.openxmlformats.org/drawingml/2006/main" xmlns:r="http://schemas.openxmlformats.org/officeDocument/2006/relationships" xmlns:p="http://schemas.openxmlformats.org/presentationml/2006/main">
   <p:cSld>
     <p:spTree>
@@ -20236,7 +21079,7 @@
                   <a:srgbClr val="00B050"/>
                 </a:solidFill>
               </a:rPr>
-              <a:t>plotarmos o erro em função da variação dos pesos</a:t>
+              <a:t>plotarmos o erro em função dos pesos</a:t>
             </a:r>
             <a:r>
               <a:rPr lang="pt-BR" dirty="0"/>
@@ -20294,56 +21137,20 @@
             </a:r>
             <a:r>
               <a:rPr lang="pt-BR" dirty="0"/>
-              <a:t>, ou seja, os pesos que minimizam a função de erro.</a:t>
-            </a:r>
-          </a:p>
-          <a:p>
-            <a:r>
-              <a:rPr lang="pt-BR" dirty="0"/>
-              <a:t>O algoritmo de otimização, que veremos em breve, </a:t>
+              <a:t>, ou seja, os </a:t>
             </a:r>
             <a:r>
               <a:rPr lang="pt-BR" b="1" i="1" dirty="0">
                 <a:solidFill>
-                  <a:srgbClr val="00B050"/>
+                  <a:schemeClr val="accent2"/>
                 </a:solidFill>
               </a:rPr>
-              <a:t>caminha</a:t>
-            </a:r>
-            <a:r>
-              <a:rPr lang="pt-BR" dirty="0"/>
-              <a:t> através da superfície sempre </a:t>
-            </a:r>
-            <a:r>
-              <a:rPr lang="pt-BR" b="1" i="1" dirty="0">
-                <a:solidFill>
-                  <a:srgbClr val="00B050"/>
-                </a:solidFill>
-              </a:rPr>
-              <a:t>indo</a:t>
-            </a:r>
-            <a:r>
-              <a:rPr lang="pt-BR" dirty="0"/>
-              <a:t> </a:t>
-            </a:r>
-            <a:r>
-              <a:rPr lang="pt-BR" b="1" i="1" dirty="0">
-                <a:solidFill>
-                  <a:srgbClr val="00B050"/>
-                </a:solidFill>
-              </a:rPr>
-              <a:t>em direção ao seu ponto mais baixo</a:t>
+              <a:t>pesos que minimizam a função de erro</a:t>
             </a:r>
             <a:r>
               <a:rPr lang="pt-BR" dirty="0"/>
               <a:t>.</a:t>
             </a:r>
-          </a:p>
-          <a:p>
-            <a:pPr marL="0" indent="0">
-              <a:buNone/>
-            </a:pPr>
-            <a:endParaRPr lang="pt-BR" dirty="0"/>
           </a:p>
         </p:txBody>
       </p:sp>
@@ -21502,7 +22309,1290 @@
 </p:sld>
 </file>
 
-<file path=ppt/slides/slide27.xml><?xml version="1.0" encoding="utf-8"?>
+<file path=ppt/slides/slide28.xml><?xml version="1.0" encoding="utf-8"?>
+<p:sld xmlns:a="http://schemas.openxmlformats.org/drawingml/2006/main" xmlns:r="http://schemas.openxmlformats.org/officeDocument/2006/relationships" xmlns:p="http://schemas.openxmlformats.org/presentationml/2006/main">
+  <p:cSld>
+    <p:spTree>
+      <p:nvGrpSpPr>
+        <p:cNvPr id="1" name="">
+          <a:extLst>
+            <a:ext uri="{FF2B5EF4-FFF2-40B4-BE49-F238E27FC236}">
+              <a16:creationId xmlns:a16="http://schemas.microsoft.com/office/drawing/2014/main" id="{49407951-294D-1987-1F07-7BA98F642C9A}"/>
+            </a:ext>
+          </a:extLst>
+        </p:cNvPr>
+        <p:cNvGrpSpPr/>
+        <p:nvPr/>
+      </p:nvGrpSpPr>
+      <p:grpSpPr>
+        <a:xfrm>
+          <a:off x="0" y="0"/>
+          <a:ext cx="0" cy="0"/>
+          <a:chOff x="0" y="0"/>
+          <a:chExt cx="0" cy="0"/>
+        </a:xfrm>
+      </p:grpSpPr>
+      <p:sp>
+        <p:nvSpPr>
+          <p:cNvPr id="2" name="Título 1">
+            <a:extLst>
+              <a:ext uri="{FF2B5EF4-FFF2-40B4-BE49-F238E27FC236}">
+                <a16:creationId xmlns:a16="http://schemas.microsoft.com/office/drawing/2014/main" id="{174A5B92-BB19-C84F-3FA2-248F9DA1A5FC}"/>
+              </a:ext>
+            </a:extLst>
+          </p:cNvPr>
+          <p:cNvSpPr>
+            <a:spLocks noGrp="1"/>
+          </p:cNvSpPr>
+          <p:nvPr>
+            <p:ph type="title"/>
+          </p:nvPr>
+        </p:nvSpPr>
+        <p:spPr/>
+        <p:txBody>
+          <a:bodyPr/>
+          <a:lstStyle/>
+          <a:p>
+            <a:r>
+              <a:rPr lang="pt-BR" dirty="0"/>
+              <a:t>Ponto de mínimo ou solução ótima</a:t>
+            </a:r>
+          </a:p>
+        </p:txBody>
+      </p:sp>
+      <p:sp>
+        <p:nvSpPr>
+          <p:cNvPr id="3" name="Espaço Reservado para Conteúdo 2">
+            <a:extLst>
+              <a:ext uri="{FF2B5EF4-FFF2-40B4-BE49-F238E27FC236}">
+                <a16:creationId xmlns:a16="http://schemas.microsoft.com/office/drawing/2014/main" id="{2C33344C-9F95-DAB9-1333-D4DCC4D067C7}"/>
+              </a:ext>
+            </a:extLst>
+          </p:cNvPr>
+          <p:cNvSpPr>
+            <a:spLocks noGrp="1"/>
+          </p:cNvSpPr>
+          <p:nvPr>
+            <p:ph idx="1"/>
+          </p:nvPr>
+        </p:nvSpPr>
+        <p:spPr>
+          <a:xfrm>
+            <a:off x="5842417" y="1825626"/>
+            <a:ext cx="6178345" cy="5032376"/>
+          </a:xfrm>
+        </p:spPr>
+        <p:txBody>
+          <a:bodyPr>
+            <a:normAutofit/>
+          </a:bodyPr>
+          <a:lstStyle/>
+          <a:p>
+            <a:r>
+              <a:rPr lang="pt-BR" dirty="0"/>
+              <a:t>O algoritmo de otimização, que veremos em breve, </a:t>
+            </a:r>
+            <a:r>
+              <a:rPr lang="pt-BR" b="1" i="1" dirty="0">
+                <a:solidFill>
+                  <a:srgbClr val="00B050"/>
+                </a:solidFill>
+              </a:rPr>
+              <a:t>caminha</a:t>
+            </a:r>
+            <a:r>
+              <a:rPr lang="pt-BR" dirty="0"/>
+              <a:t> através da superfície sempre </a:t>
+            </a:r>
+            <a:r>
+              <a:rPr lang="pt-BR" b="1" i="1" dirty="0">
+                <a:solidFill>
+                  <a:srgbClr val="00B050"/>
+                </a:solidFill>
+              </a:rPr>
+              <a:t>indo</a:t>
+            </a:r>
+            <a:r>
+              <a:rPr lang="pt-BR" dirty="0"/>
+              <a:t> </a:t>
+            </a:r>
+            <a:r>
+              <a:rPr lang="pt-BR" b="1" i="1" dirty="0">
+                <a:solidFill>
+                  <a:srgbClr val="00B050"/>
+                </a:solidFill>
+              </a:rPr>
+              <a:t>em direção ao seu ponto mais baixo</a:t>
+            </a:r>
+            <a:r>
+              <a:rPr lang="pt-BR" dirty="0"/>
+              <a:t>.</a:t>
+            </a:r>
+          </a:p>
+          <a:p>
+            <a:pPr marL="0" indent="0">
+              <a:buNone/>
+            </a:pPr>
+            <a:endParaRPr lang="pt-BR" dirty="0"/>
+          </a:p>
+        </p:txBody>
+      </p:sp>
+      <mc:AlternateContent xmlns:mc="http://schemas.openxmlformats.org/markup-compatibility/2006" xmlns:a14="http://schemas.microsoft.com/office/drawing/2010/main">
+        <mc:Choice Requires="a14">
+          <p:sp>
+            <p:nvSpPr>
+              <p:cNvPr id="5" name="CaixaDeTexto 4">
+                <a:extLst>
+                  <a:ext uri="{FF2B5EF4-FFF2-40B4-BE49-F238E27FC236}">
+                    <a16:creationId xmlns:a16="http://schemas.microsoft.com/office/drawing/2014/main" id="{CAC8B18A-EE59-CC83-84A9-F597F9A85042}"/>
+                  </a:ext>
+                </a:extLst>
+              </p:cNvPr>
+              <p:cNvSpPr txBox="1"/>
+              <p:nvPr/>
+            </p:nvSpPr>
+            <p:spPr>
+              <a:xfrm>
+                <a:off x="1005900" y="4543755"/>
+                <a:ext cx="4593515" cy="2169633"/>
+              </a:xfrm>
+              <a:prstGeom prst="rect">
+                <a:avLst/>
+              </a:prstGeom>
+              <a:noFill/>
+            </p:spPr>
+            <p:txBody>
+              <a:bodyPr wrap="square" rtlCol="0">
+                <a:spAutoFit/>
+              </a:bodyPr>
+              <a:lstStyle/>
+              <a:p>
+                <a:pPr/>
+                <a14:m>
+                  <m:oMathPara xmlns:m="http://schemas.openxmlformats.org/officeDocument/2006/math">
+                    <m:oMathParaPr>
+                      <m:jc m:val="left"/>
+                    </m:oMathParaPr>
+                    <m:oMath xmlns:m="http://schemas.openxmlformats.org/officeDocument/2006/math">
+                      <m:r>
+                        <m:rPr>
+                          <m:sty m:val="p"/>
+                        </m:rPr>
+                        <a:rPr lang="pt-BR" sz="2400" b="0" i="0" smtClean="0">
+                          <a:latin typeface="Cambria Math" panose="02040503050406030204" pitchFamily="18" charset="0"/>
+                        </a:rPr>
+                        <m:t>MSE</m:t>
+                      </m:r>
+                      <m:r>
+                        <a:rPr lang="pt-BR" sz="2400" b="0" i="1" smtClean="0">
+                          <a:latin typeface="Cambria Math" panose="02040503050406030204" pitchFamily="18" charset="0"/>
+                        </a:rPr>
+                        <m:t>=</m:t>
+                      </m:r>
+                      <m:f>
+                        <m:fPr>
+                          <m:ctrlPr>
+                            <a:rPr lang="pt-BR" sz="2400" b="0" i="1" smtClean="0">
+                              <a:latin typeface="Cambria Math" panose="02040503050406030204" pitchFamily="18" charset="0"/>
+                            </a:rPr>
+                          </m:ctrlPr>
+                        </m:fPr>
+                        <m:num>
+                          <m:r>
+                            <a:rPr lang="pt-BR" sz="2400" b="0" i="1" smtClean="0">
+                              <a:latin typeface="Cambria Math" panose="02040503050406030204" pitchFamily="18" charset="0"/>
+                            </a:rPr>
+                            <m:t>1</m:t>
+                          </m:r>
+                        </m:num>
+                        <m:den>
+                          <m:r>
+                            <a:rPr lang="pt-BR" sz="2400" b="0" i="1" smtClean="0">
+                              <a:latin typeface="Cambria Math" panose="02040503050406030204" pitchFamily="18" charset="0"/>
+                            </a:rPr>
+                            <m:t>𝑁</m:t>
+                          </m:r>
+                        </m:den>
+                      </m:f>
+                      <m:nary>
+                        <m:naryPr>
+                          <m:chr m:val="∑"/>
+                          <m:ctrlPr>
+                            <a:rPr lang="pt-BR" sz="2400" b="0" i="1" smtClean="0">
+                              <a:latin typeface="Cambria Math" panose="02040503050406030204" pitchFamily="18" charset="0"/>
+                            </a:rPr>
+                          </m:ctrlPr>
+                        </m:naryPr>
+                        <m:sub>
+                          <m:r>
+                            <m:rPr>
+                              <m:brk m:alnAt="23"/>
+                            </m:rPr>
+                            <a:rPr lang="pt-BR" sz="2400" b="0" i="1" smtClean="0">
+                              <a:latin typeface="Cambria Math" panose="02040503050406030204" pitchFamily="18" charset="0"/>
+                            </a:rPr>
+                            <m:t>𝑛</m:t>
+                          </m:r>
+                          <m:r>
+                            <a:rPr lang="pt-BR" sz="2400" b="0" i="1" smtClean="0">
+                              <a:latin typeface="Cambria Math" panose="02040503050406030204" pitchFamily="18" charset="0"/>
+                            </a:rPr>
+                            <m:t>=0</m:t>
+                          </m:r>
+                        </m:sub>
+                        <m:sup>
+                          <m:r>
+                            <a:rPr lang="pt-BR" sz="2400" b="0" i="1" smtClean="0">
+                              <a:latin typeface="Cambria Math" panose="02040503050406030204" pitchFamily="18" charset="0"/>
+                            </a:rPr>
+                            <m:t>𝑁</m:t>
+                          </m:r>
+                          <m:r>
+                            <a:rPr lang="pt-BR" sz="2400" b="0" i="1" smtClean="0">
+                              <a:latin typeface="Cambria Math" panose="02040503050406030204" pitchFamily="18" charset="0"/>
+                            </a:rPr>
+                            <m:t>−1</m:t>
+                          </m:r>
+                        </m:sup>
+                        <m:e>
+                          <m:sSup>
+                            <m:sSupPr>
+                              <m:ctrlPr>
+                                <a:rPr lang="pt-BR" sz="2400" b="0" i="1" smtClean="0">
+                                  <a:latin typeface="Cambria Math" panose="02040503050406030204" pitchFamily="18" charset="0"/>
+                                </a:rPr>
+                              </m:ctrlPr>
+                            </m:sSupPr>
+                            <m:e>
+                              <m:d>
+                                <m:dPr>
+                                  <m:ctrlPr>
+                                    <a:rPr lang="pt-BR" sz="2400" b="0" i="1" smtClean="0">
+                                      <a:latin typeface="Cambria Math" panose="02040503050406030204" pitchFamily="18" charset="0"/>
+                                    </a:rPr>
+                                  </m:ctrlPr>
+                                </m:dPr>
+                                <m:e>
+                                  <m:acc>
+                                    <m:accPr>
+                                      <m:chr m:val="̂"/>
+                                      <m:ctrlPr>
+                                        <a:rPr lang="pt-BR" sz="2400" i="1">
+                                          <a:latin typeface="Cambria Math" panose="02040503050406030204" pitchFamily="18" charset="0"/>
+                                        </a:rPr>
+                                      </m:ctrlPr>
+                                    </m:accPr>
+                                    <m:e>
+                                      <m:r>
+                                        <a:rPr lang="pt-BR" sz="2400" i="1">
+                                          <a:latin typeface="Cambria Math" panose="02040503050406030204" pitchFamily="18" charset="0"/>
+                                        </a:rPr>
+                                        <m:t>𝑦</m:t>
+                                      </m:r>
+                                    </m:e>
+                                  </m:acc>
+                                  <m:r>
+                                    <a:rPr lang="pt-BR" sz="2400" i="1">
+                                      <a:latin typeface="Cambria Math" panose="02040503050406030204" pitchFamily="18" charset="0"/>
+                                    </a:rPr>
+                                    <m:t>[</m:t>
+                                  </m:r>
+                                  <m:r>
+                                    <a:rPr lang="pt-BR" sz="2400" i="1">
+                                      <a:latin typeface="Cambria Math" panose="02040503050406030204" pitchFamily="18" charset="0"/>
+                                    </a:rPr>
+                                    <m:t>𝑛</m:t>
+                                  </m:r>
+                                  <m:r>
+                                    <a:rPr lang="pt-BR" sz="2400" i="1">
+                                      <a:latin typeface="Cambria Math" panose="02040503050406030204" pitchFamily="18" charset="0"/>
+                                    </a:rPr>
+                                    <m:t>]−</m:t>
+                                  </m:r>
+                                  <m:r>
+                                    <a:rPr lang="pt-BR" sz="2400" i="1">
+                                      <a:latin typeface="Cambria Math" panose="02040503050406030204" pitchFamily="18" charset="0"/>
+                                    </a:rPr>
+                                    <m:t>𝑦</m:t>
+                                  </m:r>
+                                  <m:r>
+                                    <a:rPr lang="pt-BR" sz="2400" i="1">
+                                      <a:latin typeface="Cambria Math" panose="02040503050406030204" pitchFamily="18" charset="0"/>
+                                    </a:rPr>
+                                    <m:t>[</m:t>
+                                  </m:r>
+                                  <m:r>
+                                    <a:rPr lang="pt-BR" sz="2400" i="1">
+                                      <a:latin typeface="Cambria Math" panose="02040503050406030204" pitchFamily="18" charset="0"/>
+                                    </a:rPr>
+                                    <m:t>𝑛</m:t>
+                                  </m:r>
+                                  <m:r>
+                                    <a:rPr lang="pt-BR" sz="2400" i="1">
+                                      <a:latin typeface="Cambria Math" panose="02040503050406030204" pitchFamily="18" charset="0"/>
+                                    </a:rPr>
+                                    <m:t>]</m:t>
+                                  </m:r>
+                                </m:e>
+                              </m:d>
+                            </m:e>
+                            <m:sup>
+                              <m:r>
+                                <a:rPr lang="pt-BR" sz="2400" b="0" i="1" smtClean="0">
+                                  <a:latin typeface="Cambria Math" panose="02040503050406030204" pitchFamily="18" charset="0"/>
+                                </a:rPr>
+                                <m:t>2</m:t>
+                              </m:r>
+                            </m:sup>
+                          </m:sSup>
+                        </m:e>
+                      </m:nary>
+                      <m:r>
+                        <a:rPr lang="pt-BR" sz="2400" b="0" i="1" smtClean="0">
+                          <a:latin typeface="Cambria Math" panose="02040503050406030204" pitchFamily="18" charset="0"/>
+                        </a:rPr>
+                        <m:t>=</m:t>
+                      </m:r>
+                      <m:f>
+                        <m:fPr>
+                          <m:ctrlPr>
+                            <a:rPr lang="pt-BR" sz="2400" i="1">
+                              <a:latin typeface="Cambria Math" panose="02040503050406030204" pitchFamily="18" charset="0"/>
+                            </a:rPr>
+                          </m:ctrlPr>
+                        </m:fPr>
+                        <m:num>
+                          <m:r>
+                            <a:rPr lang="pt-BR" sz="2400" i="1">
+                              <a:latin typeface="Cambria Math" panose="02040503050406030204" pitchFamily="18" charset="0"/>
+                            </a:rPr>
+                            <m:t>1</m:t>
+                          </m:r>
+                        </m:num>
+                        <m:den>
+                          <m:r>
+                            <a:rPr lang="pt-BR" sz="2400" i="1">
+                              <a:latin typeface="Cambria Math" panose="02040503050406030204" pitchFamily="18" charset="0"/>
+                            </a:rPr>
+                            <m:t>𝑁</m:t>
+                          </m:r>
+                        </m:den>
+                      </m:f>
+                      <m:nary>
+                        <m:naryPr>
+                          <m:chr m:val="∑"/>
+                          <m:ctrlPr>
+                            <a:rPr lang="pt-BR" sz="2400" i="1">
+                              <a:latin typeface="Cambria Math" panose="02040503050406030204" pitchFamily="18" charset="0"/>
+                            </a:rPr>
+                          </m:ctrlPr>
+                        </m:naryPr>
+                        <m:sub>
+                          <m:r>
+                            <m:rPr>
+                              <m:brk m:alnAt="23"/>
+                            </m:rPr>
+                            <a:rPr lang="pt-BR" sz="2400" i="1">
+                              <a:latin typeface="Cambria Math" panose="02040503050406030204" pitchFamily="18" charset="0"/>
+                            </a:rPr>
+                            <m:t>𝑛</m:t>
+                          </m:r>
+                          <m:r>
+                            <a:rPr lang="pt-BR" sz="2400" i="1">
+                              <a:latin typeface="Cambria Math" panose="02040503050406030204" pitchFamily="18" charset="0"/>
+                            </a:rPr>
+                            <m:t>=</m:t>
+                          </m:r>
+                          <m:r>
+                            <a:rPr lang="pt-BR" sz="2400" b="0" i="1" smtClean="0">
+                              <a:latin typeface="Cambria Math" panose="02040503050406030204" pitchFamily="18" charset="0"/>
+                            </a:rPr>
+                            <m:t>0</m:t>
+                          </m:r>
+                        </m:sub>
+                        <m:sup>
+                          <m:r>
+                            <a:rPr lang="pt-BR" sz="2400" i="1">
+                              <a:latin typeface="Cambria Math" panose="02040503050406030204" pitchFamily="18" charset="0"/>
+                            </a:rPr>
+                            <m:t>𝑁</m:t>
+                          </m:r>
+                          <m:r>
+                            <a:rPr lang="pt-BR" sz="2400" b="0" i="1" smtClean="0">
+                              <a:latin typeface="Cambria Math" panose="02040503050406030204" pitchFamily="18" charset="0"/>
+                            </a:rPr>
+                            <m:t>−1</m:t>
+                          </m:r>
+                        </m:sup>
+                        <m:e>
+                          <m:sSup>
+                            <m:sSupPr>
+                              <m:ctrlPr>
+                                <a:rPr lang="pt-BR" sz="2400" i="1">
+                                  <a:latin typeface="Cambria Math" panose="02040503050406030204" pitchFamily="18" charset="0"/>
+                                </a:rPr>
+                              </m:ctrlPr>
+                            </m:sSupPr>
+                            <m:e>
+                              <m:d>
+                                <m:dPr>
+                                  <m:ctrlPr>
+                                    <a:rPr lang="pt-BR" sz="2400" i="1">
+                                      <a:latin typeface="Cambria Math" panose="02040503050406030204" pitchFamily="18" charset="0"/>
+                                    </a:rPr>
+                                  </m:ctrlPr>
+                                </m:dPr>
+                                <m:e>
+                                  <m:sSub>
+                                    <m:sSubPr>
+                                      <m:ctrlPr>
+                                        <a:rPr lang="pt-BR" sz="2400" i="1" smtClean="0">
+                                          <a:latin typeface="Cambria Math" panose="02040503050406030204" pitchFamily="18" charset="0"/>
+                                        </a:rPr>
+                                      </m:ctrlPr>
+                                    </m:sSubPr>
+                                    <m:e>
+                                      <m:sSub>
+                                        <m:sSubPr>
+                                          <m:ctrlPr>
+                                            <a:rPr lang="pt-BR" sz="2400" i="1">
+                                              <a:latin typeface="Cambria Math" panose="02040503050406030204" pitchFamily="18" charset="0"/>
+                                            </a:rPr>
+                                          </m:ctrlPr>
+                                        </m:sSubPr>
+                                        <m:e>
+                                          <m:r>
+                                            <a:rPr lang="pt-BR" sz="2400" i="1">
+                                              <a:latin typeface="Cambria Math" panose="02040503050406030204" pitchFamily="18" charset="0"/>
+                                            </a:rPr>
+                                            <m:t>𝑎</m:t>
+                                          </m:r>
+                                        </m:e>
+                                        <m:sub>
+                                          <m:r>
+                                            <a:rPr lang="pt-BR" sz="2400" i="1">
+                                              <a:latin typeface="Cambria Math" panose="02040503050406030204" pitchFamily="18" charset="0"/>
+                                            </a:rPr>
+                                            <m:t>0</m:t>
+                                          </m:r>
+                                        </m:sub>
+                                      </m:sSub>
+                                      <m:r>
+                                        <a:rPr lang="pt-BR" sz="2400" i="1">
+                                          <a:latin typeface="Cambria Math" panose="02040503050406030204" pitchFamily="18" charset="0"/>
+                                        </a:rPr>
+                                        <m:t>+</m:t>
+                                      </m:r>
+                                      <m:r>
+                                        <a:rPr lang="pt-BR" sz="2400" b="0" i="1" smtClean="0">
+                                          <a:latin typeface="Cambria Math" panose="02040503050406030204" pitchFamily="18" charset="0"/>
+                                        </a:rPr>
+                                        <m:t>𝑎</m:t>
+                                      </m:r>
+                                    </m:e>
+                                    <m:sub>
+                                      <m:r>
+                                        <a:rPr lang="pt-BR" sz="2400" b="0" i="1" smtClean="0">
+                                          <a:latin typeface="Cambria Math" panose="02040503050406030204" pitchFamily="18" charset="0"/>
+                                        </a:rPr>
+                                        <m:t>1</m:t>
+                                      </m:r>
+                                    </m:sub>
+                                  </m:sSub>
+                                  <m:r>
+                                    <a:rPr lang="pt-BR" sz="2400" b="0" i="1" smtClean="0">
+                                      <a:latin typeface="Cambria Math" panose="02040503050406030204" pitchFamily="18" charset="0"/>
+                                    </a:rPr>
+                                    <m:t>𝑥</m:t>
+                                  </m:r>
+                                  <m:r>
+                                    <a:rPr lang="pt-BR" sz="2400" b="0" i="1" smtClean="0">
+                                      <a:latin typeface="Cambria Math" panose="02040503050406030204" pitchFamily="18" charset="0"/>
+                                    </a:rPr>
+                                    <m:t>[</m:t>
+                                  </m:r>
+                                  <m:r>
+                                    <a:rPr lang="pt-BR" sz="2400" b="0" i="1" smtClean="0">
+                                      <a:latin typeface="Cambria Math" panose="02040503050406030204" pitchFamily="18" charset="0"/>
+                                    </a:rPr>
+                                    <m:t>𝑛</m:t>
+                                  </m:r>
+                                  <m:r>
+                                    <a:rPr lang="pt-BR" sz="2400" b="0" i="1" smtClean="0">
+                                      <a:latin typeface="Cambria Math" panose="02040503050406030204" pitchFamily="18" charset="0"/>
+                                    </a:rPr>
+                                    <m:t>]−</m:t>
+                                  </m:r>
+                                  <m:r>
+                                    <a:rPr lang="pt-BR" sz="2400" b="0" i="1" smtClean="0">
+                                      <a:latin typeface="Cambria Math" panose="02040503050406030204" pitchFamily="18" charset="0"/>
+                                    </a:rPr>
+                                    <m:t>𝑦</m:t>
+                                  </m:r>
+                                  <m:r>
+                                    <a:rPr lang="pt-BR" sz="2400" b="0" i="1" smtClean="0">
+                                      <a:latin typeface="Cambria Math" panose="02040503050406030204" pitchFamily="18" charset="0"/>
+                                    </a:rPr>
+                                    <m:t>[</m:t>
+                                  </m:r>
+                                  <m:r>
+                                    <a:rPr lang="pt-BR" sz="2400" b="0" i="1" smtClean="0">
+                                      <a:latin typeface="Cambria Math" panose="02040503050406030204" pitchFamily="18" charset="0"/>
+                                    </a:rPr>
+                                    <m:t>𝑛</m:t>
+                                  </m:r>
+                                  <m:r>
+                                    <a:rPr lang="pt-BR" sz="2400" b="0" i="1" smtClean="0">
+                                      <a:latin typeface="Cambria Math" panose="02040503050406030204" pitchFamily="18" charset="0"/>
+                                    </a:rPr>
+                                    <m:t>]</m:t>
+                                  </m:r>
+                                </m:e>
+                              </m:d>
+                            </m:e>
+                            <m:sup>
+                              <m:r>
+                                <a:rPr lang="pt-BR" sz="2400" i="1">
+                                  <a:latin typeface="Cambria Math" panose="02040503050406030204" pitchFamily="18" charset="0"/>
+                                </a:rPr>
+                                <m:t>2</m:t>
+                              </m:r>
+                            </m:sup>
+                          </m:sSup>
+                        </m:e>
+                      </m:nary>
+                    </m:oMath>
+                  </m:oMathPara>
+                </a14:m>
+                <a:endParaRPr lang="pt-BR" sz="2400" dirty="0"/>
+              </a:p>
+            </p:txBody>
+          </p:sp>
+        </mc:Choice>
+        <mc:Fallback xmlns="">
+          <p:sp>
+            <p:nvSpPr>
+              <p:cNvPr id="5" name="CaixaDeTexto 4">
+                <a:extLst>
+                  <a:ext uri="{FF2B5EF4-FFF2-40B4-BE49-F238E27FC236}">
+                    <a16:creationId xmlns:a16="http://schemas.microsoft.com/office/drawing/2014/main" id="{1216EDDF-7D90-C480-7FCF-B750F15061E5}"/>
+                  </a:ext>
+                </a:extLst>
+              </p:cNvPr>
+              <p:cNvSpPr txBox="1">
+                <a:spLocks noRot="1" noChangeAspect="1" noMove="1" noResize="1" noEditPoints="1" noAdjustHandles="1" noChangeArrowheads="1" noChangeShapeType="1" noTextEdit="1"/>
+              </p:cNvSpPr>
+              <p:nvPr/>
+            </p:nvSpPr>
+            <p:spPr>
+              <a:xfrm>
+                <a:off x="1005900" y="4543755"/>
+                <a:ext cx="4593515" cy="2169633"/>
+              </a:xfrm>
+              <a:prstGeom prst="rect">
+                <a:avLst/>
+              </a:prstGeom>
+              <a:blipFill>
+                <a:blip r:embed="rId2"/>
+                <a:stretch>
+                  <a:fillRect/>
+                </a:stretch>
+              </a:blipFill>
+            </p:spPr>
+            <p:txBody>
+              <a:bodyPr/>
+              <a:lstStyle/>
+              <a:p>
+                <a:r>
+                  <a:rPr lang="pt-BR">
+                    <a:noFill/>
+                  </a:rPr>
+                  <a:t> </a:t>
+                </a:r>
+              </a:p>
+            </p:txBody>
+          </p:sp>
+        </mc:Fallback>
+      </mc:AlternateContent>
+      <p:grpSp>
+        <p:nvGrpSpPr>
+          <p:cNvPr id="52" name="Agrupar 51">
+            <a:extLst>
+              <a:ext uri="{FF2B5EF4-FFF2-40B4-BE49-F238E27FC236}">
+                <a16:creationId xmlns:a16="http://schemas.microsoft.com/office/drawing/2014/main" id="{69A92EF6-86AA-B04F-B9D5-0526DC5E9E11}"/>
+              </a:ext>
+            </a:extLst>
+          </p:cNvPr>
+          <p:cNvGrpSpPr/>
+          <p:nvPr/>
+        </p:nvGrpSpPr>
+        <p:grpSpPr>
+          <a:xfrm>
+            <a:off x="1592492" y="1393380"/>
+            <a:ext cx="3105077" cy="2844369"/>
+            <a:chOff x="1592492" y="1393380"/>
+            <a:chExt cx="3105077" cy="2844369"/>
+          </a:xfrm>
+        </p:grpSpPr>
+        <p:pic>
+          <p:nvPicPr>
+            <p:cNvPr id="1026" name="Picture 2" descr="Visualization for Function Optimization in Python -  MachineLearningMastery.com">
+              <a:extLst>
+                <a:ext uri="{FF2B5EF4-FFF2-40B4-BE49-F238E27FC236}">
+                  <a16:creationId xmlns:a16="http://schemas.microsoft.com/office/drawing/2014/main" id="{891F5391-2026-8C2E-0B3E-FD722E573497}"/>
+                </a:ext>
+              </a:extLst>
+            </p:cNvPr>
+            <p:cNvPicPr>
+              <a:picLocks noChangeAspect="1" noChangeArrowheads="1"/>
+            </p:cNvPicPr>
+            <p:nvPr/>
+          </p:nvPicPr>
+          <p:blipFill rotWithShape="1">
+            <a:blip r:embed="rId3">
+              <a:extLst>
+                <a:ext uri="{28A0092B-C50C-407E-A947-70E740481C1C}">
+                  <a14:useLocalDpi xmlns:a14="http://schemas.microsoft.com/office/drawing/2010/main" val="0"/>
+                </a:ext>
+              </a:extLst>
+            </a:blip>
+            <a:srcRect l="25468" t="17228" r="16217" b="10711"/>
+            <a:stretch/>
+          </p:blipFill>
+          <p:spPr bwMode="auto">
+            <a:xfrm>
+              <a:off x="1592492" y="1393380"/>
+              <a:ext cx="3069081" cy="2844369"/>
+            </a:xfrm>
+            <a:prstGeom prst="rect">
+              <a:avLst/>
+            </a:prstGeom>
+            <a:noFill/>
+            <a:extLst>
+              <a:ext uri="{909E8E84-426E-40DD-AFC4-6F175D3DCCD1}">
+                <a14:hiddenFill xmlns:a14="http://schemas.microsoft.com/office/drawing/2010/main">
+                  <a:solidFill>
+                    <a:srgbClr val="FFFFFF"/>
+                  </a:solidFill>
+                </a14:hiddenFill>
+              </a:ext>
+            </a:extLst>
+          </p:spPr>
+        </p:pic>
+        <mc:AlternateContent xmlns:mc="http://schemas.openxmlformats.org/markup-compatibility/2006" xmlns:a14="http://schemas.microsoft.com/office/drawing/2010/main">
+          <mc:Choice Requires="a14">
+            <p:sp>
+              <p:nvSpPr>
+                <p:cNvPr id="32" name="CaixaDeTexto 31">
+                  <a:extLst>
+                    <a:ext uri="{FF2B5EF4-FFF2-40B4-BE49-F238E27FC236}">
+                      <a16:creationId xmlns:a16="http://schemas.microsoft.com/office/drawing/2014/main" id="{51DC6CF0-B9CE-31DF-8E6A-1D362B995785}"/>
+                    </a:ext>
+                  </a:extLst>
+                </p:cNvPr>
+                <p:cNvSpPr txBox="1"/>
+                <p:nvPr/>
+              </p:nvSpPr>
+              <p:spPr>
+                <a:xfrm>
+                  <a:off x="1980344" y="3868417"/>
+                  <a:ext cx="547099" cy="369332"/>
+                </a:xfrm>
+                <a:prstGeom prst="rect">
+                  <a:avLst/>
+                </a:prstGeom>
+                <a:noFill/>
+              </p:spPr>
+              <p:txBody>
+                <a:bodyPr wrap="square">
+                  <a:spAutoFit/>
+                </a:bodyPr>
+                <a:lstStyle/>
+                <a:p>
+                  <a:pPr/>
+                  <a14:m>
+                    <m:oMathPara xmlns:m="http://schemas.openxmlformats.org/officeDocument/2006/math">
+                      <m:oMathParaPr>
+                        <m:jc m:val="centerGroup"/>
+                      </m:oMathParaPr>
+                      <m:oMath xmlns:m="http://schemas.openxmlformats.org/officeDocument/2006/math">
+                        <m:sSub>
+                          <m:sSubPr>
+                            <m:ctrlPr>
+                              <a:rPr lang="pt-BR" sz="1800" i="1" smtClean="0">
+                                <a:latin typeface="Cambria Math" panose="02040503050406030204" pitchFamily="18" charset="0"/>
+                              </a:rPr>
+                            </m:ctrlPr>
+                          </m:sSubPr>
+                          <m:e>
+                            <m:r>
+                              <a:rPr lang="pt-BR" sz="1800" i="1">
+                                <a:latin typeface="Cambria Math" panose="02040503050406030204" pitchFamily="18" charset="0"/>
+                              </a:rPr>
+                              <m:t>𝑎</m:t>
+                            </m:r>
+                          </m:e>
+                          <m:sub>
+                            <m:r>
+                              <a:rPr lang="pt-BR" sz="1800" i="1">
+                                <a:latin typeface="Cambria Math" panose="02040503050406030204" pitchFamily="18" charset="0"/>
+                              </a:rPr>
+                              <m:t>0</m:t>
+                            </m:r>
+                          </m:sub>
+                        </m:sSub>
+                      </m:oMath>
+                    </m:oMathPara>
+                  </a14:m>
+                  <a:endParaRPr lang="pt-BR" dirty="0"/>
+                </a:p>
+              </p:txBody>
+            </p:sp>
+          </mc:Choice>
+          <mc:Fallback xmlns="">
+            <p:sp>
+              <p:nvSpPr>
+                <p:cNvPr id="32" name="CaixaDeTexto 31">
+                  <a:extLst>
+                    <a:ext uri="{FF2B5EF4-FFF2-40B4-BE49-F238E27FC236}">
+                      <a16:creationId xmlns:a16="http://schemas.microsoft.com/office/drawing/2014/main" id="{F8F56DFA-DA55-64BC-498E-89036B3ABB7B}"/>
+                    </a:ext>
+                  </a:extLst>
+                </p:cNvPr>
+                <p:cNvSpPr txBox="1">
+                  <a:spLocks noRot="1" noChangeAspect="1" noMove="1" noResize="1" noEditPoints="1" noAdjustHandles="1" noChangeArrowheads="1" noChangeShapeType="1" noTextEdit="1"/>
+                </p:cNvSpPr>
+                <p:nvPr/>
+              </p:nvSpPr>
+              <p:spPr>
+                <a:xfrm>
+                  <a:off x="1980344" y="3868417"/>
+                  <a:ext cx="547099" cy="369332"/>
+                </a:xfrm>
+                <a:prstGeom prst="rect">
+                  <a:avLst/>
+                </a:prstGeom>
+                <a:blipFill>
+                  <a:blip r:embed="rId4"/>
+                  <a:stretch>
+                    <a:fillRect/>
+                  </a:stretch>
+                </a:blipFill>
+              </p:spPr>
+              <p:txBody>
+                <a:bodyPr/>
+                <a:lstStyle/>
+                <a:p>
+                  <a:r>
+                    <a:rPr lang="pt-BR">
+                      <a:noFill/>
+                    </a:rPr>
+                    <a:t> </a:t>
+                  </a:r>
+                </a:p>
+              </p:txBody>
+            </p:sp>
+          </mc:Fallback>
+        </mc:AlternateContent>
+        <mc:AlternateContent xmlns:mc="http://schemas.openxmlformats.org/markup-compatibility/2006" xmlns:a14="http://schemas.microsoft.com/office/drawing/2010/main">
+          <mc:Choice Requires="a14">
+            <p:sp>
+              <p:nvSpPr>
+                <p:cNvPr id="34" name="CaixaDeTexto 33">
+                  <a:extLst>
+                    <a:ext uri="{FF2B5EF4-FFF2-40B4-BE49-F238E27FC236}">
+                      <a16:creationId xmlns:a16="http://schemas.microsoft.com/office/drawing/2014/main" id="{FF451B1C-3B39-A358-4712-23DDF9AB89E0}"/>
+                    </a:ext>
+                  </a:extLst>
+                </p:cNvPr>
+                <p:cNvSpPr txBox="1"/>
+                <p:nvPr/>
+              </p:nvSpPr>
+              <p:spPr>
+                <a:xfrm>
+                  <a:off x="4099817" y="3575675"/>
+                  <a:ext cx="423809" cy="369332"/>
+                </a:xfrm>
+                <a:prstGeom prst="rect">
+                  <a:avLst/>
+                </a:prstGeom>
+                <a:noFill/>
+              </p:spPr>
+              <p:txBody>
+                <a:bodyPr wrap="square">
+                  <a:spAutoFit/>
+                </a:bodyPr>
+                <a:lstStyle/>
+                <a:p>
+                  <a:pPr/>
+                  <a14:m>
+                    <m:oMathPara xmlns:m="http://schemas.openxmlformats.org/officeDocument/2006/math">
+                      <m:oMathParaPr>
+                        <m:jc m:val="centerGroup"/>
+                      </m:oMathParaPr>
+                      <m:oMath xmlns:m="http://schemas.openxmlformats.org/officeDocument/2006/math">
+                        <m:sSub>
+                          <m:sSubPr>
+                            <m:ctrlPr>
+                              <a:rPr lang="pt-BR" sz="1800" i="1" smtClean="0">
+                                <a:latin typeface="Cambria Math" panose="02040503050406030204" pitchFamily="18" charset="0"/>
+                              </a:rPr>
+                            </m:ctrlPr>
+                          </m:sSubPr>
+                          <m:e>
+                            <m:r>
+                              <a:rPr lang="pt-BR" sz="1800" i="1">
+                                <a:latin typeface="Cambria Math" panose="02040503050406030204" pitchFamily="18" charset="0"/>
+                              </a:rPr>
+                              <m:t>𝑎</m:t>
+                            </m:r>
+                          </m:e>
+                          <m:sub>
+                            <m:r>
+                              <a:rPr lang="pt-BR" sz="1800" i="1">
+                                <a:latin typeface="Cambria Math" panose="02040503050406030204" pitchFamily="18" charset="0"/>
+                              </a:rPr>
+                              <m:t>1</m:t>
+                            </m:r>
+                          </m:sub>
+                        </m:sSub>
+                      </m:oMath>
+                    </m:oMathPara>
+                  </a14:m>
+                  <a:endParaRPr lang="pt-BR" dirty="0"/>
+                </a:p>
+              </p:txBody>
+            </p:sp>
+          </mc:Choice>
+          <mc:Fallback xmlns="">
+            <p:sp>
+              <p:nvSpPr>
+                <p:cNvPr id="34" name="CaixaDeTexto 33">
+                  <a:extLst>
+                    <a:ext uri="{FF2B5EF4-FFF2-40B4-BE49-F238E27FC236}">
+                      <a16:creationId xmlns:a16="http://schemas.microsoft.com/office/drawing/2014/main" id="{0F41703A-C8C4-AC4F-DED1-A7688D7554D5}"/>
+                    </a:ext>
+                  </a:extLst>
+                </p:cNvPr>
+                <p:cNvSpPr txBox="1">
+                  <a:spLocks noRot="1" noChangeAspect="1" noMove="1" noResize="1" noEditPoints="1" noAdjustHandles="1" noChangeArrowheads="1" noChangeShapeType="1" noTextEdit="1"/>
+                </p:cNvSpPr>
+                <p:nvPr/>
+              </p:nvSpPr>
+              <p:spPr>
+                <a:xfrm>
+                  <a:off x="4099817" y="3575675"/>
+                  <a:ext cx="423809" cy="369332"/>
+                </a:xfrm>
+                <a:prstGeom prst="rect">
+                  <a:avLst/>
+                </a:prstGeom>
+                <a:blipFill>
+                  <a:blip r:embed="rId5"/>
+                  <a:stretch>
+                    <a:fillRect/>
+                  </a:stretch>
+                </a:blipFill>
+              </p:spPr>
+              <p:txBody>
+                <a:bodyPr/>
+                <a:lstStyle/>
+                <a:p>
+                  <a:r>
+                    <a:rPr lang="pt-BR">
+                      <a:noFill/>
+                    </a:rPr>
+                    <a:t> </a:t>
+                  </a:r>
+                </a:p>
+              </p:txBody>
+            </p:sp>
+          </mc:Fallback>
+        </mc:AlternateContent>
+        <mc:AlternateContent xmlns:mc="http://schemas.openxmlformats.org/markup-compatibility/2006" xmlns:a14="http://schemas.microsoft.com/office/drawing/2010/main">
+          <mc:Choice Requires="a14">
+            <p:sp>
+              <p:nvSpPr>
+                <p:cNvPr id="37" name="CaixaDeTexto 36">
+                  <a:extLst>
+                    <a:ext uri="{FF2B5EF4-FFF2-40B4-BE49-F238E27FC236}">
+                      <a16:creationId xmlns:a16="http://schemas.microsoft.com/office/drawing/2014/main" id="{30196AB4-8335-2434-49FB-6DCD20AA4E1E}"/>
+                    </a:ext>
+                  </a:extLst>
+                </p:cNvPr>
+                <p:cNvSpPr txBox="1"/>
+                <p:nvPr/>
+              </p:nvSpPr>
+              <p:spPr>
+                <a:xfrm>
+                  <a:off x="4140196" y="1456294"/>
+                  <a:ext cx="557373" cy="369332"/>
+                </a:xfrm>
+                <a:prstGeom prst="rect">
+                  <a:avLst/>
+                </a:prstGeom>
+                <a:noFill/>
+              </p:spPr>
+              <p:txBody>
+                <a:bodyPr wrap="square">
+                  <a:spAutoFit/>
+                </a:bodyPr>
+                <a:lstStyle/>
+                <a:p>
+                  <a:pPr/>
+                  <a14:m>
+                    <m:oMathPara xmlns:m="http://schemas.openxmlformats.org/officeDocument/2006/math">
+                      <m:oMathParaPr>
+                        <m:jc m:val="centerGroup"/>
+                      </m:oMathParaPr>
+                      <m:oMath xmlns:m="http://schemas.openxmlformats.org/officeDocument/2006/math">
+                        <m:r>
+                          <a:rPr lang="pt-BR" sz="1800" b="1" i="0" smtClean="0">
+                            <a:latin typeface="Cambria Math" panose="02040503050406030204" pitchFamily="18" charset="0"/>
+                          </a:rPr>
+                          <m:t>𝐌𝐒𝐄</m:t>
+                        </m:r>
+                      </m:oMath>
+                    </m:oMathPara>
+                  </a14:m>
+                  <a:endParaRPr lang="pt-BR" b="1" dirty="0"/>
+                </a:p>
+              </p:txBody>
+            </p:sp>
+          </mc:Choice>
+          <mc:Fallback xmlns="">
+            <p:sp>
+              <p:nvSpPr>
+                <p:cNvPr id="37" name="CaixaDeTexto 36">
+                  <a:extLst>
+                    <a:ext uri="{FF2B5EF4-FFF2-40B4-BE49-F238E27FC236}">
+                      <a16:creationId xmlns:a16="http://schemas.microsoft.com/office/drawing/2014/main" id="{06ABD17C-2E15-0808-E956-FE4EEA39D288}"/>
+                    </a:ext>
+                  </a:extLst>
+                </p:cNvPr>
+                <p:cNvSpPr txBox="1">
+                  <a:spLocks noRot="1" noChangeAspect="1" noMove="1" noResize="1" noEditPoints="1" noAdjustHandles="1" noChangeArrowheads="1" noChangeShapeType="1" noTextEdit="1"/>
+                </p:cNvSpPr>
+                <p:nvPr/>
+              </p:nvSpPr>
+              <p:spPr>
+                <a:xfrm>
+                  <a:off x="4140196" y="1456294"/>
+                  <a:ext cx="557373" cy="369332"/>
+                </a:xfrm>
+                <a:prstGeom prst="rect">
+                  <a:avLst/>
+                </a:prstGeom>
+                <a:blipFill>
+                  <a:blip r:embed="rId6"/>
+                  <a:stretch>
+                    <a:fillRect r="-13043"/>
+                  </a:stretch>
+                </a:blipFill>
+              </p:spPr>
+              <p:txBody>
+                <a:bodyPr/>
+                <a:lstStyle/>
+                <a:p>
+                  <a:r>
+                    <a:rPr lang="pt-BR">
+                      <a:noFill/>
+                    </a:rPr>
+                    <a:t> </a:t>
+                  </a:r>
+                </a:p>
+              </p:txBody>
+            </p:sp>
+          </mc:Fallback>
+        </mc:AlternateContent>
+      </p:grpSp>
+      <p:cxnSp>
+        <p:nvCxnSpPr>
+          <p:cNvPr id="39" name="Conector de Seta Reta 38">
+            <a:extLst>
+              <a:ext uri="{FF2B5EF4-FFF2-40B4-BE49-F238E27FC236}">
+                <a16:creationId xmlns:a16="http://schemas.microsoft.com/office/drawing/2014/main" id="{0CF05E6E-2DCF-827C-D3A9-9D2D6823E8AE}"/>
+              </a:ext>
+            </a:extLst>
+          </p:cNvPr>
+          <p:cNvCxnSpPr>
+            <a:cxnSpLocks/>
+          </p:cNvCxnSpPr>
+          <p:nvPr/>
+        </p:nvCxnSpPr>
+        <p:spPr>
+          <a:xfrm flipH="1" flipV="1">
+            <a:off x="3016026" y="3318553"/>
+            <a:ext cx="497043" cy="1023261"/>
+          </a:xfrm>
+          <a:prstGeom prst="straightConnector1">
+            <a:avLst/>
+          </a:prstGeom>
+          <a:ln>
+            <a:solidFill>
+              <a:srgbClr val="FF0000"/>
+            </a:solidFill>
+            <a:tailEnd type="triangle"/>
+          </a:ln>
+        </p:spPr>
+        <p:style>
+          <a:lnRef idx="1">
+            <a:schemeClr val="accent1"/>
+          </a:lnRef>
+          <a:fillRef idx="0">
+            <a:schemeClr val="accent1"/>
+          </a:fillRef>
+          <a:effectRef idx="0">
+            <a:schemeClr val="accent1"/>
+          </a:effectRef>
+          <a:fontRef idx="minor">
+            <a:schemeClr val="tx1"/>
+          </a:fontRef>
+        </p:style>
+      </p:cxnSp>
+      <p:sp>
+        <p:nvSpPr>
+          <p:cNvPr id="43" name="CaixaDeTexto 42">
+            <a:extLst>
+              <a:ext uri="{FF2B5EF4-FFF2-40B4-BE49-F238E27FC236}">
+                <a16:creationId xmlns:a16="http://schemas.microsoft.com/office/drawing/2014/main" id="{7DD7DBC8-C42A-5F06-23F9-7ADEC74F826A}"/>
+              </a:ext>
+            </a:extLst>
+          </p:cNvPr>
+          <p:cNvSpPr txBox="1"/>
+          <p:nvPr/>
+        </p:nvSpPr>
+        <p:spPr>
+          <a:xfrm>
+            <a:off x="2935287" y="4297726"/>
+            <a:ext cx="1483596" cy="307777"/>
+          </a:xfrm>
+          <a:prstGeom prst="rect">
+            <a:avLst/>
+          </a:prstGeom>
+          <a:noFill/>
+        </p:spPr>
+        <p:txBody>
+          <a:bodyPr wrap="square" rtlCol="0">
+            <a:spAutoFit/>
+          </a:bodyPr>
+          <a:lstStyle/>
+          <a:p>
+            <a:r>
+              <a:rPr lang="pt-BR" sz="1400" b="1" dirty="0">
+                <a:solidFill>
+                  <a:srgbClr val="00B0F0"/>
+                </a:solidFill>
+              </a:rPr>
+              <a:t>ponto de mínimo</a:t>
+            </a:r>
+          </a:p>
+        </p:txBody>
+      </p:sp>
+      <p:sp>
+        <p:nvSpPr>
+          <p:cNvPr id="44" name="Retângulo 43">
+            <a:extLst>
+              <a:ext uri="{FF2B5EF4-FFF2-40B4-BE49-F238E27FC236}">
+                <a16:creationId xmlns:a16="http://schemas.microsoft.com/office/drawing/2014/main" id="{D401F929-8474-735D-ADF3-337C96D9494B}"/>
+              </a:ext>
+            </a:extLst>
+          </p:cNvPr>
+          <p:cNvSpPr/>
+          <p:nvPr/>
+        </p:nvSpPr>
+        <p:spPr>
+          <a:xfrm>
+            <a:off x="2257425" y="6073775"/>
+            <a:ext cx="330200" cy="273050"/>
+          </a:xfrm>
+          <a:prstGeom prst="rect">
+            <a:avLst/>
+          </a:prstGeom>
+          <a:noFill/>
+          <a:ln w="19050">
+            <a:solidFill>
+              <a:srgbClr val="FF0000"/>
+            </a:solidFill>
+          </a:ln>
+        </p:spPr>
+        <p:style>
+          <a:lnRef idx="2">
+            <a:schemeClr val="accent1">
+              <a:shade val="15000"/>
+            </a:schemeClr>
+          </a:lnRef>
+          <a:fillRef idx="1">
+            <a:schemeClr val="accent1"/>
+          </a:fillRef>
+          <a:effectRef idx="0">
+            <a:schemeClr val="accent1"/>
+          </a:effectRef>
+          <a:fontRef idx="minor">
+            <a:schemeClr val="lt1"/>
+          </a:fontRef>
+        </p:style>
+        <p:txBody>
+          <a:bodyPr rtlCol="0" anchor="ctr"/>
+          <a:lstStyle/>
+          <a:p>
+            <a:pPr algn="ctr"/>
+            <a:endParaRPr lang="pt-BR"/>
+          </a:p>
+        </p:txBody>
+      </p:sp>
+      <p:sp>
+        <p:nvSpPr>
+          <p:cNvPr id="45" name="Retângulo 44">
+            <a:extLst>
+              <a:ext uri="{FF2B5EF4-FFF2-40B4-BE49-F238E27FC236}">
+                <a16:creationId xmlns:a16="http://schemas.microsoft.com/office/drawing/2014/main" id="{A67B37F4-C674-39BB-383F-EA81B42C25B3}"/>
+              </a:ext>
+            </a:extLst>
+          </p:cNvPr>
+          <p:cNvSpPr/>
+          <p:nvPr/>
+        </p:nvSpPr>
+        <p:spPr>
+          <a:xfrm>
+            <a:off x="2901950" y="6073775"/>
+            <a:ext cx="330200" cy="273050"/>
+          </a:xfrm>
+          <a:prstGeom prst="rect">
+            <a:avLst/>
+          </a:prstGeom>
+          <a:noFill/>
+          <a:ln w="19050">
+            <a:solidFill>
+              <a:srgbClr val="FF0000"/>
+            </a:solidFill>
+          </a:ln>
+        </p:spPr>
+        <p:style>
+          <a:lnRef idx="2">
+            <a:schemeClr val="accent1">
+              <a:shade val="15000"/>
+            </a:schemeClr>
+          </a:lnRef>
+          <a:fillRef idx="1">
+            <a:schemeClr val="accent1"/>
+          </a:fillRef>
+          <a:effectRef idx="0">
+            <a:schemeClr val="accent1"/>
+          </a:effectRef>
+          <a:fontRef idx="minor">
+            <a:schemeClr val="lt1"/>
+          </a:fontRef>
+        </p:style>
+        <p:txBody>
+          <a:bodyPr rtlCol="0" anchor="ctr"/>
+          <a:lstStyle/>
+          <a:p>
+            <a:pPr algn="ctr"/>
+            <a:endParaRPr lang="pt-BR"/>
+          </a:p>
+        </p:txBody>
+      </p:sp>
+      <p:cxnSp>
+        <p:nvCxnSpPr>
+          <p:cNvPr id="47" name="Conector de Seta Reta 46">
+            <a:extLst>
+              <a:ext uri="{FF2B5EF4-FFF2-40B4-BE49-F238E27FC236}">
+                <a16:creationId xmlns:a16="http://schemas.microsoft.com/office/drawing/2014/main" id="{794B6722-40AF-0378-9A89-DAA0E4DC33B4}"/>
+              </a:ext>
+            </a:extLst>
+          </p:cNvPr>
+          <p:cNvCxnSpPr/>
+          <p:nvPr/>
+        </p:nvCxnSpPr>
+        <p:spPr>
+          <a:xfrm flipV="1">
+            <a:off x="2800350" y="4543755"/>
+            <a:ext cx="781050" cy="1530020"/>
+          </a:xfrm>
+          <a:prstGeom prst="straightConnector1">
+            <a:avLst/>
+          </a:prstGeom>
+          <a:ln>
+            <a:solidFill>
+              <a:srgbClr val="FF0000"/>
+            </a:solidFill>
+            <a:tailEnd type="triangle"/>
+          </a:ln>
+        </p:spPr>
+        <p:style>
+          <a:lnRef idx="1">
+            <a:schemeClr val="accent1"/>
+          </a:lnRef>
+          <a:fillRef idx="0">
+            <a:schemeClr val="accent1"/>
+          </a:fillRef>
+          <a:effectRef idx="0">
+            <a:schemeClr val="accent1"/>
+          </a:effectRef>
+          <a:fontRef idx="minor">
+            <a:schemeClr val="tx1"/>
+          </a:fontRef>
+        </p:style>
+      </p:cxnSp>
+      <p:sp>
+        <p:nvSpPr>
+          <p:cNvPr id="48" name="CaixaDeTexto 47">
+            <a:extLst>
+              <a:ext uri="{FF2B5EF4-FFF2-40B4-BE49-F238E27FC236}">
+                <a16:creationId xmlns:a16="http://schemas.microsoft.com/office/drawing/2014/main" id="{68B4E868-C383-179B-09E0-7CBAA385F708}"/>
+              </a:ext>
+            </a:extLst>
+          </p:cNvPr>
+          <p:cNvSpPr txBox="1"/>
+          <p:nvPr/>
+        </p:nvSpPr>
+        <p:spPr>
+          <a:xfrm>
+            <a:off x="2587625" y="5604004"/>
+            <a:ext cx="695325" cy="523220"/>
+          </a:xfrm>
+          <a:prstGeom prst="rect">
+            <a:avLst/>
+          </a:prstGeom>
+          <a:noFill/>
+        </p:spPr>
+        <p:txBody>
+          <a:bodyPr wrap="square" rtlCol="0">
+            <a:spAutoFit/>
+          </a:bodyPr>
+          <a:lstStyle/>
+          <a:p>
+            <a:r>
+              <a:rPr lang="pt-BR" sz="2800" b="1" dirty="0">
+                <a:solidFill>
+                  <a:srgbClr val="FF0000"/>
+                </a:solidFill>
+              </a:rPr>
+              <a:t>?</a:t>
+            </a:r>
+            <a:endParaRPr lang="pt-BR" b="1" dirty="0">
+              <a:solidFill>
+                <a:srgbClr val="FF0000"/>
+              </a:solidFill>
+            </a:endParaRPr>
+          </a:p>
+        </p:txBody>
+      </p:sp>
+    </p:spTree>
+    <p:extLst>
+      <p:ext uri="{BB962C8B-B14F-4D97-AF65-F5344CB8AC3E}">
+        <p14:creationId xmlns:p14="http://schemas.microsoft.com/office/powerpoint/2010/main" val="239740401"/>
+      </p:ext>
+    </p:extLst>
+  </p:cSld>
+  <p:clrMapOvr>
+    <a:masterClrMapping/>
+  </p:clrMapOvr>
+</p:sld>
+</file>
+
+<file path=ppt/slides/slide29.xml><?xml version="1.0" encoding="utf-8"?>
 <p:sld xmlns:a="http://schemas.openxmlformats.org/drawingml/2006/main" xmlns:r="http://schemas.openxmlformats.org/officeDocument/2006/relationships" xmlns:p="http://schemas.openxmlformats.org/presentationml/2006/main">
   <p:cSld>
     <p:spTree>
@@ -21630,7 +23720,7 @@
             <a:r>
               <a:rPr lang="pt-BR" b="1" i="1" dirty="0">
                 <a:solidFill>
-                  <a:srgbClr val="00B050"/>
+                  <a:schemeClr val="accent2"/>
                 </a:solidFill>
               </a:rPr>
               <a:t>otimização</a:t>
@@ -21642,7 +23732,7 @@
             <a:r>
               <a:rPr lang="pt-BR" b="1" i="1" dirty="0">
                 <a:solidFill>
-                  <a:srgbClr val="00B050"/>
+                  <a:srgbClr val="7030A0"/>
                 </a:solidFill>
               </a:rPr>
               <a:t>treinamento do modelo</a:t>
@@ -22668,7 +24758,488 @@
 </p:sld>
 </file>
 
-<file path=ppt/slides/slide28.xml><?xml version="1.0" encoding="utf-8"?>
+<file path=ppt/slides/slide3.xml><?xml version="1.0" encoding="utf-8"?>
+<p:sld xmlns:a="http://schemas.openxmlformats.org/drawingml/2006/main" xmlns:r="http://schemas.openxmlformats.org/officeDocument/2006/relationships" xmlns:p="http://schemas.openxmlformats.org/presentationml/2006/main">
+  <p:cSld>
+    <p:spTree>
+      <p:nvGrpSpPr>
+        <p:cNvPr id="1" name=""/>
+        <p:cNvGrpSpPr/>
+        <p:nvPr/>
+      </p:nvGrpSpPr>
+      <p:grpSpPr>
+        <a:xfrm>
+          <a:off x="0" y="0"/>
+          <a:ext cx="0" cy="0"/>
+          <a:chOff x="0" y="0"/>
+          <a:chExt cx="0" cy="0"/>
+        </a:xfrm>
+      </p:grpSpPr>
+      <mc:AlternateContent xmlns:mc="http://schemas.openxmlformats.org/markup-compatibility/2006" xmlns:a14="http://schemas.microsoft.com/office/drawing/2010/main">
+        <mc:Choice Requires="a14">
+          <p:sp>
+            <p:nvSpPr>
+              <p:cNvPr id="2" name="Título 1">
+                <a:extLst>
+                  <a:ext uri="{FF2B5EF4-FFF2-40B4-BE49-F238E27FC236}">
+                    <a16:creationId xmlns:a16="http://schemas.microsoft.com/office/drawing/2014/main" id="{EBBFACCC-402D-F8EB-8DF6-A01AC2F11478}"/>
+                  </a:ext>
+                </a:extLst>
+              </p:cNvPr>
+              <p:cNvSpPr>
+                <a:spLocks noGrp="1"/>
+              </p:cNvSpPr>
+              <p:nvPr>
+                <p:ph type="title"/>
+              </p:nvPr>
+            </p:nvSpPr>
+            <p:spPr/>
+            <p:txBody>
+              <a:bodyPr/>
+              <a:lstStyle/>
+              <a:p>
+                <a:r>
+                  <a:rPr lang="pt-BR" dirty="0"/>
+                  <a:t>Mapeando </a:t>
+                </a:r>
+                <a14:m>
+                  <m:oMath xmlns:m="http://schemas.openxmlformats.org/officeDocument/2006/math">
+                    <m:r>
+                      <a:rPr lang="pt-BR" b="1" i="1" smtClean="0">
+                        <a:latin typeface="Cambria Math" panose="02040503050406030204" pitchFamily="18" charset="0"/>
+                      </a:rPr>
+                      <m:t>𝒙</m:t>
+                    </m:r>
+                  </m:oMath>
+                </a14:m>
+                <a:r>
+                  <a:rPr lang="pt-BR" dirty="0"/>
+                  <a:t> em </a:t>
+                </a:r>
+                <a14:m>
+                  <m:oMath xmlns:m="http://schemas.openxmlformats.org/officeDocument/2006/math">
+                    <m:r>
+                      <a:rPr lang="pt-BR" b="1" i="1" smtClean="0">
+                        <a:latin typeface="Cambria Math" panose="02040503050406030204" pitchFamily="18" charset="0"/>
+                      </a:rPr>
+                      <m:t>𝒚</m:t>
+                    </m:r>
+                  </m:oMath>
+                </a14:m>
+                <a:endParaRPr lang="pt-BR" b="1" dirty="0"/>
+              </a:p>
+            </p:txBody>
+          </p:sp>
+        </mc:Choice>
+        <mc:Fallback xmlns="">
+          <p:sp>
+            <p:nvSpPr>
+              <p:cNvPr id="2" name="Título 1">
+                <a:extLst>
+                  <a:ext uri="{FF2B5EF4-FFF2-40B4-BE49-F238E27FC236}">
+                    <a16:creationId xmlns:a16="http://schemas.microsoft.com/office/drawing/2014/main" id="{EBBFACCC-402D-F8EB-8DF6-A01AC2F11478}"/>
+                  </a:ext>
+                </a:extLst>
+              </p:cNvPr>
+              <p:cNvSpPr>
+                <a:spLocks noGrp="1" noRot="1" noChangeAspect="1" noMove="1" noResize="1" noEditPoints="1" noAdjustHandles="1" noChangeArrowheads="1" noChangeShapeType="1" noTextEdit="1"/>
+              </p:cNvSpPr>
+              <p:nvPr>
+                <p:ph type="title"/>
+              </p:nvPr>
+            </p:nvSpPr>
+            <p:spPr>
+              <a:blipFill>
+                <a:blip r:embed="rId2"/>
+                <a:stretch>
+                  <a:fillRect l="-2377"/>
+                </a:stretch>
+              </a:blipFill>
+            </p:spPr>
+            <p:txBody>
+              <a:bodyPr/>
+              <a:lstStyle/>
+              <a:p>
+                <a:r>
+                  <a:rPr lang="pt-BR">
+                    <a:noFill/>
+                  </a:rPr>
+                  <a:t> </a:t>
+                </a:r>
+              </a:p>
+            </p:txBody>
+          </p:sp>
+        </mc:Fallback>
+      </mc:AlternateContent>
+      <mc:AlternateContent xmlns:mc="http://schemas.openxmlformats.org/markup-compatibility/2006" xmlns:a14="http://schemas.microsoft.com/office/drawing/2010/main">
+        <mc:Choice Requires="a14">
+          <p:sp>
+            <p:nvSpPr>
+              <p:cNvPr id="3" name="Espaço Reservado para Conteúdo 2">
+                <a:extLst>
+                  <a:ext uri="{FF2B5EF4-FFF2-40B4-BE49-F238E27FC236}">
+                    <a16:creationId xmlns:a16="http://schemas.microsoft.com/office/drawing/2014/main" id="{574AB04A-D8D2-BC7E-F4F7-97B83877B167}"/>
+                  </a:ext>
+                </a:extLst>
+              </p:cNvPr>
+              <p:cNvSpPr>
+                <a:spLocks noGrp="1"/>
+              </p:cNvSpPr>
+              <p:nvPr>
+                <p:ph idx="1"/>
+              </p:nvPr>
+            </p:nvSpPr>
+            <p:spPr>
+              <a:xfrm>
+                <a:off x="5291192" y="1825624"/>
+                <a:ext cx="6760396" cy="5032375"/>
+              </a:xfrm>
+            </p:spPr>
+            <p:txBody>
+              <a:bodyPr>
+                <a:normAutofit/>
+              </a:bodyPr>
+              <a:lstStyle/>
+              <a:p>
+                <a:r>
+                  <a:rPr lang="pt-BR" dirty="0"/>
+                  <a:t>Considerem esses dois conjuntos de números.</a:t>
+                </a:r>
+              </a:p>
+              <a:p>
+                <a:pPr lvl="1">
+                  <a:buFont typeface="Wingdings" panose="05000000000000000000" pitchFamily="2" charset="2"/>
+                  <a:buChar char="§"/>
+                </a:pPr>
+                <a:r>
+                  <a:rPr lang="pt-BR" dirty="0"/>
+                  <a:t>Entradas e suas respectivas saídas esperadas.</a:t>
+                </a:r>
+              </a:p>
+              <a:p>
+                <a:r>
+                  <a:rPr lang="pt-BR" dirty="0"/>
+                  <a:t>Qual a relação entre os dois conjuntos? </a:t>
+                </a:r>
+              </a:p>
+              <a:p>
+                <a:pPr lvl="1">
+                  <a:buFont typeface="Wingdings" panose="05000000000000000000" pitchFamily="2" charset="2"/>
+                  <a:buChar char="§"/>
+                </a:pPr>
+                <a:r>
+                  <a:rPr lang="pt-BR" dirty="0"/>
+                  <a:t>Ou seja, qual é a </a:t>
+                </a:r>
+                <a:r>
+                  <a:rPr lang="pt-BR" b="1" i="1" dirty="0">
+                    <a:solidFill>
+                      <a:srgbClr val="00B050"/>
+                    </a:solidFill>
+                  </a:rPr>
+                  <a:t>função que mapeia </a:t>
+                </a:r>
+                <a:r>
+                  <a:rPr lang="pt-BR" dirty="0"/>
+                  <a:t>os valores de </a:t>
+                </a:r>
+                <a14:m>
+                  <m:oMath xmlns:m="http://schemas.openxmlformats.org/officeDocument/2006/math">
+                    <m:r>
+                      <a:rPr lang="pt-BR" b="1" i="1" smtClean="0">
+                        <a:latin typeface="Cambria Math" panose="02040503050406030204" pitchFamily="18" charset="0"/>
+                      </a:rPr>
+                      <m:t>𝒙</m:t>
+                    </m:r>
+                  </m:oMath>
+                </a14:m>
+                <a:r>
+                  <a:rPr lang="pt-BR" dirty="0"/>
+                  <a:t> em </a:t>
+                </a:r>
+                <a14:m>
+                  <m:oMath xmlns:m="http://schemas.openxmlformats.org/officeDocument/2006/math">
+                    <m:r>
+                      <a:rPr lang="pt-BR" b="1" i="1">
+                        <a:latin typeface="Cambria Math" panose="02040503050406030204" pitchFamily="18" charset="0"/>
+                      </a:rPr>
+                      <m:t>𝒚</m:t>
+                    </m:r>
+                  </m:oMath>
+                </a14:m>
+                <a:r>
+                  <a:rPr lang="pt-BR" dirty="0"/>
+                  <a:t>?</a:t>
+                </a:r>
+              </a:p>
+              <a:p>
+                <a:r>
+                  <a:rPr lang="pt-BR" dirty="0"/>
+                  <a:t>Nós sabemos que </a:t>
+                </a:r>
+                <a14:m>
+                  <m:oMath xmlns:m="http://schemas.openxmlformats.org/officeDocument/2006/math">
+                    <m:r>
+                      <a:rPr lang="pt-BR" b="1" i="1" smtClean="0">
+                        <a:latin typeface="Cambria Math" panose="02040503050406030204" pitchFamily="18" charset="0"/>
+                      </a:rPr>
+                      <m:t>𝒚</m:t>
+                    </m:r>
+                  </m:oMath>
+                </a14:m>
+                <a:r>
+                  <a:rPr lang="pt-BR" dirty="0"/>
+                  <a:t> é uma função de </a:t>
+                </a:r>
+                <a14:m>
+                  <m:oMath xmlns:m="http://schemas.openxmlformats.org/officeDocument/2006/math">
+                    <m:r>
+                      <a:rPr lang="pt-BR" b="1" i="1">
+                        <a:latin typeface="Cambria Math" panose="02040503050406030204" pitchFamily="18" charset="0"/>
+                      </a:rPr>
+                      <m:t>𝒙</m:t>
+                    </m:r>
+                  </m:oMath>
+                </a14:m>
+                <a:r>
+                  <a:rPr lang="pt-BR" dirty="0"/>
+                  <a:t>, nós só não sabemos que função é essa.</a:t>
+                </a:r>
+              </a:p>
+              <a:p>
+                <a:r>
+                  <a:rPr lang="pt-BR" dirty="0"/>
+                  <a:t>Que tal plotarmos esses pontos?</a:t>
+                </a:r>
+              </a:p>
+            </p:txBody>
+          </p:sp>
+        </mc:Choice>
+        <mc:Fallback xmlns="">
+          <p:sp>
+            <p:nvSpPr>
+              <p:cNvPr id="3" name="Espaço Reservado para Conteúdo 2">
+                <a:extLst>
+                  <a:ext uri="{FF2B5EF4-FFF2-40B4-BE49-F238E27FC236}">
+                    <a16:creationId xmlns:a16="http://schemas.microsoft.com/office/drawing/2014/main" id="{574AB04A-D8D2-BC7E-F4F7-97B83877B167}"/>
+                  </a:ext>
+                </a:extLst>
+              </p:cNvPr>
+              <p:cNvSpPr>
+                <a:spLocks noGrp="1" noRot="1" noChangeAspect="1" noMove="1" noResize="1" noEditPoints="1" noAdjustHandles="1" noChangeArrowheads="1" noChangeShapeType="1" noTextEdit="1"/>
+              </p:cNvSpPr>
+              <p:nvPr>
+                <p:ph idx="1"/>
+              </p:nvPr>
+            </p:nvSpPr>
+            <p:spPr>
+              <a:xfrm>
+                <a:off x="5291192" y="1825624"/>
+                <a:ext cx="6760396" cy="5032375"/>
+              </a:xfrm>
+              <a:blipFill>
+                <a:blip r:embed="rId3"/>
+                <a:stretch>
+                  <a:fillRect l="-1623" t="-1937" r="-2525"/>
+                </a:stretch>
+              </a:blipFill>
+            </p:spPr>
+            <p:txBody>
+              <a:bodyPr/>
+              <a:lstStyle/>
+              <a:p>
+                <a:r>
+                  <a:rPr lang="en-US">
+                    <a:noFill/>
+                  </a:rPr>
+                  <a:t> </a:t>
+                </a:r>
+              </a:p>
+            </p:txBody>
+          </p:sp>
+        </mc:Fallback>
+      </mc:AlternateContent>
+      <mc:AlternateContent xmlns:mc="http://schemas.openxmlformats.org/markup-compatibility/2006" xmlns:a14="http://schemas.microsoft.com/office/drawing/2010/main">
+        <mc:Choice Requires="a14">
+          <p:sp>
+            <p:nvSpPr>
+              <p:cNvPr id="4" name="CaixaDeTexto 3">
+                <a:extLst>
+                  <a:ext uri="{FF2B5EF4-FFF2-40B4-BE49-F238E27FC236}">
+                    <a16:creationId xmlns:a16="http://schemas.microsoft.com/office/drawing/2014/main" id="{457B0757-0010-3DDB-7F4D-4E0B92E0088F}"/>
+                  </a:ext>
+                </a:extLst>
+              </p:cNvPr>
+              <p:cNvSpPr txBox="1"/>
+              <p:nvPr/>
+            </p:nvSpPr>
+            <p:spPr>
+              <a:xfrm>
+                <a:off x="838200" y="1947542"/>
+                <a:ext cx="4275711" cy="1077218"/>
+              </a:xfrm>
+              <a:prstGeom prst="rect">
+                <a:avLst/>
+              </a:prstGeom>
+              <a:noFill/>
+            </p:spPr>
+            <p:txBody>
+              <a:bodyPr wrap="square" rtlCol="0">
+                <a:spAutoFit/>
+              </a:bodyPr>
+              <a:lstStyle/>
+              <a:p>
+                <a:pPr algn="just"/>
+                <a14:m>
+                  <m:oMathPara xmlns:m="http://schemas.openxmlformats.org/officeDocument/2006/math">
+                    <m:oMathParaPr>
+                      <m:jc m:val="left"/>
+                    </m:oMathParaPr>
+                    <m:oMath xmlns:m="http://schemas.openxmlformats.org/officeDocument/2006/math">
+                      <m:r>
+                        <a:rPr lang="pt-BR" sz="3200" b="1" i="1" smtClean="0">
+                          <a:latin typeface="Cambria Math" panose="02040503050406030204" pitchFamily="18" charset="0"/>
+                        </a:rPr>
+                        <m:t>𝒙</m:t>
+                      </m:r>
+                      <m:r>
+                        <a:rPr lang="pt-BR" sz="3200" b="0" i="1" smtClean="0">
+                          <a:latin typeface="Cambria Math" panose="02040503050406030204" pitchFamily="18" charset="0"/>
+                        </a:rPr>
+                        <m:t>=</m:t>
+                      </m:r>
+                      <m:d>
+                        <m:dPr>
+                          <m:begChr m:val="{"/>
+                          <m:endChr m:val="}"/>
+                          <m:ctrlPr>
+                            <a:rPr lang="pt-BR" sz="3200" b="0" i="1" smtClean="0">
+                              <a:latin typeface="Cambria Math" panose="02040503050406030204" pitchFamily="18" charset="0"/>
+                            </a:rPr>
+                          </m:ctrlPr>
+                        </m:dPr>
+                        <m:e>
+                          <m:r>
+                            <a:rPr lang="pt-BR" sz="3200" b="0" i="1" smtClean="0">
+                              <a:latin typeface="Cambria Math" panose="02040503050406030204" pitchFamily="18" charset="0"/>
+                            </a:rPr>
+                            <m:t>−1, 0, 1, 2, 3, 4</m:t>
+                          </m:r>
+                        </m:e>
+                      </m:d>
+                    </m:oMath>
+                  </m:oMathPara>
+                </a14:m>
+                <a:endParaRPr lang="pt-BR" sz="3200" b="0" i="1" dirty="0">
+                  <a:latin typeface="Cambria Math" panose="02040503050406030204" pitchFamily="18" charset="0"/>
+                </a:endParaRPr>
+              </a:p>
+              <a:p>
+                <a:pPr algn="just"/>
+                <a14:m>
+                  <m:oMathPara xmlns:m="http://schemas.openxmlformats.org/officeDocument/2006/math">
+                    <m:oMathParaPr>
+                      <m:jc m:val="left"/>
+                    </m:oMathParaPr>
+                    <m:oMath xmlns:m="http://schemas.openxmlformats.org/officeDocument/2006/math">
+                      <m:r>
+                        <a:rPr lang="pt-BR" sz="3200" b="1" i="1" smtClean="0">
+                          <a:latin typeface="Cambria Math" panose="02040503050406030204" pitchFamily="18" charset="0"/>
+                        </a:rPr>
+                        <m:t>𝒚</m:t>
+                      </m:r>
+                      <m:r>
+                        <a:rPr lang="pt-BR" sz="3200" b="0" i="1" smtClean="0">
+                          <a:latin typeface="Cambria Math" panose="02040503050406030204" pitchFamily="18" charset="0"/>
+                        </a:rPr>
+                        <m:t>=</m:t>
+                      </m:r>
+                      <m:d>
+                        <m:dPr>
+                          <m:begChr m:val="{"/>
+                          <m:endChr m:val="}"/>
+                          <m:ctrlPr>
+                            <a:rPr lang="pt-BR" sz="3200" b="0" i="1" smtClean="0">
+                              <a:latin typeface="Cambria Math" panose="02040503050406030204" pitchFamily="18" charset="0"/>
+                            </a:rPr>
+                          </m:ctrlPr>
+                        </m:dPr>
+                        <m:e>
+                          <m:r>
+                            <a:rPr lang="pt-BR" sz="3200" b="0" i="1" smtClean="0">
+                              <a:latin typeface="Cambria Math" panose="02040503050406030204" pitchFamily="18" charset="0"/>
+                            </a:rPr>
+                            <m:t>−3, −1, 1, 3, 5, 7</m:t>
+                          </m:r>
+                        </m:e>
+                      </m:d>
+                    </m:oMath>
+                  </m:oMathPara>
+                </a14:m>
+                <a:endParaRPr lang="pt-BR" sz="3200" dirty="0"/>
+              </a:p>
+            </p:txBody>
+          </p:sp>
+        </mc:Choice>
+        <mc:Fallback xmlns="">
+          <p:sp>
+            <p:nvSpPr>
+              <p:cNvPr id="4" name="CaixaDeTexto 3">
+                <a:extLst>
+                  <a:ext uri="{FF2B5EF4-FFF2-40B4-BE49-F238E27FC236}">
+                    <a16:creationId xmlns:a16="http://schemas.microsoft.com/office/drawing/2014/main" id="{457B0757-0010-3DDB-7F4D-4E0B92E0088F}"/>
+                  </a:ext>
+                </a:extLst>
+              </p:cNvPr>
+              <p:cNvSpPr txBox="1">
+                <a:spLocks noRot="1" noChangeAspect="1" noMove="1" noResize="1" noEditPoints="1" noAdjustHandles="1" noChangeArrowheads="1" noChangeShapeType="1" noTextEdit="1"/>
+              </p:cNvSpPr>
+              <p:nvPr/>
+            </p:nvSpPr>
+            <p:spPr>
+              <a:xfrm>
+                <a:off x="838200" y="1947542"/>
+                <a:ext cx="4275711" cy="1077218"/>
+              </a:xfrm>
+              <a:prstGeom prst="rect">
+                <a:avLst/>
+              </a:prstGeom>
+              <a:blipFill>
+                <a:blip r:embed="rId4"/>
+                <a:stretch>
+                  <a:fillRect/>
+                </a:stretch>
+              </a:blipFill>
+            </p:spPr>
+            <p:txBody>
+              <a:bodyPr/>
+              <a:lstStyle/>
+              <a:p>
+                <a:r>
+                  <a:rPr lang="pt-BR">
+                    <a:noFill/>
+                  </a:rPr>
+                  <a:t> </a:t>
+                </a:r>
+              </a:p>
+            </p:txBody>
+          </p:sp>
+        </mc:Fallback>
+      </mc:AlternateContent>
+    </p:spTree>
+    <p:extLst>
+      <p:ext uri="{BB962C8B-B14F-4D97-AF65-F5344CB8AC3E}">
+        <p14:creationId xmlns:p14="http://schemas.microsoft.com/office/powerpoint/2010/main" val="4182266788"/>
+      </p:ext>
+    </p:extLst>
+  </p:cSld>
+  <p:clrMapOvr>
+    <a:masterClrMapping/>
+  </p:clrMapOvr>
+</p:sld>
+</file>
+
+<file path=ppt/slides/slide30.xml><?xml version="1.0" encoding="utf-8"?>
 <p:sld xmlns:a="http://schemas.openxmlformats.org/drawingml/2006/main" xmlns:r="http://schemas.openxmlformats.org/officeDocument/2006/relationships" xmlns:p="http://schemas.openxmlformats.org/presentationml/2006/main">
   <p:cSld>
     <p:spTree>
@@ -22731,8 +25302,8 @@
         </p:nvSpPr>
         <p:spPr>
           <a:xfrm>
-            <a:off x="5722706" y="1825625"/>
-            <a:ext cx="6240694" cy="5032376"/>
+            <a:off x="5722705" y="1825625"/>
+            <a:ext cx="6339155" cy="5032376"/>
           </a:xfrm>
         </p:spPr>
         <p:txBody>
@@ -22755,7 +25326,7 @@
             </a:r>
             <a:r>
               <a:rPr lang="pt-BR" dirty="0"/>
-              <a:t>/atualização do modelo se </a:t>
+              <a:t> (ou atualização) do modelo se </a:t>
             </a:r>
             <a:r>
               <a:rPr lang="pt-BR" b="1" i="1" dirty="0">
@@ -23798,7 +26369,7 @@
 </p:sld>
 </file>
 
-<file path=ppt/slides/slide29.xml><?xml version="1.0" encoding="utf-8"?>
+<file path=ppt/slides/slide31.xml><?xml version="1.0" encoding="utf-8"?>
 <p:sld xmlns:a="http://schemas.openxmlformats.org/drawingml/2006/main" xmlns:r="http://schemas.openxmlformats.org/officeDocument/2006/relationships" xmlns:p="http://schemas.openxmlformats.org/presentationml/2006/main">
   <p:cSld>
     <p:spTree>
@@ -25188,488 +27759,7 @@
 </p:sld>
 </file>
 
-<file path=ppt/slides/slide3.xml><?xml version="1.0" encoding="utf-8"?>
-<p:sld xmlns:a="http://schemas.openxmlformats.org/drawingml/2006/main" xmlns:r="http://schemas.openxmlformats.org/officeDocument/2006/relationships" xmlns:p="http://schemas.openxmlformats.org/presentationml/2006/main">
-  <p:cSld>
-    <p:spTree>
-      <p:nvGrpSpPr>
-        <p:cNvPr id="1" name=""/>
-        <p:cNvGrpSpPr/>
-        <p:nvPr/>
-      </p:nvGrpSpPr>
-      <p:grpSpPr>
-        <a:xfrm>
-          <a:off x="0" y="0"/>
-          <a:ext cx="0" cy="0"/>
-          <a:chOff x="0" y="0"/>
-          <a:chExt cx="0" cy="0"/>
-        </a:xfrm>
-      </p:grpSpPr>
-      <mc:AlternateContent xmlns:mc="http://schemas.openxmlformats.org/markup-compatibility/2006" xmlns:a14="http://schemas.microsoft.com/office/drawing/2010/main">
-        <mc:Choice Requires="a14">
-          <p:sp>
-            <p:nvSpPr>
-              <p:cNvPr id="2" name="Título 1">
-                <a:extLst>
-                  <a:ext uri="{FF2B5EF4-FFF2-40B4-BE49-F238E27FC236}">
-                    <a16:creationId xmlns:a16="http://schemas.microsoft.com/office/drawing/2014/main" id="{EBBFACCC-402D-F8EB-8DF6-A01AC2F11478}"/>
-                  </a:ext>
-                </a:extLst>
-              </p:cNvPr>
-              <p:cNvSpPr>
-                <a:spLocks noGrp="1"/>
-              </p:cNvSpPr>
-              <p:nvPr>
-                <p:ph type="title"/>
-              </p:nvPr>
-            </p:nvSpPr>
-            <p:spPr/>
-            <p:txBody>
-              <a:bodyPr/>
-              <a:lstStyle/>
-              <a:p>
-                <a:r>
-                  <a:rPr lang="pt-BR" dirty="0"/>
-                  <a:t>Mapeando </a:t>
-                </a:r>
-                <a14:m>
-                  <m:oMath xmlns:m="http://schemas.openxmlformats.org/officeDocument/2006/math">
-                    <m:r>
-                      <a:rPr lang="pt-BR" b="1" i="1" smtClean="0">
-                        <a:latin typeface="Cambria Math" panose="02040503050406030204" pitchFamily="18" charset="0"/>
-                      </a:rPr>
-                      <m:t>𝒙</m:t>
-                    </m:r>
-                  </m:oMath>
-                </a14:m>
-                <a:r>
-                  <a:rPr lang="pt-BR" dirty="0"/>
-                  <a:t> em </a:t>
-                </a:r>
-                <a14:m>
-                  <m:oMath xmlns:m="http://schemas.openxmlformats.org/officeDocument/2006/math">
-                    <m:r>
-                      <a:rPr lang="pt-BR" b="1" i="1" smtClean="0">
-                        <a:latin typeface="Cambria Math" panose="02040503050406030204" pitchFamily="18" charset="0"/>
-                      </a:rPr>
-                      <m:t>𝒚</m:t>
-                    </m:r>
-                  </m:oMath>
-                </a14:m>
-                <a:endParaRPr lang="pt-BR" b="1" dirty="0"/>
-              </a:p>
-            </p:txBody>
-          </p:sp>
-        </mc:Choice>
-        <mc:Fallback xmlns="">
-          <p:sp>
-            <p:nvSpPr>
-              <p:cNvPr id="2" name="Título 1">
-                <a:extLst>
-                  <a:ext uri="{FF2B5EF4-FFF2-40B4-BE49-F238E27FC236}">
-                    <a16:creationId xmlns:a16="http://schemas.microsoft.com/office/drawing/2014/main" id="{EBBFACCC-402D-F8EB-8DF6-A01AC2F11478}"/>
-                  </a:ext>
-                </a:extLst>
-              </p:cNvPr>
-              <p:cNvSpPr>
-                <a:spLocks noGrp="1" noRot="1" noChangeAspect="1" noMove="1" noResize="1" noEditPoints="1" noAdjustHandles="1" noChangeArrowheads="1" noChangeShapeType="1" noTextEdit="1"/>
-              </p:cNvSpPr>
-              <p:nvPr>
-                <p:ph type="title"/>
-              </p:nvPr>
-            </p:nvSpPr>
-            <p:spPr>
-              <a:blipFill>
-                <a:blip r:embed="rId2"/>
-                <a:stretch>
-                  <a:fillRect l="-2377"/>
-                </a:stretch>
-              </a:blipFill>
-            </p:spPr>
-            <p:txBody>
-              <a:bodyPr/>
-              <a:lstStyle/>
-              <a:p>
-                <a:r>
-                  <a:rPr lang="pt-BR">
-                    <a:noFill/>
-                  </a:rPr>
-                  <a:t> </a:t>
-                </a:r>
-              </a:p>
-            </p:txBody>
-          </p:sp>
-        </mc:Fallback>
-      </mc:AlternateContent>
-      <mc:AlternateContent xmlns:mc="http://schemas.openxmlformats.org/markup-compatibility/2006">
-        <mc:Choice xmlns:a14="http://schemas.microsoft.com/office/drawing/2010/main" Requires="a14">
-          <p:sp>
-            <p:nvSpPr>
-              <p:cNvPr id="3" name="Espaço Reservado para Conteúdo 2">
-                <a:extLst>
-                  <a:ext uri="{FF2B5EF4-FFF2-40B4-BE49-F238E27FC236}">
-                    <a16:creationId xmlns:a16="http://schemas.microsoft.com/office/drawing/2014/main" id="{574AB04A-D8D2-BC7E-F4F7-97B83877B167}"/>
-                  </a:ext>
-                </a:extLst>
-              </p:cNvPr>
-              <p:cNvSpPr>
-                <a:spLocks noGrp="1"/>
-              </p:cNvSpPr>
-              <p:nvPr>
-                <p:ph idx="1"/>
-              </p:nvPr>
-            </p:nvSpPr>
-            <p:spPr>
-              <a:xfrm>
-                <a:off x="5291192" y="1825624"/>
-                <a:ext cx="6760396" cy="5032375"/>
-              </a:xfrm>
-            </p:spPr>
-            <p:txBody>
-              <a:bodyPr>
-                <a:normAutofit/>
-              </a:bodyPr>
-              <a:lstStyle/>
-              <a:p>
-                <a:r>
-                  <a:rPr lang="pt-BR" dirty="0"/>
-                  <a:t>Considerem esses dois conjuntos de números.</a:t>
-                </a:r>
-              </a:p>
-              <a:p>
-                <a:pPr lvl="1">
-                  <a:buFont typeface="Wingdings" panose="05000000000000000000" pitchFamily="2" charset="2"/>
-                  <a:buChar char="§"/>
-                </a:pPr>
-                <a:r>
-                  <a:rPr lang="pt-BR" dirty="0"/>
-                  <a:t>Entradas e suas respectivas saídas esperadas.</a:t>
-                </a:r>
-              </a:p>
-              <a:p>
-                <a:r>
-                  <a:rPr lang="pt-BR" dirty="0"/>
-                  <a:t>Qual a relação entre os dois conjuntos? </a:t>
-                </a:r>
-              </a:p>
-              <a:p>
-                <a:pPr lvl="1">
-                  <a:buFont typeface="Wingdings" panose="05000000000000000000" pitchFamily="2" charset="2"/>
-                  <a:buChar char="§"/>
-                </a:pPr>
-                <a:r>
-                  <a:rPr lang="pt-BR" dirty="0"/>
-                  <a:t>Ou seja, qual é a </a:t>
-                </a:r>
-                <a:r>
-                  <a:rPr lang="pt-BR" b="1" i="1" dirty="0">
-                    <a:solidFill>
-                      <a:srgbClr val="00B050"/>
-                    </a:solidFill>
-                  </a:rPr>
-                  <a:t>função que mapeia </a:t>
-                </a:r>
-                <a:r>
-                  <a:rPr lang="pt-BR" dirty="0"/>
-                  <a:t>os valores de </a:t>
-                </a:r>
-                <a14:m>
-                  <m:oMath xmlns:m="http://schemas.openxmlformats.org/officeDocument/2006/math">
-                    <m:r>
-                      <a:rPr lang="pt-BR" b="1" i="1" smtClean="0">
-                        <a:latin typeface="Cambria Math" panose="02040503050406030204" pitchFamily="18" charset="0"/>
-                      </a:rPr>
-                      <m:t>𝒙</m:t>
-                    </m:r>
-                  </m:oMath>
-                </a14:m>
-                <a:r>
-                  <a:rPr lang="pt-BR" dirty="0"/>
-                  <a:t> em </a:t>
-                </a:r>
-                <a14:m>
-                  <m:oMath xmlns:m="http://schemas.openxmlformats.org/officeDocument/2006/math">
-                    <m:r>
-                      <a:rPr lang="pt-BR" b="1" i="1">
-                        <a:latin typeface="Cambria Math" panose="02040503050406030204" pitchFamily="18" charset="0"/>
-                      </a:rPr>
-                      <m:t>𝒚</m:t>
-                    </m:r>
-                  </m:oMath>
-                </a14:m>
-                <a:r>
-                  <a:rPr lang="pt-BR" dirty="0"/>
-                  <a:t>?</a:t>
-                </a:r>
-              </a:p>
-              <a:p>
-                <a:r>
-                  <a:rPr lang="pt-BR" dirty="0"/>
-                  <a:t>Nós sabemos que </a:t>
-                </a:r>
-                <a14:m>
-                  <m:oMath xmlns:m="http://schemas.openxmlformats.org/officeDocument/2006/math">
-                    <m:r>
-                      <a:rPr lang="pt-BR" b="1" i="1" smtClean="0">
-                        <a:latin typeface="Cambria Math" panose="02040503050406030204" pitchFamily="18" charset="0"/>
-                      </a:rPr>
-                      <m:t>𝒚</m:t>
-                    </m:r>
-                  </m:oMath>
-                </a14:m>
-                <a:r>
-                  <a:rPr lang="pt-BR" dirty="0"/>
-                  <a:t> é uma função de </a:t>
-                </a:r>
-                <a14:m>
-                  <m:oMath xmlns:m="http://schemas.openxmlformats.org/officeDocument/2006/math">
-                    <m:r>
-                      <a:rPr lang="pt-BR" b="1" i="1">
-                        <a:latin typeface="Cambria Math" panose="02040503050406030204" pitchFamily="18" charset="0"/>
-                      </a:rPr>
-                      <m:t>𝒙</m:t>
-                    </m:r>
-                  </m:oMath>
-                </a14:m>
-                <a:r>
-                  <a:rPr lang="pt-BR" dirty="0"/>
-                  <a:t>, nós só não sabemos que função é essa.</a:t>
-                </a:r>
-              </a:p>
-              <a:p>
-                <a:r>
-                  <a:rPr lang="pt-BR" dirty="0"/>
-                  <a:t>Que tal plotarmos esses pontos?</a:t>
-                </a:r>
-              </a:p>
-            </p:txBody>
-          </p:sp>
-        </mc:Choice>
-        <mc:Fallback>
-          <p:sp>
-            <p:nvSpPr>
-              <p:cNvPr id="3" name="Espaço Reservado para Conteúdo 2">
-                <a:extLst>
-                  <a:ext uri="{FF2B5EF4-FFF2-40B4-BE49-F238E27FC236}">
-                    <a16:creationId xmlns:a16="http://schemas.microsoft.com/office/drawing/2014/main" id="{574AB04A-D8D2-BC7E-F4F7-97B83877B167}"/>
-                  </a:ext>
-                </a:extLst>
-              </p:cNvPr>
-              <p:cNvSpPr>
-                <a:spLocks noGrp="1" noRot="1" noChangeAspect="1" noMove="1" noResize="1" noEditPoints="1" noAdjustHandles="1" noChangeArrowheads="1" noChangeShapeType="1" noTextEdit="1"/>
-              </p:cNvSpPr>
-              <p:nvPr>
-                <p:ph idx="1"/>
-              </p:nvPr>
-            </p:nvSpPr>
-            <p:spPr>
-              <a:xfrm>
-                <a:off x="5291192" y="1825624"/>
-                <a:ext cx="6760396" cy="5032375"/>
-              </a:xfrm>
-              <a:blipFill>
-                <a:blip r:embed="rId3"/>
-                <a:stretch>
-                  <a:fillRect l="-1623" t="-1937" r="-2525"/>
-                </a:stretch>
-              </a:blipFill>
-            </p:spPr>
-            <p:txBody>
-              <a:bodyPr/>
-              <a:lstStyle/>
-              <a:p>
-                <a:r>
-                  <a:rPr lang="en-US">
-                    <a:noFill/>
-                  </a:rPr>
-                  <a:t> </a:t>
-                </a:r>
-              </a:p>
-            </p:txBody>
-          </p:sp>
-        </mc:Fallback>
-      </mc:AlternateContent>
-      <mc:AlternateContent xmlns:mc="http://schemas.openxmlformats.org/markup-compatibility/2006" xmlns:a14="http://schemas.microsoft.com/office/drawing/2010/main">
-        <mc:Choice Requires="a14">
-          <p:sp>
-            <p:nvSpPr>
-              <p:cNvPr id="4" name="CaixaDeTexto 3">
-                <a:extLst>
-                  <a:ext uri="{FF2B5EF4-FFF2-40B4-BE49-F238E27FC236}">
-                    <a16:creationId xmlns:a16="http://schemas.microsoft.com/office/drawing/2014/main" id="{457B0757-0010-3DDB-7F4D-4E0B92E0088F}"/>
-                  </a:ext>
-                </a:extLst>
-              </p:cNvPr>
-              <p:cNvSpPr txBox="1"/>
-              <p:nvPr/>
-            </p:nvSpPr>
-            <p:spPr>
-              <a:xfrm>
-                <a:off x="838200" y="1947542"/>
-                <a:ext cx="4275711" cy="1077218"/>
-              </a:xfrm>
-              <a:prstGeom prst="rect">
-                <a:avLst/>
-              </a:prstGeom>
-              <a:noFill/>
-            </p:spPr>
-            <p:txBody>
-              <a:bodyPr wrap="square" rtlCol="0">
-                <a:spAutoFit/>
-              </a:bodyPr>
-              <a:lstStyle/>
-              <a:p>
-                <a:pPr algn="just"/>
-                <a14:m>
-                  <m:oMathPara xmlns:m="http://schemas.openxmlformats.org/officeDocument/2006/math">
-                    <m:oMathParaPr>
-                      <m:jc m:val="left"/>
-                    </m:oMathParaPr>
-                    <m:oMath xmlns:m="http://schemas.openxmlformats.org/officeDocument/2006/math">
-                      <m:r>
-                        <a:rPr lang="pt-BR" sz="3200" b="1" i="1" smtClean="0">
-                          <a:latin typeface="Cambria Math" panose="02040503050406030204" pitchFamily="18" charset="0"/>
-                        </a:rPr>
-                        <m:t>𝒙</m:t>
-                      </m:r>
-                      <m:r>
-                        <a:rPr lang="pt-BR" sz="3200" b="0" i="1" smtClean="0">
-                          <a:latin typeface="Cambria Math" panose="02040503050406030204" pitchFamily="18" charset="0"/>
-                        </a:rPr>
-                        <m:t>=</m:t>
-                      </m:r>
-                      <m:d>
-                        <m:dPr>
-                          <m:begChr m:val="{"/>
-                          <m:endChr m:val="}"/>
-                          <m:ctrlPr>
-                            <a:rPr lang="pt-BR" sz="3200" b="0" i="1" smtClean="0">
-                              <a:latin typeface="Cambria Math" panose="02040503050406030204" pitchFamily="18" charset="0"/>
-                            </a:rPr>
-                          </m:ctrlPr>
-                        </m:dPr>
-                        <m:e>
-                          <m:r>
-                            <a:rPr lang="pt-BR" sz="3200" b="0" i="1" smtClean="0">
-                              <a:latin typeface="Cambria Math" panose="02040503050406030204" pitchFamily="18" charset="0"/>
-                            </a:rPr>
-                            <m:t>−1, 0, 1, 2, 3, 4</m:t>
-                          </m:r>
-                        </m:e>
-                      </m:d>
-                    </m:oMath>
-                  </m:oMathPara>
-                </a14:m>
-                <a:endParaRPr lang="pt-BR" sz="3200" b="0" i="1" dirty="0">
-                  <a:latin typeface="Cambria Math" panose="02040503050406030204" pitchFamily="18" charset="0"/>
-                </a:endParaRPr>
-              </a:p>
-              <a:p>
-                <a:pPr algn="just"/>
-                <a14:m>
-                  <m:oMathPara xmlns:m="http://schemas.openxmlformats.org/officeDocument/2006/math">
-                    <m:oMathParaPr>
-                      <m:jc m:val="left"/>
-                    </m:oMathParaPr>
-                    <m:oMath xmlns:m="http://schemas.openxmlformats.org/officeDocument/2006/math">
-                      <m:r>
-                        <a:rPr lang="pt-BR" sz="3200" b="1" i="1" smtClean="0">
-                          <a:latin typeface="Cambria Math" panose="02040503050406030204" pitchFamily="18" charset="0"/>
-                        </a:rPr>
-                        <m:t>𝒚</m:t>
-                      </m:r>
-                      <m:r>
-                        <a:rPr lang="pt-BR" sz="3200" b="0" i="1" smtClean="0">
-                          <a:latin typeface="Cambria Math" panose="02040503050406030204" pitchFamily="18" charset="0"/>
-                        </a:rPr>
-                        <m:t>=</m:t>
-                      </m:r>
-                      <m:d>
-                        <m:dPr>
-                          <m:begChr m:val="{"/>
-                          <m:endChr m:val="}"/>
-                          <m:ctrlPr>
-                            <a:rPr lang="pt-BR" sz="3200" b="0" i="1" smtClean="0">
-                              <a:latin typeface="Cambria Math" panose="02040503050406030204" pitchFamily="18" charset="0"/>
-                            </a:rPr>
-                          </m:ctrlPr>
-                        </m:dPr>
-                        <m:e>
-                          <m:r>
-                            <a:rPr lang="pt-BR" sz="3200" b="0" i="1" smtClean="0">
-                              <a:latin typeface="Cambria Math" panose="02040503050406030204" pitchFamily="18" charset="0"/>
-                            </a:rPr>
-                            <m:t>−3, −1, 1, 3, 5, 7</m:t>
-                          </m:r>
-                        </m:e>
-                      </m:d>
-                    </m:oMath>
-                  </m:oMathPara>
-                </a14:m>
-                <a:endParaRPr lang="pt-BR" sz="3200" dirty="0"/>
-              </a:p>
-            </p:txBody>
-          </p:sp>
-        </mc:Choice>
-        <mc:Fallback xmlns="">
-          <p:sp>
-            <p:nvSpPr>
-              <p:cNvPr id="4" name="CaixaDeTexto 3">
-                <a:extLst>
-                  <a:ext uri="{FF2B5EF4-FFF2-40B4-BE49-F238E27FC236}">
-                    <a16:creationId xmlns:a16="http://schemas.microsoft.com/office/drawing/2014/main" id="{457B0757-0010-3DDB-7F4D-4E0B92E0088F}"/>
-                  </a:ext>
-                </a:extLst>
-              </p:cNvPr>
-              <p:cNvSpPr txBox="1">
-                <a:spLocks noRot="1" noChangeAspect="1" noMove="1" noResize="1" noEditPoints="1" noAdjustHandles="1" noChangeArrowheads="1" noChangeShapeType="1" noTextEdit="1"/>
-              </p:cNvSpPr>
-              <p:nvPr/>
-            </p:nvSpPr>
-            <p:spPr>
-              <a:xfrm>
-                <a:off x="838200" y="1947542"/>
-                <a:ext cx="4275711" cy="1077218"/>
-              </a:xfrm>
-              <a:prstGeom prst="rect">
-                <a:avLst/>
-              </a:prstGeom>
-              <a:blipFill>
-                <a:blip r:embed="rId4"/>
-                <a:stretch>
-                  <a:fillRect/>
-                </a:stretch>
-              </a:blipFill>
-            </p:spPr>
-            <p:txBody>
-              <a:bodyPr/>
-              <a:lstStyle/>
-              <a:p>
-                <a:r>
-                  <a:rPr lang="pt-BR">
-                    <a:noFill/>
-                  </a:rPr>
-                  <a:t> </a:t>
-                </a:r>
-              </a:p>
-            </p:txBody>
-          </p:sp>
-        </mc:Fallback>
-      </mc:AlternateContent>
-    </p:spTree>
-    <p:extLst>
-      <p:ext uri="{BB962C8B-B14F-4D97-AF65-F5344CB8AC3E}">
-        <p14:creationId xmlns:p14="http://schemas.microsoft.com/office/powerpoint/2010/main" val="4182266788"/>
-      </p:ext>
-    </p:extLst>
-  </p:cSld>
-  <p:clrMapOvr>
-    <a:masterClrMapping/>
-  </p:clrMapOvr>
-</p:sld>
-</file>
-
-<file path=ppt/slides/slide30.xml><?xml version="1.0" encoding="utf-8"?>
+<file path=ppt/slides/slide32.xml><?xml version="1.0" encoding="utf-8"?>
 <p:sld xmlns:a="http://schemas.openxmlformats.org/drawingml/2006/main" xmlns:r="http://schemas.openxmlformats.org/officeDocument/2006/relationships" xmlns:p="http://schemas.openxmlformats.org/presentationml/2006/main">
   <p:cSld>
     <p:spTree>
@@ -26037,7 +28127,7 @@
 </p:sld>
 </file>
 
-<file path=ppt/slides/slide31.xml><?xml version="1.0" encoding="utf-8"?>
+<file path=ppt/slides/slide33.xml><?xml version="1.0" encoding="utf-8"?>
 <p:sld xmlns:a="http://schemas.openxmlformats.org/drawingml/2006/main" xmlns:r="http://schemas.openxmlformats.org/officeDocument/2006/relationships" xmlns:p="http://schemas.openxmlformats.org/presentationml/2006/main">
   <p:cSld>
     <p:spTree>
@@ -26276,7 +28366,7 @@
 </p:sld>
 </file>
 
-<file path=ppt/slides/slide32.xml><?xml version="1.0" encoding="utf-8"?>
+<file path=ppt/slides/slide34.xml><?xml version="1.0" encoding="utf-8"?>
 <p:sld xmlns:a="http://schemas.openxmlformats.org/drawingml/2006/main" xmlns:r="http://schemas.openxmlformats.org/officeDocument/2006/relationships" xmlns:p="http://schemas.openxmlformats.org/presentationml/2006/main">
   <p:cSld>
     <p:spTree>
@@ -26386,7 +28476,7 @@
 </p:sld>
 </file>
 
-<file path=ppt/slides/slide33.xml><?xml version="1.0" encoding="utf-8"?>
+<file path=ppt/slides/slide35.xml><?xml version="1.0" encoding="utf-8"?>
 <p:sld xmlns:a="http://schemas.openxmlformats.org/drawingml/2006/main" xmlns:r="http://schemas.openxmlformats.org/officeDocument/2006/relationships" xmlns:p="http://schemas.openxmlformats.org/presentationml/2006/main">
   <p:cSld>
     <p:spTree>
@@ -26472,7 +28562,7 @@
 </p:sld>
 </file>
 
-<file path=ppt/slides/slide34.xml><?xml version="1.0" encoding="utf-8"?>
+<file path=ppt/slides/slide36.xml><?xml version="1.0" encoding="utf-8"?>
 <p:sld xmlns:a="http://schemas.openxmlformats.org/drawingml/2006/main" xmlns:r="http://schemas.openxmlformats.org/officeDocument/2006/relationships" xmlns:p="http://schemas.openxmlformats.org/presentationml/2006/main">
   <p:cSld>
     <p:spTree>
@@ -26558,7 +28648,7 @@
 </p:sld>
 </file>
 
-<file path=ppt/slides/slide35.xml><?xml version="1.0" encoding="utf-8"?>
+<file path=ppt/slides/slide37.xml><?xml version="1.0" encoding="utf-8"?>
 <p:sld xmlns:a="http://schemas.openxmlformats.org/drawingml/2006/main" xmlns:r="http://schemas.openxmlformats.org/officeDocument/2006/relationships" xmlns:p="http://schemas.openxmlformats.org/presentationml/2006/main">
   <p:cSld>
     <p:spTree>
@@ -27857,8 +29947,8 @@
           </p:sp>
         </mc:Fallback>
       </mc:AlternateContent>
-      <mc:AlternateContent xmlns:mc="http://schemas.openxmlformats.org/markup-compatibility/2006">
-        <mc:Choice xmlns:a14="http://schemas.microsoft.com/office/drawing/2010/main" Requires="a14">
+      <mc:AlternateContent xmlns:mc="http://schemas.openxmlformats.org/markup-compatibility/2006" xmlns:a14="http://schemas.microsoft.com/office/drawing/2010/main">
+        <mc:Choice Requires="a14">
           <p:sp>
             <p:nvSpPr>
               <p:cNvPr id="3" name="Espaço Reservado para Conteúdo 2">
@@ -28110,7 +30200,7 @@
             </p:txBody>
           </p:sp>
         </mc:Choice>
-        <mc:Fallback>
+        <mc:Fallback xmlns="">
           <p:sp>
             <p:nvSpPr>
               <p:cNvPr id="3" name="Espaço Reservado para Conteúdo 2">
@@ -30218,8 +32308,8 @@
           </a:p>
         </p:txBody>
       </p:sp>
-      <mc:AlternateContent xmlns:mc="http://schemas.openxmlformats.org/markup-compatibility/2006">
-        <mc:Choice xmlns:a14="http://schemas.microsoft.com/office/drawing/2010/main" Requires="a14">
+      <mc:AlternateContent xmlns:mc="http://schemas.openxmlformats.org/markup-compatibility/2006" xmlns:a14="http://schemas.microsoft.com/office/drawing/2010/main">
+        <mc:Choice Requires="a14">
           <p:sp>
             <p:nvSpPr>
               <p:cNvPr id="3" name="Espaço Reservado para Conteúdo 2">
@@ -30274,7 +32364,7 @@
             </p:txBody>
           </p:sp>
         </mc:Choice>
-        <mc:Fallback>
+        <mc:Fallback xmlns="">
           <p:sp>
             <p:nvSpPr>
               <p:cNvPr id="3" name="Espaço Reservado para Conteúdo 2">

--- a/slides/TP557_5_Medindo_a_precisão_de_um_modelo_de_ML.pptx
+++ b/slides/TP557_5_Medindo_a_precisão_de_um_modelo_de_ML.pptx
@@ -312,7 +312,7 @@
           <a:p>
             <a:fld id="{144F1436-6906-4D93-B7A2-786C327BFA14}" type="datetimeFigureOut">
               <a:rPr lang="nl-BE" smtClean="0"/>
-              <a:t>31/03/2025</a:t>
+              <a:t>2/04/2025</a:t>
             </a:fld>
             <a:endParaRPr lang="nl-BE"/>
           </a:p>
@@ -477,7 +477,7 @@
           <a:p>
             <a:fld id="{AA8CD09E-2914-4F47-B6C1-51B2C31814C9}" type="datetimeFigureOut">
               <a:rPr lang="pt-BR" smtClean="0"/>
-              <a:t>31/03/2025</a:t>
+              <a:t>02/04/2025</a:t>
             </a:fld>
             <a:endParaRPr lang="pt-BR"/>
           </a:p>
@@ -1739,7 +1739,7 @@
         <p:cNvPr id="1" name="">
           <a:extLst>
             <a:ext uri="{FF2B5EF4-FFF2-40B4-BE49-F238E27FC236}">
-              <a16:creationId xmlns:a16="http://schemas.microsoft.com/office/drawing/2014/main" xmlns="" id="{9717057F-33FB-32C9-4D28-AB2F769E5E4A}"/>
+              <a16:creationId xmlns="" xmlns:a16="http://schemas.microsoft.com/office/drawing/2014/main" id="{9717057F-33FB-32C9-4D28-AB2F769E5E4A}"/>
             </a:ext>
           </a:extLst>
         </p:cNvPr>
@@ -1759,7 +1759,7 @@
           <p:cNvPr id="2" name="Espaço Reservado para Imagem de Slide 1">
             <a:extLst>
               <a:ext uri="{FF2B5EF4-FFF2-40B4-BE49-F238E27FC236}">
-                <a16:creationId xmlns:a16="http://schemas.microsoft.com/office/drawing/2014/main" xmlns="" id="{5C400566-A9E9-338F-076D-30D05E744DD9}"/>
+                <a16:creationId xmlns="" xmlns:a16="http://schemas.microsoft.com/office/drawing/2014/main" id="{5C400566-A9E9-338F-076D-30D05E744DD9}"/>
               </a:ext>
             </a:extLst>
           </p:cNvPr>
@@ -1777,7 +1777,7 @@
           <p:cNvPr id="3" name="Espaço Reservado para Anotações 2">
             <a:extLst>
               <a:ext uri="{FF2B5EF4-FFF2-40B4-BE49-F238E27FC236}">
-                <a16:creationId xmlns:a16="http://schemas.microsoft.com/office/drawing/2014/main" xmlns="" id="{D38315AD-8819-944D-0D8A-FB1058C702A8}"/>
+                <a16:creationId xmlns="" xmlns:a16="http://schemas.microsoft.com/office/drawing/2014/main" id="{D38315AD-8819-944D-0D8A-FB1058C702A8}"/>
               </a:ext>
             </a:extLst>
           </p:cNvPr>
@@ -1854,7 +1854,7 @@
           <p:cNvPr id="4" name="Espaço Reservado para Número de Slide 3">
             <a:extLst>
               <a:ext uri="{FF2B5EF4-FFF2-40B4-BE49-F238E27FC236}">
-                <a16:creationId xmlns:a16="http://schemas.microsoft.com/office/drawing/2014/main" xmlns="" id="{5569DC30-6F49-0875-C9D3-9E42CDE9E266}"/>
+                <a16:creationId xmlns="" xmlns:a16="http://schemas.microsoft.com/office/drawing/2014/main" id="{5569DC30-6F49-0875-C9D3-9E42CDE9E266}"/>
               </a:ext>
             </a:extLst>
           </p:cNvPr>
@@ -2321,7 +2321,7 @@
           <p:cNvPr id="2" name="Título 1">
             <a:extLst>
               <a:ext uri="{FF2B5EF4-FFF2-40B4-BE49-F238E27FC236}">
-                <a16:creationId xmlns:a16="http://schemas.microsoft.com/office/drawing/2014/main" xmlns="" id="{1DB9B4FF-B06E-403C-A326-BDC64D8FF94E}"/>
+                <a16:creationId xmlns="" xmlns:a16="http://schemas.microsoft.com/office/drawing/2014/main" id="{1DB9B4FF-B06E-403C-A326-BDC64D8FF94E}"/>
               </a:ext>
             </a:extLst>
           </p:cNvPr>
@@ -2358,7 +2358,7 @@
           <p:cNvPr id="3" name="Subtítulo 2">
             <a:extLst>
               <a:ext uri="{FF2B5EF4-FFF2-40B4-BE49-F238E27FC236}">
-                <a16:creationId xmlns:a16="http://schemas.microsoft.com/office/drawing/2014/main" xmlns="" id="{247BDFCE-746E-45BF-A319-4733D58D1632}"/>
+                <a16:creationId xmlns="" xmlns:a16="http://schemas.microsoft.com/office/drawing/2014/main" id="{247BDFCE-746E-45BF-A319-4733D58D1632}"/>
               </a:ext>
             </a:extLst>
           </p:cNvPr>
@@ -2428,7 +2428,7 @@
           <p:cNvPr id="4" name="Espaço Reservado para Data 3">
             <a:extLst>
               <a:ext uri="{FF2B5EF4-FFF2-40B4-BE49-F238E27FC236}">
-                <a16:creationId xmlns:a16="http://schemas.microsoft.com/office/drawing/2014/main" xmlns="" id="{9EDE2778-5372-4104-B96D-968184DA8288}"/>
+                <a16:creationId xmlns="" xmlns:a16="http://schemas.microsoft.com/office/drawing/2014/main" id="{9EDE2778-5372-4104-B96D-968184DA8288}"/>
               </a:ext>
             </a:extLst>
           </p:cNvPr>
@@ -2446,7 +2446,7 @@
           <a:p>
             <a:fld id="{63289F7E-B80B-496E-81B4-D396C37C9454}" type="datetimeFigureOut">
               <a:rPr lang="pt-BR" smtClean="0"/>
-              <a:t>31/03/2025</a:t>
+              <a:t>02/04/2025</a:t>
             </a:fld>
             <a:endParaRPr lang="pt-BR"/>
           </a:p>
@@ -2457,7 +2457,7 @@
           <p:cNvPr id="5" name="Espaço Reservado para Rodapé 4">
             <a:extLst>
               <a:ext uri="{FF2B5EF4-FFF2-40B4-BE49-F238E27FC236}">
-                <a16:creationId xmlns:a16="http://schemas.microsoft.com/office/drawing/2014/main" xmlns="" id="{C1DD0F41-C861-4051-988D-3024A37A4B93}"/>
+                <a16:creationId xmlns="" xmlns:a16="http://schemas.microsoft.com/office/drawing/2014/main" id="{C1DD0F41-C861-4051-988D-3024A37A4B93}"/>
               </a:ext>
             </a:extLst>
           </p:cNvPr>
@@ -2482,7 +2482,7 @@
           <p:cNvPr id="6" name="Espaço Reservado para Número de Slide 5">
             <a:extLst>
               <a:ext uri="{FF2B5EF4-FFF2-40B4-BE49-F238E27FC236}">
-                <a16:creationId xmlns:a16="http://schemas.microsoft.com/office/drawing/2014/main" xmlns="" id="{07E5967E-D980-431A-A5DB-3F0C5030A81E}"/>
+                <a16:creationId xmlns="" xmlns:a16="http://schemas.microsoft.com/office/drawing/2014/main" id="{07E5967E-D980-431A-A5DB-3F0C5030A81E}"/>
               </a:ext>
             </a:extLst>
           </p:cNvPr>
@@ -2541,7 +2541,7 @@
           <p:cNvPr id="2" name="Título 1">
             <a:extLst>
               <a:ext uri="{FF2B5EF4-FFF2-40B4-BE49-F238E27FC236}">
-                <a16:creationId xmlns:a16="http://schemas.microsoft.com/office/drawing/2014/main" xmlns="" id="{9036C49F-3E68-4175-81BA-3C3FEE44308A}"/>
+                <a16:creationId xmlns="" xmlns:a16="http://schemas.microsoft.com/office/drawing/2014/main" id="{9036C49F-3E68-4175-81BA-3C3FEE44308A}"/>
               </a:ext>
             </a:extLst>
           </p:cNvPr>
@@ -2569,7 +2569,7 @@
           <p:cNvPr id="3" name="Espaço Reservado para Texto Vertical 2">
             <a:extLst>
               <a:ext uri="{FF2B5EF4-FFF2-40B4-BE49-F238E27FC236}">
-                <a16:creationId xmlns:a16="http://schemas.microsoft.com/office/drawing/2014/main" xmlns="" id="{426FA736-3DD3-4D4E-B57B-BBE1D8F7D424}"/>
+                <a16:creationId xmlns="" xmlns:a16="http://schemas.microsoft.com/office/drawing/2014/main" id="{426FA736-3DD3-4D4E-B57B-BBE1D8F7D424}"/>
               </a:ext>
             </a:extLst>
           </p:cNvPr>
@@ -2626,7 +2626,7 @@
           <p:cNvPr id="4" name="Espaço Reservado para Data 3">
             <a:extLst>
               <a:ext uri="{FF2B5EF4-FFF2-40B4-BE49-F238E27FC236}">
-                <a16:creationId xmlns:a16="http://schemas.microsoft.com/office/drawing/2014/main" xmlns="" id="{99E8855C-D8FD-48F6-B14E-861E0DE4D915}"/>
+                <a16:creationId xmlns="" xmlns:a16="http://schemas.microsoft.com/office/drawing/2014/main" id="{99E8855C-D8FD-48F6-B14E-861E0DE4D915}"/>
               </a:ext>
             </a:extLst>
           </p:cNvPr>
@@ -2644,7 +2644,7 @@
           <a:p>
             <a:fld id="{63289F7E-B80B-496E-81B4-D396C37C9454}" type="datetimeFigureOut">
               <a:rPr lang="pt-BR" smtClean="0"/>
-              <a:t>31/03/2025</a:t>
+              <a:t>02/04/2025</a:t>
             </a:fld>
             <a:endParaRPr lang="pt-BR"/>
           </a:p>
@@ -2655,7 +2655,7 @@
           <p:cNvPr id="5" name="Espaço Reservado para Rodapé 4">
             <a:extLst>
               <a:ext uri="{FF2B5EF4-FFF2-40B4-BE49-F238E27FC236}">
-                <a16:creationId xmlns:a16="http://schemas.microsoft.com/office/drawing/2014/main" xmlns="" id="{97C0BB88-2F21-42A5-ACFF-83DA47F2D340}"/>
+                <a16:creationId xmlns="" xmlns:a16="http://schemas.microsoft.com/office/drawing/2014/main" id="{97C0BB88-2F21-42A5-ACFF-83DA47F2D340}"/>
               </a:ext>
             </a:extLst>
           </p:cNvPr>
@@ -2680,7 +2680,7 @@
           <p:cNvPr id="6" name="Espaço Reservado para Número de Slide 5">
             <a:extLst>
               <a:ext uri="{FF2B5EF4-FFF2-40B4-BE49-F238E27FC236}">
-                <a16:creationId xmlns:a16="http://schemas.microsoft.com/office/drawing/2014/main" xmlns="" id="{6CB462B3-1F22-4C05-B4B8-7A279FB7D5E9}"/>
+                <a16:creationId xmlns="" xmlns:a16="http://schemas.microsoft.com/office/drawing/2014/main" id="{6CB462B3-1F22-4C05-B4B8-7A279FB7D5E9}"/>
               </a:ext>
             </a:extLst>
           </p:cNvPr>
@@ -2739,7 +2739,7 @@
           <p:cNvPr id="2" name="Título Vertical 1">
             <a:extLst>
               <a:ext uri="{FF2B5EF4-FFF2-40B4-BE49-F238E27FC236}">
-                <a16:creationId xmlns:a16="http://schemas.microsoft.com/office/drawing/2014/main" xmlns="" id="{EAEAB728-701C-4207-A9D5-23FF45C60502}"/>
+                <a16:creationId xmlns="" xmlns:a16="http://schemas.microsoft.com/office/drawing/2014/main" id="{EAEAB728-701C-4207-A9D5-23FF45C60502}"/>
               </a:ext>
             </a:extLst>
           </p:cNvPr>
@@ -2772,7 +2772,7 @@
           <p:cNvPr id="3" name="Espaço Reservado para Texto Vertical 2">
             <a:extLst>
               <a:ext uri="{FF2B5EF4-FFF2-40B4-BE49-F238E27FC236}">
-                <a16:creationId xmlns:a16="http://schemas.microsoft.com/office/drawing/2014/main" xmlns="" id="{BA8C8CCF-7823-480A-9A19-0F664DD17E3B}"/>
+                <a16:creationId xmlns="" xmlns:a16="http://schemas.microsoft.com/office/drawing/2014/main" id="{BA8C8CCF-7823-480A-9A19-0F664DD17E3B}"/>
               </a:ext>
             </a:extLst>
           </p:cNvPr>
@@ -2834,7 +2834,7 @@
           <p:cNvPr id="4" name="Espaço Reservado para Data 3">
             <a:extLst>
               <a:ext uri="{FF2B5EF4-FFF2-40B4-BE49-F238E27FC236}">
-                <a16:creationId xmlns:a16="http://schemas.microsoft.com/office/drawing/2014/main" xmlns="" id="{721D5734-7B1F-425D-942F-6EB73344027C}"/>
+                <a16:creationId xmlns="" xmlns:a16="http://schemas.microsoft.com/office/drawing/2014/main" id="{721D5734-7B1F-425D-942F-6EB73344027C}"/>
               </a:ext>
             </a:extLst>
           </p:cNvPr>
@@ -2852,7 +2852,7 @@
           <a:p>
             <a:fld id="{63289F7E-B80B-496E-81B4-D396C37C9454}" type="datetimeFigureOut">
               <a:rPr lang="pt-BR" smtClean="0"/>
-              <a:t>31/03/2025</a:t>
+              <a:t>02/04/2025</a:t>
             </a:fld>
             <a:endParaRPr lang="pt-BR"/>
           </a:p>
@@ -2863,7 +2863,7 @@
           <p:cNvPr id="5" name="Espaço Reservado para Rodapé 4">
             <a:extLst>
               <a:ext uri="{FF2B5EF4-FFF2-40B4-BE49-F238E27FC236}">
-                <a16:creationId xmlns:a16="http://schemas.microsoft.com/office/drawing/2014/main" xmlns="" id="{1E1AAEAC-F08D-45FE-89EC-B1B349A868C9}"/>
+                <a16:creationId xmlns="" xmlns:a16="http://schemas.microsoft.com/office/drawing/2014/main" id="{1E1AAEAC-F08D-45FE-89EC-B1B349A868C9}"/>
               </a:ext>
             </a:extLst>
           </p:cNvPr>
@@ -2888,7 +2888,7 @@
           <p:cNvPr id="6" name="Espaço Reservado para Número de Slide 5">
             <a:extLst>
               <a:ext uri="{FF2B5EF4-FFF2-40B4-BE49-F238E27FC236}">
-                <a16:creationId xmlns:a16="http://schemas.microsoft.com/office/drawing/2014/main" xmlns="" id="{BAA44493-9911-47B2-87A6-C2141A972BC8}"/>
+                <a16:creationId xmlns="" xmlns:a16="http://schemas.microsoft.com/office/drawing/2014/main" id="{BAA44493-9911-47B2-87A6-C2141A972BC8}"/>
               </a:ext>
             </a:extLst>
           </p:cNvPr>
@@ -2947,7 +2947,7 @@
           <p:cNvPr id="2" name="Título 1">
             <a:extLst>
               <a:ext uri="{FF2B5EF4-FFF2-40B4-BE49-F238E27FC236}">
-                <a16:creationId xmlns:a16="http://schemas.microsoft.com/office/drawing/2014/main" xmlns="" id="{71BD44A5-8F21-4626-A01D-48A1C874B1D5}"/>
+                <a16:creationId xmlns="" xmlns:a16="http://schemas.microsoft.com/office/drawing/2014/main" id="{71BD44A5-8F21-4626-A01D-48A1C874B1D5}"/>
               </a:ext>
             </a:extLst>
           </p:cNvPr>
@@ -2975,7 +2975,7 @@
           <p:cNvPr id="3" name="Espaço Reservado para Conteúdo 2">
             <a:extLst>
               <a:ext uri="{FF2B5EF4-FFF2-40B4-BE49-F238E27FC236}">
-                <a16:creationId xmlns:a16="http://schemas.microsoft.com/office/drawing/2014/main" xmlns="" id="{B79E8085-65A9-48AA-951D-71D978BFF4ED}"/>
+                <a16:creationId xmlns="" xmlns:a16="http://schemas.microsoft.com/office/drawing/2014/main" id="{B79E8085-65A9-48AA-951D-71D978BFF4ED}"/>
               </a:ext>
             </a:extLst>
           </p:cNvPr>
@@ -3032,7 +3032,7 @@
           <p:cNvPr id="4" name="Espaço Reservado para Data 3">
             <a:extLst>
               <a:ext uri="{FF2B5EF4-FFF2-40B4-BE49-F238E27FC236}">
-                <a16:creationId xmlns:a16="http://schemas.microsoft.com/office/drawing/2014/main" xmlns="" id="{F05BE1AF-51EA-425D-B188-DE7BD675009F}"/>
+                <a16:creationId xmlns="" xmlns:a16="http://schemas.microsoft.com/office/drawing/2014/main" id="{F05BE1AF-51EA-425D-B188-DE7BD675009F}"/>
               </a:ext>
             </a:extLst>
           </p:cNvPr>
@@ -3050,7 +3050,7 @@
           <a:p>
             <a:fld id="{63289F7E-B80B-496E-81B4-D396C37C9454}" type="datetimeFigureOut">
               <a:rPr lang="pt-BR" smtClean="0"/>
-              <a:t>31/03/2025</a:t>
+              <a:t>02/04/2025</a:t>
             </a:fld>
             <a:endParaRPr lang="pt-BR"/>
           </a:p>
@@ -3061,7 +3061,7 @@
           <p:cNvPr id="5" name="Espaço Reservado para Rodapé 4">
             <a:extLst>
               <a:ext uri="{FF2B5EF4-FFF2-40B4-BE49-F238E27FC236}">
-                <a16:creationId xmlns:a16="http://schemas.microsoft.com/office/drawing/2014/main" xmlns="" id="{121BE632-29CF-4CB9-B365-C9EF38F89BE6}"/>
+                <a16:creationId xmlns="" xmlns:a16="http://schemas.microsoft.com/office/drawing/2014/main" id="{121BE632-29CF-4CB9-B365-C9EF38F89BE6}"/>
               </a:ext>
             </a:extLst>
           </p:cNvPr>
@@ -3086,7 +3086,7 @@
           <p:cNvPr id="6" name="Espaço Reservado para Número de Slide 5">
             <a:extLst>
               <a:ext uri="{FF2B5EF4-FFF2-40B4-BE49-F238E27FC236}">
-                <a16:creationId xmlns:a16="http://schemas.microsoft.com/office/drawing/2014/main" xmlns="" id="{60CF3DD1-9AEC-4A57-B461-4E4DD86FAC18}"/>
+                <a16:creationId xmlns="" xmlns:a16="http://schemas.microsoft.com/office/drawing/2014/main" id="{60CF3DD1-9AEC-4A57-B461-4E4DD86FAC18}"/>
               </a:ext>
             </a:extLst>
           </p:cNvPr>
@@ -3145,7 +3145,7 @@
           <p:cNvPr id="2" name="Título 1">
             <a:extLst>
               <a:ext uri="{FF2B5EF4-FFF2-40B4-BE49-F238E27FC236}">
-                <a16:creationId xmlns:a16="http://schemas.microsoft.com/office/drawing/2014/main" xmlns="" id="{34AB2FF0-A4D7-4E28-991D-FF26140D5988}"/>
+                <a16:creationId xmlns="" xmlns:a16="http://schemas.microsoft.com/office/drawing/2014/main" id="{34AB2FF0-A4D7-4E28-991D-FF26140D5988}"/>
               </a:ext>
             </a:extLst>
           </p:cNvPr>
@@ -3182,7 +3182,7 @@
           <p:cNvPr id="3" name="Espaço Reservado para Texto 2">
             <a:extLst>
               <a:ext uri="{FF2B5EF4-FFF2-40B4-BE49-F238E27FC236}">
-                <a16:creationId xmlns:a16="http://schemas.microsoft.com/office/drawing/2014/main" xmlns="" id="{E2AC45B0-4145-40DB-8E61-105461170604}"/>
+                <a16:creationId xmlns="" xmlns:a16="http://schemas.microsoft.com/office/drawing/2014/main" id="{E2AC45B0-4145-40DB-8E61-105461170604}"/>
               </a:ext>
             </a:extLst>
           </p:cNvPr>
@@ -3307,7 +3307,7 @@
           <p:cNvPr id="4" name="Espaço Reservado para Data 3">
             <a:extLst>
               <a:ext uri="{FF2B5EF4-FFF2-40B4-BE49-F238E27FC236}">
-                <a16:creationId xmlns:a16="http://schemas.microsoft.com/office/drawing/2014/main" xmlns="" id="{50F1D3FB-740A-4EBA-A309-2CE71D12ECFB}"/>
+                <a16:creationId xmlns="" xmlns:a16="http://schemas.microsoft.com/office/drawing/2014/main" id="{50F1D3FB-740A-4EBA-A309-2CE71D12ECFB}"/>
               </a:ext>
             </a:extLst>
           </p:cNvPr>
@@ -3325,7 +3325,7 @@
           <a:p>
             <a:fld id="{63289F7E-B80B-496E-81B4-D396C37C9454}" type="datetimeFigureOut">
               <a:rPr lang="pt-BR" smtClean="0"/>
-              <a:t>31/03/2025</a:t>
+              <a:t>02/04/2025</a:t>
             </a:fld>
             <a:endParaRPr lang="pt-BR"/>
           </a:p>
@@ -3336,7 +3336,7 @@
           <p:cNvPr id="5" name="Espaço Reservado para Rodapé 4">
             <a:extLst>
               <a:ext uri="{FF2B5EF4-FFF2-40B4-BE49-F238E27FC236}">
-                <a16:creationId xmlns:a16="http://schemas.microsoft.com/office/drawing/2014/main" xmlns="" id="{BDCAB18F-8715-4465-A940-F9C193A2ACE9}"/>
+                <a16:creationId xmlns="" xmlns:a16="http://schemas.microsoft.com/office/drawing/2014/main" id="{BDCAB18F-8715-4465-A940-F9C193A2ACE9}"/>
               </a:ext>
             </a:extLst>
           </p:cNvPr>
@@ -3361,7 +3361,7 @@
           <p:cNvPr id="6" name="Espaço Reservado para Número de Slide 5">
             <a:extLst>
               <a:ext uri="{FF2B5EF4-FFF2-40B4-BE49-F238E27FC236}">
-                <a16:creationId xmlns:a16="http://schemas.microsoft.com/office/drawing/2014/main" xmlns="" id="{353466C6-8248-429F-8056-FF040BF509EB}"/>
+                <a16:creationId xmlns="" xmlns:a16="http://schemas.microsoft.com/office/drawing/2014/main" id="{353466C6-8248-429F-8056-FF040BF509EB}"/>
               </a:ext>
             </a:extLst>
           </p:cNvPr>
@@ -3420,7 +3420,7 @@
           <p:cNvPr id="2" name="Título 1">
             <a:extLst>
               <a:ext uri="{FF2B5EF4-FFF2-40B4-BE49-F238E27FC236}">
-                <a16:creationId xmlns:a16="http://schemas.microsoft.com/office/drawing/2014/main" xmlns="" id="{BC7BB9F0-F14B-4A91-B2B7-35BC47FE4DE7}"/>
+                <a16:creationId xmlns="" xmlns:a16="http://schemas.microsoft.com/office/drawing/2014/main" id="{BC7BB9F0-F14B-4A91-B2B7-35BC47FE4DE7}"/>
               </a:ext>
             </a:extLst>
           </p:cNvPr>
@@ -3448,7 +3448,7 @@
           <p:cNvPr id="3" name="Espaço Reservado para Conteúdo 2">
             <a:extLst>
               <a:ext uri="{FF2B5EF4-FFF2-40B4-BE49-F238E27FC236}">
-                <a16:creationId xmlns:a16="http://schemas.microsoft.com/office/drawing/2014/main" xmlns="" id="{EC1FC1C4-73DA-47A6-8496-B0B457F7D39A}"/>
+                <a16:creationId xmlns="" xmlns:a16="http://schemas.microsoft.com/office/drawing/2014/main" id="{EC1FC1C4-73DA-47A6-8496-B0B457F7D39A}"/>
               </a:ext>
             </a:extLst>
           </p:cNvPr>
@@ -3510,7 +3510,7 @@
           <p:cNvPr id="4" name="Espaço Reservado para Conteúdo 3">
             <a:extLst>
               <a:ext uri="{FF2B5EF4-FFF2-40B4-BE49-F238E27FC236}">
-                <a16:creationId xmlns:a16="http://schemas.microsoft.com/office/drawing/2014/main" xmlns="" id="{E92F06A8-A449-4D92-9912-76873E529B38}"/>
+                <a16:creationId xmlns="" xmlns:a16="http://schemas.microsoft.com/office/drawing/2014/main" id="{E92F06A8-A449-4D92-9912-76873E529B38}"/>
               </a:ext>
             </a:extLst>
           </p:cNvPr>
@@ -3572,7 +3572,7 @@
           <p:cNvPr id="5" name="Espaço Reservado para Data 4">
             <a:extLst>
               <a:ext uri="{FF2B5EF4-FFF2-40B4-BE49-F238E27FC236}">
-                <a16:creationId xmlns:a16="http://schemas.microsoft.com/office/drawing/2014/main" xmlns="" id="{938070A4-BC2F-4D55-BD8D-DEAF11BB9EE9}"/>
+                <a16:creationId xmlns="" xmlns:a16="http://schemas.microsoft.com/office/drawing/2014/main" id="{938070A4-BC2F-4D55-BD8D-DEAF11BB9EE9}"/>
               </a:ext>
             </a:extLst>
           </p:cNvPr>
@@ -3590,7 +3590,7 @@
           <a:p>
             <a:fld id="{63289F7E-B80B-496E-81B4-D396C37C9454}" type="datetimeFigureOut">
               <a:rPr lang="pt-BR" smtClean="0"/>
-              <a:t>31/03/2025</a:t>
+              <a:t>02/04/2025</a:t>
             </a:fld>
             <a:endParaRPr lang="pt-BR"/>
           </a:p>
@@ -3601,7 +3601,7 @@
           <p:cNvPr id="6" name="Espaço Reservado para Rodapé 5">
             <a:extLst>
               <a:ext uri="{FF2B5EF4-FFF2-40B4-BE49-F238E27FC236}">
-                <a16:creationId xmlns:a16="http://schemas.microsoft.com/office/drawing/2014/main" xmlns="" id="{45CC2DB8-844A-465F-BA9A-7734C80C7F43}"/>
+                <a16:creationId xmlns="" xmlns:a16="http://schemas.microsoft.com/office/drawing/2014/main" id="{45CC2DB8-844A-465F-BA9A-7734C80C7F43}"/>
               </a:ext>
             </a:extLst>
           </p:cNvPr>
@@ -3626,7 +3626,7 @@
           <p:cNvPr id="7" name="Espaço Reservado para Número de Slide 6">
             <a:extLst>
               <a:ext uri="{FF2B5EF4-FFF2-40B4-BE49-F238E27FC236}">
-                <a16:creationId xmlns:a16="http://schemas.microsoft.com/office/drawing/2014/main" xmlns="" id="{4CC606A8-097B-4040-94E0-CD8C88280D8F}"/>
+                <a16:creationId xmlns="" xmlns:a16="http://schemas.microsoft.com/office/drawing/2014/main" id="{4CC606A8-097B-4040-94E0-CD8C88280D8F}"/>
               </a:ext>
             </a:extLst>
           </p:cNvPr>
@@ -3685,7 +3685,7 @@
           <p:cNvPr id="2" name="Título 1">
             <a:extLst>
               <a:ext uri="{FF2B5EF4-FFF2-40B4-BE49-F238E27FC236}">
-                <a16:creationId xmlns:a16="http://schemas.microsoft.com/office/drawing/2014/main" xmlns="" id="{76D66686-0143-4CB6-8C09-BA326F1E7ACA}"/>
+                <a16:creationId xmlns="" xmlns:a16="http://schemas.microsoft.com/office/drawing/2014/main" id="{76D66686-0143-4CB6-8C09-BA326F1E7ACA}"/>
               </a:ext>
             </a:extLst>
           </p:cNvPr>
@@ -3718,7 +3718,7 @@
           <p:cNvPr id="3" name="Espaço Reservado para Texto 2">
             <a:extLst>
               <a:ext uri="{FF2B5EF4-FFF2-40B4-BE49-F238E27FC236}">
-                <a16:creationId xmlns:a16="http://schemas.microsoft.com/office/drawing/2014/main" xmlns="" id="{0227AB85-F59E-4BCE-B846-4FA0992C2F23}"/>
+                <a16:creationId xmlns="" xmlns:a16="http://schemas.microsoft.com/office/drawing/2014/main" id="{0227AB85-F59E-4BCE-B846-4FA0992C2F23}"/>
               </a:ext>
             </a:extLst>
           </p:cNvPr>
@@ -3789,7 +3789,7 @@
           <p:cNvPr id="4" name="Espaço Reservado para Conteúdo 3">
             <a:extLst>
               <a:ext uri="{FF2B5EF4-FFF2-40B4-BE49-F238E27FC236}">
-                <a16:creationId xmlns:a16="http://schemas.microsoft.com/office/drawing/2014/main" xmlns="" id="{3373456C-7319-4D0A-827D-D29F6B083F5D}"/>
+                <a16:creationId xmlns="" xmlns:a16="http://schemas.microsoft.com/office/drawing/2014/main" id="{3373456C-7319-4D0A-827D-D29F6B083F5D}"/>
               </a:ext>
             </a:extLst>
           </p:cNvPr>
@@ -3851,7 +3851,7 @@
           <p:cNvPr id="5" name="Espaço Reservado para Texto 4">
             <a:extLst>
               <a:ext uri="{FF2B5EF4-FFF2-40B4-BE49-F238E27FC236}">
-                <a16:creationId xmlns:a16="http://schemas.microsoft.com/office/drawing/2014/main" xmlns="" id="{4CD109D0-2E83-4262-8029-A871CEC47406}"/>
+                <a16:creationId xmlns="" xmlns:a16="http://schemas.microsoft.com/office/drawing/2014/main" id="{4CD109D0-2E83-4262-8029-A871CEC47406}"/>
               </a:ext>
             </a:extLst>
           </p:cNvPr>
@@ -3922,7 +3922,7 @@
           <p:cNvPr id="6" name="Espaço Reservado para Conteúdo 5">
             <a:extLst>
               <a:ext uri="{FF2B5EF4-FFF2-40B4-BE49-F238E27FC236}">
-                <a16:creationId xmlns:a16="http://schemas.microsoft.com/office/drawing/2014/main" xmlns="" id="{AD706E3A-CFBB-4A6C-A65F-D0360A9E74FE}"/>
+                <a16:creationId xmlns="" xmlns:a16="http://schemas.microsoft.com/office/drawing/2014/main" id="{AD706E3A-CFBB-4A6C-A65F-D0360A9E74FE}"/>
               </a:ext>
             </a:extLst>
           </p:cNvPr>
@@ -3984,7 +3984,7 @@
           <p:cNvPr id="7" name="Espaço Reservado para Data 6">
             <a:extLst>
               <a:ext uri="{FF2B5EF4-FFF2-40B4-BE49-F238E27FC236}">
-                <a16:creationId xmlns:a16="http://schemas.microsoft.com/office/drawing/2014/main" xmlns="" id="{4172C0E5-5AF0-4805-BB51-443733CD2BD5}"/>
+                <a16:creationId xmlns="" xmlns:a16="http://schemas.microsoft.com/office/drawing/2014/main" id="{4172C0E5-5AF0-4805-BB51-443733CD2BD5}"/>
               </a:ext>
             </a:extLst>
           </p:cNvPr>
@@ -4002,7 +4002,7 @@
           <a:p>
             <a:fld id="{63289F7E-B80B-496E-81B4-D396C37C9454}" type="datetimeFigureOut">
               <a:rPr lang="pt-BR" smtClean="0"/>
-              <a:t>31/03/2025</a:t>
+              <a:t>02/04/2025</a:t>
             </a:fld>
             <a:endParaRPr lang="pt-BR"/>
           </a:p>
@@ -4013,7 +4013,7 @@
           <p:cNvPr id="8" name="Espaço Reservado para Rodapé 7">
             <a:extLst>
               <a:ext uri="{FF2B5EF4-FFF2-40B4-BE49-F238E27FC236}">
-                <a16:creationId xmlns:a16="http://schemas.microsoft.com/office/drawing/2014/main" xmlns="" id="{0E801648-156F-497E-99CF-797DF48051E1}"/>
+                <a16:creationId xmlns="" xmlns:a16="http://schemas.microsoft.com/office/drawing/2014/main" id="{0E801648-156F-497E-99CF-797DF48051E1}"/>
               </a:ext>
             </a:extLst>
           </p:cNvPr>
@@ -4038,7 +4038,7 @@
           <p:cNvPr id="9" name="Espaço Reservado para Número de Slide 8">
             <a:extLst>
               <a:ext uri="{FF2B5EF4-FFF2-40B4-BE49-F238E27FC236}">
-                <a16:creationId xmlns:a16="http://schemas.microsoft.com/office/drawing/2014/main" xmlns="" id="{EEE23D32-80E7-4796-A137-66BF842E4B53}"/>
+                <a16:creationId xmlns="" xmlns:a16="http://schemas.microsoft.com/office/drawing/2014/main" id="{EEE23D32-80E7-4796-A137-66BF842E4B53}"/>
               </a:ext>
             </a:extLst>
           </p:cNvPr>
@@ -4097,7 +4097,7 @@
           <p:cNvPr id="2" name="Título 1">
             <a:extLst>
               <a:ext uri="{FF2B5EF4-FFF2-40B4-BE49-F238E27FC236}">
-                <a16:creationId xmlns:a16="http://schemas.microsoft.com/office/drawing/2014/main" xmlns="" id="{2BCE2379-C78F-47E1-8CFC-B846E7AF148D}"/>
+                <a16:creationId xmlns="" xmlns:a16="http://schemas.microsoft.com/office/drawing/2014/main" id="{2BCE2379-C78F-47E1-8CFC-B846E7AF148D}"/>
               </a:ext>
             </a:extLst>
           </p:cNvPr>
@@ -4125,7 +4125,7 @@
           <p:cNvPr id="3" name="Espaço Reservado para Data 2">
             <a:extLst>
               <a:ext uri="{FF2B5EF4-FFF2-40B4-BE49-F238E27FC236}">
-                <a16:creationId xmlns:a16="http://schemas.microsoft.com/office/drawing/2014/main" xmlns="" id="{342600A9-7F92-4E22-9D94-E4717252A817}"/>
+                <a16:creationId xmlns="" xmlns:a16="http://schemas.microsoft.com/office/drawing/2014/main" id="{342600A9-7F92-4E22-9D94-E4717252A817}"/>
               </a:ext>
             </a:extLst>
           </p:cNvPr>
@@ -4143,7 +4143,7 @@
           <a:p>
             <a:fld id="{63289F7E-B80B-496E-81B4-D396C37C9454}" type="datetimeFigureOut">
               <a:rPr lang="pt-BR" smtClean="0"/>
-              <a:t>31/03/2025</a:t>
+              <a:t>02/04/2025</a:t>
             </a:fld>
             <a:endParaRPr lang="pt-BR"/>
           </a:p>
@@ -4154,7 +4154,7 @@
           <p:cNvPr id="4" name="Espaço Reservado para Rodapé 3">
             <a:extLst>
               <a:ext uri="{FF2B5EF4-FFF2-40B4-BE49-F238E27FC236}">
-                <a16:creationId xmlns:a16="http://schemas.microsoft.com/office/drawing/2014/main" xmlns="" id="{192E6BED-F546-40CC-A2DF-99CBA853654E}"/>
+                <a16:creationId xmlns="" xmlns:a16="http://schemas.microsoft.com/office/drawing/2014/main" id="{192E6BED-F546-40CC-A2DF-99CBA853654E}"/>
               </a:ext>
             </a:extLst>
           </p:cNvPr>
@@ -4179,7 +4179,7 @@
           <p:cNvPr id="5" name="Espaço Reservado para Número de Slide 4">
             <a:extLst>
               <a:ext uri="{FF2B5EF4-FFF2-40B4-BE49-F238E27FC236}">
-                <a16:creationId xmlns:a16="http://schemas.microsoft.com/office/drawing/2014/main" xmlns="" id="{6091CC40-A8C4-4063-80EB-CC5099621678}"/>
+                <a16:creationId xmlns="" xmlns:a16="http://schemas.microsoft.com/office/drawing/2014/main" id="{6091CC40-A8C4-4063-80EB-CC5099621678}"/>
               </a:ext>
             </a:extLst>
           </p:cNvPr>
@@ -4238,7 +4238,7 @@
           <p:cNvPr id="2" name="Espaço Reservado para Data 1">
             <a:extLst>
               <a:ext uri="{FF2B5EF4-FFF2-40B4-BE49-F238E27FC236}">
-                <a16:creationId xmlns:a16="http://schemas.microsoft.com/office/drawing/2014/main" xmlns="" id="{DD19515C-212C-4EAE-84A3-8FF4BC844F1B}"/>
+                <a16:creationId xmlns="" xmlns:a16="http://schemas.microsoft.com/office/drawing/2014/main" id="{DD19515C-212C-4EAE-84A3-8FF4BC844F1B}"/>
               </a:ext>
             </a:extLst>
           </p:cNvPr>
@@ -4256,7 +4256,7 @@
           <a:p>
             <a:fld id="{63289F7E-B80B-496E-81B4-D396C37C9454}" type="datetimeFigureOut">
               <a:rPr lang="pt-BR" smtClean="0"/>
-              <a:t>31/03/2025</a:t>
+              <a:t>02/04/2025</a:t>
             </a:fld>
             <a:endParaRPr lang="pt-BR"/>
           </a:p>
@@ -4267,7 +4267,7 @@
           <p:cNvPr id="3" name="Espaço Reservado para Rodapé 2">
             <a:extLst>
               <a:ext uri="{FF2B5EF4-FFF2-40B4-BE49-F238E27FC236}">
-                <a16:creationId xmlns:a16="http://schemas.microsoft.com/office/drawing/2014/main" xmlns="" id="{94D3D120-B3E8-4C96-861D-7A4F12F49B3A}"/>
+                <a16:creationId xmlns="" xmlns:a16="http://schemas.microsoft.com/office/drawing/2014/main" id="{94D3D120-B3E8-4C96-861D-7A4F12F49B3A}"/>
               </a:ext>
             </a:extLst>
           </p:cNvPr>
@@ -4292,7 +4292,7 @@
           <p:cNvPr id="4" name="Espaço Reservado para Número de Slide 3">
             <a:extLst>
               <a:ext uri="{FF2B5EF4-FFF2-40B4-BE49-F238E27FC236}">
-                <a16:creationId xmlns:a16="http://schemas.microsoft.com/office/drawing/2014/main" xmlns="" id="{42E49B68-FA1B-468B-9F17-D5C09243D454}"/>
+                <a16:creationId xmlns="" xmlns:a16="http://schemas.microsoft.com/office/drawing/2014/main" id="{42E49B68-FA1B-468B-9F17-D5C09243D454}"/>
               </a:ext>
             </a:extLst>
           </p:cNvPr>
@@ -4351,7 +4351,7 @@
           <p:cNvPr id="2" name="Título 1">
             <a:extLst>
               <a:ext uri="{FF2B5EF4-FFF2-40B4-BE49-F238E27FC236}">
-                <a16:creationId xmlns:a16="http://schemas.microsoft.com/office/drawing/2014/main" xmlns="" id="{1C17BCBE-A897-4319-85EC-D87909C24980}"/>
+                <a16:creationId xmlns="" xmlns:a16="http://schemas.microsoft.com/office/drawing/2014/main" id="{1C17BCBE-A897-4319-85EC-D87909C24980}"/>
               </a:ext>
             </a:extLst>
           </p:cNvPr>
@@ -4388,7 +4388,7 @@
           <p:cNvPr id="3" name="Espaço Reservado para Conteúdo 2">
             <a:extLst>
               <a:ext uri="{FF2B5EF4-FFF2-40B4-BE49-F238E27FC236}">
-                <a16:creationId xmlns:a16="http://schemas.microsoft.com/office/drawing/2014/main" xmlns="" id="{4226F885-0204-4913-868B-4B8B82576F17}"/>
+                <a16:creationId xmlns="" xmlns:a16="http://schemas.microsoft.com/office/drawing/2014/main" id="{4226F885-0204-4913-868B-4B8B82576F17}"/>
               </a:ext>
             </a:extLst>
           </p:cNvPr>
@@ -4478,7 +4478,7 @@
           <p:cNvPr id="4" name="Espaço Reservado para Texto 3">
             <a:extLst>
               <a:ext uri="{FF2B5EF4-FFF2-40B4-BE49-F238E27FC236}">
-                <a16:creationId xmlns:a16="http://schemas.microsoft.com/office/drawing/2014/main" xmlns="" id="{00F9F784-A858-441B-8AB5-697098141751}"/>
+                <a16:creationId xmlns="" xmlns:a16="http://schemas.microsoft.com/office/drawing/2014/main" id="{00F9F784-A858-441B-8AB5-697098141751}"/>
               </a:ext>
             </a:extLst>
           </p:cNvPr>
@@ -4549,7 +4549,7 @@
           <p:cNvPr id="5" name="Espaço Reservado para Data 4">
             <a:extLst>
               <a:ext uri="{FF2B5EF4-FFF2-40B4-BE49-F238E27FC236}">
-                <a16:creationId xmlns:a16="http://schemas.microsoft.com/office/drawing/2014/main" xmlns="" id="{A4DC363A-5000-472E-8B17-02E7DCB8840A}"/>
+                <a16:creationId xmlns="" xmlns:a16="http://schemas.microsoft.com/office/drawing/2014/main" id="{A4DC363A-5000-472E-8B17-02E7DCB8840A}"/>
               </a:ext>
             </a:extLst>
           </p:cNvPr>
@@ -4567,7 +4567,7 @@
           <a:p>
             <a:fld id="{63289F7E-B80B-496E-81B4-D396C37C9454}" type="datetimeFigureOut">
               <a:rPr lang="pt-BR" smtClean="0"/>
-              <a:t>31/03/2025</a:t>
+              <a:t>02/04/2025</a:t>
             </a:fld>
             <a:endParaRPr lang="pt-BR"/>
           </a:p>
@@ -4578,7 +4578,7 @@
           <p:cNvPr id="6" name="Espaço Reservado para Rodapé 5">
             <a:extLst>
               <a:ext uri="{FF2B5EF4-FFF2-40B4-BE49-F238E27FC236}">
-                <a16:creationId xmlns:a16="http://schemas.microsoft.com/office/drawing/2014/main" xmlns="" id="{5548425D-2C21-4C56-BAD4-662978775C28}"/>
+                <a16:creationId xmlns="" xmlns:a16="http://schemas.microsoft.com/office/drawing/2014/main" id="{5548425D-2C21-4C56-BAD4-662978775C28}"/>
               </a:ext>
             </a:extLst>
           </p:cNvPr>
@@ -4603,7 +4603,7 @@
           <p:cNvPr id="7" name="Espaço Reservado para Número de Slide 6">
             <a:extLst>
               <a:ext uri="{FF2B5EF4-FFF2-40B4-BE49-F238E27FC236}">
-                <a16:creationId xmlns:a16="http://schemas.microsoft.com/office/drawing/2014/main" xmlns="" id="{C63E9726-E64C-42B2-AE8A-8C235A956B48}"/>
+                <a16:creationId xmlns="" xmlns:a16="http://schemas.microsoft.com/office/drawing/2014/main" id="{C63E9726-E64C-42B2-AE8A-8C235A956B48}"/>
               </a:ext>
             </a:extLst>
           </p:cNvPr>
@@ -4662,7 +4662,7 @@
           <p:cNvPr id="2" name="Título 1">
             <a:extLst>
               <a:ext uri="{FF2B5EF4-FFF2-40B4-BE49-F238E27FC236}">
-                <a16:creationId xmlns:a16="http://schemas.microsoft.com/office/drawing/2014/main" xmlns="" id="{11086A78-3E74-450C-96A6-CA8AC37AF772}"/>
+                <a16:creationId xmlns="" xmlns:a16="http://schemas.microsoft.com/office/drawing/2014/main" id="{11086A78-3E74-450C-96A6-CA8AC37AF772}"/>
               </a:ext>
             </a:extLst>
           </p:cNvPr>
@@ -4699,7 +4699,7 @@
           <p:cNvPr id="3" name="Espaço Reservado para Imagem 2">
             <a:extLst>
               <a:ext uri="{FF2B5EF4-FFF2-40B4-BE49-F238E27FC236}">
-                <a16:creationId xmlns:a16="http://schemas.microsoft.com/office/drawing/2014/main" xmlns="" id="{5F5B7312-975A-4DBC-9B2F-3652ADA006FD}"/>
+                <a16:creationId xmlns="" xmlns:a16="http://schemas.microsoft.com/office/drawing/2014/main" id="{5F5B7312-975A-4DBC-9B2F-3652ADA006FD}"/>
               </a:ext>
             </a:extLst>
           </p:cNvPr>
@@ -4766,7 +4766,7 @@
           <p:cNvPr id="4" name="Espaço Reservado para Texto 3">
             <a:extLst>
               <a:ext uri="{FF2B5EF4-FFF2-40B4-BE49-F238E27FC236}">
-                <a16:creationId xmlns:a16="http://schemas.microsoft.com/office/drawing/2014/main" xmlns="" id="{AAF805F5-1DFF-41C6-944C-7D79FE0D0963}"/>
+                <a16:creationId xmlns="" xmlns:a16="http://schemas.microsoft.com/office/drawing/2014/main" id="{AAF805F5-1DFF-41C6-944C-7D79FE0D0963}"/>
               </a:ext>
             </a:extLst>
           </p:cNvPr>
@@ -4837,7 +4837,7 @@
           <p:cNvPr id="5" name="Espaço Reservado para Data 4">
             <a:extLst>
               <a:ext uri="{FF2B5EF4-FFF2-40B4-BE49-F238E27FC236}">
-                <a16:creationId xmlns:a16="http://schemas.microsoft.com/office/drawing/2014/main" xmlns="" id="{02113D81-8665-4516-BD81-C6A1F254EECD}"/>
+                <a16:creationId xmlns="" xmlns:a16="http://schemas.microsoft.com/office/drawing/2014/main" id="{02113D81-8665-4516-BD81-C6A1F254EECD}"/>
               </a:ext>
             </a:extLst>
           </p:cNvPr>
@@ -4855,7 +4855,7 @@
           <a:p>
             <a:fld id="{63289F7E-B80B-496E-81B4-D396C37C9454}" type="datetimeFigureOut">
               <a:rPr lang="pt-BR" smtClean="0"/>
-              <a:t>31/03/2025</a:t>
+              <a:t>02/04/2025</a:t>
             </a:fld>
             <a:endParaRPr lang="pt-BR"/>
           </a:p>
@@ -4866,7 +4866,7 @@
           <p:cNvPr id="6" name="Espaço Reservado para Rodapé 5">
             <a:extLst>
               <a:ext uri="{FF2B5EF4-FFF2-40B4-BE49-F238E27FC236}">
-                <a16:creationId xmlns:a16="http://schemas.microsoft.com/office/drawing/2014/main" xmlns="" id="{2B00C88B-FF32-40AA-A187-727D96FD7862}"/>
+                <a16:creationId xmlns="" xmlns:a16="http://schemas.microsoft.com/office/drawing/2014/main" id="{2B00C88B-FF32-40AA-A187-727D96FD7862}"/>
               </a:ext>
             </a:extLst>
           </p:cNvPr>
@@ -4891,7 +4891,7 @@
           <p:cNvPr id="7" name="Espaço Reservado para Número de Slide 6">
             <a:extLst>
               <a:ext uri="{FF2B5EF4-FFF2-40B4-BE49-F238E27FC236}">
-                <a16:creationId xmlns:a16="http://schemas.microsoft.com/office/drawing/2014/main" xmlns="" id="{A04D1A2D-69F7-4B8F-A730-BC26DC340BA6}"/>
+                <a16:creationId xmlns="" xmlns:a16="http://schemas.microsoft.com/office/drawing/2014/main" id="{A04D1A2D-69F7-4B8F-A730-BC26DC340BA6}"/>
               </a:ext>
             </a:extLst>
           </p:cNvPr>
@@ -4955,7 +4955,7 @@
           <p:cNvPr id="2" name="Espaço Reservado para Título 1">
             <a:extLst>
               <a:ext uri="{FF2B5EF4-FFF2-40B4-BE49-F238E27FC236}">
-                <a16:creationId xmlns:a16="http://schemas.microsoft.com/office/drawing/2014/main" xmlns="" id="{E69A0273-1966-4A1B-9370-4C1CE5036371}"/>
+                <a16:creationId xmlns="" xmlns:a16="http://schemas.microsoft.com/office/drawing/2014/main" id="{E69A0273-1966-4A1B-9370-4C1CE5036371}"/>
               </a:ext>
             </a:extLst>
           </p:cNvPr>
@@ -4993,7 +4993,7 @@
           <p:cNvPr id="3" name="Espaço Reservado para Texto 2">
             <a:extLst>
               <a:ext uri="{FF2B5EF4-FFF2-40B4-BE49-F238E27FC236}">
-                <a16:creationId xmlns:a16="http://schemas.microsoft.com/office/drawing/2014/main" xmlns="" id="{3B9CF87A-0448-49A7-AB25-EBC1D56A40EF}"/>
+                <a16:creationId xmlns="" xmlns:a16="http://schemas.microsoft.com/office/drawing/2014/main" id="{3B9CF87A-0448-49A7-AB25-EBC1D56A40EF}"/>
               </a:ext>
             </a:extLst>
           </p:cNvPr>
@@ -5060,7 +5060,7 @@
           <p:cNvPr id="4" name="Espaço Reservado para Data 3">
             <a:extLst>
               <a:ext uri="{FF2B5EF4-FFF2-40B4-BE49-F238E27FC236}">
-                <a16:creationId xmlns:a16="http://schemas.microsoft.com/office/drawing/2014/main" xmlns="" id="{2EF7B1F2-BB5A-44D0-816D-16AD2C71430E}"/>
+                <a16:creationId xmlns="" xmlns:a16="http://schemas.microsoft.com/office/drawing/2014/main" id="{2EF7B1F2-BB5A-44D0-816D-16AD2C71430E}"/>
               </a:ext>
             </a:extLst>
           </p:cNvPr>
@@ -5096,7 +5096,7 @@
           <a:p>
             <a:fld id="{63289F7E-B80B-496E-81B4-D396C37C9454}" type="datetimeFigureOut">
               <a:rPr lang="pt-BR" smtClean="0"/>
-              <a:t>31/03/2025</a:t>
+              <a:t>02/04/2025</a:t>
             </a:fld>
             <a:endParaRPr lang="pt-BR"/>
           </a:p>
@@ -5107,7 +5107,7 @@
           <p:cNvPr id="5" name="Espaço Reservado para Rodapé 4">
             <a:extLst>
               <a:ext uri="{FF2B5EF4-FFF2-40B4-BE49-F238E27FC236}">
-                <a16:creationId xmlns:a16="http://schemas.microsoft.com/office/drawing/2014/main" xmlns="" id="{C703F94C-2CC8-4DAA-BC35-14FC3E841DCD}"/>
+                <a16:creationId xmlns="" xmlns:a16="http://schemas.microsoft.com/office/drawing/2014/main" id="{C703F94C-2CC8-4DAA-BC35-14FC3E841DCD}"/>
               </a:ext>
             </a:extLst>
           </p:cNvPr>
@@ -5150,7 +5150,7 @@
           <p:cNvPr id="6" name="Espaço Reservado para Número de Slide 5">
             <a:extLst>
               <a:ext uri="{FF2B5EF4-FFF2-40B4-BE49-F238E27FC236}">
-                <a16:creationId xmlns:a16="http://schemas.microsoft.com/office/drawing/2014/main" xmlns="" id="{64051336-7048-457A-8B61-D94291D71648}"/>
+                <a16:creationId xmlns="" xmlns:a16="http://schemas.microsoft.com/office/drawing/2014/main" id="{64051336-7048-457A-8B61-D94291D71648}"/>
               </a:ext>
             </a:extLst>
           </p:cNvPr>
@@ -5518,7 +5518,7 @@
           <p:cNvPr id="2" name="Título 1">
             <a:extLst>
               <a:ext uri="{FF2B5EF4-FFF2-40B4-BE49-F238E27FC236}">
-                <a16:creationId xmlns:a16="http://schemas.microsoft.com/office/drawing/2014/main" xmlns="" id="{32666AC8-2E17-4DB4-B0F5-60C640CCFD2E}"/>
+                <a16:creationId xmlns="" xmlns:a16="http://schemas.microsoft.com/office/drawing/2014/main" id="{32666AC8-2E17-4DB4-B0F5-60C640CCFD2E}"/>
               </a:ext>
             </a:extLst>
           </p:cNvPr>
@@ -5572,7 +5572,7 @@
           <p:cNvPr id="4" name="CaixaDeTexto 3">
             <a:extLst>
               <a:ext uri="{FF2B5EF4-FFF2-40B4-BE49-F238E27FC236}">
-                <a16:creationId xmlns:a16="http://schemas.microsoft.com/office/drawing/2014/main" xmlns="" id="{430EB894-B7D4-434C-9D1A-A14094D9BEEC}"/>
+                <a16:creationId xmlns="" xmlns:a16="http://schemas.microsoft.com/office/drawing/2014/main" id="{430EB894-B7D4-434C-9D1A-A14094D9BEEC}"/>
               </a:ext>
             </a:extLst>
           </p:cNvPr>
@@ -5613,7 +5613,7 @@
           <p:cNvPr id="1026" name="Picture 2" descr="Logo">
             <a:extLst>
               <a:ext uri="{FF2B5EF4-FFF2-40B4-BE49-F238E27FC236}">
-                <a16:creationId xmlns:a16="http://schemas.microsoft.com/office/drawing/2014/main" xmlns="" id="{3F2642E0-4F6A-4196-8F58-E77D36E9A33F}"/>
+                <a16:creationId xmlns="" xmlns:a16="http://schemas.microsoft.com/office/drawing/2014/main" id="{3F2642E0-4F6A-4196-8F58-E77D36E9A33F}"/>
               </a:ext>
             </a:extLst>
           </p:cNvPr>
@@ -5658,7 +5658,7 @@
           <p:cNvPr id="5122" name="Picture 2" descr="Image result for machine learning">
             <a:extLst>
               <a:ext uri="{FF2B5EF4-FFF2-40B4-BE49-F238E27FC236}">
-                <a16:creationId xmlns:a16="http://schemas.microsoft.com/office/drawing/2014/main" xmlns="" id="{810CE0A2-4102-44A6-A370-175E7896CDCB}"/>
+                <a16:creationId xmlns="" xmlns:a16="http://schemas.microsoft.com/office/drawing/2014/main" id="{810CE0A2-4102-44A6-A370-175E7896CDCB}"/>
               </a:ext>
             </a:extLst>
           </p:cNvPr>
@@ -5703,7 +5703,7 @@
           <p:cNvPr id="3" name="Picture 2" descr="IoT Group">
             <a:extLst>
               <a:ext uri="{FF2B5EF4-FFF2-40B4-BE49-F238E27FC236}">
-                <a16:creationId xmlns:a16="http://schemas.microsoft.com/office/drawing/2014/main" xmlns="" id="{AC034F57-E830-B6E7-6790-12FDBBDB2975}"/>
+                <a16:creationId xmlns="" xmlns:a16="http://schemas.microsoft.com/office/drawing/2014/main" id="{AC034F57-E830-B6E7-6790-12FDBBDB2975}"/>
               </a:ext>
             </a:extLst>
           </p:cNvPr>
@@ -5778,7 +5778,7 @@
           <p:cNvPr id="2" name="Título 1">
             <a:extLst>
               <a:ext uri="{FF2B5EF4-FFF2-40B4-BE49-F238E27FC236}">
-                <a16:creationId xmlns:a16="http://schemas.microsoft.com/office/drawing/2014/main" xmlns="" id="{77169B24-439F-2623-4569-4FB2DD7BA69E}"/>
+                <a16:creationId xmlns="" xmlns:a16="http://schemas.microsoft.com/office/drawing/2014/main" id="{77169B24-439F-2623-4569-4FB2DD7BA69E}"/>
               </a:ext>
             </a:extLst>
           </p:cNvPr>
@@ -5801,14 +5801,14 @@
           </a:p>
         </p:txBody>
       </p:sp>
-      <mc:AlternateContent xmlns:mc="http://schemas.openxmlformats.org/markup-compatibility/2006">
-        <mc:Choice xmlns:a14="http://schemas.microsoft.com/office/drawing/2010/main" Requires="a14">
+      <mc:AlternateContent xmlns:mc="http://schemas.openxmlformats.org/markup-compatibility/2006" xmlns:a14="http://schemas.microsoft.com/office/drawing/2010/main">
+        <mc:Choice Requires="a14">
           <p:sp>
             <p:nvSpPr>
               <p:cNvPr id="3" name="Espaço Reservado para Conteúdo 2">
                 <a:extLst>
                   <a:ext uri="{FF2B5EF4-FFF2-40B4-BE49-F238E27FC236}">
-                    <a16:creationId xmlns:a16="http://schemas.microsoft.com/office/drawing/2014/main" xmlns="" id="{F7659DC9-1554-0C0A-78CF-76B7B51210CF}"/>
+                    <a16:creationId xmlns="" xmlns:a16="http://schemas.microsoft.com/office/drawing/2014/main" id="{F7659DC9-1554-0C0A-78CF-76B7B51210CF}"/>
                   </a:ext>
                 </a:extLst>
               </p:cNvPr>
@@ -5923,7 +5923,7 @@
             </p:txBody>
           </p:sp>
         </mc:Choice>
-        <mc:Fallback>
+        <mc:Fallback xmlns="">
           <p:sp>
             <p:nvSpPr>
               <p:cNvPr id="3" name="Espaço Reservado para Conteúdo 2">
@@ -5972,7 +5972,7 @@
           <p:cNvPr id="25" name="Agrupar 24">
             <a:extLst>
               <a:ext uri="{FF2B5EF4-FFF2-40B4-BE49-F238E27FC236}">
-                <a16:creationId xmlns:a16="http://schemas.microsoft.com/office/drawing/2014/main" xmlns="" id="{89464E1D-FEE2-AAC0-80C0-379EEC02375F}"/>
+                <a16:creationId xmlns="" xmlns:a16="http://schemas.microsoft.com/office/drawing/2014/main" id="{89464E1D-FEE2-AAC0-80C0-379EEC02375F}"/>
               </a:ext>
             </a:extLst>
           </p:cNvPr>
@@ -5992,7 +5992,7 @@
             <p:cNvPr id="17" name="Agrupar 16">
               <a:extLst>
                 <a:ext uri="{FF2B5EF4-FFF2-40B4-BE49-F238E27FC236}">
-                  <a16:creationId xmlns:a16="http://schemas.microsoft.com/office/drawing/2014/main" xmlns="" id="{89212B23-55CD-CCDA-9C3B-BA14483628E4}"/>
+                  <a16:creationId xmlns="" xmlns:a16="http://schemas.microsoft.com/office/drawing/2014/main" id="{89212B23-55CD-CCDA-9C3B-BA14483628E4}"/>
                 </a:ext>
               </a:extLst>
             </p:cNvPr>
@@ -6012,7 +6012,7 @@
               <p:cNvPr id="4" name="Agrupar 3">
                 <a:extLst>
                   <a:ext uri="{FF2B5EF4-FFF2-40B4-BE49-F238E27FC236}">
-                    <a16:creationId xmlns:a16="http://schemas.microsoft.com/office/drawing/2014/main" xmlns="" id="{8FF7C909-12C2-1F28-3CD1-F415FDEBCF05}"/>
+                    <a16:creationId xmlns="" xmlns:a16="http://schemas.microsoft.com/office/drawing/2014/main" id="{8FF7C909-12C2-1F28-3CD1-F415FDEBCF05}"/>
                   </a:ext>
                 </a:extLst>
               </p:cNvPr>
@@ -6032,7 +6032,7 @@
                 <p:cNvPr id="5" name="Picture 2">
                   <a:extLst>
                     <a:ext uri="{FF2B5EF4-FFF2-40B4-BE49-F238E27FC236}">
-                      <a16:creationId xmlns:a16="http://schemas.microsoft.com/office/drawing/2014/main" xmlns="" id="{1D1D236C-D17A-910F-590E-14660AC344E8}"/>
+                      <a16:creationId xmlns="" xmlns:a16="http://schemas.microsoft.com/office/drawing/2014/main" id="{1D1D236C-D17A-910F-590E-14660AC344E8}"/>
                     </a:ext>
                   </a:extLst>
                 </p:cNvPr>
@@ -6079,7 +6079,7 @@
                 <p:cNvPr id="6" name="Conector reto 5">
                   <a:extLst>
                     <a:ext uri="{FF2B5EF4-FFF2-40B4-BE49-F238E27FC236}">
-                      <a16:creationId xmlns:a16="http://schemas.microsoft.com/office/drawing/2014/main" xmlns="" id="{17F923C8-0338-E3A0-307C-4C48FF5D48E6}"/>
+                      <a16:creationId xmlns="" xmlns:a16="http://schemas.microsoft.com/office/drawing/2014/main" id="{17F923C8-0338-E3A0-307C-4C48FF5D48E6}"/>
                     </a:ext>
                   </a:extLst>
                 </p:cNvPr>
@@ -6122,7 +6122,7 @@
                 <p:cNvPr id="7" name="Conector reto 6">
                   <a:extLst>
                     <a:ext uri="{FF2B5EF4-FFF2-40B4-BE49-F238E27FC236}">
-                      <a16:creationId xmlns:a16="http://schemas.microsoft.com/office/drawing/2014/main" xmlns="" id="{108E4EB3-0A18-7674-4972-08EE9EB6C50A}"/>
+                      <a16:creationId xmlns="" xmlns:a16="http://schemas.microsoft.com/office/drawing/2014/main" id="{108E4EB3-0A18-7674-4972-08EE9EB6C50A}"/>
                     </a:ext>
                   </a:extLst>
                 </p:cNvPr>
@@ -6165,7 +6165,7 @@
                 <p:cNvPr id="8" name="Conector reto 7">
                   <a:extLst>
                     <a:ext uri="{FF2B5EF4-FFF2-40B4-BE49-F238E27FC236}">
-                      <a16:creationId xmlns:a16="http://schemas.microsoft.com/office/drawing/2014/main" xmlns="" id="{2DD01A53-07A0-0690-1495-693F9ECD4A00}"/>
+                      <a16:creationId xmlns="" xmlns:a16="http://schemas.microsoft.com/office/drawing/2014/main" id="{2DD01A53-07A0-0690-1495-693F9ECD4A00}"/>
                     </a:ext>
                   </a:extLst>
                 </p:cNvPr>
@@ -6208,7 +6208,7 @@
                 <p:cNvPr id="9" name="Conector reto 8">
                   <a:extLst>
                     <a:ext uri="{FF2B5EF4-FFF2-40B4-BE49-F238E27FC236}">
-                      <a16:creationId xmlns:a16="http://schemas.microsoft.com/office/drawing/2014/main" xmlns="" id="{CB18CCA6-494D-B0A3-4D7E-74DA8CC3B8A0}"/>
+                      <a16:creationId xmlns="" xmlns:a16="http://schemas.microsoft.com/office/drawing/2014/main" id="{CB18CCA6-494D-B0A3-4D7E-74DA8CC3B8A0}"/>
                     </a:ext>
                   </a:extLst>
                 </p:cNvPr>
@@ -6251,7 +6251,7 @@
                 <p:cNvPr id="10" name="Conector reto 9">
                   <a:extLst>
                     <a:ext uri="{FF2B5EF4-FFF2-40B4-BE49-F238E27FC236}">
-                      <a16:creationId xmlns:a16="http://schemas.microsoft.com/office/drawing/2014/main" xmlns="" id="{A2C62E84-F226-525B-CA91-F7ED46F858A3}"/>
+                      <a16:creationId xmlns="" xmlns:a16="http://schemas.microsoft.com/office/drawing/2014/main" id="{A2C62E84-F226-525B-CA91-F7ED46F858A3}"/>
                     </a:ext>
                   </a:extLst>
                 </p:cNvPr>
@@ -6295,7 +6295,7 @@
               <p:cNvPr id="11" name="CaixaDeTexto 10">
                 <a:extLst>
                   <a:ext uri="{FF2B5EF4-FFF2-40B4-BE49-F238E27FC236}">
-                    <a16:creationId xmlns:a16="http://schemas.microsoft.com/office/drawing/2014/main" xmlns="" id="{319F74EA-B98D-DDFF-AB65-A7E1DCDF4697}"/>
+                    <a16:creationId xmlns="" xmlns:a16="http://schemas.microsoft.com/office/drawing/2014/main" id="{319F74EA-B98D-DDFF-AB65-A7E1DCDF4697}"/>
                   </a:ext>
                 </a:extLst>
               </p:cNvPr>
@@ -6330,7 +6330,7 @@
               <p:cNvPr id="12" name="CaixaDeTexto 11">
                 <a:extLst>
                   <a:ext uri="{FF2B5EF4-FFF2-40B4-BE49-F238E27FC236}">
-                    <a16:creationId xmlns:a16="http://schemas.microsoft.com/office/drawing/2014/main" xmlns="" id="{88FD813C-F31B-C73D-966D-8C7F0F909160}"/>
+                    <a16:creationId xmlns="" xmlns:a16="http://schemas.microsoft.com/office/drawing/2014/main" id="{88FD813C-F31B-C73D-966D-8C7F0F909160}"/>
                   </a:ext>
                 </a:extLst>
               </p:cNvPr>
@@ -6365,7 +6365,7 @@
               <p:cNvPr id="13" name="CaixaDeTexto 12">
                 <a:extLst>
                   <a:ext uri="{FF2B5EF4-FFF2-40B4-BE49-F238E27FC236}">
-                    <a16:creationId xmlns:a16="http://schemas.microsoft.com/office/drawing/2014/main" xmlns="" id="{C852C7D1-AB69-D606-FC4E-0B5C2BACB107}"/>
+                    <a16:creationId xmlns="" xmlns:a16="http://schemas.microsoft.com/office/drawing/2014/main" id="{C852C7D1-AB69-D606-FC4E-0B5C2BACB107}"/>
                   </a:ext>
                 </a:extLst>
               </p:cNvPr>
@@ -6400,7 +6400,7 @@
               <p:cNvPr id="14" name="CaixaDeTexto 13">
                 <a:extLst>
                   <a:ext uri="{FF2B5EF4-FFF2-40B4-BE49-F238E27FC236}">
-                    <a16:creationId xmlns:a16="http://schemas.microsoft.com/office/drawing/2014/main" xmlns="" id="{9E922D3C-5A4A-3D21-6197-DBAF14CDD453}"/>
+                    <a16:creationId xmlns="" xmlns:a16="http://schemas.microsoft.com/office/drawing/2014/main" id="{9E922D3C-5A4A-3D21-6197-DBAF14CDD453}"/>
                   </a:ext>
                 </a:extLst>
               </p:cNvPr>
@@ -6435,7 +6435,7 @@
               <p:cNvPr id="15" name="CaixaDeTexto 14">
                 <a:extLst>
                   <a:ext uri="{FF2B5EF4-FFF2-40B4-BE49-F238E27FC236}">
-                    <a16:creationId xmlns:a16="http://schemas.microsoft.com/office/drawing/2014/main" xmlns="" id="{0086DBF0-CF72-E0B1-1CAA-C89D91AF58FC}"/>
+                    <a16:creationId xmlns="" xmlns:a16="http://schemas.microsoft.com/office/drawing/2014/main" id="{0086DBF0-CF72-E0B1-1CAA-C89D91AF58FC}"/>
                   </a:ext>
                 </a:extLst>
               </p:cNvPr>
@@ -6470,7 +6470,7 @@
               <p:cNvPr id="16" name="CaixaDeTexto 15">
                 <a:extLst>
                   <a:ext uri="{FF2B5EF4-FFF2-40B4-BE49-F238E27FC236}">
-                    <a16:creationId xmlns:a16="http://schemas.microsoft.com/office/drawing/2014/main" xmlns="" id="{BFC5DBDA-2B32-374E-2937-C6D4CC105E04}"/>
+                    <a16:creationId xmlns="" xmlns:a16="http://schemas.microsoft.com/office/drawing/2014/main" id="{BFC5DBDA-2B32-374E-2937-C6D4CC105E04}"/>
                   </a:ext>
                 </a:extLst>
               </p:cNvPr>
@@ -6506,7 +6506,7 @@
             <p:cNvPr id="21" name="Elipse 20">
               <a:extLst>
                 <a:ext uri="{FF2B5EF4-FFF2-40B4-BE49-F238E27FC236}">
-                  <a16:creationId xmlns:a16="http://schemas.microsoft.com/office/drawing/2014/main" xmlns="" id="{E872EBD6-3B01-CA1B-1131-CA2567F9A9ED}"/>
+                  <a16:creationId xmlns="" xmlns:a16="http://schemas.microsoft.com/office/drawing/2014/main" id="{E872EBD6-3B01-CA1B-1131-CA2567F9A9ED}"/>
                 </a:ext>
               </a:extLst>
             </p:cNvPr>
@@ -6558,7 +6558,7 @@
             <p:cNvPr id="22" name="Elipse 21">
               <a:extLst>
                 <a:ext uri="{FF2B5EF4-FFF2-40B4-BE49-F238E27FC236}">
-                  <a16:creationId xmlns:a16="http://schemas.microsoft.com/office/drawing/2014/main" xmlns="" id="{7C6891EA-E337-0F90-D14F-45641BBAEBBD}"/>
+                  <a16:creationId xmlns="" xmlns:a16="http://schemas.microsoft.com/office/drawing/2014/main" id="{7C6891EA-E337-0F90-D14F-45641BBAEBBD}"/>
                 </a:ext>
               </a:extLst>
             </p:cNvPr>
@@ -6611,7 +6611,7 @@
           <p:cNvPr id="19" name="Agrupar 18">
             <a:extLst>
               <a:ext uri="{FF2B5EF4-FFF2-40B4-BE49-F238E27FC236}">
-                <a16:creationId xmlns:a16="http://schemas.microsoft.com/office/drawing/2014/main" xmlns="" id="{49A3BA49-253D-6EBB-43D5-F2D359406770}"/>
+                <a16:creationId xmlns="" xmlns:a16="http://schemas.microsoft.com/office/drawing/2014/main" id="{49A3BA49-253D-6EBB-43D5-F2D359406770}"/>
               </a:ext>
             </a:extLst>
           </p:cNvPr>
@@ -6633,7 +6633,7 @@
                 <p:cNvPr id="18" name="CaixaDeTexto 17">
                   <a:extLst>
                     <a:ext uri="{FF2B5EF4-FFF2-40B4-BE49-F238E27FC236}">
-                      <a16:creationId xmlns:a16="http://schemas.microsoft.com/office/drawing/2014/main" xmlns="" id="{FA05A557-7AB7-A40B-7A50-EB6EBA9FB964}"/>
+                      <a16:creationId xmlns="" xmlns:a16="http://schemas.microsoft.com/office/drawing/2014/main" id="{FA05A557-7AB7-A40B-7A50-EB6EBA9FB964}"/>
                     </a:ext>
                   </a:extLst>
                 </p:cNvPr>
@@ -6803,7 +6803,7 @@
             <p:cNvPr id="20" name="Elipse 19">
               <a:extLst>
                 <a:ext uri="{FF2B5EF4-FFF2-40B4-BE49-F238E27FC236}">
-                  <a16:creationId xmlns:a16="http://schemas.microsoft.com/office/drawing/2014/main" xmlns="" id="{2AAD787D-9C05-A7F6-E8E3-65DF6731B54C}"/>
+                  <a16:creationId xmlns="" xmlns:a16="http://schemas.microsoft.com/office/drawing/2014/main" id="{2AAD787D-9C05-A7F6-E8E3-65DF6731B54C}"/>
                 </a:ext>
               </a:extLst>
             </p:cNvPr>
@@ -6855,7 +6855,7 @@
             <p:cNvPr id="23" name="Elipse 22">
               <a:extLst>
                 <a:ext uri="{FF2B5EF4-FFF2-40B4-BE49-F238E27FC236}">
-                  <a16:creationId xmlns:a16="http://schemas.microsoft.com/office/drawing/2014/main" xmlns="" id="{82B32199-B2BC-FA91-4F4B-324430A78F74}"/>
+                  <a16:creationId xmlns="" xmlns:a16="http://schemas.microsoft.com/office/drawing/2014/main" id="{82B32199-B2BC-FA91-4F4B-324430A78F74}"/>
                 </a:ext>
               </a:extLst>
             </p:cNvPr>
@@ -6910,7 +6910,7 @@
               <p:cNvPr id="24" name="CaixaDeTexto 23">
                 <a:extLst>
                   <a:ext uri="{FF2B5EF4-FFF2-40B4-BE49-F238E27FC236}">
-                    <a16:creationId xmlns:a16="http://schemas.microsoft.com/office/drawing/2014/main" xmlns="" id="{EB2CBE63-CC5F-A3D8-77A2-7786CDE19147}"/>
+                    <a16:creationId xmlns="" xmlns:a16="http://schemas.microsoft.com/office/drawing/2014/main" id="{EB2CBE63-CC5F-A3D8-77A2-7786CDE19147}"/>
                   </a:ext>
                 </a:extLst>
               </p:cNvPr>
@@ -7162,7 +7162,7 @@
           <p:cNvPr id="2" name="Título 1">
             <a:extLst>
               <a:ext uri="{FF2B5EF4-FFF2-40B4-BE49-F238E27FC236}">
-                <a16:creationId xmlns:a16="http://schemas.microsoft.com/office/drawing/2014/main" xmlns="" id="{77169B24-439F-2623-4569-4FB2DD7BA69E}"/>
+                <a16:creationId xmlns="" xmlns:a16="http://schemas.microsoft.com/office/drawing/2014/main" id="{77169B24-439F-2623-4569-4FB2DD7BA69E}"/>
               </a:ext>
             </a:extLst>
           </p:cNvPr>
@@ -7190,7 +7190,7 @@
           <p:cNvPr id="3" name="Espaço Reservado para Conteúdo 2">
             <a:extLst>
               <a:ext uri="{FF2B5EF4-FFF2-40B4-BE49-F238E27FC236}">
-                <a16:creationId xmlns:a16="http://schemas.microsoft.com/office/drawing/2014/main" xmlns="" id="{F7659DC9-1554-0C0A-78CF-76B7B51210CF}"/>
+                <a16:creationId xmlns="" xmlns:a16="http://schemas.microsoft.com/office/drawing/2014/main" id="{F7659DC9-1554-0C0A-78CF-76B7B51210CF}"/>
               </a:ext>
             </a:extLst>
           </p:cNvPr>
@@ -7263,7 +7263,7 @@
               <p:cNvPr id="18" name="CaixaDeTexto 17">
                 <a:extLst>
                   <a:ext uri="{FF2B5EF4-FFF2-40B4-BE49-F238E27FC236}">
-                    <a16:creationId xmlns:a16="http://schemas.microsoft.com/office/drawing/2014/main" xmlns="" id="{FA05A557-7AB7-A40B-7A50-EB6EBA9FB964}"/>
+                    <a16:creationId xmlns="" xmlns:a16="http://schemas.microsoft.com/office/drawing/2014/main" id="{FA05A557-7AB7-A40B-7A50-EB6EBA9FB964}"/>
                   </a:ext>
                 </a:extLst>
               </p:cNvPr>
@@ -7403,7 +7403,7 @@
           <p:cNvPr id="19" name="Elipse 18">
             <a:extLst>
               <a:ext uri="{FF2B5EF4-FFF2-40B4-BE49-F238E27FC236}">
-                <a16:creationId xmlns:a16="http://schemas.microsoft.com/office/drawing/2014/main" xmlns="" id="{795256B9-5626-BEE2-FF82-D903F78DB15F}"/>
+                <a16:creationId xmlns="" xmlns:a16="http://schemas.microsoft.com/office/drawing/2014/main" id="{795256B9-5626-BEE2-FF82-D903F78DB15F}"/>
               </a:ext>
             </a:extLst>
           </p:cNvPr>
@@ -7455,7 +7455,7 @@
           <p:cNvPr id="20" name="Elipse 19">
             <a:extLst>
               <a:ext uri="{FF2B5EF4-FFF2-40B4-BE49-F238E27FC236}">
-                <a16:creationId xmlns:a16="http://schemas.microsoft.com/office/drawing/2014/main" xmlns="" id="{2AAD787D-9C05-A7F6-E8E3-65DF6731B54C}"/>
+                <a16:creationId xmlns="" xmlns:a16="http://schemas.microsoft.com/office/drawing/2014/main" id="{2AAD787D-9C05-A7F6-E8E3-65DF6731B54C}"/>
               </a:ext>
             </a:extLst>
           </p:cNvPr>
@@ -7507,7 +7507,7 @@
           <p:cNvPr id="25" name="Agrupar 24">
             <a:extLst>
               <a:ext uri="{FF2B5EF4-FFF2-40B4-BE49-F238E27FC236}">
-                <a16:creationId xmlns:a16="http://schemas.microsoft.com/office/drawing/2014/main" xmlns="" id="{1A6ED2DA-25CE-E3E3-BAB3-9815A7D28358}"/>
+                <a16:creationId xmlns="" xmlns:a16="http://schemas.microsoft.com/office/drawing/2014/main" id="{1A6ED2DA-25CE-E3E3-BAB3-9815A7D28358}"/>
               </a:ext>
             </a:extLst>
           </p:cNvPr>
@@ -7527,7 +7527,7 @@
             <p:cNvPr id="17" name="Agrupar 16">
               <a:extLst>
                 <a:ext uri="{FF2B5EF4-FFF2-40B4-BE49-F238E27FC236}">
-                  <a16:creationId xmlns:a16="http://schemas.microsoft.com/office/drawing/2014/main" xmlns="" id="{89212B23-55CD-CCDA-9C3B-BA14483628E4}"/>
+                  <a16:creationId xmlns="" xmlns:a16="http://schemas.microsoft.com/office/drawing/2014/main" id="{89212B23-55CD-CCDA-9C3B-BA14483628E4}"/>
                 </a:ext>
               </a:extLst>
             </p:cNvPr>
@@ -7547,7 +7547,7 @@
               <p:cNvPr id="4" name="Agrupar 3">
                 <a:extLst>
                   <a:ext uri="{FF2B5EF4-FFF2-40B4-BE49-F238E27FC236}">
-                    <a16:creationId xmlns:a16="http://schemas.microsoft.com/office/drawing/2014/main" xmlns="" id="{8FF7C909-12C2-1F28-3CD1-F415FDEBCF05}"/>
+                    <a16:creationId xmlns="" xmlns:a16="http://schemas.microsoft.com/office/drawing/2014/main" id="{8FF7C909-12C2-1F28-3CD1-F415FDEBCF05}"/>
                   </a:ext>
                 </a:extLst>
               </p:cNvPr>
@@ -7567,7 +7567,7 @@
                 <p:cNvPr id="5" name="Picture 2">
                   <a:extLst>
                     <a:ext uri="{FF2B5EF4-FFF2-40B4-BE49-F238E27FC236}">
-                      <a16:creationId xmlns:a16="http://schemas.microsoft.com/office/drawing/2014/main" xmlns="" id="{1D1D236C-D17A-910F-590E-14660AC344E8}"/>
+                      <a16:creationId xmlns="" xmlns:a16="http://schemas.microsoft.com/office/drawing/2014/main" id="{1D1D236C-D17A-910F-590E-14660AC344E8}"/>
                     </a:ext>
                   </a:extLst>
                 </p:cNvPr>
@@ -7614,7 +7614,7 @@
                 <p:cNvPr id="6" name="Conector reto 5">
                   <a:extLst>
                     <a:ext uri="{FF2B5EF4-FFF2-40B4-BE49-F238E27FC236}">
-                      <a16:creationId xmlns:a16="http://schemas.microsoft.com/office/drawing/2014/main" xmlns="" id="{17F923C8-0338-E3A0-307C-4C48FF5D48E6}"/>
+                      <a16:creationId xmlns="" xmlns:a16="http://schemas.microsoft.com/office/drawing/2014/main" id="{17F923C8-0338-E3A0-307C-4C48FF5D48E6}"/>
                     </a:ext>
                   </a:extLst>
                 </p:cNvPr>
@@ -7657,7 +7657,7 @@
                 <p:cNvPr id="7" name="Conector reto 6">
                   <a:extLst>
                     <a:ext uri="{FF2B5EF4-FFF2-40B4-BE49-F238E27FC236}">
-                      <a16:creationId xmlns:a16="http://schemas.microsoft.com/office/drawing/2014/main" xmlns="" id="{108E4EB3-0A18-7674-4972-08EE9EB6C50A}"/>
+                      <a16:creationId xmlns="" xmlns:a16="http://schemas.microsoft.com/office/drawing/2014/main" id="{108E4EB3-0A18-7674-4972-08EE9EB6C50A}"/>
                     </a:ext>
                   </a:extLst>
                 </p:cNvPr>
@@ -7700,7 +7700,7 @@
                 <p:cNvPr id="8" name="Conector reto 7">
                   <a:extLst>
                     <a:ext uri="{FF2B5EF4-FFF2-40B4-BE49-F238E27FC236}">
-                      <a16:creationId xmlns:a16="http://schemas.microsoft.com/office/drawing/2014/main" xmlns="" id="{2DD01A53-07A0-0690-1495-693F9ECD4A00}"/>
+                      <a16:creationId xmlns="" xmlns:a16="http://schemas.microsoft.com/office/drawing/2014/main" id="{2DD01A53-07A0-0690-1495-693F9ECD4A00}"/>
                     </a:ext>
                   </a:extLst>
                 </p:cNvPr>
@@ -7743,7 +7743,7 @@
                 <p:cNvPr id="9" name="Conector reto 8">
                   <a:extLst>
                     <a:ext uri="{FF2B5EF4-FFF2-40B4-BE49-F238E27FC236}">
-                      <a16:creationId xmlns:a16="http://schemas.microsoft.com/office/drawing/2014/main" xmlns="" id="{CB18CCA6-494D-B0A3-4D7E-74DA8CC3B8A0}"/>
+                      <a16:creationId xmlns="" xmlns:a16="http://schemas.microsoft.com/office/drawing/2014/main" id="{CB18CCA6-494D-B0A3-4D7E-74DA8CC3B8A0}"/>
                     </a:ext>
                   </a:extLst>
                 </p:cNvPr>
@@ -7786,7 +7786,7 @@
                 <p:cNvPr id="10" name="Conector reto 9">
                   <a:extLst>
                     <a:ext uri="{FF2B5EF4-FFF2-40B4-BE49-F238E27FC236}">
-                      <a16:creationId xmlns:a16="http://schemas.microsoft.com/office/drawing/2014/main" xmlns="" id="{A2C62E84-F226-525B-CA91-F7ED46F858A3}"/>
+                      <a16:creationId xmlns="" xmlns:a16="http://schemas.microsoft.com/office/drawing/2014/main" id="{A2C62E84-F226-525B-CA91-F7ED46F858A3}"/>
                     </a:ext>
                   </a:extLst>
                 </p:cNvPr>
@@ -7830,7 +7830,7 @@
               <p:cNvPr id="11" name="CaixaDeTexto 10">
                 <a:extLst>
                   <a:ext uri="{FF2B5EF4-FFF2-40B4-BE49-F238E27FC236}">
-                    <a16:creationId xmlns:a16="http://schemas.microsoft.com/office/drawing/2014/main" xmlns="" id="{319F74EA-B98D-DDFF-AB65-A7E1DCDF4697}"/>
+                    <a16:creationId xmlns="" xmlns:a16="http://schemas.microsoft.com/office/drawing/2014/main" id="{319F74EA-B98D-DDFF-AB65-A7E1DCDF4697}"/>
                   </a:ext>
                 </a:extLst>
               </p:cNvPr>
@@ -7865,7 +7865,7 @@
               <p:cNvPr id="12" name="CaixaDeTexto 11">
                 <a:extLst>
                   <a:ext uri="{FF2B5EF4-FFF2-40B4-BE49-F238E27FC236}">
-                    <a16:creationId xmlns:a16="http://schemas.microsoft.com/office/drawing/2014/main" xmlns="" id="{88FD813C-F31B-C73D-966D-8C7F0F909160}"/>
+                    <a16:creationId xmlns="" xmlns:a16="http://schemas.microsoft.com/office/drawing/2014/main" id="{88FD813C-F31B-C73D-966D-8C7F0F909160}"/>
                   </a:ext>
                 </a:extLst>
               </p:cNvPr>
@@ -7900,7 +7900,7 @@
               <p:cNvPr id="13" name="CaixaDeTexto 12">
                 <a:extLst>
                   <a:ext uri="{FF2B5EF4-FFF2-40B4-BE49-F238E27FC236}">
-                    <a16:creationId xmlns:a16="http://schemas.microsoft.com/office/drawing/2014/main" xmlns="" id="{C852C7D1-AB69-D606-FC4E-0B5C2BACB107}"/>
+                    <a16:creationId xmlns="" xmlns:a16="http://schemas.microsoft.com/office/drawing/2014/main" id="{C852C7D1-AB69-D606-FC4E-0B5C2BACB107}"/>
                   </a:ext>
                 </a:extLst>
               </p:cNvPr>
@@ -7935,7 +7935,7 @@
               <p:cNvPr id="14" name="CaixaDeTexto 13">
                 <a:extLst>
                   <a:ext uri="{FF2B5EF4-FFF2-40B4-BE49-F238E27FC236}">
-                    <a16:creationId xmlns:a16="http://schemas.microsoft.com/office/drawing/2014/main" xmlns="" id="{9E922D3C-5A4A-3D21-6197-DBAF14CDD453}"/>
+                    <a16:creationId xmlns="" xmlns:a16="http://schemas.microsoft.com/office/drawing/2014/main" id="{9E922D3C-5A4A-3D21-6197-DBAF14CDD453}"/>
                   </a:ext>
                 </a:extLst>
               </p:cNvPr>
@@ -7970,7 +7970,7 @@
               <p:cNvPr id="15" name="CaixaDeTexto 14">
                 <a:extLst>
                   <a:ext uri="{FF2B5EF4-FFF2-40B4-BE49-F238E27FC236}">
-                    <a16:creationId xmlns:a16="http://schemas.microsoft.com/office/drawing/2014/main" xmlns="" id="{0086DBF0-CF72-E0B1-1CAA-C89D91AF58FC}"/>
+                    <a16:creationId xmlns="" xmlns:a16="http://schemas.microsoft.com/office/drawing/2014/main" id="{0086DBF0-CF72-E0B1-1CAA-C89D91AF58FC}"/>
                   </a:ext>
                 </a:extLst>
               </p:cNvPr>
@@ -8005,7 +8005,7 @@
               <p:cNvPr id="16" name="CaixaDeTexto 15">
                 <a:extLst>
                   <a:ext uri="{FF2B5EF4-FFF2-40B4-BE49-F238E27FC236}">
-                    <a16:creationId xmlns:a16="http://schemas.microsoft.com/office/drawing/2014/main" xmlns="" id="{BFC5DBDA-2B32-374E-2937-C6D4CC105E04}"/>
+                    <a16:creationId xmlns="" xmlns:a16="http://schemas.microsoft.com/office/drawing/2014/main" id="{BFC5DBDA-2B32-374E-2937-C6D4CC105E04}"/>
                   </a:ext>
                 </a:extLst>
               </p:cNvPr>
@@ -8041,7 +8041,7 @@
             <p:cNvPr id="21" name="Elipse 20">
               <a:extLst>
                 <a:ext uri="{FF2B5EF4-FFF2-40B4-BE49-F238E27FC236}">
-                  <a16:creationId xmlns:a16="http://schemas.microsoft.com/office/drawing/2014/main" xmlns="" id="{E872EBD6-3B01-CA1B-1131-CA2567F9A9ED}"/>
+                  <a16:creationId xmlns="" xmlns:a16="http://schemas.microsoft.com/office/drawing/2014/main" id="{E872EBD6-3B01-CA1B-1131-CA2567F9A9ED}"/>
                 </a:ext>
               </a:extLst>
             </p:cNvPr>
@@ -8093,7 +8093,7 @@
             <p:cNvPr id="22" name="Elipse 21">
               <a:extLst>
                 <a:ext uri="{FF2B5EF4-FFF2-40B4-BE49-F238E27FC236}">
-                  <a16:creationId xmlns:a16="http://schemas.microsoft.com/office/drawing/2014/main" xmlns="" id="{7C6891EA-E337-0F90-D14F-45641BBAEBBD}"/>
+                  <a16:creationId xmlns="" xmlns:a16="http://schemas.microsoft.com/office/drawing/2014/main" id="{7C6891EA-E337-0F90-D14F-45641BBAEBBD}"/>
                 </a:ext>
               </a:extLst>
             </p:cNvPr>
@@ -8148,7 +8148,7 @@
               <p:cNvPr id="26" name="CaixaDeTexto 25">
                 <a:extLst>
                   <a:ext uri="{FF2B5EF4-FFF2-40B4-BE49-F238E27FC236}">
-                    <a16:creationId xmlns:a16="http://schemas.microsoft.com/office/drawing/2014/main" xmlns="" id="{EA0B3A29-D4D6-FCDB-D400-00DDC5DD35B0}"/>
+                    <a16:creationId xmlns="" xmlns:a16="http://schemas.microsoft.com/office/drawing/2014/main" id="{EA0B3A29-D4D6-FCDB-D400-00DDC5DD35B0}"/>
                   </a:ext>
                 </a:extLst>
               </p:cNvPr>
@@ -8456,7 +8456,7 @@
         <p:cNvPr id="1" name="">
           <a:extLst>
             <a:ext uri="{FF2B5EF4-FFF2-40B4-BE49-F238E27FC236}">
-              <a16:creationId xmlns:a16="http://schemas.microsoft.com/office/drawing/2014/main" xmlns="" id="{3505C21E-F99F-1F86-68FD-B54DA0D8F6EE}"/>
+              <a16:creationId xmlns="" xmlns:a16="http://schemas.microsoft.com/office/drawing/2014/main" id="{3505C21E-F99F-1F86-68FD-B54DA0D8F6EE}"/>
             </a:ext>
           </a:extLst>
         </p:cNvPr>
@@ -8476,7 +8476,7 @@
           <p:cNvPr id="2" name="Título 1">
             <a:extLst>
               <a:ext uri="{FF2B5EF4-FFF2-40B4-BE49-F238E27FC236}">
-                <a16:creationId xmlns:a16="http://schemas.microsoft.com/office/drawing/2014/main" xmlns="" id="{F52C2310-D341-EF14-1295-8882EF1555F3}"/>
+                <a16:creationId xmlns="" xmlns:a16="http://schemas.microsoft.com/office/drawing/2014/main" id="{F52C2310-D341-EF14-1295-8882EF1555F3}"/>
               </a:ext>
             </a:extLst>
           </p:cNvPr>
@@ -8504,7 +8504,7 @@
           <p:cNvPr id="3" name="Espaço Reservado para Conteúdo 2">
             <a:extLst>
               <a:ext uri="{FF2B5EF4-FFF2-40B4-BE49-F238E27FC236}">
-                <a16:creationId xmlns:a16="http://schemas.microsoft.com/office/drawing/2014/main" xmlns="" id="{63ACD9A7-3967-6937-BAEE-BF163BE77966}"/>
+                <a16:creationId xmlns="" xmlns:a16="http://schemas.microsoft.com/office/drawing/2014/main" id="{63ACD9A7-3967-6937-BAEE-BF163BE77966}"/>
               </a:ext>
             </a:extLst>
           </p:cNvPr>
@@ -8563,7 +8563,7 @@
               <p:cNvPr id="18" name="CaixaDeTexto 17">
                 <a:extLst>
                   <a:ext uri="{FF2B5EF4-FFF2-40B4-BE49-F238E27FC236}">
-                    <a16:creationId xmlns:a16="http://schemas.microsoft.com/office/drawing/2014/main" xmlns="" id="{A326554D-7061-A5A0-10D4-89EFE78EE532}"/>
+                    <a16:creationId xmlns="" xmlns:a16="http://schemas.microsoft.com/office/drawing/2014/main" id="{A326554D-7061-A5A0-10D4-89EFE78EE532}"/>
                   </a:ext>
                 </a:extLst>
               </p:cNvPr>
@@ -8703,7 +8703,7 @@
           <p:cNvPr id="19" name="Elipse 18">
             <a:extLst>
               <a:ext uri="{FF2B5EF4-FFF2-40B4-BE49-F238E27FC236}">
-                <a16:creationId xmlns:a16="http://schemas.microsoft.com/office/drawing/2014/main" xmlns="" id="{4AF54D8E-6D21-A889-D883-2C9CBA6DEC92}"/>
+                <a16:creationId xmlns="" xmlns:a16="http://schemas.microsoft.com/office/drawing/2014/main" id="{4AF54D8E-6D21-A889-D883-2C9CBA6DEC92}"/>
               </a:ext>
             </a:extLst>
           </p:cNvPr>
@@ -8755,7 +8755,7 @@
           <p:cNvPr id="20" name="Elipse 19">
             <a:extLst>
               <a:ext uri="{FF2B5EF4-FFF2-40B4-BE49-F238E27FC236}">
-                <a16:creationId xmlns:a16="http://schemas.microsoft.com/office/drawing/2014/main" xmlns="" id="{B12F94EC-6AB6-B29E-0B90-67907ED6D9C5}"/>
+                <a16:creationId xmlns="" xmlns:a16="http://schemas.microsoft.com/office/drawing/2014/main" id="{B12F94EC-6AB6-B29E-0B90-67907ED6D9C5}"/>
               </a:ext>
             </a:extLst>
           </p:cNvPr>
@@ -8807,7 +8807,7 @@
           <p:cNvPr id="25" name="Agrupar 24">
             <a:extLst>
               <a:ext uri="{FF2B5EF4-FFF2-40B4-BE49-F238E27FC236}">
-                <a16:creationId xmlns:a16="http://schemas.microsoft.com/office/drawing/2014/main" xmlns="" id="{4055DEAC-F07C-0C94-1B62-29A674AC1765}"/>
+                <a16:creationId xmlns="" xmlns:a16="http://schemas.microsoft.com/office/drawing/2014/main" id="{4055DEAC-F07C-0C94-1B62-29A674AC1765}"/>
               </a:ext>
             </a:extLst>
           </p:cNvPr>
@@ -8827,7 +8827,7 @@
             <p:cNvPr id="17" name="Agrupar 16">
               <a:extLst>
                 <a:ext uri="{FF2B5EF4-FFF2-40B4-BE49-F238E27FC236}">
-                  <a16:creationId xmlns:a16="http://schemas.microsoft.com/office/drawing/2014/main" xmlns="" id="{47C36D27-5523-8A36-BC43-EA2324C5E9A1}"/>
+                  <a16:creationId xmlns="" xmlns:a16="http://schemas.microsoft.com/office/drawing/2014/main" id="{47C36D27-5523-8A36-BC43-EA2324C5E9A1}"/>
                 </a:ext>
               </a:extLst>
             </p:cNvPr>
@@ -8847,7 +8847,7 @@
               <p:cNvPr id="4" name="Agrupar 3">
                 <a:extLst>
                   <a:ext uri="{FF2B5EF4-FFF2-40B4-BE49-F238E27FC236}">
-                    <a16:creationId xmlns:a16="http://schemas.microsoft.com/office/drawing/2014/main" xmlns="" id="{CCE73537-384D-5509-B717-2E78CA6D2080}"/>
+                    <a16:creationId xmlns="" xmlns:a16="http://schemas.microsoft.com/office/drawing/2014/main" id="{CCE73537-384D-5509-B717-2E78CA6D2080}"/>
                   </a:ext>
                 </a:extLst>
               </p:cNvPr>
@@ -8867,7 +8867,7 @@
                 <p:cNvPr id="5" name="Picture 2">
                   <a:extLst>
                     <a:ext uri="{FF2B5EF4-FFF2-40B4-BE49-F238E27FC236}">
-                      <a16:creationId xmlns:a16="http://schemas.microsoft.com/office/drawing/2014/main" xmlns="" id="{3C129BBF-B934-EAD6-F14D-F90A2EC5B5D5}"/>
+                      <a16:creationId xmlns="" xmlns:a16="http://schemas.microsoft.com/office/drawing/2014/main" id="{3C129BBF-B934-EAD6-F14D-F90A2EC5B5D5}"/>
                     </a:ext>
                   </a:extLst>
                 </p:cNvPr>
@@ -8914,7 +8914,7 @@
                 <p:cNvPr id="6" name="Conector reto 5">
                   <a:extLst>
                     <a:ext uri="{FF2B5EF4-FFF2-40B4-BE49-F238E27FC236}">
-                      <a16:creationId xmlns:a16="http://schemas.microsoft.com/office/drawing/2014/main" xmlns="" id="{6AB0B0F9-7225-B610-9338-537D15745971}"/>
+                      <a16:creationId xmlns="" xmlns:a16="http://schemas.microsoft.com/office/drawing/2014/main" id="{6AB0B0F9-7225-B610-9338-537D15745971}"/>
                     </a:ext>
                   </a:extLst>
                 </p:cNvPr>
@@ -8957,7 +8957,7 @@
                 <p:cNvPr id="7" name="Conector reto 6">
                   <a:extLst>
                     <a:ext uri="{FF2B5EF4-FFF2-40B4-BE49-F238E27FC236}">
-                      <a16:creationId xmlns:a16="http://schemas.microsoft.com/office/drawing/2014/main" xmlns="" id="{E396CC0B-2247-923A-77B2-C4008FEB1D55}"/>
+                      <a16:creationId xmlns="" xmlns:a16="http://schemas.microsoft.com/office/drawing/2014/main" id="{E396CC0B-2247-923A-77B2-C4008FEB1D55}"/>
                     </a:ext>
                   </a:extLst>
                 </p:cNvPr>
@@ -9000,7 +9000,7 @@
                 <p:cNvPr id="8" name="Conector reto 7">
                   <a:extLst>
                     <a:ext uri="{FF2B5EF4-FFF2-40B4-BE49-F238E27FC236}">
-                      <a16:creationId xmlns:a16="http://schemas.microsoft.com/office/drawing/2014/main" xmlns="" id="{11BB635E-03FB-37F5-DF1D-F2FCF1B3336B}"/>
+                      <a16:creationId xmlns="" xmlns:a16="http://schemas.microsoft.com/office/drawing/2014/main" id="{11BB635E-03FB-37F5-DF1D-F2FCF1B3336B}"/>
                     </a:ext>
                   </a:extLst>
                 </p:cNvPr>
@@ -9043,7 +9043,7 @@
                 <p:cNvPr id="9" name="Conector reto 8">
                   <a:extLst>
                     <a:ext uri="{FF2B5EF4-FFF2-40B4-BE49-F238E27FC236}">
-                      <a16:creationId xmlns:a16="http://schemas.microsoft.com/office/drawing/2014/main" xmlns="" id="{9F13B697-7B3A-6839-9052-9C4751A7E3D8}"/>
+                      <a16:creationId xmlns="" xmlns:a16="http://schemas.microsoft.com/office/drawing/2014/main" id="{9F13B697-7B3A-6839-9052-9C4751A7E3D8}"/>
                     </a:ext>
                   </a:extLst>
                 </p:cNvPr>
@@ -9086,7 +9086,7 @@
                 <p:cNvPr id="10" name="Conector reto 9">
                   <a:extLst>
                     <a:ext uri="{FF2B5EF4-FFF2-40B4-BE49-F238E27FC236}">
-                      <a16:creationId xmlns:a16="http://schemas.microsoft.com/office/drawing/2014/main" xmlns="" id="{F066DD7E-5D9F-DA1A-56AE-02BC13BAA04B}"/>
+                      <a16:creationId xmlns="" xmlns:a16="http://schemas.microsoft.com/office/drawing/2014/main" id="{F066DD7E-5D9F-DA1A-56AE-02BC13BAA04B}"/>
                     </a:ext>
                   </a:extLst>
                 </p:cNvPr>
@@ -9130,7 +9130,7 @@
               <p:cNvPr id="11" name="CaixaDeTexto 10">
                 <a:extLst>
                   <a:ext uri="{FF2B5EF4-FFF2-40B4-BE49-F238E27FC236}">
-                    <a16:creationId xmlns:a16="http://schemas.microsoft.com/office/drawing/2014/main" xmlns="" id="{D2655067-A26A-F9EC-FDD8-FA2359C9A643}"/>
+                    <a16:creationId xmlns="" xmlns:a16="http://schemas.microsoft.com/office/drawing/2014/main" id="{D2655067-A26A-F9EC-FDD8-FA2359C9A643}"/>
                   </a:ext>
                 </a:extLst>
               </p:cNvPr>
@@ -9165,7 +9165,7 @@
               <p:cNvPr id="12" name="CaixaDeTexto 11">
                 <a:extLst>
                   <a:ext uri="{FF2B5EF4-FFF2-40B4-BE49-F238E27FC236}">
-                    <a16:creationId xmlns:a16="http://schemas.microsoft.com/office/drawing/2014/main" xmlns="" id="{CA5B0A17-29B2-5A89-F63C-2420B13C5B68}"/>
+                    <a16:creationId xmlns="" xmlns:a16="http://schemas.microsoft.com/office/drawing/2014/main" id="{CA5B0A17-29B2-5A89-F63C-2420B13C5B68}"/>
                   </a:ext>
                 </a:extLst>
               </p:cNvPr>
@@ -9200,7 +9200,7 @@
               <p:cNvPr id="13" name="CaixaDeTexto 12">
                 <a:extLst>
                   <a:ext uri="{FF2B5EF4-FFF2-40B4-BE49-F238E27FC236}">
-                    <a16:creationId xmlns:a16="http://schemas.microsoft.com/office/drawing/2014/main" xmlns="" id="{A5972850-3C6B-BDEB-976F-F13462FD2CF0}"/>
+                    <a16:creationId xmlns="" xmlns:a16="http://schemas.microsoft.com/office/drawing/2014/main" id="{A5972850-3C6B-BDEB-976F-F13462FD2CF0}"/>
                   </a:ext>
                 </a:extLst>
               </p:cNvPr>
@@ -9235,7 +9235,7 @@
               <p:cNvPr id="14" name="CaixaDeTexto 13">
                 <a:extLst>
                   <a:ext uri="{FF2B5EF4-FFF2-40B4-BE49-F238E27FC236}">
-                    <a16:creationId xmlns:a16="http://schemas.microsoft.com/office/drawing/2014/main" xmlns="" id="{53D3C7CC-7BC7-3D66-A6EE-218C6F1088CF}"/>
+                    <a16:creationId xmlns="" xmlns:a16="http://schemas.microsoft.com/office/drawing/2014/main" id="{53D3C7CC-7BC7-3D66-A6EE-218C6F1088CF}"/>
                   </a:ext>
                 </a:extLst>
               </p:cNvPr>
@@ -9270,7 +9270,7 @@
               <p:cNvPr id="15" name="CaixaDeTexto 14">
                 <a:extLst>
                   <a:ext uri="{FF2B5EF4-FFF2-40B4-BE49-F238E27FC236}">
-                    <a16:creationId xmlns:a16="http://schemas.microsoft.com/office/drawing/2014/main" xmlns="" id="{F6175BF4-F7D5-2ECE-6349-5B53EF3E4F24}"/>
+                    <a16:creationId xmlns="" xmlns:a16="http://schemas.microsoft.com/office/drawing/2014/main" id="{F6175BF4-F7D5-2ECE-6349-5B53EF3E4F24}"/>
                   </a:ext>
                 </a:extLst>
               </p:cNvPr>
@@ -9305,7 +9305,7 @@
               <p:cNvPr id="16" name="CaixaDeTexto 15">
                 <a:extLst>
                   <a:ext uri="{FF2B5EF4-FFF2-40B4-BE49-F238E27FC236}">
-                    <a16:creationId xmlns:a16="http://schemas.microsoft.com/office/drawing/2014/main" xmlns="" id="{0B11F692-A433-62D0-99B0-0668B48A6F65}"/>
+                    <a16:creationId xmlns="" xmlns:a16="http://schemas.microsoft.com/office/drawing/2014/main" id="{0B11F692-A433-62D0-99B0-0668B48A6F65}"/>
                   </a:ext>
                 </a:extLst>
               </p:cNvPr>
@@ -9341,7 +9341,7 @@
             <p:cNvPr id="21" name="Elipse 20">
               <a:extLst>
                 <a:ext uri="{FF2B5EF4-FFF2-40B4-BE49-F238E27FC236}">
-                  <a16:creationId xmlns:a16="http://schemas.microsoft.com/office/drawing/2014/main" xmlns="" id="{345EFA2C-84B3-BA95-4F31-A95622D44401}"/>
+                  <a16:creationId xmlns="" xmlns:a16="http://schemas.microsoft.com/office/drawing/2014/main" id="{345EFA2C-84B3-BA95-4F31-A95622D44401}"/>
                 </a:ext>
               </a:extLst>
             </p:cNvPr>
@@ -9393,7 +9393,7 @@
             <p:cNvPr id="22" name="Elipse 21">
               <a:extLst>
                 <a:ext uri="{FF2B5EF4-FFF2-40B4-BE49-F238E27FC236}">
-                  <a16:creationId xmlns:a16="http://schemas.microsoft.com/office/drawing/2014/main" xmlns="" id="{3BE96C96-6D77-D2CE-511E-D7B0BDAD0D60}"/>
+                  <a16:creationId xmlns="" xmlns:a16="http://schemas.microsoft.com/office/drawing/2014/main" id="{3BE96C96-6D77-D2CE-511E-D7B0BDAD0D60}"/>
                 </a:ext>
               </a:extLst>
             </p:cNvPr>
@@ -9448,7 +9448,7 @@
               <p:cNvPr id="26" name="CaixaDeTexto 25">
                 <a:extLst>
                   <a:ext uri="{FF2B5EF4-FFF2-40B4-BE49-F238E27FC236}">
-                    <a16:creationId xmlns:a16="http://schemas.microsoft.com/office/drawing/2014/main" xmlns="" id="{9EDE9D76-0D87-FBBD-A58D-3E1A554142D7}"/>
+                    <a16:creationId xmlns="" xmlns:a16="http://schemas.microsoft.com/office/drawing/2014/main" id="{9EDE9D76-0D87-FBBD-A58D-3E1A554142D7}"/>
                   </a:ext>
                 </a:extLst>
               </p:cNvPr>
@@ -9770,7 +9770,7 @@
           <p:cNvPr id="2" name="Título 1">
             <a:extLst>
               <a:ext uri="{FF2B5EF4-FFF2-40B4-BE49-F238E27FC236}">
-                <a16:creationId xmlns:a16="http://schemas.microsoft.com/office/drawing/2014/main" xmlns="" id="{CF95404E-CC0C-4A02-1C7F-A7A21D9C652D}"/>
+                <a16:creationId xmlns="" xmlns:a16="http://schemas.microsoft.com/office/drawing/2014/main" id="{CF95404E-CC0C-4A02-1C7F-A7A21D9C652D}"/>
               </a:ext>
             </a:extLst>
           </p:cNvPr>
@@ -9800,7 +9800,7 @@
               <p:cNvPr id="3" name="Espaço Reservado para Conteúdo 2">
                 <a:extLst>
                   <a:ext uri="{FF2B5EF4-FFF2-40B4-BE49-F238E27FC236}">
-                    <a16:creationId xmlns:a16="http://schemas.microsoft.com/office/drawing/2014/main" xmlns="" id="{7BB6200C-6379-6754-5883-867BF482713F}"/>
+                    <a16:creationId xmlns="" xmlns:a16="http://schemas.microsoft.com/office/drawing/2014/main" id="{7BB6200C-6379-6754-5883-867BF482713F}"/>
                   </a:ext>
                 </a:extLst>
               </p:cNvPr>
@@ -10028,7 +10028,7 @@
           <p:cNvPr id="8" name="Imagem 7">
             <a:extLst>
               <a:ext uri="{FF2B5EF4-FFF2-40B4-BE49-F238E27FC236}">
-                <a16:creationId xmlns:a16="http://schemas.microsoft.com/office/drawing/2014/main" xmlns="" id="{28B934AE-7AFB-089F-5327-4A838F805EA7}"/>
+                <a16:creationId xmlns="" xmlns:a16="http://schemas.microsoft.com/office/drawing/2014/main" id="{28B934AE-7AFB-089F-5327-4A838F805EA7}"/>
               </a:ext>
             </a:extLst>
           </p:cNvPr>
@@ -10066,7 +10066,7 @@
               <p:cNvPr id="9" name="CaixaDeTexto 8">
                 <a:extLst>
                   <a:ext uri="{FF2B5EF4-FFF2-40B4-BE49-F238E27FC236}">
-                    <a16:creationId xmlns:a16="http://schemas.microsoft.com/office/drawing/2014/main" xmlns="" id="{B62B356A-C62C-7C18-F99C-0BB5124AAB97}"/>
+                    <a16:creationId xmlns="" xmlns:a16="http://schemas.microsoft.com/office/drawing/2014/main" id="{B62B356A-C62C-7C18-F99C-0BB5124AAB97}"/>
                   </a:ext>
                 </a:extLst>
               </p:cNvPr>
@@ -10198,7 +10198,7 @@
               <p:cNvPr id="10" name="CaixaDeTexto 9">
                 <a:extLst>
                   <a:ext uri="{FF2B5EF4-FFF2-40B4-BE49-F238E27FC236}">
-                    <a16:creationId xmlns:a16="http://schemas.microsoft.com/office/drawing/2014/main" xmlns="" id="{F4E588CD-F36D-1549-E773-192477475B31}"/>
+                    <a16:creationId xmlns="" xmlns:a16="http://schemas.microsoft.com/office/drawing/2014/main" id="{F4E588CD-F36D-1549-E773-192477475B31}"/>
                   </a:ext>
                 </a:extLst>
               </p:cNvPr>
@@ -10384,7 +10384,7 @@
               <p:cNvPr id="11" name="CaixaDeTexto 10">
                 <a:extLst>
                   <a:ext uri="{FF2B5EF4-FFF2-40B4-BE49-F238E27FC236}">
-                    <a16:creationId xmlns:a16="http://schemas.microsoft.com/office/drawing/2014/main" xmlns="" id="{55E66E9B-C5B8-2BEF-C2D6-304317E08986}"/>
+                    <a16:creationId xmlns="" xmlns:a16="http://schemas.microsoft.com/office/drawing/2014/main" id="{55E66E9B-C5B8-2BEF-C2D6-304317E08986}"/>
                   </a:ext>
                 </a:extLst>
               </p:cNvPr>
@@ -10616,7 +10616,7 @@
           <p:cNvPr id="12" name="CaixaDeTexto 11">
             <a:extLst>
               <a:ext uri="{FF2B5EF4-FFF2-40B4-BE49-F238E27FC236}">
-                <a16:creationId xmlns:a16="http://schemas.microsoft.com/office/drawing/2014/main" xmlns="" id="{4B804862-4CB6-95A6-785A-EA19222C7E0A}"/>
+                <a16:creationId xmlns="" xmlns:a16="http://schemas.microsoft.com/office/drawing/2014/main" id="{4B804862-4CB6-95A6-785A-EA19222C7E0A}"/>
               </a:ext>
             </a:extLst>
           </p:cNvPr>
@@ -10653,7 +10653,7 @@
               <p:cNvPr id="15" name="CaixaDeTexto 14">
                 <a:extLst>
                   <a:ext uri="{FF2B5EF4-FFF2-40B4-BE49-F238E27FC236}">
-                    <a16:creationId xmlns:a16="http://schemas.microsoft.com/office/drawing/2014/main" xmlns="" id="{2C0E0BF6-E9E7-917E-1A95-7663ACE47117}"/>
+                    <a16:creationId xmlns="" xmlns:a16="http://schemas.microsoft.com/office/drawing/2014/main" id="{2C0E0BF6-E9E7-917E-1A95-7663ACE47117}"/>
                   </a:ext>
                 </a:extLst>
               </p:cNvPr>
@@ -10792,7 +10792,7 @@
           <p:cNvPr id="16" name="CaixaDeTexto 15">
             <a:extLst>
               <a:ext uri="{FF2B5EF4-FFF2-40B4-BE49-F238E27FC236}">
-                <a16:creationId xmlns:a16="http://schemas.microsoft.com/office/drawing/2014/main" xmlns="" id="{FD948EC7-85F7-6E52-1F45-B0C46EEE686D}"/>
+                <a16:creationId xmlns="" xmlns:a16="http://schemas.microsoft.com/office/drawing/2014/main" id="{FD948EC7-85F7-6E52-1F45-B0C46EEE686D}"/>
               </a:ext>
             </a:extLst>
           </p:cNvPr>
@@ -10829,7 +10829,7 @@
               <p:cNvPr id="17" name="CaixaDeTexto 16">
                 <a:extLst>
                   <a:ext uri="{FF2B5EF4-FFF2-40B4-BE49-F238E27FC236}">
-                    <a16:creationId xmlns:a16="http://schemas.microsoft.com/office/drawing/2014/main" xmlns="" id="{0C965931-9A52-5212-D858-2CA21A5BB4E6}"/>
+                    <a16:creationId xmlns="" xmlns:a16="http://schemas.microsoft.com/office/drawing/2014/main" id="{0C965931-9A52-5212-D858-2CA21A5BB4E6}"/>
                   </a:ext>
                 </a:extLst>
               </p:cNvPr>
@@ -10967,7 +10967,7 @@
           <p:cNvPr id="18" name="CaixaDeTexto 17">
             <a:extLst>
               <a:ext uri="{FF2B5EF4-FFF2-40B4-BE49-F238E27FC236}">
-                <a16:creationId xmlns:a16="http://schemas.microsoft.com/office/drawing/2014/main" xmlns="" id="{CDE437A9-7CA4-2024-881F-36BEFDF36D5A}"/>
+                <a16:creationId xmlns="" xmlns:a16="http://schemas.microsoft.com/office/drawing/2014/main" id="{CDE437A9-7CA4-2024-881F-36BEFDF36D5A}"/>
               </a:ext>
             </a:extLst>
           </p:cNvPr>
@@ -11032,7 +11032,7 @@
           <p:cNvPr id="2" name="Título 1">
             <a:extLst>
               <a:ext uri="{FF2B5EF4-FFF2-40B4-BE49-F238E27FC236}">
-                <a16:creationId xmlns:a16="http://schemas.microsoft.com/office/drawing/2014/main" xmlns="" id="{77169B24-439F-2623-4569-4FB2DD7BA69E}"/>
+                <a16:creationId xmlns="" xmlns:a16="http://schemas.microsoft.com/office/drawing/2014/main" id="{77169B24-439F-2623-4569-4FB2DD7BA69E}"/>
               </a:ext>
             </a:extLst>
           </p:cNvPr>
@@ -11062,7 +11062,7 @@
               <p:cNvPr id="3" name="Espaço Reservado para Conteúdo 2">
                 <a:extLst>
                   <a:ext uri="{FF2B5EF4-FFF2-40B4-BE49-F238E27FC236}">
-                    <a16:creationId xmlns:a16="http://schemas.microsoft.com/office/drawing/2014/main" xmlns="" id="{F7659DC9-1554-0C0A-78CF-76B7B51210CF}"/>
+                    <a16:creationId xmlns="" xmlns:a16="http://schemas.microsoft.com/office/drawing/2014/main" id="{F7659DC9-1554-0C0A-78CF-76B7B51210CF}"/>
                   </a:ext>
                 </a:extLst>
               </p:cNvPr>
@@ -11229,7 +11229,7 @@
               <p:cNvPr id="5" name="CaixaDeTexto 4">
                 <a:extLst>
                   <a:ext uri="{FF2B5EF4-FFF2-40B4-BE49-F238E27FC236}">
-                    <a16:creationId xmlns:a16="http://schemas.microsoft.com/office/drawing/2014/main" xmlns="" id="{23AA0FD9-5618-1CB1-C45C-EC822823FCE6}"/>
+                    <a16:creationId xmlns="" xmlns:a16="http://schemas.microsoft.com/office/drawing/2014/main" id="{23AA0FD9-5618-1CB1-C45C-EC822823FCE6}"/>
                   </a:ext>
                 </a:extLst>
               </p:cNvPr>
@@ -11415,7 +11415,7 @@
               <p:cNvPr id="4" name="CaixaDeTexto 3">
                 <a:extLst>
                   <a:ext uri="{FF2B5EF4-FFF2-40B4-BE49-F238E27FC236}">
-                    <a16:creationId xmlns:a16="http://schemas.microsoft.com/office/drawing/2014/main" xmlns="" id="{CE383BC1-E520-56B2-9887-35520FE0D236}"/>
+                    <a16:creationId xmlns="" xmlns:a16="http://schemas.microsoft.com/office/drawing/2014/main" id="{CE383BC1-E520-56B2-9887-35520FE0D236}"/>
                   </a:ext>
                 </a:extLst>
               </p:cNvPr>
@@ -11545,7 +11545,7 @@
           <p:cNvPr id="17" name="Imagem 16">
             <a:extLst>
               <a:ext uri="{FF2B5EF4-FFF2-40B4-BE49-F238E27FC236}">
-                <a16:creationId xmlns:a16="http://schemas.microsoft.com/office/drawing/2014/main" xmlns="" id="{B264004C-5785-B53A-912B-070D69AF0074}"/>
+                <a16:creationId xmlns="" xmlns:a16="http://schemas.microsoft.com/office/drawing/2014/main" id="{B264004C-5785-B53A-912B-070D69AF0074}"/>
               </a:ext>
             </a:extLst>
           </p:cNvPr>
@@ -11583,7 +11583,7 @@
               <p:cNvPr id="6" name="CaixaDeTexto 5">
                 <a:extLst>
                   <a:ext uri="{FF2B5EF4-FFF2-40B4-BE49-F238E27FC236}">
-                    <a16:creationId xmlns:a16="http://schemas.microsoft.com/office/drawing/2014/main" xmlns="" id="{FB342B0A-A7DF-6C12-40E4-C2608103EBA3}"/>
+                    <a16:creationId xmlns="" xmlns:a16="http://schemas.microsoft.com/office/drawing/2014/main" id="{FB342B0A-A7DF-6C12-40E4-C2608103EBA3}"/>
                   </a:ext>
                 </a:extLst>
               </p:cNvPr>
@@ -11753,7 +11753,7 @@
           <p:cNvPr id="2050" name="Picture 2">
             <a:extLst>
               <a:ext uri="{FF2B5EF4-FFF2-40B4-BE49-F238E27FC236}">
-                <a16:creationId xmlns:a16="http://schemas.microsoft.com/office/drawing/2014/main" xmlns="" id="{AC1FD510-769A-FDEC-ABA2-12F26B39BDEF}"/>
+                <a16:creationId xmlns="" xmlns:a16="http://schemas.microsoft.com/office/drawing/2014/main" id="{AC1FD510-769A-FDEC-ABA2-12F26B39BDEF}"/>
               </a:ext>
             </a:extLst>
           </p:cNvPr>
@@ -11830,7 +11830,7 @@
           <p:cNvPr id="2" name="Título 1">
             <a:extLst>
               <a:ext uri="{FF2B5EF4-FFF2-40B4-BE49-F238E27FC236}">
-                <a16:creationId xmlns:a16="http://schemas.microsoft.com/office/drawing/2014/main" xmlns="" id="{7A532BBE-B730-80FE-B571-737E28D0519E}"/>
+                <a16:creationId xmlns="" xmlns:a16="http://schemas.microsoft.com/office/drawing/2014/main" id="{7A532BBE-B730-80FE-B571-737E28D0519E}"/>
               </a:ext>
             </a:extLst>
           </p:cNvPr>
@@ -11860,7 +11860,7 @@
               <p:cNvPr id="3" name="Espaço Reservado para Conteúdo 2">
                 <a:extLst>
                   <a:ext uri="{FF2B5EF4-FFF2-40B4-BE49-F238E27FC236}">
-                    <a16:creationId xmlns:a16="http://schemas.microsoft.com/office/drawing/2014/main" xmlns="" id="{6B6828F7-9D67-7C40-231F-ADA4A16099B3}"/>
+                    <a16:creationId xmlns="" xmlns:a16="http://schemas.microsoft.com/office/drawing/2014/main" id="{6B6828F7-9D67-7C40-231F-ADA4A16099B3}"/>
                   </a:ext>
                 </a:extLst>
               </p:cNvPr>
@@ -12044,7 +12044,7 @@
           <p:cNvPr id="4" name="Imagem 3">
             <a:extLst>
               <a:ext uri="{FF2B5EF4-FFF2-40B4-BE49-F238E27FC236}">
-                <a16:creationId xmlns:a16="http://schemas.microsoft.com/office/drawing/2014/main" xmlns="" id="{F7FD3E92-C09E-69CD-F096-68F5BBDB05D5}"/>
+                <a16:creationId xmlns="" xmlns:a16="http://schemas.microsoft.com/office/drawing/2014/main" id="{F7FD3E92-C09E-69CD-F096-68F5BBDB05D5}"/>
               </a:ext>
             </a:extLst>
           </p:cNvPr>
@@ -12082,7 +12082,7 @@
               <p:cNvPr id="7" name="CaixaDeTexto 6">
                 <a:extLst>
                   <a:ext uri="{FF2B5EF4-FFF2-40B4-BE49-F238E27FC236}">
-                    <a16:creationId xmlns:a16="http://schemas.microsoft.com/office/drawing/2014/main" xmlns="" id="{AA0E7A75-4672-695C-338D-9C8E6FB5F241}"/>
+                    <a16:creationId xmlns="" xmlns:a16="http://schemas.microsoft.com/office/drawing/2014/main" id="{AA0E7A75-4672-695C-338D-9C8E6FB5F241}"/>
                   </a:ext>
                 </a:extLst>
               </p:cNvPr>
@@ -12214,7 +12214,7 @@
               <p:cNvPr id="8" name="CaixaDeTexto 7">
                 <a:extLst>
                   <a:ext uri="{FF2B5EF4-FFF2-40B4-BE49-F238E27FC236}">
-                    <a16:creationId xmlns:a16="http://schemas.microsoft.com/office/drawing/2014/main" xmlns="" id="{130EC248-F637-E0C9-42A3-BEAB62D2298C}"/>
+                    <a16:creationId xmlns="" xmlns:a16="http://schemas.microsoft.com/office/drawing/2014/main" id="{130EC248-F637-E0C9-42A3-BEAB62D2298C}"/>
                   </a:ext>
                 </a:extLst>
               </p:cNvPr>
@@ -12419,7 +12419,7 @@
               <p:cNvPr id="9" name="CaixaDeTexto 8">
                 <a:extLst>
                   <a:ext uri="{FF2B5EF4-FFF2-40B4-BE49-F238E27FC236}">
-                    <a16:creationId xmlns:a16="http://schemas.microsoft.com/office/drawing/2014/main" xmlns="" id="{0FE64DDE-CE4B-1933-7ADD-4A83CBA36CD5}"/>
+                    <a16:creationId xmlns="" xmlns:a16="http://schemas.microsoft.com/office/drawing/2014/main" id="{0FE64DDE-CE4B-1933-7ADD-4A83CBA36CD5}"/>
                   </a:ext>
                 </a:extLst>
               </p:cNvPr>
@@ -12629,7 +12629,7 @@
           <p:cNvPr id="10" name="CaixaDeTexto 9">
             <a:extLst>
               <a:ext uri="{FF2B5EF4-FFF2-40B4-BE49-F238E27FC236}">
-                <a16:creationId xmlns:a16="http://schemas.microsoft.com/office/drawing/2014/main" xmlns="" id="{2588A145-A2B8-63C4-EA80-8E35C1B8BD03}"/>
+                <a16:creationId xmlns="" xmlns:a16="http://schemas.microsoft.com/office/drawing/2014/main" id="{2588A145-A2B8-63C4-EA80-8E35C1B8BD03}"/>
               </a:ext>
             </a:extLst>
           </p:cNvPr>
@@ -12666,7 +12666,7 @@
               <p:cNvPr id="11" name="CaixaDeTexto 10">
                 <a:extLst>
                   <a:ext uri="{FF2B5EF4-FFF2-40B4-BE49-F238E27FC236}">
-                    <a16:creationId xmlns:a16="http://schemas.microsoft.com/office/drawing/2014/main" xmlns="" id="{46D2BE21-82CD-97D4-8C96-5BCF4C0D8490}"/>
+                    <a16:creationId xmlns="" xmlns:a16="http://schemas.microsoft.com/office/drawing/2014/main" id="{46D2BE21-82CD-97D4-8C96-5BCF4C0D8490}"/>
                   </a:ext>
                 </a:extLst>
               </p:cNvPr>
@@ -12805,7 +12805,7 @@
           <p:cNvPr id="12" name="CaixaDeTexto 11">
             <a:extLst>
               <a:ext uri="{FF2B5EF4-FFF2-40B4-BE49-F238E27FC236}">
-                <a16:creationId xmlns:a16="http://schemas.microsoft.com/office/drawing/2014/main" xmlns="" id="{0754134C-FF1C-6E49-5C05-D82167F99FC1}"/>
+                <a16:creationId xmlns="" xmlns:a16="http://schemas.microsoft.com/office/drawing/2014/main" id="{0754134C-FF1C-6E49-5C05-D82167F99FC1}"/>
               </a:ext>
             </a:extLst>
           </p:cNvPr>
@@ -12842,7 +12842,7 @@
               <p:cNvPr id="13" name="CaixaDeTexto 12">
                 <a:extLst>
                   <a:ext uri="{FF2B5EF4-FFF2-40B4-BE49-F238E27FC236}">
-                    <a16:creationId xmlns:a16="http://schemas.microsoft.com/office/drawing/2014/main" xmlns="" id="{0EEC867F-1B76-A5C2-84DC-C316CA20789A}"/>
+                    <a16:creationId xmlns="" xmlns:a16="http://schemas.microsoft.com/office/drawing/2014/main" id="{0EEC867F-1B76-A5C2-84DC-C316CA20789A}"/>
                   </a:ext>
                 </a:extLst>
               </p:cNvPr>
@@ -12980,7 +12980,7 @@
           <p:cNvPr id="14" name="CaixaDeTexto 13">
             <a:extLst>
               <a:ext uri="{FF2B5EF4-FFF2-40B4-BE49-F238E27FC236}">
-                <a16:creationId xmlns:a16="http://schemas.microsoft.com/office/drawing/2014/main" xmlns="" id="{96F84455-938D-8F48-6B09-1A6AC09B2185}"/>
+                <a16:creationId xmlns="" xmlns:a16="http://schemas.microsoft.com/office/drawing/2014/main" id="{96F84455-938D-8F48-6B09-1A6AC09B2185}"/>
               </a:ext>
             </a:extLst>
           </p:cNvPr>
@@ -13015,7 +13015,7 @@
           <p:cNvPr id="15" name="Picture 2">
             <a:extLst>
               <a:ext uri="{FF2B5EF4-FFF2-40B4-BE49-F238E27FC236}">
-                <a16:creationId xmlns:a16="http://schemas.microsoft.com/office/drawing/2014/main" xmlns="" id="{210AABEE-8AC5-2FEE-F211-3DCFEC9504EA}"/>
+                <a16:creationId xmlns="" xmlns:a16="http://schemas.microsoft.com/office/drawing/2014/main" id="{210AABEE-8AC5-2FEE-F211-3DCFEC9504EA}"/>
               </a:ext>
             </a:extLst>
           </p:cNvPr>
@@ -13064,7 +13064,7 @@
               <p:cNvPr id="16" name="CaixaDeTexto 15">
                 <a:extLst>
                   <a:ext uri="{FF2B5EF4-FFF2-40B4-BE49-F238E27FC236}">
-                    <a16:creationId xmlns:a16="http://schemas.microsoft.com/office/drawing/2014/main" xmlns="" id="{5815255A-37DD-6815-7BA8-6E7547F0DDFB}"/>
+                    <a16:creationId xmlns="" xmlns:a16="http://schemas.microsoft.com/office/drawing/2014/main" id="{5815255A-37DD-6815-7BA8-6E7547F0DDFB}"/>
                   </a:ext>
                 </a:extLst>
               </p:cNvPr>
@@ -13288,7 +13288,7 @@
           <p:cNvPr id="2" name="Título 1">
             <a:extLst>
               <a:ext uri="{FF2B5EF4-FFF2-40B4-BE49-F238E27FC236}">
-                <a16:creationId xmlns:a16="http://schemas.microsoft.com/office/drawing/2014/main" xmlns="" id="{5FF9F3C9-BC99-D1EE-D89B-53B8DB245545}"/>
+                <a16:creationId xmlns="" xmlns:a16="http://schemas.microsoft.com/office/drawing/2014/main" id="{5FF9F3C9-BC99-D1EE-D89B-53B8DB245545}"/>
               </a:ext>
             </a:extLst>
           </p:cNvPr>
@@ -13316,7 +13316,7 @@
           <p:cNvPr id="3" name="Espaço Reservado para Conteúdo 2">
             <a:extLst>
               <a:ext uri="{FF2B5EF4-FFF2-40B4-BE49-F238E27FC236}">
-                <a16:creationId xmlns:a16="http://schemas.microsoft.com/office/drawing/2014/main" xmlns="" id="{A3B0BEA5-45F1-846E-DDE8-40FAEBCEB467}"/>
+                <a16:creationId xmlns="" xmlns:a16="http://schemas.microsoft.com/office/drawing/2014/main" id="{A3B0BEA5-45F1-846E-DDE8-40FAEBCEB467}"/>
               </a:ext>
             </a:extLst>
           </p:cNvPr>
@@ -13484,7 +13484,7 @@
           <p:cNvPr id="4" name="Imagem 3">
             <a:extLst>
               <a:ext uri="{FF2B5EF4-FFF2-40B4-BE49-F238E27FC236}">
-                <a16:creationId xmlns:a16="http://schemas.microsoft.com/office/drawing/2014/main" xmlns="" id="{7205F127-C8CB-909F-4909-CF04C491920B}"/>
+                <a16:creationId xmlns="" xmlns:a16="http://schemas.microsoft.com/office/drawing/2014/main" id="{7205F127-C8CB-909F-4909-CF04C491920B}"/>
               </a:ext>
             </a:extLst>
           </p:cNvPr>
@@ -13550,7 +13550,7 @@
           <p:cNvPr id="2" name="Título 1">
             <a:extLst>
               <a:ext uri="{FF2B5EF4-FFF2-40B4-BE49-F238E27FC236}">
-                <a16:creationId xmlns:a16="http://schemas.microsoft.com/office/drawing/2014/main" xmlns="" id="{49A10830-7336-91D1-5499-0862C69FEE02}"/>
+                <a16:creationId xmlns="" xmlns:a16="http://schemas.microsoft.com/office/drawing/2014/main" id="{49A10830-7336-91D1-5499-0862C69FEE02}"/>
               </a:ext>
             </a:extLst>
           </p:cNvPr>
@@ -13578,7 +13578,7 @@
           <p:cNvPr id="3" name="Espaço Reservado para Conteúdo 2">
             <a:extLst>
               <a:ext uri="{FF2B5EF4-FFF2-40B4-BE49-F238E27FC236}">
-                <a16:creationId xmlns:a16="http://schemas.microsoft.com/office/drawing/2014/main" xmlns="" id="{996BF4C0-7E55-8111-D7D7-035EB9474E11}"/>
+                <a16:creationId xmlns="" xmlns:a16="http://schemas.microsoft.com/office/drawing/2014/main" id="{996BF4C0-7E55-8111-D7D7-035EB9474E11}"/>
               </a:ext>
             </a:extLst>
           </p:cNvPr>
@@ -13737,7 +13737,7 @@
               <p:cNvPr id="4" name="CaixaDeTexto 3">
                 <a:extLst>
                   <a:ext uri="{FF2B5EF4-FFF2-40B4-BE49-F238E27FC236}">
-                    <a16:creationId xmlns:a16="http://schemas.microsoft.com/office/drawing/2014/main" xmlns="" id="{912EE77C-6A3E-1677-40E5-D9887B8F1F1E}"/>
+                    <a16:creationId xmlns="" xmlns:a16="http://schemas.microsoft.com/office/drawing/2014/main" id="{912EE77C-6A3E-1677-40E5-D9887B8F1F1E}"/>
                   </a:ext>
                 </a:extLst>
               </p:cNvPr>
@@ -14000,7 +14000,7 @@
               <p:cNvPr id="6" name="CaixaDeTexto 5">
                 <a:extLst>
                   <a:ext uri="{FF2B5EF4-FFF2-40B4-BE49-F238E27FC236}">
-                    <a16:creationId xmlns:a16="http://schemas.microsoft.com/office/drawing/2014/main" xmlns="" id="{4F978C60-702A-3E84-6A73-7B615BC32415}"/>
+                    <a16:creationId xmlns="" xmlns:a16="http://schemas.microsoft.com/office/drawing/2014/main" id="{4F978C60-702A-3E84-6A73-7B615BC32415}"/>
                   </a:ext>
                 </a:extLst>
               </p:cNvPr>
@@ -14246,7 +14246,7 @@
               <p:cNvPr id="8" name="CaixaDeTexto 7">
                 <a:extLst>
                   <a:ext uri="{FF2B5EF4-FFF2-40B4-BE49-F238E27FC236}">
-                    <a16:creationId xmlns:a16="http://schemas.microsoft.com/office/drawing/2014/main" xmlns="" id="{B2E122A9-38F7-3EDD-EB51-59C40B04209A}"/>
+                    <a16:creationId xmlns="" xmlns:a16="http://schemas.microsoft.com/office/drawing/2014/main" id="{B2E122A9-38F7-3EDD-EB51-59C40B04209A}"/>
                   </a:ext>
                 </a:extLst>
               </p:cNvPr>
@@ -14610,7 +14610,7 @@
           <p:cNvPr id="10" name="Chave Direita 9">
             <a:extLst>
               <a:ext uri="{FF2B5EF4-FFF2-40B4-BE49-F238E27FC236}">
-                <a16:creationId xmlns:a16="http://schemas.microsoft.com/office/drawing/2014/main" xmlns="" id="{93847FBB-5EC0-2B17-E863-7E714B0F2822}"/>
+                <a16:creationId xmlns="" xmlns:a16="http://schemas.microsoft.com/office/drawing/2014/main" id="{93847FBB-5EC0-2B17-E863-7E714B0F2822}"/>
               </a:ext>
             </a:extLst>
           </p:cNvPr>
@@ -14654,7 +14654,7 @@
           <p:cNvPr id="11" name="CaixaDeTexto 10">
             <a:extLst>
               <a:ext uri="{FF2B5EF4-FFF2-40B4-BE49-F238E27FC236}">
-                <a16:creationId xmlns:a16="http://schemas.microsoft.com/office/drawing/2014/main" xmlns="" id="{6BADE38C-30AD-7CB9-1E21-F23E5394C2BF}"/>
+                <a16:creationId xmlns="" xmlns:a16="http://schemas.microsoft.com/office/drawing/2014/main" id="{6BADE38C-30AD-7CB9-1E21-F23E5394C2BF}"/>
               </a:ext>
             </a:extLst>
           </p:cNvPr>
@@ -14690,7 +14690,7 @@
           <p:cNvPr id="12" name="Chave Direita 11">
             <a:extLst>
               <a:ext uri="{FF2B5EF4-FFF2-40B4-BE49-F238E27FC236}">
-                <a16:creationId xmlns:a16="http://schemas.microsoft.com/office/drawing/2014/main" xmlns="" id="{188BC520-3A22-1304-CF44-585EBB62C79B}"/>
+                <a16:creationId xmlns="" xmlns:a16="http://schemas.microsoft.com/office/drawing/2014/main" id="{188BC520-3A22-1304-CF44-585EBB62C79B}"/>
               </a:ext>
             </a:extLst>
           </p:cNvPr>
@@ -14734,7 +14734,7 @@
           <p:cNvPr id="13" name="CaixaDeTexto 12">
             <a:extLst>
               <a:ext uri="{FF2B5EF4-FFF2-40B4-BE49-F238E27FC236}">
-                <a16:creationId xmlns:a16="http://schemas.microsoft.com/office/drawing/2014/main" xmlns="" id="{51AFB85E-4781-4569-8ECE-CCDFAA667CDA}"/>
+                <a16:creationId xmlns="" xmlns:a16="http://schemas.microsoft.com/office/drawing/2014/main" id="{51AFB85E-4781-4569-8ECE-CCDFAA667CDA}"/>
               </a:ext>
             </a:extLst>
           </p:cNvPr>
@@ -14772,7 +14772,7 @@
               <p:cNvPr id="5" name="CaixaDeTexto 4">
                 <a:extLst>
                   <a:ext uri="{FF2B5EF4-FFF2-40B4-BE49-F238E27FC236}">
-                    <a16:creationId xmlns:a16="http://schemas.microsoft.com/office/drawing/2014/main" xmlns="" id="{58660048-2E5D-834E-A26B-95299D0CB16C}"/>
+                    <a16:creationId xmlns="" xmlns:a16="http://schemas.microsoft.com/office/drawing/2014/main" id="{58660048-2E5D-834E-A26B-95299D0CB16C}"/>
                   </a:ext>
                 </a:extLst>
               </p:cNvPr>
@@ -15082,7 +15082,7 @@
           <p:cNvPr id="2" name="Título 1">
             <a:extLst>
               <a:ext uri="{FF2B5EF4-FFF2-40B4-BE49-F238E27FC236}">
-                <a16:creationId xmlns:a16="http://schemas.microsoft.com/office/drawing/2014/main" xmlns="" id="{49A10830-7336-91D1-5499-0862C69FEE02}"/>
+                <a16:creationId xmlns="" xmlns:a16="http://schemas.microsoft.com/office/drawing/2014/main" id="{49A10830-7336-91D1-5499-0862C69FEE02}"/>
               </a:ext>
             </a:extLst>
           </p:cNvPr>
@@ -15134,7 +15134,7 @@
           <p:cNvPr id="3" name="Espaço Reservado para Conteúdo 2">
             <a:extLst>
               <a:ext uri="{FF2B5EF4-FFF2-40B4-BE49-F238E27FC236}">
-                <a16:creationId xmlns:a16="http://schemas.microsoft.com/office/drawing/2014/main" xmlns="" id="{996BF4C0-7E55-8111-D7D7-035EB9474E11}"/>
+                <a16:creationId xmlns="" xmlns:a16="http://schemas.microsoft.com/office/drawing/2014/main" id="{996BF4C0-7E55-8111-D7D7-035EB9474E11}"/>
               </a:ext>
             </a:extLst>
           </p:cNvPr>
@@ -15245,7 +15245,7 @@
               <p:cNvPr id="4" name="CaixaDeTexto 3">
                 <a:extLst>
                   <a:ext uri="{FF2B5EF4-FFF2-40B4-BE49-F238E27FC236}">
-                    <a16:creationId xmlns:a16="http://schemas.microsoft.com/office/drawing/2014/main" xmlns="" id="{912EE77C-6A3E-1677-40E5-D9887B8F1F1E}"/>
+                    <a16:creationId xmlns="" xmlns:a16="http://schemas.microsoft.com/office/drawing/2014/main" id="{912EE77C-6A3E-1677-40E5-D9887B8F1F1E}"/>
                   </a:ext>
                 </a:extLst>
               </p:cNvPr>
@@ -15536,7 +15536,7 @@
           <p:cNvPr id="2" name="Título 1">
             <a:extLst>
               <a:ext uri="{FF2B5EF4-FFF2-40B4-BE49-F238E27FC236}">
-                <a16:creationId xmlns:a16="http://schemas.microsoft.com/office/drawing/2014/main" xmlns="" id="{49A10830-7336-91D1-5499-0862C69FEE02}"/>
+                <a16:creationId xmlns="" xmlns:a16="http://schemas.microsoft.com/office/drawing/2014/main" id="{49A10830-7336-91D1-5499-0862C69FEE02}"/>
               </a:ext>
             </a:extLst>
           </p:cNvPr>
@@ -15588,7 +15588,7 @@
           <p:cNvPr id="3" name="Espaço Reservado para Conteúdo 2">
             <a:extLst>
               <a:ext uri="{FF2B5EF4-FFF2-40B4-BE49-F238E27FC236}">
-                <a16:creationId xmlns:a16="http://schemas.microsoft.com/office/drawing/2014/main" xmlns="" id="{996BF4C0-7E55-8111-D7D7-035EB9474E11}"/>
+                <a16:creationId xmlns="" xmlns:a16="http://schemas.microsoft.com/office/drawing/2014/main" id="{996BF4C0-7E55-8111-D7D7-035EB9474E11}"/>
               </a:ext>
             </a:extLst>
           </p:cNvPr>
@@ -15691,7 +15691,7 @@
               <p:cNvPr id="4" name="CaixaDeTexto 3">
                 <a:extLst>
                   <a:ext uri="{FF2B5EF4-FFF2-40B4-BE49-F238E27FC236}">
-                    <a16:creationId xmlns:a16="http://schemas.microsoft.com/office/drawing/2014/main" xmlns="" id="{912EE77C-6A3E-1677-40E5-D9887B8F1F1E}"/>
+                    <a16:creationId xmlns="" xmlns:a16="http://schemas.microsoft.com/office/drawing/2014/main" id="{912EE77C-6A3E-1677-40E5-D9887B8F1F1E}"/>
                   </a:ext>
                 </a:extLst>
               </p:cNvPr>
@@ -15952,7 +15952,7 @@
           <p:cNvPr id="1026" name="Picture 2">
             <a:extLst>
               <a:ext uri="{FF2B5EF4-FFF2-40B4-BE49-F238E27FC236}">
-                <a16:creationId xmlns:a16="http://schemas.microsoft.com/office/drawing/2014/main" xmlns="" id="{7CBC9B34-92E1-B52B-8142-014B6553EAF0}"/>
+                <a16:creationId xmlns="" xmlns:a16="http://schemas.microsoft.com/office/drawing/2014/main" id="{7CBC9B34-92E1-B52B-8142-014B6553EAF0}"/>
               </a:ext>
             </a:extLst>
           </p:cNvPr>
@@ -15999,7 +15999,7 @@
           <p:cNvPr id="5" name="Elipse 4">
             <a:extLst>
               <a:ext uri="{FF2B5EF4-FFF2-40B4-BE49-F238E27FC236}">
-                <a16:creationId xmlns:a16="http://schemas.microsoft.com/office/drawing/2014/main" xmlns="" id="{939C8695-1AC6-E3B6-703C-D28BBA11C447}"/>
+                <a16:creationId xmlns="" xmlns:a16="http://schemas.microsoft.com/office/drawing/2014/main" id="{939C8695-1AC6-E3B6-703C-D28BBA11C447}"/>
               </a:ext>
             </a:extLst>
           </p:cNvPr>
@@ -16053,7 +16053,7 @@
               <p:cNvPr id="6" name="CaixaDeTexto 5">
                 <a:extLst>
                   <a:ext uri="{FF2B5EF4-FFF2-40B4-BE49-F238E27FC236}">
-                    <a16:creationId xmlns:a16="http://schemas.microsoft.com/office/drawing/2014/main" xmlns="" id="{97EA9FFC-A8FC-FBFD-695A-DC546F50941B}"/>
+                    <a16:creationId xmlns="" xmlns:a16="http://schemas.microsoft.com/office/drawing/2014/main" id="{97EA9FFC-A8FC-FBFD-695A-DC546F50941B}"/>
                   </a:ext>
                 </a:extLst>
               </p:cNvPr>
@@ -16227,7 +16227,7 @@
           <p:cNvPr id="2" name="Título 1">
             <a:extLst>
               <a:ext uri="{FF2B5EF4-FFF2-40B4-BE49-F238E27FC236}">
-                <a16:creationId xmlns:a16="http://schemas.microsoft.com/office/drawing/2014/main" xmlns="" id="{EECB3FED-5D1A-7084-5333-A3B2FA75F608}"/>
+                <a16:creationId xmlns="" xmlns:a16="http://schemas.microsoft.com/office/drawing/2014/main" id="{EECB3FED-5D1A-7084-5333-A3B2FA75F608}"/>
               </a:ext>
             </a:extLst>
           </p:cNvPr>
@@ -16255,7 +16255,7 @@
           <p:cNvPr id="3" name="Espaço Reservado para Conteúdo 2">
             <a:extLst>
               <a:ext uri="{FF2B5EF4-FFF2-40B4-BE49-F238E27FC236}">
-                <a16:creationId xmlns:a16="http://schemas.microsoft.com/office/drawing/2014/main" xmlns="" id="{25FE7774-7186-A846-D8DE-518B2CBF4EBD}"/>
+                <a16:creationId xmlns="" xmlns:a16="http://schemas.microsoft.com/office/drawing/2014/main" id="{25FE7774-7186-A846-D8DE-518B2CBF4EBD}"/>
               </a:ext>
             </a:extLst>
           </p:cNvPr>
@@ -16434,7 +16434,7 @@
         <p:cNvPr id="1" name="">
           <a:extLst>
             <a:ext uri="{FF2B5EF4-FFF2-40B4-BE49-F238E27FC236}">
-              <a16:creationId xmlns:a16="http://schemas.microsoft.com/office/drawing/2014/main" xmlns="" id="{C2F83E0F-01C0-1627-646F-CD1F7DACD0D4}"/>
+              <a16:creationId xmlns="" xmlns:a16="http://schemas.microsoft.com/office/drawing/2014/main" id="{C2F83E0F-01C0-1627-646F-CD1F7DACD0D4}"/>
             </a:ext>
           </a:extLst>
         </p:cNvPr>
@@ -16454,7 +16454,7 @@
           <p:cNvPr id="2" name="Título 1">
             <a:extLst>
               <a:ext uri="{FF2B5EF4-FFF2-40B4-BE49-F238E27FC236}">
-                <a16:creationId xmlns:a16="http://schemas.microsoft.com/office/drawing/2014/main" xmlns="" id="{D5093881-35CA-729E-21B6-C476D0963BC3}"/>
+                <a16:creationId xmlns="" xmlns:a16="http://schemas.microsoft.com/office/drawing/2014/main" id="{D5093881-35CA-729E-21B6-C476D0963BC3}"/>
               </a:ext>
             </a:extLst>
           </p:cNvPr>
@@ -16508,7 +16508,7 @@
               <p:cNvPr id="3" name="Espaço Reservado para Conteúdo 2">
                 <a:extLst>
                   <a:ext uri="{FF2B5EF4-FFF2-40B4-BE49-F238E27FC236}">
-                    <a16:creationId xmlns:a16="http://schemas.microsoft.com/office/drawing/2014/main" xmlns="" id="{389BE13C-73AE-50AC-806C-E5A1971F2D4E}"/>
+                    <a16:creationId xmlns="" xmlns:a16="http://schemas.microsoft.com/office/drawing/2014/main" id="{389BE13C-73AE-50AC-806C-E5A1971F2D4E}"/>
                   </a:ext>
                 </a:extLst>
               </p:cNvPr>
@@ -16678,7 +16678,7 @@
               <p:cNvPr id="4" name="CaixaDeTexto 3">
                 <a:extLst>
                   <a:ext uri="{FF2B5EF4-FFF2-40B4-BE49-F238E27FC236}">
-                    <a16:creationId xmlns:a16="http://schemas.microsoft.com/office/drawing/2014/main" xmlns="" id="{610B69BF-F67C-90E1-3919-D53C00CF2173}"/>
+                    <a16:creationId xmlns="" xmlns:a16="http://schemas.microsoft.com/office/drawing/2014/main" id="{610B69BF-F67C-90E1-3919-D53C00CF2173}"/>
                   </a:ext>
                 </a:extLst>
               </p:cNvPr>
@@ -16939,7 +16939,7 @@
           <p:cNvPr id="1026" name="Picture 2">
             <a:extLst>
               <a:ext uri="{FF2B5EF4-FFF2-40B4-BE49-F238E27FC236}">
-                <a16:creationId xmlns:a16="http://schemas.microsoft.com/office/drawing/2014/main" xmlns="" id="{B6E9DA0A-3478-5BEB-E669-9FF6C1670820}"/>
+                <a16:creationId xmlns="" xmlns:a16="http://schemas.microsoft.com/office/drawing/2014/main" id="{B6E9DA0A-3478-5BEB-E669-9FF6C1670820}"/>
               </a:ext>
             </a:extLst>
           </p:cNvPr>
@@ -16986,7 +16986,7 @@
           <p:cNvPr id="5" name="Elipse 4">
             <a:extLst>
               <a:ext uri="{FF2B5EF4-FFF2-40B4-BE49-F238E27FC236}">
-                <a16:creationId xmlns:a16="http://schemas.microsoft.com/office/drawing/2014/main" xmlns="" id="{46EBF986-4948-B37D-0075-CEADC3D35257}"/>
+                <a16:creationId xmlns="" xmlns:a16="http://schemas.microsoft.com/office/drawing/2014/main" id="{46EBF986-4948-B37D-0075-CEADC3D35257}"/>
               </a:ext>
             </a:extLst>
           </p:cNvPr>
@@ -17040,7 +17040,7 @@
               <p:cNvPr id="6" name="CaixaDeTexto 5">
                 <a:extLst>
                   <a:ext uri="{FF2B5EF4-FFF2-40B4-BE49-F238E27FC236}">
-                    <a16:creationId xmlns:a16="http://schemas.microsoft.com/office/drawing/2014/main" xmlns="" id="{51669CE3-4548-5F00-F826-E55C20306092}"/>
+                    <a16:creationId xmlns="" xmlns:a16="http://schemas.microsoft.com/office/drawing/2014/main" id="{51669CE3-4548-5F00-F826-E55C20306092}"/>
                   </a:ext>
                 </a:extLst>
               </p:cNvPr>
@@ -17214,7 +17214,7 @@
           <p:cNvPr id="2" name="Título 1">
             <a:extLst>
               <a:ext uri="{FF2B5EF4-FFF2-40B4-BE49-F238E27FC236}">
-                <a16:creationId xmlns:a16="http://schemas.microsoft.com/office/drawing/2014/main" xmlns="" id="{49A10830-7336-91D1-5499-0862C69FEE02}"/>
+                <a16:creationId xmlns="" xmlns:a16="http://schemas.microsoft.com/office/drawing/2014/main" id="{49A10830-7336-91D1-5499-0862C69FEE02}"/>
               </a:ext>
             </a:extLst>
           </p:cNvPr>
@@ -17270,7 +17270,7 @@
           <p:cNvPr id="3" name="Espaço Reservado para Conteúdo 2">
             <a:extLst>
               <a:ext uri="{FF2B5EF4-FFF2-40B4-BE49-F238E27FC236}">
-                <a16:creationId xmlns:a16="http://schemas.microsoft.com/office/drawing/2014/main" xmlns="" id="{996BF4C0-7E55-8111-D7D7-035EB9474E11}"/>
+                <a16:creationId xmlns="" xmlns:a16="http://schemas.microsoft.com/office/drawing/2014/main" id="{996BF4C0-7E55-8111-D7D7-035EB9474E11}"/>
               </a:ext>
             </a:extLst>
           </p:cNvPr>
@@ -17357,7 +17357,7 @@
               <p:cNvPr id="5" name="CaixaDeTexto 4">
                 <a:extLst>
                   <a:ext uri="{FF2B5EF4-FFF2-40B4-BE49-F238E27FC236}">
-                    <a16:creationId xmlns:a16="http://schemas.microsoft.com/office/drawing/2014/main" xmlns="" id="{DB827281-D803-D692-2D15-45F018122509}"/>
+                    <a16:creationId xmlns="" xmlns:a16="http://schemas.microsoft.com/office/drawing/2014/main" id="{DB827281-D803-D692-2D15-45F018122509}"/>
                   </a:ext>
                 </a:extLst>
               </p:cNvPr>
@@ -17661,7 +17661,7 @@
           <p:cNvPr id="2" name="Título 1">
             <a:extLst>
               <a:ext uri="{FF2B5EF4-FFF2-40B4-BE49-F238E27FC236}">
-                <a16:creationId xmlns:a16="http://schemas.microsoft.com/office/drawing/2014/main" xmlns="" id="{49A10830-7336-91D1-5499-0862C69FEE02}"/>
+                <a16:creationId xmlns="" xmlns:a16="http://schemas.microsoft.com/office/drawing/2014/main" id="{49A10830-7336-91D1-5499-0862C69FEE02}"/>
               </a:ext>
             </a:extLst>
           </p:cNvPr>
@@ -17705,7 +17705,7 @@
           <p:cNvPr id="3" name="Espaço Reservado para Conteúdo 2">
             <a:extLst>
               <a:ext uri="{FF2B5EF4-FFF2-40B4-BE49-F238E27FC236}">
-                <a16:creationId xmlns:a16="http://schemas.microsoft.com/office/drawing/2014/main" xmlns="" id="{996BF4C0-7E55-8111-D7D7-035EB9474E11}"/>
+                <a16:creationId xmlns="" xmlns:a16="http://schemas.microsoft.com/office/drawing/2014/main" id="{996BF4C0-7E55-8111-D7D7-035EB9474E11}"/>
               </a:ext>
             </a:extLst>
           </p:cNvPr>
@@ -17813,7 +17813,7 @@
               <p:cNvPr id="4" name="CaixaDeTexto 3">
                 <a:extLst>
                   <a:ext uri="{FF2B5EF4-FFF2-40B4-BE49-F238E27FC236}">
-                    <a16:creationId xmlns:a16="http://schemas.microsoft.com/office/drawing/2014/main" xmlns="" id="{EF5F8010-CACA-C2A4-30BD-3BE2F2AF278D}"/>
+                    <a16:creationId xmlns="" xmlns:a16="http://schemas.microsoft.com/office/drawing/2014/main" id="{EF5F8010-CACA-C2A4-30BD-3BE2F2AF278D}"/>
                   </a:ext>
                 </a:extLst>
               </p:cNvPr>
@@ -18087,7 +18087,7 @@
           <p:cNvPr id="2" name="Título 1">
             <a:extLst>
               <a:ext uri="{FF2B5EF4-FFF2-40B4-BE49-F238E27FC236}">
-                <a16:creationId xmlns:a16="http://schemas.microsoft.com/office/drawing/2014/main" xmlns="" id="{49A10830-7336-91D1-5499-0862C69FEE02}"/>
+                <a16:creationId xmlns="" xmlns:a16="http://schemas.microsoft.com/office/drawing/2014/main" id="{49A10830-7336-91D1-5499-0862C69FEE02}"/>
               </a:ext>
             </a:extLst>
           </p:cNvPr>
@@ -18131,7 +18131,7 @@
           <p:cNvPr id="3" name="Espaço Reservado para Conteúdo 2">
             <a:extLst>
               <a:ext uri="{FF2B5EF4-FFF2-40B4-BE49-F238E27FC236}">
-                <a16:creationId xmlns:a16="http://schemas.microsoft.com/office/drawing/2014/main" xmlns="" id="{996BF4C0-7E55-8111-D7D7-035EB9474E11}"/>
+                <a16:creationId xmlns="" xmlns:a16="http://schemas.microsoft.com/office/drawing/2014/main" id="{996BF4C0-7E55-8111-D7D7-035EB9474E11}"/>
               </a:ext>
             </a:extLst>
           </p:cNvPr>
@@ -18230,7 +18230,7 @@
               <p:cNvPr id="4" name="CaixaDeTexto 3">
                 <a:extLst>
                   <a:ext uri="{FF2B5EF4-FFF2-40B4-BE49-F238E27FC236}">
-                    <a16:creationId xmlns:a16="http://schemas.microsoft.com/office/drawing/2014/main" xmlns="" id="{EF5F8010-CACA-C2A4-30BD-3BE2F2AF278D}"/>
+                    <a16:creationId xmlns="" xmlns:a16="http://schemas.microsoft.com/office/drawing/2014/main" id="{EF5F8010-CACA-C2A4-30BD-3BE2F2AF278D}"/>
                   </a:ext>
                 </a:extLst>
               </p:cNvPr>
@@ -18504,7 +18504,7 @@
           <p:cNvPr id="2" name="Título 1">
             <a:extLst>
               <a:ext uri="{FF2B5EF4-FFF2-40B4-BE49-F238E27FC236}">
-                <a16:creationId xmlns:a16="http://schemas.microsoft.com/office/drawing/2014/main" xmlns="" id="{57A1A700-99B2-FE0E-67A5-D3FF4AECD0E8}"/>
+                <a16:creationId xmlns="" xmlns:a16="http://schemas.microsoft.com/office/drawing/2014/main" id="{57A1A700-99B2-FE0E-67A5-D3FF4AECD0E8}"/>
               </a:ext>
             </a:extLst>
           </p:cNvPr>
@@ -18532,7 +18532,7 @@
           <p:cNvPr id="3" name="Espaço Reservado para Conteúdo 2">
             <a:extLst>
               <a:ext uri="{FF2B5EF4-FFF2-40B4-BE49-F238E27FC236}">
-                <a16:creationId xmlns:a16="http://schemas.microsoft.com/office/drawing/2014/main" xmlns="" id="{011C451E-859D-2157-A7CE-65479D14B9EB}"/>
+                <a16:creationId xmlns="" xmlns:a16="http://schemas.microsoft.com/office/drawing/2014/main" id="{011C451E-859D-2157-A7CE-65479D14B9EB}"/>
               </a:ext>
             </a:extLst>
           </p:cNvPr>
@@ -18661,7 +18661,7 @@
           <p:cNvPr id="2" name="Título 1">
             <a:extLst>
               <a:ext uri="{FF2B5EF4-FFF2-40B4-BE49-F238E27FC236}">
-                <a16:creationId xmlns:a16="http://schemas.microsoft.com/office/drawing/2014/main" xmlns="" id="{ABEFD801-7E8D-0885-F1AD-8DAF6F77CEEE}"/>
+                <a16:creationId xmlns="" xmlns:a16="http://schemas.microsoft.com/office/drawing/2014/main" id="{ABEFD801-7E8D-0885-F1AD-8DAF6F77CEEE}"/>
               </a:ext>
             </a:extLst>
           </p:cNvPr>
@@ -18689,7 +18689,7 @@
           <p:cNvPr id="3" name="Espaço Reservado para Conteúdo 2">
             <a:extLst>
               <a:ext uri="{FF2B5EF4-FFF2-40B4-BE49-F238E27FC236}">
-                <a16:creationId xmlns:a16="http://schemas.microsoft.com/office/drawing/2014/main" xmlns="" id="{9BA6276C-11C7-FBDF-9CC4-A84A195D7527}"/>
+                <a16:creationId xmlns="" xmlns:a16="http://schemas.microsoft.com/office/drawing/2014/main" id="{9BA6276C-11C7-FBDF-9CC4-A84A195D7527}"/>
               </a:ext>
             </a:extLst>
           </p:cNvPr>
@@ -18765,7 +18765,7 @@
             <a:r>
               <a:rPr lang="pt-BR" b="1" i="1" dirty="0">
                 <a:solidFill>
-                  <a:srgbClr val="00B050"/>
+                  <a:srgbClr val="FF0000"/>
                 </a:solidFill>
               </a:rPr>
               <a:t>modelo de ML </a:t>
@@ -18802,7 +18802,7 @@
           <p:cNvPr id="35" name="Agrupar 34">
             <a:extLst>
               <a:ext uri="{FF2B5EF4-FFF2-40B4-BE49-F238E27FC236}">
-                <a16:creationId xmlns:a16="http://schemas.microsoft.com/office/drawing/2014/main" xmlns="" id="{A9782521-FE16-7376-22C4-2B622220EFB1}"/>
+                <a16:creationId xmlns="" xmlns:a16="http://schemas.microsoft.com/office/drawing/2014/main" id="{A9782521-FE16-7376-22C4-2B622220EFB1}"/>
               </a:ext>
             </a:extLst>
           </p:cNvPr>
@@ -18822,7 +18822,7 @@
             <p:cNvPr id="4" name="Agrupar 3">
               <a:extLst>
                 <a:ext uri="{FF2B5EF4-FFF2-40B4-BE49-F238E27FC236}">
-                  <a16:creationId xmlns:a16="http://schemas.microsoft.com/office/drawing/2014/main" xmlns="" id="{7043207C-E08F-0373-D6FF-F0C502F36306}"/>
+                  <a16:creationId xmlns="" xmlns:a16="http://schemas.microsoft.com/office/drawing/2014/main" id="{7043207C-E08F-0373-D6FF-F0C502F36306}"/>
                 </a:ext>
               </a:extLst>
             </p:cNvPr>
@@ -18842,7 +18842,7 @@
               <p:cNvPr id="15" name="Retângulo 14">
                 <a:extLst>
                   <a:ext uri="{FF2B5EF4-FFF2-40B4-BE49-F238E27FC236}">
-                    <a16:creationId xmlns:a16="http://schemas.microsoft.com/office/drawing/2014/main" xmlns="" id="{16FC2795-212E-91C6-32E5-2EA13A55B896}"/>
+                    <a16:creationId xmlns="" xmlns:a16="http://schemas.microsoft.com/office/drawing/2014/main" id="{16FC2795-212E-91C6-32E5-2EA13A55B896}"/>
                   </a:ext>
                 </a:extLst>
               </p:cNvPr>
@@ -18900,7 +18900,7 @@
               <p:cNvPr id="6" name="Straight Arrow Connector 14">
                 <a:extLst>
                   <a:ext uri="{FF2B5EF4-FFF2-40B4-BE49-F238E27FC236}">
-                    <a16:creationId xmlns:a16="http://schemas.microsoft.com/office/drawing/2014/main" xmlns="" id="{F238EB8B-055A-9659-C6C7-E8D6D2401278}"/>
+                    <a16:creationId xmlns="" xmlns:a16="http://schemas.microsoft.com/office/drawing/2014/main" id="{F238EB8B-055A-9659-C6C7-E8D6D2401278}"/>
                   </a:ext>
                 </a:extLst>
               </p:cNvPr>
@@ -18941,7 +18941,7 @@
               <p:cNvPr id="7" name="Straight Arrow Connector 14">
                 <a:extLst>
                   <a:ext uri="{FF2B5EF4-FFF2-40B4-BE49-F238E27FC236}">
-                    <a16:creationId xmlns:a16="http://schemas.microsoft.com/office/drawing/2014/main" xmlns="" id="{10811772-B5E2-C96E-FC88-09170CBCFB66}"/>
+                    <a16:creationId xmlns="" xmlns:a16="http://schemas.microsoft.com/office/drawing/2014/main" id="{10811772-B5E2-C96E-FC88-09170CBCFB66}"/>
                   </a:ext>
                 </a:extLst>
               </p:cNvPr>
@@ -18984,7 +18984,7 @@
               <p:cNvPr id="8" name="Rectangle 12">
                 <a:extLst>
                   <a:ext uri="{FF2B5EF4-FFF2-40B4-BE49-F238E27FC236}">
-                    <a16:creationId xmlns:a16="http://schemas.microsoft.com/office/drawing/2014/main" xmlns="" id="{1B0D0AE8-BDC0-49CC-107A-ED44A46639BD}"/>
+                    <a16:creationId xmlns="" xmlns:a16="http://schemas.microsoft.com/office/drawing/2014/main" id="{1B0D0AE8-BDC0-49CC-107A-ED44A46639BD}"/>
                   </a:ext>
                 </a:extLst>
               </p:cNvPr>
@@ -19045,7 +19045,7 @@
                   <p:cNvPr id="9" name="CaixaDeTexto 8">
                     <a:extLst>
                       <a:ext uri="{FF2B5EF4-FFF2-40B4-BE49-F238E27FC236}">
-                        <a16:creationId xmlns:a16="http://schemas.microsoft.com/office/drawing/2014/main" xmlns="" id="{949F9987-4ABF-C340-D042-BBC34574BF4C}"/>
+                        <a16:creationId xmlns="" xmlns:a16="http://schemas.microsoft.com/office/drawing/2014/main" id="{949F9987-4ABF-C340-D042-BBC34574BF4C}"/>
                       </a:ext>
                     </a:extLst>
                   </p:cNvPr>
@@ -19141,7 +19141,7 @@
                   <p:cNvPr id="10" name="CaixaDeTexto 9">
                     <a:extLst>
                       <a:ext uri="{FF2B5EF4-FFF2-40B4-BE49-F238E27FC236}">
-                        <a16:creationId xmlns:a16="http://schemas.microsoft.com/office/drawing/2014/main" xmlns="" id="{7F15E993-4422-806B-1EAF-0E2278B7F409}"/>
+                        <a16:creationId xmlns="" xmlns:a16="http://schemas.microsoft.com/office/drawing/2014/main" id="{7F15E993-4422-806B-1EAF-0E2278B7F409}"/>
                       </a:ext>
                     </a:extLst>
                   </p:cNvPr>
@@ -19237,7 +19237,7 @@
                   <p:cNvPr id="11" name="CaixaDeTexto 10">
                     <a:extLst>
                       <a:ext uri="{FF2B5EF4-FFF2-40B4-BE49-F238E27FC236}">
-                        <a16:creationId xmlns:a16="http://schemas.microsoft.com/office/drawing/2014/main" xmlns="" id="{124DCDD6-D8CF-6576-CFF0-698F7B3EB2CE}"/>
+                        <a16:creationId xmlns="" xmlns:a16="http://schemas.microsoft.com/office/drawing/2014/main" id="{124DCDD6-D8CF-6576-CFF0-698F7B3EB2CE}"/>
                       </a:ext>
                     </a:extLst>
                   </p:cNvPr>
@@ -19343,7 +19343,7 @@
               <p:cNvPr id="12" name="Conector: Angulado 11">
                 <a:extLst>
                   <a:ext uri="{FF2B5EF4-FFF2-40B4-BE49-F238E27FC236}">
-                    <a16:creationId xmlns:a16="http://schemas.microsoft.com/office/drawing/2014/main" xmlns="" id="{BE324F06-24FA-DC3F-B2D3-6D62EF999C7A}"/>
+                    <a16:creationId xmlns="" xmlns:a16="http://schemas.microsoft.com/office/drawing/2014/main" id="{BE324F06-24FA-DC3F-B2D3-6D62EF999C7A}"/>
                   </a:ext>
                 </a:extLst>
               </p:cNvPr>
@@ -19386,7 +19386,7 @@
               <p:cNvPr id="13" name="Conector: Angulado 12">
                 <a:extLst>
                   <a:ext uri="{FF2B5EF4-FFF2-40B4-BE49-F238E27FC236}">
-                    <a16:creationId xmlns:a16="http://schemas.microsoft.com/office/drawing/2014/main" xmlns="" id="{CA314D9A-D6E0-712D-48EB-B4C1887A6B1C}"/>
+                    <a16:creationId xmlns="" xmlns:a16="http://schemas.microsoft.com/office/drawing/2014/main" id="{CA314D9A-D6E0-712D-48EB-B4C1887A6B1C}"/>
                   </a:ext>
                 </a:extLst>
               </p:cNvPr>
@@ -19432,7 +19432,7 @@
               <p:cNvPr id="14" name="CaixaDeTexto 13">
                 <a:extLst>
                   <a:ext uri="{FF2B5EF4-FFF2-40B4-BE49-F238E27FC236}">
-                    <a16:creationId xmlns:a16="http://schemas.microsoft.com/office/drawing/2014/main" xmlns="" id="{6C81948B-BB65-3F38-F6E4-2BA28B046FA8}"/>
+                    <a16:creationId xmlns="" xmlns:a16="http://schemas.microsoft.com/office/drawing/2014/main" id="{6C81948B-BB65-3F38-F6E4-2BA28B046FA8}"/>
                   </a:ext>
                 </a:extLst>
               </p:cNvPr>
@@ -19476,7 +19476,7 @@
               <p:cNvPr id="16" name="CaixaDeTexto 15">
                 <a:extLst>
                   <a:ext uri="{FF2B5EF4-FFF2-40B4-BE49-F238E27FC236}">
-                    <a16:creationId xmlns:a16="http://schemas.microsoft.com/office/drawing/2014/main" xmlns="" id="{B2CE912B-5038-EBC1-81A7-D20EE5D6E46D}"/>
+                    <a16:creationId xmlns="" xmlns:a16="http://schemas.microsoft.com/office/drawing/2014/main" id="{B2CE912B-5038-EBC1-81A7-D20EE5D6E46D}"/>
                   </a:ext>
                 </a:extLst>
               </p:cNvPr>
@@ -19512,7 +19512,7 @@
               <p:cNvPr id="17" name="CaixaDeTexto 16">
                 <a:extLst>
                   <a:ext uri="{FF2B5EF4-FFF2-40B4-BE49-F238E27FC236}">
-                    <a16:creationId xmlns:a16="http://schemas.microsoft.com/office/drawing/2014/main" xmlns="" id="{D3E11F84-4477-5F76-06FD-69734A1728E7}"/>
+                    <a16:creationId xmlns="" xmlns:a16="http://schemas.microsoft.com/office/drawing/2014/main" id="{D3E11F84-4477-5F76-06FD-69734A1728E7}"/>
                   </a:ext>
                 </a:extLst>
               </p:cNvPr>
@@ -19555,7 +19555,7 @@
               <p:cNvPr id="18" name="CaixaDeTexto 17">
                 <a:extLst>
                   <a:ext uri="{FF2B5EF4-FFF2-40B4-BE49-F238E27FC236}">
-                    <a16:creationId xmlns:a16="http://schemas.microsoft.com/office/drawing/2014/main" xmlns="" id="{45EED265-0627-E165-4B85-2F60C945BCA4}"/>
+                    <a16:creationId xmlns="" xmlns:a16="http://schemas.microsoft.com/office/drawing/2014/main" id="{45EED265-0627-E165-4B85-2F60C945BCA4}"/>
                   </a:ext>
                 </a:extLst>
               </p:cNvPr>
@@ -19591,7 +19591,7 @@
               <p:cNvPr id="19" name="Conector reto 18">
                 <a:extLst>
                   <a:ext uri="{FF2B5EF4-FFF2-40B4-BE49-F238E27FC236}">
-                    <a16:creationId xmlns:a16="http://schemas.microsoft.com/office/drawing/2014/main" xmlns="" id="{4FBB144A-D3B1-58ED-79D4-025C07566D4A}"/>
+                    <a16:creationId xmlns="" xmlns:a16="http://schemas.microsoft.com/office/drawing/2014/main" id="{4FBB144A-D3B1-58ED-79D4-025C07566D4A}"/>
                   </a:ext>
                 </a:extLst>
               </p:cNvPr>
@@ -19635,7 +19635,7 @@
                 <p:cNvPr id="20" name="Retângulo 19">
                   <a:extLst>
                     <a:ext uri="{FF2B5EF4-FFF2-40B4-BE49-F238E27FC236}">
-                      <a16:creationId xmlns:a16="http://schemas.microsoft.com/office/drawing/2014/main" xmlns="" id="{677D043A-F43E-B0F3-37B7-346AE0697B04}"/>
+                      <a16:creationId xmlns="" xmlns:a16="http://schemas.microsoft.com/office/drawing/2014/main" id="{677D043A-F43E-B0F3-37B7-346AE0697B04}"/>
                     </a:ext>
                   </a:extLst>
                 </p:cNvPr>
@@ -19860,7 +19860,7 @@
             <p:cNvPr id="23" name="Retângulo 22">
               <a:extLst>
                 <a:ext uri="{FF2B5EF4-FFF2-40B4-BE49-F238E27FC236}">
-                  <a16:creationId xmlns:a16="http://schemas.microsoft.com/office/drawing/2014/main" xmlns="" id="{850665E7-60C9-9057-ADB6-2CAE2237B854}"/>
+                  <a16:creationId xmlns="" xmlns:a16="http://schemas.microsoft.com/office/drawing/2014/main" id="{850665E7-60C9-9057-ADB6-2CAE2237B854}"/>
                 </a:ext>
               </a:extLst>
             </p:cNvPr>
@@ -19912,7 +19912,7 @@
             <p:cNvPr id="24" name="Retângulo 23">
               <a:extLst>
                 <a:ext uri="{FF2B5EF4-FFF2-40B4-BE49-F238E27FC236}">
-                  <a16:creationId xmlns:a16="http://schemas.microsoft.com/office/drawing/2014/main" xmlns="" id="{C7E874E7-5F26-FF77-A6A0-4A158DC458C0}"/>
+                  <a16:creationId xmlns="" xmlns:a16="http://schemas.microsoft.com/office/drawing/2014/main" id="{C7E874E7-5F26-FF77-A6A0-4A158DC458C0}"/>
                 </a:ext>
               </a:extLst>
             </p:cNvPr>
@@ -19964,7 +19964,7 @@
             <p:cNvPr id="28" name="Conector de Seta Reta 27">
               <a:extLst>
                 <a:ext uri="{FF2B5EF4-FFF2-40B4-BE49-F238E27FC236}">
-                  <a16:creationId xmlns:a16="http://schemas.microsoft.com/office/drawing/2014/main" xmlns="" id="{CB280270-DF7E-B48C-54FA-D35DD769A8F2}"/>
+                  <a16:creationId xmlns="" xmlns:a16="http://schemas.microsoft.com/office/drawing/2014/main" id="{CB280270-DF7E-B48C-54FA-D35DD769A8F2}"/>
                 </a:ext>
               </a:extLst>
             </p:cNvPr>
@@ -20008,7 +20008,7 @@
             <p:cNvPr id="30" name="Conector de Seta Reta 29">
               <a:extLst>
                 <a:ext uri="{FF2B5EF4-FFF2-40B4-BE49-F238E27FC236}">
-                  <a16:creationId xmlns:a16="http://schemas.microsoft.com/office/drawing/2014/main" xmlns="" id="{C10D38CF-E0FA-1551-91EE-C0598E273D40}"/>
+                  <a16:creationId xmlns="" xmlns:a16="http://schemas.microsoft.com/office/drawing/2014/main" id="{C10D38CF-E0FA-1551-91EE-C0598E273D40}"/>
                 </a:ext>
               </a:extLst>
             </p:cNvPr>
@@ -20052,7 +20052,7 @@
             <p:cNvPr id="31" name="CaixaDeTexto 30">
               <a:extLst>
                 <a:ext uri="{FF2B5EF4-FFF2-40B4-BE49-F238E27FC236}">
-                  <a16:creationId xmlns:a16="http://schemas.microsoft.com/office/drawing/2014/main" xmlns="" id="{3DB927FD-619C-3B92-17E3-53ADFB087CC0}"/>
+                  <a16:creationId xmlns="" xmlns:a16="http://schemas.microsoft.com/office/drawing/2014/main" id="{3DB927FD-619C-3B92-17E3-53ADFB087CC0}"/>
                 </a:ext>
               </a:extLst>
             </p:cNvPr>
@@ -20118,7 +20118,7 @@
           <p:cNvPr id="2" name="Título 1">
             <a:extLst>
               <a:ext uri="{FF2B5EF4-FFF2-40B4-BE49-F238E27FC236}">
-                <a16:creationId xmlns:a16="http://schemas.microsoft.com/office/drawing/2014/main" xmlns="" id="{ABEFD801-7E8D-0885-F1AD-8DAF6F77CEEE}"/>
+                <a16:creationId xmlns="" xmlns:a16="http://schemas.microsoft.com/office/drawing/2014/main" id="{ABEFD801-7E8D-0885-F1AD-8DAF6F77CEEE}"/>
               </a:ext>
             </a:extLst>
           </p:cNvPr>
@@ -20146,7 +20146,7 @@
           <p:cNvPr id="3" name="Espaço Reservado para Conteúdo 2">
             <a:extLst>
               <a:ext uri="{FF2B5EF4-FFF2-40B4-BE49-F238E27FC236}">
-                <a16:creationId xmlns:a16="http://schemas.microsoft.com/office/drawing/2014/main" xmlns="" id="{9BA6276C-11C7-FBDF-9CC4-A84A195D7527}"/>
+                <a16:creationId xmlns="" xmlns:a16="http://schemas.microsoft.com/office/drawing/2014/main" id="{9BA6276C-11C7-FBDF-9CC4-A84A195D7527}"/>
               </a:ext>
             </a:extLst>
           </p:cNvPr>
@@ -20209,7 +20209,31 @@
             </a:r>
             <a:r>
               <a:rPr lang="pt-BR" sz="2800" dirty="0"/>
-              <a:t> em outros casos, além dos pesos, temos que descobrir o formato da função.</a:t>
+              <a:t> em outros casos, </a:t>
+            </a:r>
+            <a:r>
+              <a:rPr lang="pt-BR" sz="2800" b="1" i="1" dirty="0">
+                <a:solidFill>
+                  <a:schemeClr val="accent2"/>
+                </a:solidFill>
+              </a:rPr>
+              <a:t>além dos pesos</a:t>
+            </a:r>
+            <a:r>
+              <a:rPr lang="pt-BR" sz="2800" dirty="0"/>
+              <a:t>, temos que </a:t>
+            </a:r>
+            <a:r>
+              <a:rPr lang="pt-BR" sz="2800" b="1" i="1" dirty="0">
+                <a:solidFill>
+                  <a:srgbClr val="7030A0"/>
+                </a:solidFill>
+              </a:rPr>
+              <a:t>descobrir o formato da função</a:t>
+            </a:r>
+            <a:r>
+              <a:rPr lang="pt-BR" sz="2800" dirty="0"/>
+              <a:t>.</a:t>
             </a:r>
           </a:p>
           <a:p>
@@ -20229,7 +20253,7 @@
           <p:cNvPr id="35" name="Agrupar 34">
             <a:extLst>
               <a:ext uri="{FF2B5EF4-FFF2-40B4-BE49-F238E27FC236}">
-                <a16:creationId xmlns:a16="http://schemas.microsoft.com/office/drawing/2014/main" xmlns="" id="{A9782521-FE16-7376-22C4-2B622220EFB1}"/>
+                <a16:creationId xmlns="" xmlns:a16="http://schemas.microsoft.com/office/drawing/2014/main" id="{A9782521-FE16-7376-22C4-2B622220EFB1}"/>
               </a:ext>
             </a:extLst>
           </p:cNvPr>
@@ -20249,7 +20273,7 @@
             <p:cNvPr id="4" name="Agrupar 3">
               <a:extLst>
                 <a:ext uri="{FF2B5EF4-FFF2-40B4-BE49-F238E27FC236}">
-                  <a16:creationId xmlns:a16="http://schemas.microsoft.com/office/drawing/2014/main" xmlns="" id="{7043207C-E08F-0373-D6FF-F0C502F36306}"/>
+                  <a16:creationId xmlns="" xmlns:a16="http://schemas.microsoft.com/office/drawing/2014/main" id="{7043207C-E08F-0373-D6FF-F0C502F36306}"/>
                 </a:ext>
               </a:extLst>
             </p:cNvPr>
@@ -20269,7 +20293,7 @@
               <p:cNvPr id="15" name="Retângulo 14">
                 <a:extLst>
                   <a:ext uri="{FF2B5EF4-FFF2-40B4-BE49-F238E27FC236}">
-                    <a16:creationId xmlns:a16="http://schemas.microsoft.com/office/drawing/2014/main" xmlns="" id="{16FC2795-212E-91C6-32E5-2EA13A55B896}"/>
+                    <a16:creationId xmlns="" xmlns:a16="http://schemas.microsoft.com/office/drawing/2014/main" id="{16FC2795-212E-91C6-32E5-2EA13A55B896}"/>
                   </a:ext>
                 </a:extLst>
               </p:cNvPr>
@@ -20327,7 +20351,7 @@
               <p:cNvPr id="6" name="Straight Arrow Connector 14">
                 <a:extLst>
                   <a:ext uri="{FF2B5EF4-FFF2-40B4-BE49-F238E27FC236}">
-                    <a16:creationId xmlns:a16="http://schemas.microsoft.com/office/drawing/2014/main" xmlns="" id="{F238EB8B-055A-9659-C6C7-E8D6D2401278}"/>
+                    <a16:creationId xmlns="" xmlns:a16="http://schemas.microsoft.com/office/drawing/2014/main" id="{F238EB8B-055A-9659-C6C7-E8D6D2401278}"/>
                   </a:ext>
                 </a:extLst>
               </p:cNvPr>
@@ -20368,7 +20392,7 @@
               <p:cNvPr id="7" name="Straight Arrow Connector 14">
                 <a:extLst>
                   <a:ext uri="{FF2B5EF4-FFF2-40B4-BE49-F238E27FC236}">
-                    <a16:creationId xmlns:a16="http://schemas.microsoft.com/office/drawing/2014/main" xmlns="" id="{10811772-B5E2-C96E-FC88-09170CBCFB66}"/>
+                    <a16:creationId xmlns="" xmlns:a16="http://schemas.microsoft.com/office/drawing/2014/main" id="{10811772-B5E2-C96E-FC88-09170CBCFB66}"/>
                   </a:ext>
                 </a:extLst>
               </p:cNvPr>
@@ -20411,7 +20435,7 @@
               <p:cNvPr id="8" name="Rectangle 12">
                 <a:extLst>
                   <a:ext uri="{FF2B5EF4-FFF2-40B4-BE49-F238E27FC236}">
-                    <a16:creationId xmlns:a16="http://schemas.microsoft.com/office/drawing/2014/main" xmlns="" id="{1B0D0AE8-BDC0-49CC-107A-ED44A46639BD}"/>
+                    <a16:creationId xmlns="" xmlns:a16="http://schemas.microsoft.com/office/drawing/2014/main" id="{1B0D0AE8-BDC0-49CC-107A-ED44A46639BD}"/>
                   </a:ext>
                 </a:extLst>
               </p:cNvPr>
@@ -20472,7 +20496,7 @@
                   <p:cNvPr id="9" name="CaixaDeTexto 8">
                     <a:extLst>
                       <a:ext uri="{FF2B5EF4-FFF2-40B4-BE49-F238E27FC236}">
-                        <a16:creationId xmlns:a16="http://schemas.microsoft.com/office/drawing/2014/main" xmlns="" id="{949F9987-4ABF-C340-D042-BBC34574BF4C}"/>
+                        <a16:creationId xmlns="" xmlns:a16="http://schemas.microsoft.com/office/drawing/2014/main" id="{949F9987-4ABF-C340-D042-BBC34574BF4C}"/>
                       </a:ext>
                     </a:extLst>
                   </p:cNvPr>
@@ -20568,7 +20592,7 @@
                   <p:cNvPr id="10" name="CaixaDeTexto 9">
                     <a:extLst>
                       <a:ext uri="{FF2B5EF4-FFF2-40B4-BE49-F238E27FC236}">
-                        <a16:creationId xmlns:a16="http://schemas.microsoft.com/office/drawing/2014/main" xmlns="" id="{7F15E993-4422-806B-1EAF-0E2278B7F409}"/>
+                        <a16:creationId xmlns="" xmlns:a16="http://schemas.microsoft.com/office/drawing/2014/main" id="{7F15E993-4422-806B-1EAF-0E2278B7F409}"/>
                       </a:ext>
                     </a:extLst>
                   </p:cNvPr>
@@ -20664,7 +20688,7 @@
                   <p:cNvPr id="11" name="CaixaDeTexto 10">
                     <a:extLst>
                       <a:ext uri="{FF2B5EF4-FFF2-40B4-BE49-F238E27FC236}">
-                        <a16:creationId xmlns:a16="http://schemas.microsoft.com/office/drawing/2014/main" xmlns="" id="{124DCDD6-D8CF-6576-CFF0-698F7B3EB2CE}"/>
+                        <a16:creationId xmlns="" xmlns:a16="http://schemas.microsoft.com/office/drawing/2014/main" id="{124DCDD6-D8CF-6576-CFF0-698F7B3EB2CE}"/>
                       </a:ext>
                     </a:extLst>
                   </p:cNvPr>
@@ -20770,7 +20794,7 @@
               <p:cNvPr id="12" name="Conector: Angulado 11">
                 <a:extLst>
                   <a:ext uri="{FF2B5EF4-FFF2-40B4-BE49-F238E27FC236}">
-                    <a16:creationId xmlns:a16="http://schemas.microsoft.com/office/drawing/2014/main" xmlns="" id="{BE324F06-24FA-DC3F-B2D3-6D62EF999C7A}"/>
+                    <a16:creationId xmlns="" xmlns:a16="http://schemas.microsoft.com/office/drawing/2014/main" id="{BE324F06-24FA-DC3F-B2D3-6D62EF999C7A}"/>
                   </a:ext>
                 </a:extLst>
               </p:cNvPr>
@@ -20813,7 +20837,7 @@
               <p:cNvPr id="13" name="Conector: Angulado 12">
                 <a:extLst>
                   <a:ext uri="{FF2B5EF4-FFF2-40B4-BE49-F238E27FC236}">
-                    <a16:creationId xmlns:a16="http://schemas.microsoft.com/office/drawing/2014/main" xmlns="" id="{CA314D9A-D6E0-712D-48EB-B4C1887A6B1C}"/>
+                    <a16:creationId xmlns="" xmlns:a16="http://schemas.microsoft.com/office/drawing/2014/main" id="{CA314D9A-D6E0-712D-48EB-B4C1887A6B1C}"/>
                   </a:ext>
                 </a:extLst>
               </p:cNvPr>
@@ -20859,7 +20883,7 @@
               <p:cNvPr id="14" name="CaixaDeTexto 13">
                 <a:extLst>
                   <a:ext uri="{FF2B5EF4-FFF2-40B4-BE49-F238E27FC236}">
-                    <a16:creationId xmlns:a16="http://schemas.microsoft.com/office/drawing/2014/main" xmlns="" id="{6C81948B-BB65-3F38-F6E4-2BA28B046FA8}"/>
+                    <a16:creationId xmlns="" xmlns:a16="http://schemas.microsoft.com/office/drawing/2014/main" id="{6C81948B-BB65-3F38-F6E4-2BA28B046FA8}"/>
                   </a:ext>
                 </a:extLst>
               </p:cNvPr>
@@ -20903,7 +20927,7 @@
               <p:cNvPr id="16" name="CaixaDeTexto 15">
                 <a:extLst>
                   <a:ext uri="{FF2B5EF4-FFF2-40B4-BE49-F238E27FC236}">
-                    <a16:creationId xmlns:a16="http://schemas.microsoft.com/office/drawing/2014/main" xmlns="" id="{B2CE912B-5038-EBC1-81A7-D20EE5D6E46D}"/>
+                    <a16:creationId xmlns="" xmlns:a16="http://schemas.microsoft.com/office/drawing/2014/main" id="{B2CE912B-5038-EBC1-81A7-D20EE5D6E46D}"/>
                   </a:ext>
                 </a:extLst>
               </p:cNvPr>
@@ -20939,7 +20963,7 @@
               <p:cNvPr id="17" name="CaixaDeTexto 16">
                 <a:extLst>
                   <a:ext uri="{FF2B5EF4-FFF2-40B4-BE49-F238E27FC236}">
-                    <a16:creationId xmlns:a16="http://schemas.microsoft.com/office/drawing/2014/main" xmlns="" id="{D3E11F84-4477-5F76-06FD-69734A1728E7}"/>
+                    <a16:creationId xmlns="" xmlns:a16="http://schemas.microsoft.com/office/drawing/2014/main" id="{D3E11F84-4477-5F76-06FD-69734A1728E7}"/>
                   </a:ext>
                 </a:extLst>
               </p:cNvPr>
@@ -20982,7 +21006,7 @@
               <p:cNvPr id="18" name="CaixaDeTexto 17">
                 <a:extLst>
                   <a:ext uri="{FF2B5EF4-FFF2-40B4-BE49-F238E27FC236}">
-                    <a16:creationId xmlns:a16="http://schemas.microsoft.com/office/drawing/2014/main" xmlns="" id="{45EED265-0627-E165-4B85-2F60C945BCA4}"/>
+                    <a16:creationId xmlns="" xmlns:a16="http://schemas.microsoft.com/office/drawing/2014/main" id="{45EED265-0627-E165-4B85-2F60C945BCA4}"/>
                   </a:ext>
                 </a:extLst>
               </p:cNvPr>
@@ -21018,7 +21042,7 @@
               <p:cNvPr id="19" name="Conector reto 18">
                 <a:extLst>
                   <a:ext uri="{FF2B5EF4-FFF2-40B4-BE49-F238E27FC236}">
-                    <a16:creationId xmlns:a16="http://schemas.microsoft.com/office/drawing/2014/main" xmlns="" id="{4FBB144A-D3B1-58ED-79D4-025C07566D4A}"/>
+                    <a16:creationId xmlns="" xmlns:a16="http://schemas.microsoft.com/office/drawing/2014/main" id="{4FBB144A-D3B1-58ED-79D4-025C07566D4A}"/>
                   </a:ext>
                 </a:extLst>
               </p:cNvPr>
@@ -21062,7 +21086,7 @@
                 <p:cNvPr id="20" name="Retângulo 19">
                   <a:extLst>
                     <a:ext uri="{FF2B5EF4-FFF2-40B4-BE49-F238E27FC236}">
-                      <a16:creationId xmlns:a16="http://schemas.microsoft.com/office/drawing/2014/main" xmlns="" id="{677D043A-F43E-B0F3-37B7-346AE0697B04}"/>
+                      <a16:creationId xmlns="" xmlns:a16="http://schemas.microsoft.com/office/drawing/2014/main" id="{677D043A-F43E-B0F3-37B7-346AE0697B04}"/>
                     </a:ext>
                   </a:extLst>
                 </p:cNvPr>
@@ -21287,7 +21311,7 @@
             <p:cNvPr id="23" name="Retângulo 22">
               <a:extLst>
                 <a:ext uri="{FF2B5EF4-FFF2-40B4-BE49-F238E27FC236}">
-                  <a16:creationId xmlns:a16="http://schemas.microsoft.com/office/drawing/2014/main" xmlns="" id="{850665E7-60C9-9057-ADB6-2CAE2237B854}"/>
+                  <a16:creationId xmlns="" xmlns:a16="http://schemas.microsoft.com/office/drawing/2014/main" id="{850665E7-60C9-9057-ADB6-2CAE2237B854}"/>
                 </a:ext>
               </a:extLst>
             </p:cNvPr>
@@ -21339,7 +21363,7 @@
             <p:cNvPr id="24" name="Retângulo 23">
               <a:extLst>
                 <a:ext uri="{FF2B5EF4-FFF2-40B4-BE49-F238E27FC236}">
-                  <a16:creationId xmlns:a16="http://schemas.microsoft.com/office/drawing/2014/main" xmlns="" id="{C7E874E7-5F26-FF77-A6A0-4A158DC458C0}"/>
+                  <a16:creationId xmlns="" xmlns:a16="http://schemas.microsoft.com/office/drawing/2014/main" id="{C7E874E7-5F26-FF77-A6A0-4A158DC458C0}"/>
                 </a:ext>
               </a:extLst>
             </p:cNvPr>
@@ -21391,7 +21415,7 @@
             <p:cNvPr id="28" name="Conector de Seta Reta 27">
               <a:extLst>
                 <a:ext uri="{FF2B5EF4-FFF2-40B4-BE49-F238E27FC236}">
-                  <a16:creationId xmlns:a16="http://schemas.microsoft.com/office/drawing/2014/main" xmlns="" id="{CB280270-DF7E-B48C-54FA-D35DD769A8F2}"/>
+                  <a16:creationId xmlns="" xmlns:a16="http://schemas.microsoft.com/office/drawing/2014/main" id="{CB280270-DF7E-B48C-54FA-D35DD769A8F2}"/>
                 </a:ext>
               </a:extLst>
             </p:cNvPr>
@@ -21435,7 +21459,7 @@
             <p:cNvPr id="30" name="Conector de Seta Reta 29">
               <a:extLst>
                 <a:ext uri="{FF2B5EF4-FFF2-40B4-BE49-F238E27FC236}">
-                  <a16:creationId xmlns:a16="http://schemas.microsoft.com/office/drawing/2014/main" xmlns="" id="{C10D38CF-E0FA-1551-91EE-C0598E273D40}"/>
+                  <a16:creationId xmlns="" xmlns:a16="http://schemas.microsoft.com/office/drawing/2014/main" id="{C10D38CF-E0FA-1551-91EE-C0598E273D40}"/>
                 </a:ext>
               </a:extLst>
             </p:cNvPr>
@@ -21479,7 +21503,7 @@
             <p:cNvPr id="31" name="CaixaDeTexto 30">
               <a:extLst>
                 <a:ext uri="{FF2B5EF4-FFF2-40B4-BE49-F238E27FC236}">
-                  <a16:creationId xmlns:a16="http://schemas.microsoft.com/office/drawing/2014/main" xmlns="" id="{3DB927FD-619C-3B92-17E3-53ADFB087CC0}"/>
+                  <a16:creationId xmlns="" xmlns:a16="http://schemas.microsoft.com/office/drawing/2014/main" id="{3DB927FD-619C-3B92-17E3-53ADFB087CC0}"/>
                 </a:ext>
               </a:extLst>
             </p:cNvPr>
@@ -21545,7 +21569,7 @@
           <p:cNvPr id="2" name="Título 1">
             <a:extLst>
               <a:ext uri="{FF2B5EF4-FFF2-40B4-BE49-F238E27FC236}">
-                <a16:creationId xmlns:a16="http://schemas.microsoft.com/office/drawing/2014/main" xmlns="" id="{ABEFD801-7E8D-0885-F1AD-8DAF6F77CEEE}"/>
+                <a16:creationId xmlns="" xmlns:a16="http://schemas.microsoft.com/office/drawing/2014/main" id="{ABEFD801-7E8D-0885-F1AD-8DAF6F77CEEE}"/>
               </a:ext>
             </a:extLst>
           </p:cNvPr>
@@ -21573,7 +21597,7 @@
           <p:cNvPr id="3" name="Espaço Reservado para Conteúdo 2">
             <a:extLst>
               <a:ext uri="{FF2B5EF4-FFF2-40B4-BE49-F238E27FC236}">
-                <a16:creationId xmlns:a16="http://schemas.microsoft.com/office/drawing/2014/main" xmlns="" id="{9BA6276C-11C7-FBDF-9CC4-A84A195D7527}"/>
+                <a16:creationId xmlns="" xmlns:a16="http://schemas.microsoft.com/office/drawing/2014/main" id="{9BA6276C-11C7-FBDF-9CC4-A84A195D7527}"/>
               </a:ext>
             </a:extLst>
           </p:cNvPr>
@@ -21598,7 +21622,19 @@
           <a:p>
             <a:r>
               <a:rPr lang="pt-BR" dirty="0"/>
-              <a:t>Dado que o conjunto de treinamento é conhecido e fixo, notamos que a </a:t>
+              <a:t>Dado que o conjunto de treinamento é </a:t>
+            </a:r>
+            <a:r>
+              <a:rPr lang="pt-BR" b="1" i="1" dirty="0">
+                <a:solidFill>
+                  <a:schemeClr val="accent2"/>
+                </a:solidFill>
+              </a:rPr>
+              <a:t>conhecido e fixo</a:t>
+            </a:r>
+            <a:r>
+              <a:rPr lang="pt-BR" dirty="0"/>
+              <a:t>, notamos que a </a:t>
             </a:r>
             <a:r>
               <a:rPr lang="pt-BR" b="1" i="1" dirty="0"/>
@@ -21688,7 +21724,7 @@
               <p:cNvPr id="5" name="CaixaDeTexto 4">
                 <a:extLst>
                   <a:ext uri="{FF2B5EF4-FFF2-40B4-BE49-F238E27FC236}">
-                    <a16:creationId xmlns:a16="http://schemas.microsoft.com/office/drawing/2014/main" xmlns="" id="{1216EDDF-7D90-C480-7FCF-B750F15061E5}"/>
+                    <a16:creationId xmlns="" xmlns:a16="http://schemas.microsoft.com/office/drawing/2014/main" id="{1216EDDF-7D90-C480-7FCF-B750F15061E5}"/>
                   </a:ext>
                 </a:extLst>
               </p:cNvPr>
@@ -22163,7 +22199,7 @@
           <p:cNvPr id="44" name="Retângulo 43">
             <a:extLst>
               <a:ext uri="{FF2B5EF4-FFF2-40B4-BE49-F238E27FC236}">
-                <a16:creationId xmlns:a16="http://schemas.microsoft.com/office/drawing/2014/main" xmlns="" id="{0E22BE30-DFAE-8B87-D83B-05B9B69080D4}"/>
+                <a16:creationId xmlns="" xmlns:a16="http://schemas.microsoft.com/office/drawing/2014/main" id="{0E22BE30-DFAE-8B87-D83B-05B9B69080D4}"/>
               </a:ext>
             </a:extLst>
           </p:cNvPr>
@@ -22215,7 +22251,7 @@
           <p:cNvPr id="45" name="Retângulo 44">
             <a:extLst>
               <a:ext uri="{FF2B5EF4-FFF2-40B4-BE49-F238E27FC236}">
-                <a16:creationId xmlns:a16="http://schemas.microsoft.com/office/drawing/2014/main" xmlns="" id="{BA16A255-C8A7-13E5-A987-B241E01F62BC}"/>
+                <a16:creationId xmlns="" xmlns:a16="http://schemas.microsoft.com/office/drawing/2014/main" id="{BA16A255-C8A7-13E5-A987-B241E01F62BC}"/>
               </a:ext>
             </a:extLst>
           </p:cNvPr>
@@ -22267,7 +22303,7 @@
           <p:cNvPr id="48" name="CaixaDeTexto 47">
             <a:extLst>
               <a:ext uri="{FF2B5EF4-FFF2-40B4-BE49-F238E27FC236}">
-                <a16:creationId xmlns:a16="http://schemas.microsoft.com/office/drawing/2014/main" xmlns="" id="{B9DE3902-824E-8DE4-4B5F-D95AEAF0C065}"/>
+                <a16:creationId xmlns="" xmlns:a16="http://schemas.microsoft.com/office/drawing/2014/main" id="{B9DE3902-824E-8DE4-4B5F-D95AEAF0C065}"/>
               </a:ext>
             </a:extLst>
           </p:cNvPr>
@@ -22311,7 +22347,7 @@
           <p:cNvPr id="6" name="Conector de Seta Reta 5">
             <a:extLst>
               <a:ext uri="{FF2B5EF4-FFF2-40B4-BE49-F238E27FC236}">
-                <a16:creationId xmlns:a16="http://schemas.microsoft.com/office/drawing/2014/main" xmlns="" id="{2C082D7A-BEFF-DA1D-3F2F-76FA61553F87}"/>
+                <a16:creationId xmlns="" xmlns:a16="http://schemas.microsoft.com/office/drawing/2014/main" id="{2C082D7A-BEFF-DA1D-3F2F-76FA61553F87}"/>
               </a:ext>
             </a:extLst>
           </p:cNvPr>
@@ -22353,7 +22389,7 @@
           <p:cNvPr id="8" name="Conector de Seta Reta 7">
             <a:extLst>
               <a:ext uri="{FF2B5EF4-FFF2-40B4-BE49-F238E27FC236}">
-                <a16:creationId xmlns:a16="http://schemas.microsoft.com/office/drawing/2014/main" xmlns="" id="{269E65DF-033F-5E0E-FF63-59C477B4956B}"/>
+                <a16:creationId xmlns="" xmlns:a16="http://schemas.microsoft.com/office/drawing/2014/main" id="{269E65DF-033F-5E0E-FF63-59C477B4956B}"/>
               </a:ext>
             </a:extLst>
           </p:cNvPr>
@@ -22427,7 +22463,7 @@
           <p:cNvPr id="2" name="Título 1">
             <a:extLst>
               <a:ext uri="{FF2B5EF4-FFF2-40B4-BE49-F238E27FC236}">
-                <a16:creationId xmlns:a16="http://schemas.microsoft.com/office/drawing/2014/main" xmlns="" id="{ABEFD801-7E8D-0885-F1AD-8DAF6F77CEEE}"/>
+                <a16:creationId xmlns="" xmlns:a16="http://schemas.microsoft.com/office/drawing/2014/main" id="{ABEFD801-7E8D-0885-F1AD-8DAF6F77CEEE}"/>
               </a:ext>
             </a:extLst>
           </p:cNvPr>
@@ -22455,7 +22491,7 @@
           <p:cNvPr id="3" name="Espaço Reservado para Conteúdo 2">
             <a:extLst>
               <a:ext uri="{FF2B5EF4-FFF2-40B4-BE49-F238E27FC236}">
-                <a16:creationId xmlns:a16="http://schemas.microsoft.com/office/drawing/2014/main" xmlns="" id="{9BA6276C-11C7-FBDF-9CC4-A84A195D7527}"/>
+                <a16:creationId xmlns="" xmlns:a16="http://schemas.microsoft.com/office/drawing/2014/main" id="{9BA6276C-11C7-FBDF-9CC4-A84A195D7527}"/>
               </a:ext>
             </a:extLst>
           </p:cNvPr>
@@ -22570,7 +22606,7 @@
               <p:cNvPr id="5" name="CaixaDeTexto 4">
                 <a:extLst>
                   <a:ext uri="{FF2B5EF4-FFF2-40B4-BE49-F238E27FC236}">
-                    <a16:creationId xmlns:a16="http://schemas.microsoft.com/office/drawing/2014/main" xmlns="" id="{1216EDDF-7D90-C480-7FCF-B750F15061E5}"/>
+                    <a16:creationId xmlns="" xmlns:a16="http://schemas.microsoft.com/office/drawing/2014/main" id="{1216EDDF-7D90-C480-7FCF-B750F15061E5}"/>
                   </a:ext>
                 </a:extLst>
               </p:cNvPr>
@@ -23045,7 +23081,7 @@
           <p:cNvPr id="52" name="Agrupar 51">
             <a:extLst>
               <a:ext uri="{FF2B5EF4-FFF2-40B4-BE49-F238E27FC236}">
-                <a16:creationId xmlns:a16="http://schemas.microsoft.com/office/drawing/2014/main" xmlns="" id="{63C76009-5703-CC01-34FD-DE7DD99C2CA6}"/>
+                <a16:creationId xmlns="" xmlns:a16="http://schemas.microsoft.com/office/drawing/2014/main" id="{63C76009-5703-CC01-34FD-DE7DD99C2CA6}"/>
               </a:ext>
             </a:extLst>
           </p:cNvPr>
@@ -23065,7 +23101,7 @@
             <p:cNvPr id="1026" name="Picture 2" descr="Visualization for Function Optimization in Python -  MachineLearningMastery.com">
               <a:extLst>
                 <a:ext uri="{FF2B5EF4-FFF2-40B4-BE49-F238E27FC236}">
-                  <a16:creationId xmlns:a16="http://schemas.microsoft.com/office/drawing/2014/main" xmlns="" id="{354FEEB6-6AE9-60CB-E499-CC164C6315C0}"/>
+                  <a16:creationId xmlns="" xmlns:a16="http://schemas.microsoft.com/office/drawing/2014/main" id="{354FEEB6-6AE9-60CB-E499-CC164C6315C0}"/>
                 </a:ext>
               </a:extLst>
             </p:cNvPr>
@@ -23112,7 +23148,7 @@
                 <p:cNvPr id="32" name="CaixaDeTexto 31">
                   <a:extLst>
                     <a:ext uri="{FF2B5EF4-FFF2-40B4-BE49-F238E27FC236}">
-                      <a16:creationId xmlns:a16="http://schemas.microsoft.com/office/drawing/2014/main" xmlns="" id="{F8F56DFA-DA55-64BC-498E-89036B3ABB7B}"/>
+                      <a16:creationId xmlns="" xmlns:a16="http://schemas.microsoft.com/office/drawing/2014/main" id="{F8F56DFA-DA55-64BC-498E-89036B3ABB7B}"/>
                     </a:ext>
                   </a:extLst>
                 </p:cNvPr>
@@ -23227,7 +23263,7 @@
                 <p:cNvPr id="34" name="CaixaDeTexto 33">
                   <a:extLst>
                     <a:ext uri="{FF2B5EF4-FFF2-40B4-BE49-F238E27FC236}">
-                      <a16:creationId xmlns:a16="http://schemas.microsoft.com/office/drawing/2014/main" xmlns="" id="{0F41703A-C8C4-AC4F-DED1-A7688D7554D5}"/>
+                      <a16:creationId xmlns="" xmlns:a16="http://schemas.microsoft.com/office/drawing/2014/main" id="{0F41703A-C8C4-AC4F-DED1-A7688D7554D5}"/>
                     </a:ext>
                   </a:extLst>
                 </p:cNvPr>
@@ -23342,7 +23378,7 @@
                 <p:cNvPr id="37" name="CaixaDeTexto 36">
                   <a:extLst>
                     <a:ext uri="{FF2B5EF4-FFF2-40B4-BE49-F238E27FC236}">
-                      <a16:creationId xmlns:a16="http://schemas.microsoft.com/office/drawing/2014/main" xmlns="" id="{06ABD17C-2E15-0808-E956-FE4EEA39D288}"/>
+                      <a16:creationId xmlns="" xmlns:a16="http://schemas.microsoft.com/office/drawing/2014/main" id="{06ABD17C-2E15-0808-E956-FE4EEA39D288}"/>
                     </a:ext>
                   </a:extLst>
                 </p:cNvPr>
@@ -23437,7 +23473,7 @@
           <p:cNvPr id="39" name="Conector de Seta Reta 38">
             <a:extLst>
               <a:ext uri="{FF2B5EF4-FFF2-40B4-BE49-F238E27FC236}">
-                <a16:creationId xmlns:a16="http://schemas.microsoft.com/office/drawing/2014/main" xmlns="" id="{4041F71A-DE1C-E129-7512-5E81C16C6EAB}"/>
+                <a16:creationId xmlns="" xmlns:a16="http://schemas.microsoft.com/office/drawing/2014/main" id="{4041F71A-DE1C-E129-7512-5E81C16C6EAB}"/>
               </a:ext>
             </a:extLst>
           </p:cNvPr>
@@ -23481,7 +23517,7 @@
           <p:cNvPr id="43" name="CaixaDeTexto 42">
             <a:extLst>
               <a:ext uri="{FF2B5EF4-FFF2-40B4-BE49-F238E27FC236}">
-                <a16:creationId xmlns:a16="http://schemas.microsoft.com/office/drawing/2014/main" xmlns="" id="{95EC4D88-9E4F-5552-6DCF-99C121BF0426}"/>
+                <a16:creationId xmlns="" xmlns:a16="http://schemas.microsoft.com/office/drawing/2014/main" id="{95EC4D88-9E4F-5552-6DCF-99C121BF0426}"/>
               </a:ext>
             </a:extLst>
           </p:cNvPr>
@@ -23520,7 +23556,7 @@
           <p:cNvPr id="44" name="Retângulo 43">
             <a:extLst>
               <a:ext uri="{FF2B5EF4-FFF2-40B4-BE49-F238E27FC236}">
-                <a16:creationId xmlns:a16="http://schemas.microsoft.com/office/drawing/2014/main" xmlns="" id="{0E22BE30-DFAE-8B87-D83B-05B9B69080D4}"/>
+                <a16:creationId xmlns="" xmlns:a16="http://schemas.microsoft.com/office/drawing/2014/main" id="{0E22BE30-DFAE-8B87-D83B-05B9B69080D4}"/>
               </a:ext>
             </a:extLst>
           </p:cNvPr>
@@ -23572,7 +23608,7 @@
           <p:cNvPr id="45" name="Retângulo 44">
             <a:extLst>
               <a:ext uri="{FF2B5EF4-FFF2-40B4-BE49-F238E27FC236}">
-                <a16:creationId xmlns:a16="http://schemas.microsoft.com/office/drawing/2014/main" xmlns="" id="{BA16A255-C8A7-13E5-A987-B241E01F62BC}"/>
+                <a16:creationId xmlns="" xmlns:a16="http://schemas.microsoft.com/office/drawing/2014/main" id="{BA16A255-C8A7-13E5-A987-B241E01F62BC}"/>
               </a:ext>
             </a:extLst>
           </p:cNvPr>
@@ -23624,7 +23660,7 @@
           <p:cNvPr id="47" name="Conector de Seta Reta 46">
             <a:extLst>
               <a:ext uri="{FF2B5EF4-FFF2-40B4-BE49-F238E27FC236}">
-                <a16:creationId xmlns:a16="http://schemas.microsoft.com/office/drawing/2014/main" xmlns="" id="{822D9EAD-1149-7FBE-C611-D40937DD1A9D}"/>
+                <a16:creationId xmlns="" xmlns:a16="http://schemas.microsoft.com/office/drawing/2014/main" id="{822D9EAD-1149-7FBE-C611-D40937DD1A9D}"/>
               </a:ext>
             </a:extLst>
           </p:cNvPr>
@@ -23666,7 +23702,7 @@
           <p:cNvPr id="48" name="CaixaDeTexto 47">
             <a:extLst>
               <a:ext uri="{FF2B5EF4-FFF2-40B4-BE49-F238E27FC236}">
-                <a16:creationId xmlns:a16="http://schemas.microsoft.com/office/drawing/2014/main" xmlns="" id="{B9DE3902-824E-8DE4-4B5F-D95AEAF0C065}"/>
+                <a16:creationId xmlns="" xmlns:a16="http://schemas.microsoft.com/office/drawing/2014/main" id="{B9DE3902-824E-8DE4-4B5F-D95AEAF0C065}"/>
               </a:ext>
             </a:extLst>
           </p:cNvPr>
@@ -23726,7 +23762,7 @@
         <p:cNvPr id="1" name="">
           <a:extLst>
             <a:ext uri="{FF2B5EF4-FFF2-40B4-BE49-F238E27FC236}">
-              <a16:creationId xmlns:a16="http://schemas.microsoft.com/office/drawing/2014/main" xmlns="" id="{49407951-294D-1987-1F07-7BA98F642C9A}"/>
+              <a16:creationId xmlns="" xmlns:a16="http://schemas.microsoft.com/office/drawing/2014/main" id="{49407951-294D-1987-1F07-7BA98F642C9A}"/>
             </a:ext>
           </a:extLst>
         </p:cNvPr>
@@ -23746,7 +23782,7 @@
           <p:cNvPr id="2" name="Título 1">
             <a:extLst>
               <a:ext uri="{FF2B5EF4-FFF2-40B4-BE49-F238E27FC236}">
-                <a16:creationId xmlns:a16="http://schemas.microsoft.com/office/drawing/2014/main" xmlns="" id="{174A5B92-BB19-C84F-3FA2-248F9DA1A5FC}"/>
+                <a16:creationId xmlns="" xmlns:a16="http://schemas.microsoft.com/office/drawing/2014/main" id="{174A5B92-BB19-C84F-3FA2-248F9DA1A5FC}"/>
               </a:ext>
             </a:extLst>
           </p:cNvPr>
@@ -23774,7 +23810,7 @@
           <p:cNvPr id="3" name="Espaço Reservado para Conteúdo 2">
             <a:extLst>
               <a:ext uri="{FF2B5EF4-FFF2-40B4-BE49-F238E27FC236}">
-                <a16:creationId xmlns:a16="http://schemas.microsoft.com/office/drawing/2014/main" xmlns="" id="{2C33344C-9F95-DAB9-1333-D4DCC4D067C7}"/>
+                <a16:creationId xmlns="" xmlns:a16="http://schemas.microsoft.com/office/drawing/2014/main" id="{2C33344C-9F95-DAB9-1333-D4DCC4D067C7}"/>
               </a:ext>
             </a:extLst>
           </p:cNvPr>
@@ -23853,7 +23889,7 @@
               <p:cNvPr id="5" name="CaixaDeTexto 4">
                 <a:extLst>
                   <a:ext uri="{FF2B5EF4-FFF2-40B4-BE49-F238E27FC236}">
-                    <a16:creationId xmlns:a16="http://schemas.microsoft.com/office/drawing/2014/main" xmlns="" id="{CAC8B18A-EE59-CC83-84A9-F597F9A85042}"/>
+                    <a16:creationId xmlns="" xmlns:a16="http://schemas.microsoft.com/office/drawing/2014/main" id="{CAC8B18A-EE59-CC83-84A9-F597F9A85042}"/>
                   </a:ext>
                 </a:extLst>
               </p:cNvPr>
@@ -24328,7 +24364,7 @@
           <p:cNvPr id="52" name="Agrupar 51">
             <a:extLst>
               <a:ext uri="{FF2B5EF4-FFF2-40B4-BE49-F238E27FC236}">
-                <a16:creationId xmlns:a16="http://schemas.microsoft.com/office/drawing/2014/main" xmlns="" id="{69A92EF6-86AA-B04F-B9D5-0526DC5E9E11}"/>
+                <a16:creationId xmlns="" xmlns:a16="http://schemas.microsoft.com/office/drawing/2014/main" id="{69A92EF6-86AA-B04F-B9D5-0526DC5E9E11}"/>
               </a:ext>
             </a:extLst>
           </p:cNvPr>
@@ -24348,7 +24384,7 @@
             <p:cNvPr id="1026" name="Picture 2" descr="Visualization for Function Optimization in Python -  MachineLearningMastery.com">
               <a:extLst>
                 <a:ext uri="{FF2B5EF4-FFF2-40B4-BE49-F238E27FC236}">
-                  <a16:creationId xmlns:a16="http://schemas.microsoft.com/office/drawing/2014/main" xmlns="" id="{891F5391-2026-8C2E-0B3E-FD722E573497}"/>
+                  <a16:creationId xmlns="" xmlns:a16="http://schemas.microsoft.com/office/drawing/2014/main" id="{891F5391-2026-8C2E-0B3E-FD722E573497}"/>
                 </a:ext>
               </a:extLst>
             </p:cNvPr>
@@ -24395,7 +24431,7 @@
                 <p:cNvPr id="32" name="CaixaDeTexto 31">
                   <a:extLst>
                     <a:ext uri="{FF2B5EF4-FFF2-40B4-BE49-F238E27FC236}">
-                      <a16:creationId xmlns:a16="http://schemas.microsoft.com/office/drawing/2014/main" xmlns="" id="{51DC6CF0-B9CE-31DF-8E6A-1D362B995785}"/>
+                      <a16:creationId xmlns="" xmlns:a16="http://schemas.microsoft.com/office/drawing/2014/main" id="{51DC6CF0-B9CE-31DF-8E6A-1D362B995785}"/>
                     </a:ext>
                   </a:extLst>
                 </p:cNvPr>
@@ -24510,7 +24546,7 @@
                 <p:cNvPr id="34" name="CaixaDeTexto 33">
                   <a:extLst>
                     <a:ext uri="{FF2B5EF4-FFF2-40B4-BE49-F238E27FC236}">
-                      <a16:creationId xmlns:a16="http://schemas.microsoft.com/office/drawing/2014/main" xmlns="" id="{FF451B1C-3B39-A358-4712-23DDF9AB89E0}"/>
+                      <a16:creationId xmlns="" xmlns:a16="http://schemas.microsoft.com/office/drawing/2014/main" id="{FF451B1C-3B39-A358-4712-23DDF9AB89E0}"/>
                     </a:ext>
                   </a:extLst>
                 </p:cNvPr>
@@ -24625,7 +24661,7 @@
                 <p:cNvPr id="37" name="CaixaDeTexto 36">
                   <a:extLst>
                     <a:ext uri="{FF2B5EF4-FFF2-40B4-BE49-F238E27FC236}">
-                      <a16:creationId xmlns:a16="http://schemas.microsoft.com/office/drawing/2014/main" xmlns="" id="{30196AB4-8335-2434-49FB-6DCD20AA4E1E}"/>
+                      <a16:creationId xmlns="" xmlns:a16="http://schemas.microsoft.com/office/drawing/2014/main" id="{30196AB4-8335-2434-49FB-6DCD20AA4E1E}"/>
                     </a:ext>
                   </a:extLst>
                 </p:cNvPr>
@@ -24720,7 +24756,7 @@
           <p:cNvPr id="39" name="Conector de Seta Reta 38">
             <a:extLst>
               <a:ext uri="{FF2B5EF4-FFF2-40B4-BE49-F238E27FC236}">
-                <a16:creationId xmlns:a16="http://schemas.microsoft.com/office/drawing/2014/main" xmlns="" id="{0CF05E6E-2DCF-827C-D3A9-9D2D6823E8AE}"/>
+                <a16:creationId xmlns="" xmlns:a16="http://schemas.microsoft.com/office/drawing/2014/main" id="{0CF05E6E-2DCF-827C-D3A9-9D2D6823E8AE}"/>
               </a:ext>
             </a:extLst>
           </p:cNvPr>
@@ -24764,7 +24800,7 @@
           <p:cNvPr id="43" name="CaixaDeTexto 42">
             <a:extLst>
               <a:ext uri="{FF2B5EF4-FFF2-40B4-BE49-F238E27FC236}">
-                <a16:creationId xmlns:a16="http://schemas.microsoft.com/office/drawing/2014/main" xmlns="" id="{7DD7DBC8-C42A-5F06-23F9-7ADEC74F826A}"/>
+                <a16:creationId xmlns="" xmlns:a16="http://schemas.microsoft.com/office/drawing/2014/main" id="{7DD7DBC8-C42A-5F06-23F9-7ADEC74F826A}"/>
               </a:ext>
             </a:extLst>
           </p:cNvPr>
@@ -24803,7 +24839,7 @@
           <p:cNvPr id="44" name="Retângulo 43">
             <a:extLst>
               <a:ext uri="{FF2B5EF4-FFF2-40B4-BE49-F238E27FC236}">
-                <a16:creationId xmlns:a16="http://schemas.microsoft.com/office/drawing/2014/main" xmlns="" id="{D401F929-8474-735D-ADF3-337C96D9494B}"/>
+                <a16:creationId xmlns="" xmlns:a16="http://schemas.microsoft.com/office/drawing/2014/main" id="{D401F929-8474-735D-ADF3-337C96D9494B}"/>
               </a:ext>
             </a:extLst>
           </p:cNvPr>
@@ -24855,7 +24891,7 @@
           <p:cNvPr id="45" name="Retângulo 44">
             <a:extLst>
               <a:ext uri="{FF2B5EF4-FFF2-40B4-BE49-F238E27FC236}">
-                <a16:creationId xmlns:a16="http://schemas.microsoft.com/office/drawing/2014/main" xmlns="" id="{A67B37F4-C674-39BB-383F-EA81B42C25B3}"/>
+                <a16:creationId xmlns="" xmlns:a16="http://schemas.microsoft.com/office/drawing/2014/main" id="{A67B37F4-C674-39BB-383F-EA81B42C25B3}"/>
               </a:ext>
             </a:extLst>
           </p:cNvPr>
@@ -24907,7 +24943,7 @@
           <p:cNvPr id="47" name="Conector de Seta Reta 46">
             <a:extLst>
               <a:ext uri="{FF2B5EF4-FFF2-40B4-BE49-F238E27FC236}">
-                <a16:creationId xmlns:a16="http://schemas.microsoft.com/office/drawing/2014/main" xmlns="" id="{794B6722-40AF-0378-9A89-DAA0E4DC33B4}"/>
+                <a16:creationId xmlns="" xmlns:a16="http://schemas.microsoft.com/office/drawing/2014/main" id="{794B6722-40AF-0378-9A89-DAA0E4DC33B4}"/>
               </a:ext>
             </a:extLst>
           </p:cNvPr>
@@ -24949,7 +24985,7 @@
           <p:cNvPr id="48" name="CaixaDeTexto 47">
             <a:extLst>
               <a:ext uri="{FF2B5EF4-FFF2-40B4-BE49-F238E27FC236}">
-                <a16:creationId xmlns:a16="http://schemas.microsoft.com/office/drawing/2014/main" xmlns="" id="{68B4E868-C383-179B-09E0-7CBAA385F708}"/>
+                <a16:creationId xmlns="" xmlns:a16="http://schemas.microsoft.com/office/drawing/2014/main" id="{68B4E868-C383-179B-09E0-7CBAA385F708}"/>
               </a:ext>
             </a:extLst>
           </p:cNvPr>
@@ -25025,7 +25061,7 @@
               <p:cNvPr id="2" name="Título 1">
                 <a:extLst>
                   <a:ext uri="{FF2B5EF4-FFF2-40B4-BE49-F238E27FC236}">
-                    <a16:creationId xmlns:a16="http://schemas.microsoft.com/office/drawing/2014/main" xmlns="" id="{EBBFACCC-402D-F8EB-8DF6-A01AC2F11478}"/>
+                    <a16:creationId xmlns="" xmlns:a16="http://schemas.microsoft.com/office/drawing/2014/main" id="{EBBFACCC-402D-F8EB-8DF6-A01AC2F11478}"/>
                   </a:ext>
                 </a:extLst>
               </p:cNvPr>
@@ -25121,7 +25157,7 @@
               <p:cNvPr id="3" name="Espaço Reservado para Conteúdo 2">
                 <a:extLst>
                   <a:ext uri="{FF2B5EF4-FFF2-40B4-BE49-F238E27FC236}">
-                    <a16:creationId xmlns:a16="http://schemas.microsoft.com/office/drawing/2014/main" xmlns="" id="{574AB04A-D8D2-BC7E-F4F7-97B83877B167}"/>
+                    <a16:creationId xmlns="" xmlns:a16="http://schemas.microsoft.com/office/drawing/2014/main" id="{574AB04A-D8D2-BC7E-F4F7-97B83877B167}"/>
                   </a:ext>
                 </a:extLst>
               </p:cNvPr>
@@ -25309,7 +25345,7 @@
               <p:cNvPr id="4" name="CaixaDeTexto 3">
                 <a:extLst>
                   <a:ext uri="{FF2B5EF4-FFF2-40B4-BE49-F238E27FC236}">
-                    <a16:creationId xmlns:a16="http://schemas.microsoft.com/office/drawing/2014/main" xmlns="" id="{457B0757-0010-3DDB-7F4D-4E0B92E0088F}"/>
+                    <a16:creationId xmlns="" xmlns:a16="http://schemas.microsoft.com/office/drawing/2014/main" id="{457B0757-0010-3DDB-7F4D-4E0B92E0088F}"/>
                   </a:ext>
                 </a:extLst>
               </p:cNvPr>
@@ -25504,7 +25540,7 @@
           <p:cNvPr id="2" name="Título 1">
             <a:extLst>
               <a:ext uri="{FF2B5EF4-FFF2-40B4-BE49-F238E27FC236}">
-                <a16:creationId xmlns:a16="http://schemas.microsoft.com/office/drawing/2014/main" xmlns="" id="{ABEFD801-7E8D-0885-F1AD-8DAF6F77CEEE}"/>
+                <a16:creationId xmlns="" xmlns:a16="http://schemas.microsoft.com/office/drawing/2014/main" id="{ABEFD801-7E8D-0885-F1AD-8DAF6F77CEEE}"/>
               </a:ext>
             </a:extLst>
           </p:cNvPr>
@@ -25532,7 +25568,7 @@
           <p:cNvPr id="3" name="Espaço Reservado para Conteúdo 2">
             <a:extLst>
               <a:ext uri="{FF2B5EF4-FFF2-40B4-BE49-F238E27FC236}">
-                <a16:creationId xmlns:a16="http://schemas.microsoft.com/office/drawing/2014/main" xmlns="" id="{9BA6276C-11C7-FBDF-9CC4-A84A195D7527}"/>
+                <a16:creationId xmlns="" xmlns:a16="http://schemas.microsoft.com/office/drawing/2014/main" id="{9BA6276C-11C7-FBDF-9CC4-A84A195D7527}"/>
               </a:ext>
             </a:extLst>
           </p:cNvPr>
@@ -25673,7 +25709,7 @@
           <p:cNvPr id="107" name="Agrupar 106">
             <a:extLst>
               <a:ext uri="{FF2B5EF4-FFF2-40B4-BE49-F238E27FC236}">
-                <a16:creationId xmlns:a16="http://schemas.microsoft.com/office/drawing/2014/main" xmlns="" id="{9F6194FB-F234-5221-2C40-FEA9956AEE0C}"/>
+                <a16:creationId xmlns="" xmlns:a16="http://schemas.microsoft.com/office/drawing/2014/main" id="{9F6194FB-F234-5221-2C40-FEA9956AEE0C}"/>
               </a:ext>
             </a:extLst>
           </p:cNvPr>
@@ -25693,7 +25729,7 @@
             <p:cNvPr id="25" name="Agrupar 24">
               <a:extLst>
                 <a:ext uri="{FF2B5EF4-FFF2-40B4-BE49-F238E27FC236}">
-                  <a16:creationId xmlns:a16="http://schemas.microsoft.com/office/drawing/2014/main" xmlns="" id="{840F54E6-6D97-C31B-F9D8-19F2AA3CDBF5}"/>
+                  <a16:creationId xmlns="" xmlns:a16="http://schemas.microsoft.com/office/drawing/2014/main" id="{840F54E6-6D97-C31B-F9D8-19F2AA3CDBF5}"/>
                 </a:ext>
               </a:extLst>
             </p:cNvPr>
@@ -25713,7 +25749,7 @@
               <p:cNvPr id="26" name="Picture 2" descr="Visualization for Function Optimization in Python -  MachineLearningMastery.com">
                 <a:extLst>
                   <a:ext uri="{FF2B5EF4-FFF2-40B4-BE49-F238E27FC236}">
-                    <a16:creationId xmlns:a16="http://schemas.microsoft.com/office/drawing/2014/main" xmlns="" id="{374B63DB-288A-70B9-44EF-3580F40CCC05}"/>
+                    <a16:creationId xmlns="" xmlns:a16="http://schemas.microsoft.com/office/drawing/2014/main" id="{374B63DB-288A-70B9-44EF-3580F40CCC05}"/>
                   </a:ext>
                 </a:extLst>
               </p:cNvPr>
@@ -25760,7 +25796,7 @@
                   <p:cNvPr id="27" name="CaixaDeTexto 26">
                     <a:extLst>
                       <a:ext uri="{FF2B5EF4-FFF2-40B4-BE49-F238E27FC236}">
-                        <a16:creationId xmlns:a16="http://schemas.microsoft.com/office/drawing/2014/main" xmlns="" id="{00D42F04-97F1-C0EA-6B00-D0BD117CDEFF}"/>
+                        <a16:creationId xmlns="" xmlns:a16="http://schemas.microsoft.com/office/drawing/2014/main" id="{00D42F04-97F1-C0EA-6B00-D0BD117CDEFF}"/>
                       </a:ext>
                     </a:extLst>
                   </p:cNvPr>
@@ -25875,7 +25911,7 @@
                   <p:cNvPr id="29" name="CaixaDeTexto 28">
                     <a:extLst>
                       <a:ext uri="{FF2B5EF4-FFF2-40B4-BE49-F238E27FC236}">
-                        <a16:creationId xmlns:a16="http://schemas.microsoft.com/office/drawing/2014/main" xmlns="" id="{1FCA9EDF-24EB-6DAA-4AB3-9E76EE2FB342}"/>
+                        <a16:creationId xmlns="" xmlns:a16="http://schemas.microsoft.com/office/drawing/2014/main" id="{1FCA9EDF-24EB-6DAA-4AB3-9E76EE2FB342}"/>
                       </a:ext>
                     </a:extLst>
                   </p:cNvPr>
@@ -25990,7 +26026,7 @@
                   <p:cNvPr id="32" name="CaixaDeTexto 31">
                     <a:extLst>
                       <a:ext uri="{FF2B5EF4-FFF2-40B4-BE49-F238E27FC236}">
-                        <a16:creationId xmlns:a16="http://schemas.microsoft.com/office/drawing/2014/main" xmlns="" id="{5C41B175-64DA-79AF-4D15-C9A59E4443D8}"/>
+                        <a16:creationId xmlns="" xmlns:a16="http://schemas.microsoft.com/office/drawing/2014/main" id="{5C41B175-64DA-79AF-4D15-C9A59E4443D8}"/>
                       </a:ext>
                     </a:extLst>
                   </p:cNvPr>
@@ -26085,7 +26121,7 @@
             <p:cNvPr id="33" name="Elipse 32">
               <a:extLst>
                 <a:ext uri="{FF2B5EF4-FFF2-40B4-BE49-F238E27FC236}">
-                  <a16:creationId xmlns:a16="http://schemas.microsoft.com/office/drawing/2014/main" xmlns="" id="{ADFE79DF-D458-343A-A13D-98FD73B6A5F6}"/>
+                  <a16:creationId xmlns="" xmlns:a16="http://schemas.microsoft.com/office/drawing/2014/main" id="{ADFE79DF-D458-343A-A13D-98FD73B6A5F6}"/>
                 </a:ext>
               </a:extLst>
             </p:cNvPr>
@@ -26141,7 +26177,7 @@
             <p:cNvPr id="36" name="Conector de Seta Reta 35">
               <a:extLst>
                 <a:ext uri="{FF2B5EF4-FFF2-40B4-BE49-F238E27FC236}">
-                  <a16:creationId xmlns:a16="http://schemas.microsoft.com/office/drawing/2014/main" xmlns="" id="{C80ACF3A-3CFA-A0BC-CB05-D0ECA5FA14D5}"/>
+                  <a16:creationId xmlns="" xmlns:a16="http://schemas.microsoft.com/office/drawing/2014/main" id="{C80ACF3A-3CFA-A0BC-CB05-D0ECA5FA14D5}"/>
                 </a:ext>
               </a:extLst>
             </p:cNvPr>
@@ -26185,7 +26221,7 @@
             <p:cNvPr id="41" name="Conector reto 40">
               <a:extLst>
                 <a:ext uri="{FF2B5EF4-FFF2-40B4-BE49-F238E27FC236}">
-                  <a16:creationId xmlns:a16="http://schemas.microsoft.com/office/drawing/2014/main" xmlns="" id="{E4FB3ED5-CBA0-424D-0693-7F2E0B11F067}"/>
+                  <a16:creationId xmlns="" xmlns:a16="http://schemas.microsoft.com/office/drawing/2014/main" id="{E4FB3ED5-CBA0-424D-0693-7F2E0B11F067}"/>
                 </a:ext>
               </a:extLst>
             </p:cNvPr>
@@ -26230,7 +26266,7 @@
             <p:cNvPr id="47" name="Conector reto 46">
               <a:extLst>
                 <a:ext uri="{FF2B5EF4-FFF2-40B4-BE49-F238E27FC236}">
-                  <a16:creationId xmlns:a16="http://schemas.microsoft.com/office/drawing/2014/main" xmlns="" id="{60709E57-1952-D602-5A8C-33759AF63ECF}"/>
+                  <a16:creationId xmlns="" xmlns:a16="http://schemas.microsoft.com/office/drawing/2014/main" id="{60709E57-1952-D602-5A8C-33759AF63ECF}"/>
                 </a:ext>
               </a:extLst>
             </p:cNvPr>
@@ -26274,7 +26310,7 @@
             <p:cNvPr id="55" name="Conector reto 54">
               <a:extLst>
                 <a:ext uri="{FF2B5EF4-FFF2-40B4-BE49-F238E27FC236}">
-                  <a16:creationId xmlns:a16="http://schemas.microsoft.com/office/drawing/2014/main" xmlns="" id="{70469046-E645-754E-8DAB-C5843FA2CA4C}"/>
+                  <a16:creationId xmlns="" xmlns:a16="http://schemas.microsoft.com/office/drawing/2014/main" id="{70469046-E645-754E-8DAB-C5843FA2CA4C}"/>
                 </a:ext>
               </a:extLst>
             </p:cNvPr>
@@ -26318,7 +26354,7 @@
             <p:cNvPr id="94" name="Conector reto 93">
               <a:extLst>
                 <a:ext uri="{FF2B5EF4-FFF2-40B4-BE49-F238E27FC236}">
-                  <a16:creationId xmlns:a16="http://schemas.microsoft.com/office/drawing/2014/main" xmlns="" id="{1BCFD666-1E92-D928-BC71-CEB6A8691777}"/>
+                  <a16:creationId xmlns="" xmlns:a16="http://schemas.microsoft.com/office/drawing/2014/main" id="{1BCFD666-1E92-D928-BC71-CEB6A8691777}"/>
                 </a:ext>
               </a:extLst>
             </p:cNvPr>
@@ -26362,7 +26398,7 @@
             <p:cNvPr id="97" name="Conector reto 96">
               <a:extLst>
                 <a:ext uri="{FF2B5EF4-FFF2-40B4-BE49-F238E27FC236}">
-                  <a16:creationId xmlns:a16="http://schemas.microsoft.com/office/drawing/2014/main" xmlns="" id="{A4C7AE2B-6CC5-1709-3D07-1602E5412267}"/>
+                  <a16:creationId xmlns="" xmlns:a16="http://schemas.microsoft.com/office/drawing/2014/main" id="{A4C7AE2B-6CC5-1709-3D07-1602E5412267}"/>
                 </a:ext>
               </a:extLst>
             </p:cNvPr>
@@ -26406,7 +26442,7 @@
             <p:cNvPr id="104" name="Conector de Seta Reta 103">
               <a:extLst>
                 <a:ext uri="{FF2B5EF4-FFF2-40B4-BE49-F238E27FC236}">
-                  <a16:creationId xmlns:a16="http://schemas.microsoft.com/office/drawing/2014/main" xmlns="" id="{79BBFED7-3E57-8610-AD49-8A0A1D984CA1}"/>
+                  <a16:creationId xmlns="" xmlns:a16="http://schemas.microsoft.com/office/drawing/2014/main" id="{79BBFED7-3E57-8610-AD49-8A0A1D984CA1}"/>
                 </a:ext>
               </a:extLst>
             </p:cNvPr>
@@ -26450,7 +26486,7 @@
             <p:cNvPr id="105" name="CaixaDeTexto 104">
               <a:extLst>
                 <a:ext uri="{FF2B5EF4-FFF2-40B4-BE49-F238E27FC236}">
-                  <a16:creationId xmlns:a16="http://schemas.microsoft.com/office/drawing/2014/main" xmlns="" id="{4AA6498F-657F-137E-D70A-390BEE15E5F0}"/>
+                  <a16:creationId xmlns="" xmlns:a16="http://schemas.microsoft.com/office/drawing/2014/main" id="{4AA6498F-657F-137E-D70A-390BEE15E5F0}"/>
                 </a:ext>
               </a:extLst>
             </p:cNvPr>
@@ -26492,7 +26528,7 @@
               <p:cNvPr id="108" name="CaixaDeTexto 107">
                 <a:extLst>
                   <a:ext uri="{FF2B5EF4-FFF2-40B4-BE49-F238E27FC236}">
-                    <a16:creationId xmlns:a16="http://schemas.microsoft.com/office/drawing/2014/main" xmlns="" id="{1D98E349-DD7D-48A2-457D-33CE98A94DE2}"/>
+                    <a16:creationId xmlns="" xmlns:a16="http://schemas.microsoft.com/office/drawing/2014/main" id="{1D98E349-DD7D-48A2-457D-33CE98A94DE2}"/>
                   </a:ext>
                 </a:extLst>
               </p:cNvPr>
@@ -26670,7 +26706,7 @@
           <p:cNvPr id="2" name="Título 1">
             <a:extLst>
               <a:ext uri="{FF2B5EF4-FFF2-40B4-BE49-F238E27FC236}">
-                <a16:creationId xmlns:a16="http://schemas.microsoft.com/office/drawing/2014/main" xmlns="" id="{ABEFD801-7E8D-0885-F1AD-8DAF6F77CEEE}"/>
+                <a16:creationId xmlns="" xmlns:a16="http://schemas.microsoft.com/office/drawing/2014/main" id="{ABEFD801-7E8D-0885-F1AD-8DAF6F77CEEE}"/>
               </a:ext>
             </a:extLst>
           </p:cNvPr>
@@ -26698,7 +26734,7 @@
           <p:cNvPr id="3" name="Espaço Reservado para Conteúdo 2">
             <a:extLst>
               <a:ext uri="{FF2B5EF4-FFF2-40B4-BE49-F238E27FC236}">
-                <a16:creationId xmlns:a16="http://schemas.microsoft.com/office/drawing/2014/main" xmlns="" id="{9BA6276C-11C7-FBDF-9CC4-A84A195D7527}"/>
+                <a16:creationId xmlns="" xmlns:a16="http://schemas.microsoft.com/office/drawing/2014/main" id="{9BA6276C-11C7-FBDF-9CC4-A84A195D7527}"/>
               </a:ext>
             </a:extLst>
           </p:cNvPr>
@@ -26807,7 +26843,7 @@
           <p:cNvPr id="107" name="Agrupar 106">
             <a:extLst>
               <a:ext uri="{FF2B5EF4-FFF2-40B4-BE49-F238E27FC236}">
-                <a16:creationId xmlns:a16="http://schemas.microsoft.com/office/drawing/2014/main" xmlns="" id="{9F6194FB-F234-5221-2C40-FEA9956AEE0C}"/>
+                <a16:creationId xmlns="" xmlns:a16="http://schemas.microsoft.com/office/drawing/2014/main" id="{9F6194FB-F234-5221-2C40-FEA9956AEE0C}"/>
               </a:ext>
             </a:extLst>
           </p:cNvPr>
@@ -26827,7 +26863,7 @@
             <p:cNvPr id="25" name="Agrupar 24">
               <a:extLst>
                 <a:ext uri="{FF2B5EF4-FFF2-40B4-BE49-F238E27FC236}">
-                  <a16:creationId xmlns:a16="http://schemas.microsoft.com/office/drawing/2014/main" xmlns="" id="{840F54E6-6D97-C31B-F9D8-19F2AA3CDBF5}"/>
+                  <a16:creationId xmlns="" xmlns:a16="http://schemas.microsoft.com/office/drawing/2014/main" id="{840F54E6-6D97-C31B-F9D8-19F2AA3CDBF5}"/>
                 </a:ext>
               </a:extLst>
             </p:cNvPr>
@@ -26847,7 +26883,7 @@
               <p:cNvPr id="26" name="Picture 2" descr="Visualization for Function Optimization in Python -  MachineLearningMastery.com">
                 <a:extLst>
                   <a:ext uri="{FF2B5EF4-FFF2-40B4-BE49-F238E27FC236}">
-                    <a16:creationId xmlns:a16="http://schemas.microsoft.com/office/drawing/2014/main" xmlns="" id="{374B63DB-288A-70B9-44EF-3580F40CCC05}"/>
+                    <a16:creationId xmlns="" xmlns:a16="http://schemas.microsoft.com/office/drawing/2014/main" id="{374B63DB-288A-70B9-44EF-3580F40CCC05}"/>
                   </a:ext>
                 </a:extLst>
               </p:cNvPr>
@@ -26894,7 +26930,7 @@
                   <p:cNvPr id="27" name="CaixaDeTexto 26">
                     <a:extLst>
                       <a:ext uri="{FF2B5EF4-FFF2-40B4-BE49-F238E27FC236}">
-                        <a16:creationId xmlns:a16="http://schemas.microsoft.com/office/drawing/2014/main" xmlns="" id="{00D42F04-97F1-C0EA-6B00-D0BD117CDEFF}"/>
+                        <a16:creationId xmlns="" xmlns:a16="http://schemas.microsoft.com/office/drawing/2014/main" id="{00D42F04-97F1-C0EA-6B00-D0BD117CDEFF}"/>
                       </a:ext>
                     </a:extLst>
                   </p:cNvPr>
@@ -27009,7 +27045,7 @@
                   <p:cNvPr id="29" name="CaixaDeTexto 28">
                     <a:extLst>
                       <a:ext uri="{FF2B5EF4-FFF2-40B4-BE49-F238E27FC236}">
-                        <a16:creationId xmlns:a16="http://schemas.microsoft.com/office/drawing/2014/main" xmlns="" id="{1FCA9EDF-24EB-6DAA-4AB3-9E76EE2FB342}"/>
+                        <a16:creationId xmlns="" xmlns:a16="http://schemas.microsoft.com/office/drawing/2014/main" id="{1FCA9EDF-24EB-6DAA-4AB3-9E76EE2FB342}"/>
                       </a:ext>
                     </a:extLst>
                   </p:cNvPr>
@@ -27124,7 +27160,7 @@
                   <p:cNvPr id="32" name="CaixaDeTexto 31">
                     <a:extLst>
                       <a:ext uri="{FF2B5EF4-FFF2-40B4-BE49-F238E27FC236}">
-                        <a16:creationId xmlns:a16="http://schemas.microsoft.com/office/drawing/2014/main" xmlns="" id="{5C41B175-64DA-79AF-4D15-C9A59E4443D8}"/>
+                        <a16:creationId xmlns="" xmlns:a16="http://schemas.microsoft.com/office/drawing/2014/main" id="{5C41B175-64DA-79AF-4D15-C9A59E4443D8}"/>
                       </a:ext>
                     </a:extLst>
                   </p:cNvPr>
@@ -27219,7 +27255,7 @@
             <p:cNvPr id="33" name="Elipse 32">
               <a:extLst>
                 <a:ext uri="{FF2B5EF4-FFF2-40B4-BE49-F238E27FC236}">
-                  <a16:creationId xmlns:a16="http://schemas.microsoft.com/office/drawing/2014/main" xmlns="" id="{ADFE79DF-D458-343A-A13D-98FD73B6A5F6}"/>
+                  <a16:creationId xmlns="" xmlns:a16="http://schemas.microsoft.com/office/drawing/2014/main" id="{ADFE79DF-D458-343A-A13D-98FD73B6A5F6}"/>
                 </a:ext>
               </a:extLst>
             </p:cNvPr>
@@ -27275,7 +27311,7 @@
             <p:cNvPr id="36" name="Conector de Seta Reta 35">
               <a:extLst>
                 <a:ext uri="{FF2B5EF4-FFF2-40B4-BE49-F238E27FC236}">
-                  <a16:creationId xmlns:a16="http://schemas.microsoft.com/office/drawing/2014/main" xmlns="" id="{C80ACF3A-3CFA-A0BC-CB05-D0ECA5FA14D5}"/>
+                  <a16:creationId xmlns="" xmlns:a16="http://schemas.microsoft.com/office/drawing/2014/main" id="{C80ACF3A-3CFA-A0BC-CB05-D0ECA5FA14D5}"/>
                 </a:ext>
               </a:extLst>
             </p:cNvPr>
@@ -27319,7 +27355,7 @@
             <p:cNvPr id="41" name="Conector reto 40">
               <a:extLst>
                 <a:ext uri="{FF2B5EF4-FFF2-40B4-BE49-F238E27FC236}">
-                  <a16:creationId xmlns:a16="http://schemas.microsoft.com/office/drawing/2014/main" xmlns="" id="{E4FB3ED5-CBA0-424D-0693-7F2E0B11F067}"/>
+                  <a16:creationId xmlns="" xmlns:a16="http://schemas.microsoft.com/office/drawing/2014/main" id="{E4FB3ED5-CBA0-424D-0693-7F2E0B11F067}"/>
                 </a:ext>
               </a:extLst>
             </p:cNvPr>
@@ -27364,7 +27400,7 @@
             <p:cNvPr id="47" name="Conector reto 46">
               <a:extLst>
                 <a:ext uri="{FF2B5EF4-FFF2-40B4-BE49-F238E27FC236}">
-                  <a16:creationId xmlns:a16="http://schemas.microsoft.com/office/drawing/2014/main" xmlns="" id="{60709E57-1952-D602-5A8C-33759AF63ECF}"/>
+                  <a16:creationId xmlns="" xmlns:a16="http://schemas.microsoft.com/office/drawing/2014/main" id="{60709E57-1952-D602-5A8C-33759AF63ECF}"/>
                 </a:ext>
               </a:extLst>
             </p:cNvPr>
@@ -27408,7 +27444,7 @@
             <p:cNvPr id="55" name="Conector reto 54">
               <a:extLst>
                 <a:ext uri="{FF2B5EF4-FFF2-40B4-BE49-F238E27FC236}">
-                  <a16:creationId xmlns:a16="http://schemas.microsoft.com/office/drawing/2014/main" xmlns="" id="{70469046-E645-754E-8DAB-C5843FA2CA4C}"/>
+                  <a16:creationId xmlns="" xmlns:a16="http://schemas.microsoft.com/office/drawing/2014/main" id="{70469046-E645-754E-8DAB-C5843FA2CA4C}"/>
                 </a:ext>
               </a:extLst>
             </p:cNvPr>
@@ -27452,7 +27488,7 @@
             <p:cNvPr id="94" name="Conector reto 93">
               <a:extLst>
                 <a:ext uri="{FF2B5EF4-FFF2-40B4-BE49-F238E27FC236}">
-                  <a16:creationId xmlns:a16="http://schemas.microsoft.com/office/drawing/2014/main" xmlns="" id="{1BCFD666-1E92-D928-BC71-CEB6A8691777}"/>
+                  <a16:creationId xmlns="" xmlns:a16="http://schemas.microsoft.com/office/drawing/2014/main" id="{1BCFD666-1E92-D928-BC71-CEB6A8691777}"/>
                 </a:ext>
               </a:extLst>
             </p:cNvPr>
@@ -27496,7 +27532,7 @@
             <p:cNvPr id="97" name="Conector reto 96">
               <a:extLst>
                 <a:ext uri="{FF2B5EF4-FFF2-40B4-BE49-F238E27FC236}">
-                  <a16:creationId xmlns:a16="http://schemas.microsoft.com/office/drawing/2014/main" xmlns="" id="{A4C7AE2B-6CC5-1709-3D07-1602E5412267}"/>
+                  <a16:creationId xmlns="" xmlns:a16="http://schemas.microsoft.com/office/drawing/2014/main" id="{A4C7AE2B-6CC5-1709-3D07-1602E5412267}"/>
                 </a:ext>
               </a:extLst>
             </p:cNvPr>
@@ -27540,7 +27576,7 @@
             <p:cNvPr id="104" name="Conector de Seta Reta 103">
               <a:extLst>
                 <a:ext uri="{FF2B5EF4-FFF2-40B4-BE49-F238E27FC236}">
-                  <a16:creationId xmlns:a16="http://schemas.microsoft.com/office/drawing/2014/main" xmlns="" id="{79BBFED7-3E57-8610-AD49-8A0A1D984CA1}"/>
+                  <a16:creationId xmlns="" xmlns:a16="http://schemas.microsoft.com/office/drawing/2014/main" id="{79BBFED7-3E57-8610-AD49-8A0A1D984CA1}"/>
                 </a:ext>
               </a:extLst>
             </p:cNvPr>
@@ -27584,7 +27620,7 @@
             <p:cNvPr id="105" name="CaixaDeTexto 104">
               <a:extLst>
                 <a:ext uri="{FF2B5EF4-FFF2-40B4-BE49-F238E27FC236}">
-                  <a16:creationId xmlns:a16="http://schemas.microsoft.com/office/drawing/2014/main" xmlns="" id="{4AA6498F-657F-137E-D70A-390BEE15E5F0}"/>
+                  <a16:creationId xmlns="" xmlns:a16="http://schemas.microsoft.com/office/drawing/2014/main" id="{4AA6498F-657F-137E-D70A-390BEE15E5F0}"/>
                 </a:ext>
               </a:extLst>
             </p:cNvPr>
@@ -27626,7 +27662,7 @@
               <p:cNvPr id="108" name="CaixaDeTexto 107">
                 <a:extLst>
                   <a:ext uri="{FF2B5EF4-FFF2-40B4-BE49-F238E27FC236}">
-                    <a16:creationId xmlns:a16="http://schemas.microsoft.com/office/drawing/2014/main" xmlns="" id="{1D98E349-DD7D-48A2-457D-33CE98A94DE2}"/>
+                    <a16:creationId xmlns="" xmlns:a16="http://schemas.microsoft.com/office/drawing/2014/main" id="{1D98E349-DD7D-48A2-457D-33CE98A94DE2}"/>
                   </a:ext>
                 </a:extLst>
               </p:cNvPr>
@@ -27804,7 +27840,7 @@
           <p:cNvPr id="2" name="Título 1">
             <a:extLst>
               <a:ext uri="{FF2B5EF4-FFF2-40B4-BE49-F238E27FC236}">
-                <a16:creationId xmlns:a16="http://schemas.microsoft.com/office/drawing/2014/main" xmlns="" id="{ABEFD801-7E8D-0885-F1AD-8DAF6F77CEEE}"/>
+                <a16:creationId xmlns="" xmlns:a16="http://schemas.microsoft.com/office/drawing/2014/main" id="{ABEFD801-7E8D-0885-F1AD-8DAF6F77CEEE}"/>
               </a:ext>
             </a:extLst>
           </p:cNvPr>
@@ -27832,7 +27868,7 @@
           <p:cNvPr id="3" name="Espaço Reservado para Conteúdo 2">
             <a:extLst>
               <a:ext uri="{FF2B5EF4-FFF2-40B4-BE49-F238E27FC236}">
-                <a16:creationId xmlns:a16="http://schemas.microsoft.com/office/drawing/2014/main" xmlns="" id="{9BA6276C-11C7-FBDF-9CC4-A84A195D7527}"/>
+                <a16:creationId xmlns="" xmlns:a16="http://schemas.microsoft.com/office/drawing/2014/main" id="{9BA6276C-11C7-FBDF-9CC4-A84A195D7527}"/>
               </a:ext>
             </a:extLst>
           </p:cNvPr>
@@ -27923,7 +27959,7 @@
           <p:cNvPr id="7" name="Agrupar 6">
             <a:extLst>
               <a:ext uri="{FF2B5EF4-FFF2-40B4-BE49-F238E27FC236}">
-                <a16:creationId xmlns:a16="http://schemas.microsoft.com/office/drawing/2014/main" xmlns="" id="{EFF7BA2C-85F3-2954-15C2-8C0FDFD2F383}"/>
+                <a16:creationId xmlns="" xmlns:a16="http://schemas.microsoft.com/office/drawing/2014/main" id="{EFF7BA2C-85F3-2954-15C2-8C0FDFD2F383}"/>
               </a:ext>
             </a:extLst>
           </p:cNvPr>
@@ -27943,7 +27979,7 @@
             <p:cNvPr id="4" name="Agrupar 3">
               <a:extLst>
                 <a:ext uri="{FF2B5EF4-FFF2-40B4-BE49-F238E27FC236}">
-                  <a16:creationId xmlns:a16="http://schemas.microsoft.com/office/drawing/2014/main" xmlns="" id="{B1CFFF15-2A34-B496-DF99-E020420F02A9}"/>
+                  <a16:creationId xmlns="" xmlns:a16="http://schemas.microsoft.com/office/drawing/2014/main" id="{B1CFFF15-2A34-B496-DF99-E020420F02A9}"/>
                 </a:ext>
               </a:extLst>
             </p:cNvPr>
@@ -27963,7 +27999,7 @@
               <p:cNvPr id="5" name="Agrupar 4">
                 <a:extLst>
                   <a:ext uri="{FF2B5EF4-FFF2-40B4-BE49-F238E27FC236}">
-                    <a16:creationId xmlns:a16="http://schemas.microsoft.com/office/drawing/2014/main" xmlns="" id="{303781AB-D3FD-EAC8-BA20-8C7AA74EED74}"/>
+                    <a16:creationId xmlns="" xmlns:a16="http://schemas.microsoft.com/office/drawing/2014/main" id="{303781AB-D3FD-EAC8-BA20-8C7AA74EED74}"/>
                   </a:ext>
                 </a:extLst>
               </p:cNvPr>
@@ -27983,7 +28019,7 @@
                 <p:cNvPr id="15" name="Picture 2" descr="Visualization for Function Optimization in Python -  MachineLearningMastery.com">
                   <a:extLst>
                     <a:ext uri="{FF2B5EF4-FFF2-40B4-BE49-F238E27FC236}">
-                      <a16:creationId xmlns:a16="http://schemas.microsoft.com/office/drawing/2014/main" xmlns="" id="{638B6B9F-5A1A-14AD-55BD-744329EBD1EB}"/>
+                      <a16:creationId xmlns="" xmlns:a16="http://schemas.microsoft.com/office/drawing/2014/main" id="{638B6B9F-5A1A-14AD-55BD-744329EBD1EB}"/>
                     </a:ext>
                   </a:extLst>
                 </p:cNvPr>
@@ -28030,7 +28066,7 @@
                     <p:cNvPr id="16" name="CaixaDeTexto 15">
                       <a:extLst>
                         <a:ext uri="{FF2B5EF4-FFF2-40B4-BE49-F238E27FC236}">
-                          <a16:creationId xmlns:a16="http://schemas.microsoft.com/office/drawing/2014/main" xmlns="" id="{79F1FF82-DAB9-8559-E32B-4EF2A346319E}"/>
+                          <a16:creationId xmlns="" xmlns:a16="http://schemas.microsoft.com/office/drawing/2014/main" id="{79F1FF82-DAB9-8559-E32B-4EF2A346319E}"/>
                         </a:ext>
                       </a:extLst>
                     </p:cNvPr>
@@ -28145,7 +28181,7 @@
                     <p:cNvPr id="17" name="CaixaDeTexto 16">
                       <a:extLst>
                         <a:ext uri="{FF2B5EF4-FFF2-40B4-BE49-F238E27FC236}">
-                          <a16:creationId xmlns:a16="http://schemas.microsoft.com/office/drawing/2014/main" xmlns="" id="{443E934D-5711-801B-0B5C-12F96AF5817B}"/>
+                          <a16:creationId xmlns="" xmlns:a16="http://schemas.microsoft.com/office/drawing/2014/main" id="{443E934D-5711-801B-0B5C-12F96AF5817B}"/>
                         </a:ext>
                       </a:extLst>
                     </p:cNvPr>
@@ -28260,7 +28296,7 @@
                     <p:cNvPr id="18" name="CaixaDeTexto 17">
                       <a:extLst>
                         <a:ext uri="{FF2B5EF4-FFF2-40B4-BE49-F238E27FC236}">
-                          <a16:creationId xmlns:a16="http://schemas.microsoft.com/office/drawing/2014/main" xmlns="" id="{837F7A79-D082-81E1-4CBD-925AE3AEB1BD}"/>
+                          <a16:creationId xmlns="" xmlns:a16="http://schemas.microsoft.com/office/drawing/2014/main" id="{837F7A79-D082-81E1-4CBD-925AE3AEB1BD}"/>
                         </a:ext>
                       </a:extLst>
                     </p:cNvPr>
@@ -28355,7 +28391,7 @@
               <p:cNvPr id="6" name="Elipse 5">
                 <a:extLst>
                   <a:ext uri="{FF2B5EF4-FFF2-40B4-BE49-F238E27FC236}">
-                    <a16:creationId xmlns:a16="http://schemas.microsoft.com/office/drawing/2014/main" xmlns="" id="{753D0596-7D8A-84E6-B162-97698774E7BC}"/>
+                    <a16:creationId xmlns="" xmlns:a16="http://schemas.microsoft.com/office/drawing/2014/main" id="{753D0596-7D8A-84E6-B162-97698774E7BC}"/>
                   </a:ext>
                 </a:extLst>
               </p:cNvPr>
@@ -28411,7 +28447,7 @@
               <p:cNvPr id="8" name="Conector reto 7">
                 <a:extLst>
                   <a:ext uri="{FF2B5EF4-FFF2-40B4-BE49-F238E27FC236}">
-                    <a16:creationId xmlns:a16="http://schemas.microsoft.com/office/drawing/2014/main" xmlns="" id="{6F479719-E6C4-B962-F6C6-52D33662B977}"/>
+                    <a16:creationId xmlns="" xmlns:a16="http://schemas.microsoft.com/office/drawing/2014/main" id="{6F479719-E6C4-B962-F6C6-52D33662B977}"/>
                   </a:ext>
                 </a:extLst>
               </p:cNvPr>
@@ -28456,7 +28492,7 @@
               <p:cNvPr id="9" name="Conector reto 8">
                 <a:extLst>
                   <a:ext uri="{FF2B5EF4-FFF2-40B4-BE49-F238E27FC236}">
-                    <a16:creationId xmlns:a16="http://schemas.microsoft.com/office/drawing/2014/main" xmlns="" id="{3566EB52-B15F-0ADC-0621-7B26FF32C1D1}"/>
+                    <a16:creationId xmlns="" xmlns:a16="http://schemas.microsoft.com/office/drawing/2014/main" id="{3566EB52-B15F-0ADC-0621-7B26FF32C1D1}"/>
                   </a:ext>
                 </a:extLst>
               </p:cNvPr>
@@ -28500,7 +28536,7 @@
               <p:cNvPr id="10" name="Conector reto 9">
                 <a:extLst>
                   <a:ext uri="{FF2B5EF4-FFF2-40B4-BE49-F238E27FC236}">
-                    <a16:creationId xmlns:a16="http://schemas.microsoft.com/office/drawing/2014/main" xmlns="" id="{E78B88C6-9D47-4D86-02FF-4EE1207C7079}"/>
+                    <a16:creationId xmlns="" xmlns:a16="http://schemas.microsoft.com/office/drawing/2014/main" id="{E78B88C6-9D47-4D86-02FF-4EE1207C7079}"/>
                   </a:ext>
                 </a:extLst>
               </p:cNvPr>
@@ -28544,7 +28580,7 @@
               <p:cNvPr id="11" name="Conector reto 10">
                 <a:extLst>
                   <a:ext uri="{FF2B5EF4-FFF2-40B4-BE49-F238E27FC236}">
-                    <a16:creationId xmlns:a16="http://schemas.microsoft.com/office/drawing/2014/main" xmlns="" id="{DA042FA6-4FC2-9517-809F-063693D3492E}"/>
+                    <a16:creationId xmlns="" xmlns:a16="http://schemas.microsoft.com/office/drawing/2014/main" id="{DA042FA6-4FC2-9517-809F-063693D3492E}"/>
                   </a:ext>
                 </a:extLst>
               </p:cNvPr>
@@ -28588,7 +28624,7 @@
               <p:cNvPr id="12" name="Conector reto 11">
                 <a:extLst>
                   <a:ext uri="{FF2B5EF4-FFF2-40B4-BE49-F238E27FC236}">
-                    <a16:creationId xmlns:a16="http://schemas.microsoft.com/office/drawing/2014/main" xmlns="" id="{716DF9ED-EC56-49C3-C322-EF7CA0BF65A4}"/>
+                    <a16:creationId xmlns="" xmlns:a16="http://schemas.microsoft.com/office/drawing/2014/main" id="{716DF9ED-EC56-49C3-C322-EF7CA0BF65A4}"/>
                   </a:ext>
                 </a:extLst>
               </p:cNvPr>
@@ -28632,7 +28668,7 @@
               <p:cNvPr id="13" name="Conector de Seta Reta 12">
                 <a:extLst>
                   <a:ext uri="{FF2B5EF4-FFF2-40B4-BE49-F238E27FC236}">
-                    <a16:creationId xmlns:a16="http://schemas.microsoft.com/office/drawing/2014/main" xmlns="" id="{9C711E50-5628-B19F-099F-8D555230683F}"/>
+                    <a16:creationId xmlns="" xmlns:a16="http://schemas.microsoft.com/office/drawing/2014/main" id="{9C711E50-5628-B19F-099F-8D555230683F}"/>
                   </a:ext>
                 </a:extLst>
               </p:cNvPr>
@@ -28676,7 +28712,7 @@
               <p:cNvPr id="14" name="CaixaDeTexto 13">
                 <a:extLst>
                   <a:ext uri="{FF2B5EF4-FFF2-40B4-BE49-F238E27FC236}">
-                    <a16:creationId xmlns:a16="http://schemas.microsoft.com/office/drawing/2014/main" xmlns="" id="{63DE3061-554C-FAE5-3632-5525A4C8A9BC}"/>
+                    <a16:creationId xmlns="" xmlns:a16="http://schemas.microsoft.com/office/drawing/2014/main" id="{63DE3061-554C-FAE5-3632-5525A4C8A9BC}"/>
                   </a:ext>
                 </a:extLst>
               </p:cNvPr>
@@ -28716,7 +28752,7 @@
             <p:cNvPr id="20" name="Elipse 19">
               <a:extLst>
                 <a:ext uri="{FF2B5EF4-FFF2-40B4-BE49-F238E27FC236}">
-                  <a16:creationId xmlns:a16="http://schemas.microsoft.com/office/drawing/2014/main" xmlns="" id="{63395918-0530-9B68-22F7-52BB772E432F}"/>
+                  <a16:creationId xmlns="" xmlns:a16="http://schemas.microsoft.com/office/drawing/2014/main" id="{63395918-0530-9B68-22F7-52BB772E432F}"/>
                 </a:ext>
               </a:extLst>
             </p:cNvPr>
@@ -28772,7 +28808,7 @@
             <p:cNvPr id="21" name="Elipse 20">
               <a:extLst>
                 <a:ext uri="{FF2B5EF4-FFF2-40B4-BE49-F238E27FC236}">
-                  <a16:creationId xmlns:a16="http://schemas.microsoft.com/office/drawing/2014/main" xmlns="" id="{0529F877-C5ED-2E1B-244D-784C90C54587}"/>
+                  <a16:creationId xmlns="" xmlns:a16="http://schemas.microsoft.com/office/drawing/2014/main" id="{0529F877-C5ED-2E1B-244D-784C90C54587}"/>
                 </a:ext>
               </a:extLst>
             </p:cNvPr>
@@ -28828,7 +28864,7 @@
             <p:cNvPr id="22" name="Elipse 21">
               <a:extLst>
                 <a:ext uri="{FF2B5EF4-FFF2-40B4-BE49-F238E27FC236}">
-                  <a16:creationId xmlns:a16="http://schemas.microsoft.com/office/drawing/2014/main" xmlns="" id="{8F34BE39-5691-A580-2510-188C1C53276B}"/>
+                  <a16:creationId xmlns="" xmlns:a16="http://schemas.microsoft.com/office/drawing/2014/main" id="{8F34BE39-5691-A580-2510-188C1C53276B}"/>
                 </a:ext>
               </a:extLst>
             </p:cNvPr>
@@ -28884,7 +28920,7 @@
             <p:cNvPr id="23" name="Elipse 22">
               <a:extLst>
                 <a:ext uri="{FF2B5EF4-FFF2-40B4-BE49-F238E27FC236}">
-                  <a16:creationId xmlns:a16="http://schemas.microsoft.com/office/drawing/2014/main" xmlns="" id="{9F0AFFF7-43DE-1015-3F3B-AAF3DDF52E0C}"/>
+                  <a16:creationId xmlns="" xmlns:a16="http://schemas.microsoft.com/office/drawing/2014/main" id="{9F0AFFF7-43DE-1015-3F3B-AAF3DDF52E0C}"/>
                 </a:ext>
               </a:extLst>
             </p:cNvPr>
@@ -28940,7 +28976,7 @@
             <p:cNvPr id="25" name="Conector: Curvo 24">
               <a:extLst>
                 <a:ext uri="{FF2B5EF4-FFF2-40B4-BE49-F238E27FC236}">
-                  <a16:creationId xmlns:a16="http://schemas.microsoft.com/office/drawing/2014/main" xmlns="" id="{E4F3E26A-F810-43AC-924F-BF461C5FB86E}"/>
+                  <a16:creationId xmlns="" xmlns:a16="http://schemas.microsoft.com/office/drawing/2014/main" id="{E4F3E26A-F810-43AC-924F-BF461C5FB86E}"/>
                 </a:ext>
               </a:extLst>
             </p:cNvPr>
@@ -28989,7 +29025,7 @@
             <p:cNvPr id="31" name="Conector: Curvo 30">
               <a:extLst>
                 <a:ext uri="{FF2B5EF4-FFF2-40B4-BE49-F238E27FC236}">
-                  <a16:creationId xmlns:a16="http://schemas.microsoft.com/office/drawing/2014/main" xmlns="" id="{C3043666-BB5A-C502-359A-4A3917065792}"/>
+                  <a16:creationId xmlns="" xmlns:a16="http://schemas.microsoft.com/office/drawing/2014/main" id="{C3043666-BB5A-C502-359A-4A3917065792}"/>
                 </a:ext>
               </a:extLst>
             </p:cNvPr>
@@ -29038,7 +29074,7 @@
             <p:cNvPr id="36" name="Conector: Curvo 35">
               <a:extLst>
                 <a:ext uri="{FF2B5EF4-FFF2-40B4-BE49-F238E27FC236}">
-                  <a16:creationId xmlns:a16="http://schemas.microsoft.com/office/drawing/2014/main" xmlns="" id="{CDD58E5F-EA2D-BB70-6D90-8E84E5EE604A}"/>
+                  <a16:creationId xmlns="" xmlns:a16="http://schemas.microsoft.com/office/drawing/2014/main" id="{CDD58E5F-EA2D-BB70-6D90-8E84E5EE604A}"/>
                 </a:ext>
               </a:extLst>
             </p:cNvPr>
@@ -29087,7 +29123,7 @@
             <p:cNvPr id="40" name="Conector: Curvo 39">
               <a:extLst>
                 <a:ext uri="{FF2B5EF4-FFF2-40B4-BE49-F238E27FC236}">
-                  <a16:creationId xmlns:a16="http://schemas.microsoft.com/office/drawing/2014/main" xmlns="" id="{0AA4F48C-5159-C330-2619-A60D9B827A22}"/>
+                  <a16:creationId xmlns="" xmlns:a16="http://schemas.microsoft.com/office/drawing/2014/main" id="{0AA4F48C-5159-C330-2619-A60D9B827A22}"/>
                 </a:ext>
               </a:extLst>
             </p:cNvPr>
@@ -29136,7 +29172,7 @@
             <p:cNvPr id="46" name="CaixaDeTexto 45">
               <a:extLst>
                 <a:ext uri="{FF2B5EF4-FFF2-40B4-BE49-F238E27FC236}">
-                  <a16:creationId xmlns:a16="http://schemas.microsoft.com/office/drawing/2014/main" xmlns="" id="{14539003-1BD8-17D2-A460-9687F6449CF4}"/>
+                  <a16:creationId xmlns="" xmlns:a16="http://schemas.microsoft.com/office/drawing/2014/main" id="{14539003-1BD8-17D2-A460-9687F6449CF4}"/>
                 </a:ext>
               </a:extLst>
             </p:cNvPr>
@@ -29202,7 +29238,7 @@
           <p:cNvPr id="2" name="Título 1">
             <a:extLst>
               <a:ext uri="{FF2B5EF4-FFF2-40B4-BE49-F238E27FC236}">
-                <a16:creationId xmlns:a16="http://schemas.microsoft.com/office/drawing/2014/main" xmlns="" id="{ABEFD801-7E8D-0885-F1AD-8DAF6F77CEEE}"/>
+                <a16:creationId xmlns="" xmlns:a16="http://schemas.microsoft.com/office/drawing/2014/main" id="{ABEFD801-7E8D-0885-F1AD-8DAF6F77CEEE}"/>
               </a:ext>
             </a:extLst>
           </p:cNvPr>
@@ -29230,7 +29266,7 @@
           <p:cNvPr id="3" name="Espaço Reservado para Conteúdo 2">
             <a:extLst>
               <a:ext uri="{FF2B5EF4-FFF2-40B4-BE49-F238E27FC236}">
-                <a16:creationId xmlns:a16="http://schemas.microsoft.com/office/drawing/2014/main" xmlns="" id="{9BA6276C-11C7-FBDF-9CC4-A84A195D7527}"/>
+                <a16:creationId xmlns="" xmlns:a16="http://schemas.microsoft.com/office/drawing/2014/main" id="{9BA6276C-11C7-FBDF-9CC4-A84A195D7527}"/>
               </a:ext>
             </a:extLst>
           </p:cNvPr>
@@ -29392,7 +29428,7 @@
             <a:hlinkClick r:id="" action="ppaction://media"/>
             <a:extLst>
               <a:ext uri="{FF2B5EF4-FFF2-40B4-BE49-F238E27FC236}">
-                <a16:creationId xmlns:a16="http://schemas.microsoft.com/office/drawing/2014/main" xmlns="" id="{66D25972-58E8-79DB-2476-AFDFC171820F}"/>
+                <a16:creationId xmlns="" xmlns:a16="http://schemas.microsoft.com/office/drawing/2014/main" id="{66D25972-58E8-79DB-2476-AFDFC171820F}"/>
               </a:ext>
             </a:extLst>
           </p:cNvPr>
@@ -29594,7 +29630,7 @@
           <p:cNvPr id="2" name="Título 1">
             <a:extLst>
               <a:ext uri="{FF2B5EF4-FFF2-40B4-BE49-F238E27FC236}">
-                <a16:creationId xmlns:a16="http://schemas.microsoft.com/office/drawing/2014/main" xmlns="" id="{A9BB36A8-6590-17D8-1A21-CACFBD100B4A}"/>
+                <a16:creationId xmlns="" xmlns:a16="http://schemas.microsoft.com/office/drawing/2014/main" id="{A9BB36A8-6590-17D8-1A21-CACFBD100B4A}"/>
               </a:ext>
             </a:extLst>
           </p:cNvPr>
@@ -29622,7 +29658,7 @@
           <p:cNvPr id="3" name="Espaço Reservado para Conteúdo 2">
             <a:extLst>
               <a:ext uri="{FF2B5EF4-FFF2-40B4-BE49-F238E27FC236}">
-                <a16:creationId xmlns:a16="http://schemas.microsoft.com/office/drawing/2014/main" xmlns="" id="{AF22D6CE-63C9-8C53-326D-3596DA5E210E}"/>
+                <a16:creationId xmlns="" xmlns:a16="http://schemas.microsoft.com/office/drawing/2014/main" id="{AF22D6CE-63C9-8C53-326D-3596DA5E210E}"/>
               </a:ext>
             </a:extLst>
           </p:cNvPr>
@@ -29735,7 +29771,7 @@
           <p:cNvPr id="5" name="Imagem 4">
             <a:extLst>
               <a:ext uri="{FF2B5EF4-FFF2-40B4-BE49-F238E27FC236}">
-                <a16:creationId xmlns:a16="http://schemas.microsoft.com/office/drawing/2014/main" xmlns="" id="{9C6CB0C9-43A4-2741-FE2B-267BDD097D20}"/>
+                <a16:creationId xmlns="" xmlns:a16="http://schemas.microsoft.com/office/drawing/2014/main" id="{9C6CB0C9-43A4-2741-FE2B-267BDD097D20}"/>
               </a:ext>
             </a:extLst>
           </p:cNvPr>
@@ -29765,7 +29801,7 @@
           <p:cNvPr id="7" name="CaixaDeTexto 6">
             <a:extLst>
               <a:ext uri="{FF2B5EF4-FFF2-40B4-BE49-F238E27FC236}">
-                <a16:creationId xmlns:a16="http://schemas.microsoft.com/office/drawing/2014/main" xmlns="" id="{854A71DF-2BE0-4289-9C05-C0F039EA0472}"/>
+                <a16:creationId xmlns="" xmlns:a16="http://schemas.microsoft.com/office/drawing/2014/main" id="{854A71DF-2BE0-4289-9C05-C0F039EA0472}"/>
               </a:ext>
             </a:extLst>
           </p:cNvPr>
@@ -29840,7 +29876,7 @@
           <p:cNvPr id="2" name="Título 1">
             <a:extLst>
               <a:ext uri="{FF2B5EF4-FFF2-40B4-BE49-F238E27FC236}">
-                <a16:creationId xmlns:a16="http://schemas.microsoft.com/office/drawing/2014/main" xmlns="" id="{2755BD9F-A5F9-C006-2D60-3988AFB742AA}"/>
+                <a16:creationId xmlns="" xmlns:a16="http://schemas.microsoft.com/office/drawing/2014/main" id="{2755BD9F-A5F9-C006-2D60-3988AFB742AA}"/>
               </a:ext>
             </a:extLst>
           </p:cNvPr>
@@ -29868,7 +29904,7 @@
           <p:cNvPr id="3" name="Espaço Reservado para Conteúdo 2">
             <a:extLst>
               <a:ext uri="{FF2B5EF4-FFF2-40B4-BE49-F238E27FC236}">
-                <a16:creationId xmlns:a16="http://schemas.microsoft.com/office/drawing/2014/main" xmlns="" id="{DE398648-3AD3-9986-3010-6210876DC9B1}"/>
+                <a16:creationId xmlns="" xmlns:a16="http://schemas.microsoft.com/office/drawing/2014/main" id="{DE398648-3AD3-9986-3010-6210876DC9B1}"/>
               </a:ext>
             </a:extLst>
           </p:cNvPr>
@@ -29957,7 +29993,7 @@
           <p:cNvPr id="4" name="Título 1">
             <a:extLst>
               <a:ext uri="{FF2B5EF4-FFF2-40B4-BE49-F238E27FC236}">
-                <a16:creationId xmlns:a16="http://schemas.microsoft.com/office/drawing/2014/main" xmlns="" id="{32666AC8-2E17-4DB4-B0F5-60C640CCFD2E}"/>
+                <a16:creationId xmlns="" xmlns:a16="http://schemas.microsoft.com/office/drawing/2014/main" id="{32666AC8-2E17-4DB4-B0F5-60C640CCFD2E}"/>
               </a:ext>
             </a:extLst>
           </p:cNvPr>
@@ -30050,7 +30086,7 @@
           <p:cNvPr id="4" name="Título 1">
             <a:extLst>
               <a:ext uri="{FF2B5EF4-FFF2-40B4-BE49-F238E27FC236}">
-                <a16:creationId xmlns:a16="http://schemas.microsoft.com/office/drawing/2014/main" xmlns="" id="{32666AC8-2E17-4DB4-B0F5-60C640CCFD2E}"/>
+                <a16:creationId xmlns="" xmlns:a16="http://schemas.microsoft.com/office/drawing/2014/main" id="{32666AC8-2E17-4DB4-B0F5-60C640CCFD2E}"/>
               </a:ext>
             </a:extLst>
           </p:cNvPr>
@@ -30136,7 +30172,7 @@
           <p:cNvPr id="39" name="Agrupar 38">
             <a:extLst>
               <a:ext uri="{FF2B5EF4-FFF2-40B4-BE49-F238E27FC236}">
-                <a16:creationId xmlns:a16="http://schemas.microsoft.com/office/drawing/2014/main" xmlns="" id="{5E685139-6069-966B-FDA3-84FF70C86088}"/>
+                <a16:creationId xmlns="" xmlns:a16="http://schemas.microsoft.com/office/drawing/2014/main" id="{5E685139-6069-966B-FDA3-84FF70C86088}"/>
               </a:ext>
             </a:extLst>
           </p:cNvPr>
@@ -30156,7 +30192,7 @@
             <p:cNvPr id="28" name="Retângulo: Cantos Arredondados 27">
               <a:extLst>
                 <a:ext uri="{FF2B5EF4-FFF2-40B4-BE49-F238E27FC236}">
-                  <a16:creationId xmlns:a16="http://schemas.microsoft.com/office/drawing/2014/main" xmlns="" id="{E6ADE51B-F5F0-50B9-9081-03D4DE974930}"/>
+                  <a16:creationId xmlns="" xmlns:a16="http://schemas.microsoft.com/office/drawing/2014/main" id="{E6ADE51B-F5F0-50B9-9081-03D4DE974930}"/>
                 </a:ext>
               </a:extLst>
             </p:cNvPr>
@@ -30219,7 +30255,7 @@
             <p:cNvPr id="29" name="Retângulo: Cantos Arredondados 28">
               <a:extLst>
                 <a:ext uri="{FF2B5EF4-FFF2-40B4-BE49-F238E27FC236}">
-                  <a16:creationId xmlns:a16="http://schemas.microsoft.com/office/drawing/2014/main" xmlns="" id="{D940D749-1DB6-C701-C5CF-CC3C4BAAA2B1}"/>
+                  <a16:creationId xmlns="" xmlns:a16="http://schemas.microsoft.com/office/drawing/2014/main" id="{D940D749-1DB6-C701-C5CF-CC3C4BAAA2B1}"/>
                 </a:ext>
               </a:extLst>
             </p:cNvPr>
@@ -30284,7 +30320,7 @@
             <p:cNvPr id="30" name="Retângulo: Cantos Arredondados 29">
               <a:extLst>
                 <a:ext uri="{FF2B5EF4-FFF2-40B4-BE49-F238E27FC236}">
-                  <a16:creationId xmlns:a16="http://schemas.microsoft.com/office/drawing/2014/main" xmlns="" id="{68711CE1-2F1A-4017-F301-880EEE647FF1}"/>
+                  <a16:creationId xmlns="" xmlns:a16="http://schemas.microsoft.com/office/drawing/2014/main" id="{68711CE1-2F1A-4017-F301-880EEE647FF1}"/>
                 </a:ext>
               </a:extLst>
             </p:cNvPr>
@@ -30356,7 +30392,7 @@
             <p:cNvPr id="31" name="Conector de Seta Reta 30">
               <a:extLst>
                 <a:ext uri="{FF2B5EF4-FFF2-40B4-BE49-F238E27FC236}">
-                  <a16:creationId xmlns:a16="http://schemas.microsoft.com/office/drawing/2014/main" xmlns="" id="{4FFFC850-2670-B7F3-8510-994383D2277D}"/>
+                  <a16:creationId xmlns="" xmlns:a16="http://schemas.microsoft.com/office/drawing/2014/main" id="{4FFFC850-2670-B7F3-8510-994383D2277D}"/>
                 </a:ext>
               </a:extLst>
             </p:cNvPr>
@@ -30399,7 +30435,7 @@
             <p:cNvPr id="32" name="Conector de Seta Reta 31">
               <a:extLst>
                 <a:ext uri="{FF2B5EF4-FFF2-40B4-BE49-F238E27FC236}">
-                  <a16:creationId xmlns:a16="http://schemas.microsoft.com/office/drawing/2014/main" xmlns="" id="{0225DCE3-778F-016F-9ED6-491B23819EE0}"/>
+                  <a16:creationId xmlns="" xmlns:a16="http://schemas.microsoft.com/office/drawing/2014/main" id="{0225DCE3-778F-016F-9ED6-491B23819EE0}"/>
                 </a:ext>
               </a:extLst>
             </p:cNvPr>
@@ -30440,7 +30476,7 @@
             <p:cNvPr id="33" name="Conector: Angulado 32">
               <a:extLst>
                 <a:ext uri="{FF2B5EF4-FFF2-40B4-BE49-F238E27FC236}">
-                  <a16:creationId xmlns:a16="http://schemas.microsoft.com/office/drawing/2014/main" xmlns="" id="{7B1D31D0-A6F9-D3C2-EA32-0C39FBCDDFD8}"/>
+                  <a16:creationId xmlns="" xmlns:a16="http://schemas.microsoft.com/office/drawing/2014/main" id="{7B1D31D0-A6F9-D3C2-EA32-0C39FBCDDFD8}"/>
                 </a:ext>
               </a:extLst>
             </p:cNvPr>
@@ -30484,7 +30520,7 @@
             <p:cNvPr id="34" name="CaixaDeTexto 33">
               <a:extLst>
                 <a:ext uri="{FF2B5EF4-FFF2-40B4-BE49-F238E27FC236}">
-                  <a16:creationId xmlns:a16="http://schemas.microsoft.com/office/drawing/2014/main" xmlns="" id="{2CBBF828-16D7-52D8-6232-E770A830B319}"/>
+                  <a16:creationId xmlns="" xmlns:a16="http://schemas.microsoft.com/office/drawing/2014/main" id="{2CBBF828-16D7-52D8-6232-E770A830B319}"/>
                 </a:ext>
               </a:extLst>
             </p:cNvPr>
@@ -30521,7 +30557,7 @@
           <p:cNvPr id="37" name="Agrupar 36">
             <a:extLst>
               <a:ext uri="{FF2B5EF4-FFF2-40B4-BE49-F238E27FC236}">
-                <a16:creationId xmlns:a16="http://schemas.microsoft.com/office/drawing/2014/main" xmlns="" id="{3427A9E2-3AFA-A87D-3728-FD640A350F46}"/>
+                <a16:creationId xmlns="" xmlns:a16="http://schemas.microsoft.com/office/drawing/2014/main" id="{3427A9E2-3AFA-A87D-3728-FD640A350F46}"/>
               </a:ext>
             </a:extLst>
           </p:cNvPr>
@@ -30541,7 +30577,7 @@
             <p:cNvPr id="4" name="Retângulo: Cantos Arredondados 3">
               <a:extLst>
                 <a:ext uri="{FF2B5EF4-FFF2-40B4-BE49-F238E27FC236}">
-                  <a16:creationId xmlns:a16="http://schemas.microsoft.com/office/drawing/2014/main" xmlns="" id="{09AC80A3-7692-65F9-9351-F18962A5491D}"/>
+                  <a16:creationId xmlns="" xmlns:a16="http://schemas.microsoft.com/office/drawing/2014/main" id="{09AC80A3-7692-65F9-9351-F18962A5491D}"/>
                 </a:ext>
               </a:extLst>
             </p:cNvPr>
@@ -30601,7 +30637,7 @@
             <p:cNvPr id="5" name="Retângulo: Cantos Arredondados 4">
               <a:extLst>
                 <a:ext uri="{FF2B5EF4-FFF2-40B4-BE49-F238E27FC236}">
-                  <a16:creationId xmlns:a16="http://schemas.microsoft.com/office/drawing/2014/main" xmlns="" id="{FA0966A8-1BF3-C8DE-8779-2E122A343932}"/>
+                  <a16:creationId xmlns="" xmlns:a16="http://schemas.microsoft.com/office/drawing/2014/main" id="{FA0966A8-1BF3-C8DE-8779-2E122A343932}"/>
                 </a:ext>
               </a:extLst>
             </p:cNvPr>
@@ -30666,7 +30702,7 @@
             <p:cNvPr id="6" name="Retângulo: Cantos Arredondados 5">
               <a:extLst>
                 <a:ext uri="{FF2B5EF4-FFF2-40B4-BE49-F238E27FC236}">
-                  <a16:creationId xmlns:a16="http://schemas.microsoft.com/office/drawing/2014/main" xmlns="" id="{232E9981-B45D-A800-524D-E74475D2C365}"/>
+                  <a16:creationId xmlns="" xmlns:a16="http://schemas.microsoft.com/office/drawing/2014/main" id="{232E9981-B45D-A800-524D-E74475D2C365}"/>
                 </a:ext>
               </a:extLst>
             </p:cNvPr>
@@ -30740,7 +30776,7 @@
             <p:cNvPr id="8" name="Conector de Seta Reta 7">
               <a:extLst>
                 <a:ext uri="{FF2B5EF4-FFF2-40B4-BE49-F238E27FC236}">
-                  <a16:creationId xmlns:a16="http://schemas.microsoft.com/office/drawing/2014/main" xmlns="" id="{E6F82BE2-1BAB-3F9A-FCE0-334FA744F2D4}"/>
+                  <a16:creationId xmlns="" xmlns:a16="http://schemas.microsoft.com/office/drawing/2014/main" id="{E6F82BE2-1BAB-3F9A-FCE0-334FA744F2D4}"/>
                 </a:ext>
               </a:extLst>
             </p:cNvPr>
@@ -30783,7 +30819,7 @@
             <p:cNvPr id="10" name="Conector de Seta Reta 9">
               <a:extLst>
                 <a:ext uri="{FF2B5EF4-FFF2-40B4-BE49-F238E27FC236}">
-                  <a16:creationId xmlns:a16="http://schemas.microsoft.com/office/drawing/2014/main" xmlns="" id="{667C820A-62BC-AE65-5F7F-74C08A0DE146}"/>
+                  <a16:creationId xmlns="" xmlns:a16="http://schemas.microsoft.com/office/drawing/2014/main" id="{667C820A-62BC-AE65-5F7F-74C08A0DE146}"/>
                 </a:ext>
               </a:extLst>
             </p:cNvPr>
@@ -30824,7 +30860,7 @@
             <p:cNvPr id="16" name="Conector: Angulado 15">
               <a:extLst>
                 <a:ext uri="{FF2B5EF4-FFF2-40B4-BE49-F238E27FC236}">
-                  <a16:creationId xmlns:a16="http://schemas.microsoft.com/office/drawing/2014/main" xmlns="" id="{8A71928B-DBBF-321B-7A0D-3011AE2D6259}"/>
+                  <a16:creationId xmlns="" xmlns:a16="http://schemas.microsoft.com/office/drawing/2014/main" id="{8A71928B-DBBF-321B-7A0D-3011AE2D6259}"/>
                 </a:ext>
               </a:extLst>
             </p:cNvPr>
@@ -30868,7 +30904,7 @@
             <p:cNvPr id="35" name="CaixaDeTexto 34">
               <a:extLst>
                 <a:ext uri="{FF2B5EF4-FFF2-40B4-BE49-F238E27FC236}">
-                  <a16:creationId xmlns:a16="http://schemas.microsoft.com/office/drawing/2014/main" xmlns="" id="{0AD83AB7-C3C7-6FB4-9A67-30F0F4028859}"/>
+                  <a16:creationId xmlns="" xmlns:a16="http://schemas.microsoft.com/office/drawing/2014/main" id="{0AD83AB7-C3C7-6FB4-9A67-30F0F4028859}"/>
                 </a:ext>
               </a:extLst>
             </p:cNvPr>
@@ -30905,7 +30941,7 @@
           <p:cNvPr id="38" name="Agrupar 37">
             <a:extLst>
               <a:ext uri="{FF2B5EF4-FFF2-40B4-BE49-F238E27FC236}">
-                <a16:creationId xmlns:a16="http://schemas.microsoft.com/office/drawing/2014/main" xmlns="" id="{9CADEF22-2DB6-5516-566F-3ED636D4E808}"/>
+                <a16:creationId xmlns="" xmlns:a16="http://schemas.microsoft.com/office/drawing/2014/main" id="{9CADEF22-2DB6-5516-566F-3ED636D4E808}"/>
               </a:ext>
             </a:extLst>
           </p:cNvPr>
@@ -30925,7 +30961,7 @@
             <p:cNvPr id="21" name="Retângulo: Cantos Arredondados 20">
               <a:extLst>
                 <a:ext uri="{FF2B5EF4-FFF2-40B4-BE49-F238E27FC236}">
-                  <a16:creationId xmlns:a16="http://schemas.microsoft.com/office/drawing/2014/main" xmlns="" id="{DCCDA0D2-6061-15B0-BC53-560EB981381A}"/>
+                  <a16:creationId xmlns="" xmlns:a16="http://schemas.microsoft.com/office/drawing/2014/main" id="{DCCDA0D2-6061-15B0-BC53-560EB981381A}"/>
                 </a:ext>
               </a:extLst>
             </p:cNvPr>
@@ -30990,7 +31026,7 @@
             <p:cNvPr id="22" name="Retângulo: Cantos Arredondados 21">
               <a:extLst>
                 <a:ext uri="{FF2B5EF4-FFF2-40B4-BE49-F238E27FC236}">
-                  <a16:creationId xmlns:a16="http://schemas.microsoft.com/office/drawing/2014/main" xmlns="" id="{DB44A420-2619-26B9-3F25-677ADAF8F27D}"/>
+                  <a16:creationId xmlns="" xmlns:a16="http://schemas.microsoft.com/office/drawing/2014/main" id="{DB44A420-2619-26B9-3F25-677ADAF8F27D}"/>
                 </a:ext>
               </a:extLst>
             </p:cNvPr>
@@ -31050,7 +31086,7 @@
             <p:cNvPr id="23" name="Retângulo: Cantos Arredondados 22">
               <a:extLst>
                 <a:ext uri="{FF2B5EF4-FFF2-40B4-BE49-F238E27FC236}">
-                  <a16:creationId xmlns:a16="http://schemas.microsoft.com/office/drawing/2014/main" xmlns="" id="{A421792E-EA21-B83B-85A6-6C08D8A12985}"/>
+                  <a16:creationId xmlns="" xmlns:a16="http://schemas.microsoft.com/office/drawing/2014/main" id="{A421792E-EA21-B83B-85A6-6C08D8A12985}"/>
                 </a:ext>
               </a:extLst>
             </p:cNvPr>
@@ -31124,7 +31160,7 @@
             <p:cNvPr id="24" name="Conector de Seta Reta 23">
               <a:extLst>
                 <a:ext uri="{FF2B5EF4-FFF2-40B4-BE49-F238E27FC236}">
-                  <a16:creationId xmlns:a16="http://schemas.microsoft.com/office/drawing/2014/main" xmlns="" id="{15627F5F-D2DE-39C5-456D-4CD918271F41}"/>
+                  <a16:creationId xmlns="" xmlns:a16="http://schemas.microsoft.com/office/drawing/2014/main" id="{15627F5F-D2DE-39C5-456D-4CD918271F41}"/>
                 </a:ext>
               </a:extLst>
             </p:cNvPr>
@@ -31167,7 +31203,7 @@
             <p:cNvPr id="25" name="Conector de Seta Reta 24">
               <a:extLst>
                 <a:ext uri="{FF2B5EF4-FFF2-40B4-BE49-F238E27FC236}">
-                  <a16:creationId xmlns:a16="http://schemas.microsoft.com/office/drawing/2014/main" xmlns="" id="{DA460B65-91E8-E67A-6546-DFB3814235E0}"/>
+                  <a16:creationId xmlns="" xmlns:a16="http://schemas.microsoft.com/office/drawing/2014/main" id="{DA460B65-91E8-E67A-6546-DFB3814235E0}"/>
                 </a:ext>
               </a:extLst>
             </p:cNvPr>
@@ -31208,7 +31244,7 @@
             <p:cNvPr id="26" name="Conector: Angulado 25">
               <a:extLst>
                 <a:ext uri="{FF2B5EF4-FFF2-40B4-BE49-F238E27FC236}">
-                  <a16:creationId xmlns:a16="http://schemas.microsoft.com/office/drawing/2014/main" xmlns="" id="{3FBD8BE1-430E-E41F-F104-C62BB7F6386F}"/>
+                  <a16:creationId xmlns="" xmlns:a16="http://schemas.microsoft.com/office/drawing/2014/main" id="{3FBD8BE1-430E-E41F-F104-C62BB7F6386F}"/>
                 </a:ext>
               </a:extLst>
             </p:cNvPr>
@@ -31252,7 +31288,7 @@
             <p:cNvPr id="36" name="CaixaDeTexto 35">
               <a:extLst>
                 <a:ext uri="{FF2B5EF4-FFF2-40B4-BE49-F238E27FC236}">
-                  <a16:creationId xmlns:a16="http://schemas.microsoft.com/office/drawing/2014/main" xmlns="" id="{6C09C5AD-FA88-A0E1-065B-C8A1ACED5A9E}"/>
+                  <a16:creationId xmlns="" xmlns:a16="http://schemas.microsoft.com/office/drawing/2014/main" id="{6C09C5AD-FA88-A0E1-065B-C8A1ACED5A9E}"/>
                 </a:ext>
               </a:extLst>
             </p:cNvPr>
@@ -31321,7 +31357,7 @@
               <p:cNvPr id="2" name="Título 1">
                 <a:extLst>
                   <a:ext uri="{FF2B5EF4-FFF2-40B4-BE49-F238E27FC236}">
-                    <a16:creationId xmlns:a16="http://schemas.microsoft.com/office/drawing/2014/main" xmlns="" id="{EBBFACCC-402D-F8EB-8DF6-A01AC2F11478}"/>
+                    <a16:creationId xmlns="" xmlns:a16="http://schemas.microsoft.com/office/drawing/2014/main" id="{EBBFACCC-402D-F8EB-8DF6-A01AC2F11478}"/>
                   </a:ext>
                 </a:extLst>
               </p:cNvPr>
@@ -31420,7 +31456,7 @@
               <p:cNvPr id="3" name="Espaço Reservado para Conteúdo 2">
                 <a:extLst>
                   <a:ext uri="{FF2B5EF4-FFF2-40B4-BE49-F238E27FC236}">
-                    <a16:creationId xmlns:a16="http://schemas.microsoft.com/office/drawing/2014/main" xmlns="" id="{574AB04A-D8D2-BC7E-F4F7-97B83877B167}"/>
+                    <a16:creationId xmlns="" xmlns:a16="http://schemas.microsoft.com/office/drawing/2014/main" id="{574AB04A-D8D2-BC7E-F4F7-97B83877B167}"/>
                   </a:ext>
                 </a:extLst>
               </p:cNvPr>
@@ -31717,7 +31753,7 @@
               <p:cNvPr id="4" name="CaixaDeTexto 3">
                 <a:extLst>
                   <a:ext uri="{FF2B5EF4-FFF2-40B4-BE49-F238E27FC236}">
-                    <a16:creationId xmlns:a16="http://schemas.microsoft.com/office/drawing/2014/main" xmlns="" id="{457B0757-0010-3DDB-7F4D-4E0B92E0088F}"/>
+                    <a16:creationId xmlns="" xmlns:a16="http://schemas.microsoft.com/office/drawing/2014/main" id="{457B0757-0010-3DDB-7F4D-4E0B92E0088F}"/>
                   </a:ext>
                 </a:extLst>
               </p:cNvPr>
@@ -31882,7 +31918,7 @@
           <p:cNvPr id="1026" name="Picture 2">
             <a:extLst>
               <a:ext uri="{FF2B5EF4-FFF2-40B4-BE49-F238E27FC236}">
-                <a16:creationId xmlns:a16="http://schemas.microsoft.com/office/drawing/2014/main" xmlns="" id="{2F929B73-2163-E9DA-DD98-A24E44354ECF}"/>
+                <a16:creationId xmlns="" xmlns:a16="http://schemas.microsoft.com/office/drawing/2014/main" id="{2F929B73-2163-E9DA-DD98-A24E44354ECF}"/>
               </a:ext>
             </a:extLst>
           </p:cNvPr>
@@ -31929,7 +31965,7 @@
           <p:cNvPr id="5" name="Seta: para Baixo 4">
             <a:extLst>
               <a:ext uri="{FF2B5EF4-FFF2-40B4-BE49-F238E27FC236}">
-                <a16:creationId xmlns:a16="http://schemas.microsoft.com/office/drawing/2014/main" xmlns="" id="{4D0DA7D0-9DF9-2C08-3122-405034D987C4}"/>
+                <a16:creationId xmlns="" xmlns:a16="http://schemas.microsoft.com/office/drawing/2014/main" id="{4D0DA7D0-9DF9-2C08-3122-405034D987C4}"/>
               </a:ext>
             </a:extLst>
           </p:cNvPr>
@@ -32005,7 +32041,7 @@
           <p:cNvPr id="2" name="Título 1">
             <a:extLst>
               <a:ext uri="{FF2B5EF4-FFF2-40B4-BE49-F238E27FC236}">
-                <a16:creationId xmlns:a16="http://schemas.microsoft.com/office/drawing/2014/main" xmlns="" id="{77169B24-439F-2623-4569-4FB2DD7BA69E}"/>
+                <a16:creationId xmlns="" xmlns:a16="http://schemas.microsoft.com/office/drawing/2014/main" id="{77169B24-439F-2623-4569-4FB2DD7BA69E}"/>
               </a:ext>
             </a:extLst>
           </p:cNvPr>
@@ -32035,7 +32071,7 @@
               <p:cNvPr id="3" name="Espaço Reservado para Conteúdo 2">
                 <a:extLst>
                   <a:ext uri="{FF2B5EF4-FFF2-40B4-BE49-F238E27FC236}">
-                    <a16:creationId xmlns:a16="http://schemas.microsoft.com/office/drawing/2014/main" xmlns="" id="{F7659DC9-1554-0C0A-78CF-76B7B51210CF}"/>
+                    <a16:creationId xmlns="" xmlns:a16="http://schemas.microsoft.com/office/drawing/2014/main" id="{F7659DC9-1554-0C0A-78CF-76B7B51210CF}"/>
                   </a:ext>
                 </a:extLst>
               </p:cNvPr>
@@ -32324,7 +32360,7 @@
               <p:cNvPr id="5" name="CaixaDeTexto 4">
                 <a:extLst>
                   <a:ext uri="{FF2B5EF4-FFF2-40B4-BE49-F238E27FC236}">
-                    <a16:creationId xmlns:a16="http://schemas.microsoft.com/office/drawing/2014/main" xmlns="" id="{23AA0FD9-5618-1CB1-C45C-EC822823FCE6}"/>
+                    <a16:creationId xmlns="" xmlns:a16="http://schemas.microsoft.com/office/drawing/2014/main" id="{23AA0FD9-5618-1CB1-C45C-EC822823FCE6}"/>
                   </a:ext>
                 </a:extLst>
               </p:cNvPr>
@@ -32512,7 +32548,7 @@
               <p:cNvPr id="4" name="CaixaDeTexto 3">
                 <a:extLst>
                   <a:ext uri="{FF2B5EF4-FFF2-40B4-BE49-F238E27FC236}">
-                    <a16:creationId xmlns:a16="http://schemas.microsoft.com/office/drawing/2014/main" xmlns="" id="{CE383BC1-E520-56B2-9887-35520FE0D236}"/>
+                    <a16:creationId xmlns="" xmlns:a16="http://schemas.microsoft.com/office/drawing/2014/main" id="{CE383BC1-E520-56B2-9887-35520FE0D236}"/>
                   </a:ext>
                 </a:extLst>
               </p:cNvPr>
@@ -32644,7 +32680,7 @@
               <p:cNvPr id="7" name="CaixaDeTexto 6">
                 <a:extLst>
                   <a:ext uri="{FF2B5EF4-FFF2-40B4-BE49-F238E27FC236}">
-                    <a16:creationId xmlns:a16="http://schemas.microsoft.com/office/drawing/2014/main" xmlns="" id="{08F642AB-5781-6ABA-EEA1-91ACFE4297E4}"/>
+                    <a16:creationId xmlns="" xmlns:a16="http://schemas.microsoft.com/office/drawing/2014/main" id="{08F642AB-5781-6ABA-EEA1-91ACFE4297E4}"/>
                   </a:ext>
                 </a:extLst>
               </p:cNvPr>
@@ -32792,7 +32828,7 @@
           <p:cNvPr id="8" name="CaixaDeTexto 7">
             <a:extLst>
               <a:ext uri="{FF2B5EF4-FFF2-40B4-BE49-F238E27FC236}">
-                <a16:creationId xmlns:a16="http://schemas.microsoft.com/office/drawing/2014/main" xmlns="" id="{80045694-BE57-1C2E-0CCC-44F6CB26F7D2}"/>
+                <a16:creationId xmlns="" xmlns:a16="http://schemas.microsoft.com/office/drawing/2014/main" id="{80045694-BE57-1C2E-0CCC-44F6CB26F7D2}"/>
               </a:ext>
             </a:extLst>
           </p:cNvPr>
@@ -32827,7 +32863,7 @@
           <p:cNvPr id="17" name="Imagem 16">
             <a:extLst>
               <a:ext uri="{FF2B5EF4-FFF2-40B4-BE49-F238E27FC236}">
-                <a16:creationId xmlns:a16="http://schemas.microsoft.com/office/drawing/2014/main" xmlns="" id="{B7679470-3B67-4D52-F73A-2C0E039620C7}"/>
+                <a16:creationId xmlns="" xmlns:a16="http://schemas.microsoft.com/office/drawing/2014/main" id="{B7679470-3B67-4D52-F73A-2C0E039620C7}"/>
               </a:ext>
             </a:extLst>
           </p:cNvPr>
@@ -32893,7 +32929,7 @@
           <p:cNvPr id="2" name="Título 1">
             <a:extLst>
               <a:ext uri="{FF2B5EF4-FFF2-40B4-BE49-F238E27FC236}">
-                <a16:creationId xmlns:a16="http://schemas.microsoft.com/office/drawing/2014/main" xmlns="" id="{77169B24-439F-2623-4569-4FB2DD7BA69E}"/>
+                <a16:creationId xmlns="" xmlns:a16="http://schemas.microsoft.com/office/drawing/2014/main" id="{77169B24-439F-2623-4569-4FB2DD7BA69E}"/>
               </a:ext>
             </a:extLst>
           </p:cNvPr>
@@ -32921,7 +32957,7 @@
           <p:cNvPr id="3" name="Espaço Reservado para Conteúdo 2">
             <a:extLst>
               <a:ext uri="{FF2B5EF4-FFF2-40B4-BE49-F238E27FC236}">
-                <a16:creationId xmlns:a16="http://schemas.microsoft.com/office/drawing/2014/main" xmlns="" id="{F7659DC9-1554-0C0A-78CF-76B7B51210CF}"/>
+                <a16:creationId xmlns="" xmlns:a16="http://schemas.microsoft.com/office/drawing/2014/main" id="{F7659DC9-1554-0C0A-78CF-76B7B51210CF}"/>
               </a:ext>
             </a:extLst>
           </p:cNvPr>
@@ -32991,7 +33027,7 @@
               <p:cNvPr id="5" name="CaixaDeTexto 4">
                 <a:extLst>
                   <a:ext uri="{FF2B5EF4-FFF2-40B4-BE49-F238E27FC236}">
-                    <a16:creationId xmlns:a16="http://schemas.microsoft.com/office/drawing/2014/main" xmlns="" id="{23AA0FD9-5618-1CB1-C45C-EC822823FCE6}"/>
+                    <a16:creationId xmlns="" xmlns:a16="http://schemas.microsoft.com/office/drawing/2014/main" id="{23AA0FD9-5618-1CB1-C45C-EC822823FCE6}"/>
                   </a:ext>
                 </a:extLst>
               </p:cNvPr>
@@ -33189,7 +33225,7 @@
               <p:cNvPr id="4" name="CaixaDeTexto 3">
                 <a:extLst>
                   <a:ext uri="{FF2B5EF4-FFF2-40B4-BE49-F238E27FC236}">
-                    <a16:creationId xmlns:a16="http://schemas.microsoft.com/office/drawing/2014/main" xmlns="" id="{CE383BC1-E520-56B2-9887-35520FE0D236}"/>
+                    <a16:creationId xmlns="" xmlns:a16="http://schemas.microsoft.com/office/drawing/2014/main" id="{CE383BC1-E520-56B2-9887-35520FE0D236}"/>
                   </a:ext>
                 </a:extLst>
               </p:cNvPr>
@@ -33321,7 +33357,7 @@
               <p:cNvPr id="7" name="CaixaDeTexto 6">
                 <a:extLst>
                   <a:ext uri="{FF2B5EF4-FFF2-40B4-BE49-F238E27FC236}">
-                    <a16:creationId xmlns:a16="http://schemas.microsoft.com/office/drawing/2014/main" xmlns="" id="{08F642AB-5781-6ABA-EEA1-91ACFE4297E4}"/>
+                    <a16:creationId xmlns="" xmlns:a16="http://schemas.microsoft.com/office/drawing/2014/main" id="{08F642AB-5781-6ABA-EEA1-91ACFE4297E4}"/>
                   </a:ext>
                 </a:extLst>
               </p:cNvPr>
@@ -33469,7 +33505,7 @@
           <p:cNvPr id="8" name="CaixaDeTexto 7">
             <a:extLst>
               <a:ext uri="{FF2B5EF4-FFF2-40B4-BE49-F238E27FC236}">
-                <a16:creationId xmlns:a16="http://schemas.microsoft.com/office/drawing/2014/main" xmlns="" id="{80045694-BE57-1C2E-0CCC-44F6CB26F7D2}"/>
+                <a16:creationId xmlns="" xmlns:a16="http://schemas.microsoft.com/office/drawing/2014/main" id="{80045694-BE57-1C2E-0CCC-44F6CB26F7D2}"/>
               </a:ext>
             </a:extLst>
           </p:cNvPr>
@@ -33514,7 +33550,7 @@
               <p:cNvPr id="9" name="CaixaDeTexto 8">
                 <a:extLst>
                   <a:ext uri="{FF2B5EF4-FFF2-40B4-BE49-F238E27FC236}">
-                    <a16:creationId xmlns:a16="http://schemas.microsoft.com/office/drawing/2014/main" xmlns="" id="{D278CA7A-1017-066E-C955-CEE7F26CB8CF}"/>
+                    <a16:creationId xmlns="" xmlns:a16="http://schemas.microsoft.com/office/drawing/2014/main" id="{D278CA7A-1017-066E-C955-CEE7F26CB8CF}"/>
                   </a:ext>
                 </a:extLst>
               </p:cNvPr>
@@ -33633,7 +33669,7 @@
           <p:cNvPr id="10" name="CaixaDeTexto 9">
             <a:extLst>
               <a:ext uri="{FF2B5EF4-FFF2-40B4-BE49-F238E27FC236}">
-                <a16:creationId xmlns:a16="http://schemas.microsoft.com/office/drawing/2014/main" xmlns="" id="{6AE4A780-2D79-19B0-B1E9-74650FFF6CE2}"/>
+                <a16:creationId xmlns="" xmlns:a16="http://schemas.microsoft.com/office/drawing/2014/main" id="{6AE4A780-2D79-19B0-B1E9-74650FFF6CE2}"/>
               </a:ext>
             </a:extLst>
           </p:cNvPr>
@@ -33668,7 +33704,7 @@
           <p:cNvPr id="17" name="Imagem 16">
             <a:extLst>
               <a:ext uri="{FF2B5EF4-FFF2-40B4-BE49-F238E27FC236}">
-                <a16:creationId xmlns:a16="http://schemas.microsoft.com/office/drawing/2014/main" xmlns="" id="{B264004C-5785-B53A-912B-070D69AF0074}"/>
+                <a16:creationId xmlns="" xmlns:a16="http://schemas.microsoft.com/office/drawing/2014/main" id="{B264004C-5785-B53A-912B-070D69AF0074}"/>
               </a:ext>
             </a:extLst>
           </p:cNvPr>
@@ -33734,7 +33770,7 @@
           <p:cNvPr id="2" name="Título 1">
             <a:extLst>
               <a:ext uri="{FF2B5EF4-FFF2-40B4-BE49-F238E27FC236}">
-                <a16:creationId xmlns:a16="http://schemas.microsoft.com/office/drawing/2014/main" xmlns="" id="{77169B24-439F-2623-4569-4FB2DD7BA69E}"/>
+                <a16:creationId xmlns="" xmlns:a16="http://schemas.microsoft.com/office/drawing/2014/main" id="{77169B24-439F-2623-4569-4FB2DD7BA69E}"/>
               </a:ext>
             </a:extLst>
           </p:cNvPr>
@@ -33762,7 +33798,7 @@
           <p:cNvPr id="3" name="Espaço Reservado para Conteúdo 2">
             <a:extLst>
               <a:ext uri="{FF2B5EF4-FFF2-40B4-BE49-F238E27FC236}">
-                <a16:creationId xmlns:a16="http://schemas.microsoft.com/office/drawing/2014/main" xmlns="" id="{F7659DC9-1554-0C0A-78CF-76B7B51210CF}"/>
+                <a16:creationId xmlns="" xmlns:a16="http://schemas.microsoft.com/office/drawing/2014/main" id="{F7659DC9-1554-0C0A-78CF-76B7B51210CF}"/>
               </a:ext>
             </a:extLst>
           </p:cNvPr>
@@ -33825,7 +33861,7 @@
               <p:cNvPr id="5" name="CaixaDeTexto 4">
                 <a:extLst>
                   <a:ext uri="{FF2B5EF4-FFF2-40B4-BE49-F238E27FC236}">
-                    <a16:creationId xmlns:a16="http://schemas.microsoft.com/office/drawing/2014/main" xmlns="" id="{23AA0FD9-5618-1CB1-C45C-EC822823FCE6}"/>
+                    <a16:creationId xmlns="" xmlns:a16="http://schemas.microsoft.com/office/drawing/2014/main" id="{23AA0FD9-5618-1CB1-C45C-EC822823FCE6}"/>
                   </a:ext>
                 </a:extLst>
               </p:cNvPr>
@@ -34023,7 +34059,7 @@
               <p:cNvPr id="4" name="CaixaDeTexto 3">
                 <a:extLst>
                   <a:ext uri="{FF2B5EF4-FFF2-40B4-BE49-F238E27FC236}">
-                    <a16:creationId xmlns:a16="http://schemas.microsoft.com/office/drawing/2014/main" xmlns="" id="{CE383BC1-E520-56B2-9887-35520FE0D236}"/>
+                    <a16:creationId xmlns="" xmlns:a16="http://schemas.microsoft.com/office/drawing/2014/main" id="{CE383BC1-E520-56B2-9887-35520FE0D236}"/>
                   </a:ext>
                 </a:extLst>
               </p:cNvPr>
@@ -34155,7 +34191,7 @@
               <p:cNvPr id="7" name="CaixaDeTexto 6">
                 <a:extLst>
                   <a:ext uri="{FF2B5EF4-FFF2-40B4-BE49-F238E27FC236}">
-                    <a16:creationId xmlns:a16="http://schemas.microsoft.com/office/drawing/2014/main" xmlns="" id="{08F642AB-5781-6ABA-EEA1-91ACFE4297E4}"/>
+                    <a16:creationId xmlns="" xmlns:a16="http://schemas.microsoft.com/office/drawing/2014/main" id="{08F642AB-5781-6ABA-EEA1-91ACFE4297E4}"/>
                   </a:ext>
                 </a:extLst>
               </p:cNvPr>
@@ -34303,7 +34339,7 @@
           <p:cNvPr id="8" name="CaixaDeTexto 7">
             <a:extLst>
               <a:ext uri="{FF2B5EF4-FFF2-40B4-BE49-F238E27FC236}">
-                <a16:creationId xmlns:a16="http://schemas.microsoft.com/office/drawing/2014/main" xmlns="" id="{80045694-BE57-1C2E-0CCC-44F6CB26F7D2}"/>
+                <a16:creationId xmlns="" xmlns:a16="http://schemas.microsoft.com/office/drawing/2014/main" id="{80045694-BE57-1C2E-0CCC-44F6CB26F7D2}"/>
               </a:ext>
             </a:extLst>
           </p:cNvPr>
@@ -34348,7 +34384,7 @@
               <p:cNvPr id="9" name="CaixaDeTexto 8">
                 <a:extLst>
                   <a:ext uri="{FF2B5EF4-FFF2-40B4-BE49-F238E27FC236}">
-                    <a16:creationId xmlns:a16="http://schemas.microsoft.com/office/drawing/2014/main" xmlns="" id="{D278CA7A-1017-066E-C955-CEE7F26CB8CF}"/>
+                    <a16:creationId xmlns="" xmlns:a16="http://schemas.microsoft.com/office/drawing/2014/main" id="{D278CA7A-1017-066E-C955-CEE7F26CB8CF}"/>
                   </a:ext>
                 </a:extLst>
               </p:cNvPr>
@@ -34467,7 +34503,7 @@
           <p:cNvPr id="10" name="CaixaDeTexto 9">
             <a:extLst>
               <a:ext uri="{FF2B5EF4-FFF2-40B4-BE49-F238E27FC236}">
-                <a16:creationId xmlns:a16="http://schemas.microsoft.com/office/drawing/2014/main" xmlns="" id="{6AE4A780-2D79-19B0-B1E9-74650FFF6CE2}"/>
+                <a16:creationId xmlns="" xmlns:a16="http://schemas.microsoft.com/office/drawing/2014/main" id="{6AE4A780-2D79-19B0-B1E9-74650FFF6CE2}"/>
               </a:ext>
             </a:extLst>
           </p:cNvPr>
@@ -34502,7 +34538,7 @@
           <p:cNvPr id="17" name="Imagem 16">
             <a:extLst>
               <a:ext uri="{FF2B5EF4-FFF2-40B4-BE49-F238E27FC236}">
-                <a16:creationId xmlns:a16="http://schemas.microsoft.com/office/drawing/2014/main" xmlns="" id="{B264004C-5785-B53A-912B-070D69AF0074}"/>
+                <a16:creationId xmlns="" xmlns:a16="http://schemas.microsoft.com/office/drawing/2014/main" id="{B264004C-5785-B53A-912B-070D69AF0074}"/>
               </a:ext>
             </a:extLst>
           </p:cNvPr>
@@ -34568,7 +34604,7 @@
           <p:cNvPr id="2" name="Título 1">
             <a:extLst>
               <a:ext uri="{FF2B5EF4-FFF2-40B4-BE49-F238E27FC236}">
-                <a16:creationId xmlns:a16="http://schemas.microsoft.com/office/drawing/2014/main" xmlns="" id="{77169B24-439F-2623-4569-4FB2DD7BA69E}"/>
+                <a16:creationId xmlns="" xmlns:a16="http://schemas.microsoft.com/office/drawing/2014/main" id="{77169B24-439F-2623-4569-4FB2DD7BA69E}"/>
               </a:ext>
             </a:extLst>
           </p:cNvPr>
@@ -34598,7 +34634,7 @@
               <p:cNvPr id="3" name="Espaço Reservado para Conteúdo 2">
                 <a:extLst>
                   <a:ext uri="{FF2B5EF4-FFF2-40B4-BE49-F238E27FC236}">
-                    <a16:creationId xmlns:a16="http://schemas.microsoft.com/office/drawing/2014/main" xmlns="" id="{F7659DC9-1554-0C0A-78CF-76B7B51210CF}"/>
+                    <a16:creationId xmlns="" xmlns:a16="http://schemas.microsoft.com/office/drawing/2014/main" id="{F7659DC9-1554-0C0A-78CF-76B7B51210CF}"/>
                   </a:ext>
                 </a:extLst>
               </p:cNvPr>
@@ -34696,7 +34732,7 @@
           <p:cNvPr id="24" name="Picture 2">
             <a:extLst>
               <a:ext uri="{FF2B5EF4-FFF2-40B4-BE49-F238E27FC236}">
-                <a16:creationId xmlns:a16="http://schemas.microsoft.com/office/drawing/2014/main" xmlns="" id="{AF4ABB3B-6DD5-472D-1C06-9342ED7E2DC9}"/>
+                <a16:creationId xmlns="" xmlns:a16="http://schemas.microsoft.com/office/drawing/2014/main" id="{AF4ABB3B-6DD5-472D-1C06-9342ED7E2DC9}"/>
               </a:ext>
             </a:extLst>
           </p:cNvPr>
@@ -34773,7 +34809,7 @@
           <p:cNvPr id="2" name="Título 1">
             <a:extLst>
               <a:ext uri="{FF2B5EF4-FFF2-40B4-BE49-F238E27FC236}">
-                <a16:creationId xmlns:a16="http://schemas.microsoft.com/office/drawing/2014/main" xmlns="" id="{77169B24-439F-2623-4569-4FB2DD7BA69E}"/>
+                <a16:creationId xmlns="" xmlns:a16="http://schemas.microsoft.com/office/drawing/2014/main" id="{77169B24-439F-2623-4569-4FB2DD7BA69E}"/>
               </a:ext>
             </a:extLst>
           </p:cNvPr>
@@ -34801,7 +34837,7 @@
           <p:cNvPr id="3" name="Espaço Reservado para Conteúdo 2">
             <a:extLst>
               <a:ext uri="{FF2B5EF4-FFF2-40B4-BE49-F238E27FC236}">
-                <a16:creationId xmlns:a16="http://schemas.microsoft.com/office/drawing/2014/main" xmlns="" id="{F7659DC9-1554-0C0A-78CF-76B7B51210CF}"/>
+                <a16:creationId xmlns="" xmlns:a16="http://schemas.microsoft.com/office/drawing/2014/main" id="{F7659DC9-1554-0C0A-78CF-76B7B51210CF}"/>
               </a:ext>
             </a:extLst>
           </p:cNvPr>
@@ -34916,7 +34952,7 @@
           <p:cNvPr id="17" name="Agrupar 16">
             <a:extLst>
               <a:ext uri="{FF2B5EF4-FFF2-40B4-BE49-F238E27FC236}">
-                <a16:creationId xmlns:a16="http://schemas.microsoft.com/office/drawing/2014/main" xmlns="" id="{6C6C7F99-319F-3F5F-707A-3647CB0C494E}"/>
+                <a16:creationId xmlns="" xmlns:a16="http://schemas.microsoft.com/office/drawing/2014/main" id="{6C6C7F99-319F-3F5F-707A-3647CB0C494E}"/>
               </a:ext>
             </a:extLst>
           </p:cNvPr>
@@ -34936,7 +34972,7 @@
             <p:cNvPr id="4" name="Agrupar 3">
               <a:extLst>
                 <a:ext uri="{FF2B5EF4-FFF2-40B4-BE49-F238E27FC236}">
-                  <a16:creationId xmlns:a16="http://schemas.microsoft.com/office/drawing/2014/main" xmlns="" id="{8FF7C909-12C2-1F28-3CD1-F415FDEBCF05}"/>
+                  <a16:creationId xmlns="" xmlns:a16="http://schemas.microsoft.com/office/drawing/2014/main" id="{8FF7C909-12C2-1F28-3CD1-F415FDEBCF05}"/>
                 </a:ext>
               </a:extLst>
             </p:cNvPr>
@@ -34956,7 +34992,7 @@
               <p:cNvPr id="5" name="Picture 2">
                 <a:extLst>
                   <a:ext uri="{FF2B5EF4-FFF2-40B4-BE49-F238E27FC236}">
-                    <a16:creationId xmlns:a16="http://schemas.microsoft.com/office/drawing/2014/main" xmlns="" id="{1D1D236C-D17A-910F-590E-14660AC344E8}"/>
+                    <a16:creationId xmlns="" xmlns:a16="http://schemas.microsoft.com/office/drawing/2014/main" id="{1D1D236C-D17A-910F-590E-14660AC344E8}"/>
                   </a:ext>
                 </a:extLst>
               </p:cNvPr>
@@ -35003,7 +35039,7 @@
               <p:cNvPr id="6" name="Conector reto 5">
                 <a:extLst>
                   <a:ext uri="{FF2B5EF4-FFF2-40B4-BE49-F238E27FC236}">
-                    <a16:creationId xmlns:a16="http://schemas.microsoft.com/office/drawing/2014/main" xmlns="" id="{17F923C8-0338-E3A0-307C-4C48FF5D48E6}"/>
+                    <a16:creationId xmlns="" xmlns:a16="http://schemas.microsoft.com/office/drawing/2014/main" id="{17F923C8-0338-E3A0-307C-4C48FF5D48E6}"/>
                   </a:ext>
                 </a:extLst>
               </p:cNvPr>
@@ -35046,7 +35082,7 @@
               <p:cNvPr id="7" name="Conector reto 6">
                 <a:extLst>
                   <a:ext uri="{FF2B5EF4-FFF2-40B4-BE49-F238E27FC236}">
-                    <a16:creationId xmlns:a16="http://schemas.microsoft.com/office/drawing/2014/main" xmlns="" id="{108E4EB3-0A18-7674-4972-08EE9EB6C50A}"/>
+                    <a16:creationId xmlns="" xmlns:a16="http://schemas.microsoft.com/office/drawing/2014/main" id="{108E4EB3-0A18-7674-4972-08EE9EB6C50A}"/>
                   </a:ext>
                 </a:extLst>
               </p:cNvPr>
@@ -35089,7 +35125,7 @@
               <p:cNvPr id="8" name="Conector reto 7">
                 <a:extLst>
                   <a:ext uri="{FF2B5EF4-FFF2-40B4-BE49-F238E27FC236}">
-                    <a16:creationId xmlns:a16="http://schemas.microsoft.com/office/drawing/2014/main" xmlns="" id="{2DD01A53-07A0-0690-1495-693F9ECD4A00}"/>
+                    <a16:creationId xmlns="" xmlns:a16="http://schemas.microsoft.com/office/drawing/2014/main" id="{2DD01A53-07A0-0690-1495-693F9ECD4A00}"/>
                   </a:ext>
                 </a:extLst>
               </p:cNvPr>
@@ -35132,7 +35168,7 @@
               <p:cNvPr id="9" name="Conector reto 8">
                 <a:extLst>
                   <a:ext uri="{FF2B5EF4-FFF2-40B4-BE49-F238E27FC236}">
-                    <a16:creationId xmlns:a16="http://schemas.microsoft.com/office/drawing/2014/main" xmlns="" id="{CB18CCA6-494D-B0A3-4D7E-74DA8CC3B8A0}"/>
+                    <a16:creationId xmlns="" xmlns:a16="http://schemas.microsoft.com/office/drawing/2014/main" id="{CB18CCA6-494D-B0A3-4D7E-74DA8CC3B8A0}"/>
                   </a:ext>
                 </a:extLst>
               </p:cNvPr>
@@ -35175,7 +35211,7 @@
               <p:cNvPr id="10" name="Conector reto 9">
                 <a:extLst>
                   <a:ext uri="{FF2B5EF4-FFF2-40B4-BE49-F238E27FC236}">
-                    <a16:creationId xmlns:a16="http://schemas.microsoft.com/office/drawing/2014/main" xmlns="" id="{A2C62E84-F226-525B-CA91-F7ED46F858A3}"/>
+                    <a16:creationId xmlns="" xmlns:a16="http://schemas.microsoft.com/office/drawing/2014/main" id="{A2C62E84-F226-525B-CA91-F7ED46F858A3}"/>
                   </a:ext>
                 </a:extLst>
               </p:cNvPr>
@@ -35219,7 +35255,7 @@
             <p:cNvPr id="11" name="CaixaDeTexto 10">
               <a:extLst>
                 <a:ext uri="{FF2B5EF4-FFF2-40B4-BE49-F238E27FC236}">
-                  <a16:creationId xmlns:a16="http://schemas.microsoft.com/office/drawing/2014/main" xmlns="" id="{319F74EA-B98D-DDFF-AB65-A7E1DCDF4697}"/>
+                  <a16:creationId xmlns="" xmlns:a16="http://schemas.microsoft.com/office/drawing/2014/main" id="{319F74EA-B98D-DDFF-AB65-A7E1DCDF4697}"/>
                 </a:ext>
               </a:extLst>
             </p:cNvPr>
@@ -35254,7 +35290,7 @@
             <p:cNvPr id="12" name="CaixaDeTexto 11">
               <a:extLst>
                 <a:ext uri="{FF2B5EF4-FFF2-40B4-BE49-F238E27FC236}">
-                  <a16:creationId xmlns:a16="http://schemas.microsoft.com/office/drawing/2014/main" xmlns="" id="{88FD813C-F31B-C73D-966D-8C7F0F909160}"/>
+                  <a16:creationId xmlns="" xmlns:a16="http://schemas.microsoft.com/office/drawing/2014/main" id="{88FD813C-F31B-C73D-966D-8C7F0F909160}"/>
                 </a:ext>
               </a:extLst>
             </p:cNvPr>
@@ -35289,7 +35325,7 @@
             <p:cNvPr id="13" name="CaixaDeTexto 12">
               <a:extLst>
                 <a:ext uri="{FF2B5EF4-FFF2-40B4-BE49-F238E27FC236}">
-                  <a16:creationId xmlns:a16="http://schemas.microsoft.com/office/drawing/2014/main" xmlns="" id="{C852C7D1-AB69-D606-FC4E-0B5C2BACB107}"/>
+                  <a16:creationId xmlns="" xmlns:a16="http://schemas.microsoft.com/office/drawing/2014/main" id="{C852C7D1-AB69-D606-FC4E-0B5C2BACB107}"/>
                 </a:ext>
               </a:extLst>
             </p:cNvPr>
@@ -35324,7 +35360,7 @@
             <p:cNvPr id="14" name="CaixaDeTexto 13">
               <a:extLst>
                 <a:ext uri="{FF2B5EF4-FFF2-40B4-BE49-F238E27FC236}">
-                  <a16:creationId xmlns:a16="http://schemas.microsoft.com/office/drawing/2014/main" xmlns="" id="{9E922D3C-5A4A-3D21-6197-DBAF14CDD453}"/>
+                  <a16:creationId xmlns="" xmlns:a16="http://schemas.microsoft.com/office/drawing/2014/main" id="{9E922D3C-5A4A-3D21-6197-DBAF14CDD453}"/>
                 </a:ext>
               </a:extLst>
             </p:cNvPr>
@@ -35359,7 +35395,7 @@
             <p:cNvPr id="15" name="CaixaDeTexto 14">
               <a:extLst>
                 <a:ext uri="{FF2B5EF4-FFF2-40B4-BE49-F238E27FC236}">
-                  <a16:creationId xmlns:a16="http://schemas.microsoft.com/office/drawing/2014/main" xmlns="" id="{0086DBF0-CF72-E0B1-1CAA-C89D91AF58FC}"/>
+                  <a16:creationId xmlns="" xmlns:a16="http://schemas.microsoft.com/office/drawing/2014/main" id="{0086DBF0-CF72-E0B1-1CAA-C89D91AF58FC}"/>
                 </a:ext>
               </a:extLst>
             </p:cNvPr>
@@ -35394,7 +35430,7 @@
             <p:cNvPr id="16" name="CaixaDeTexto 15">
               <a:extLst>
                 <a:ext uri="{FF2B5EF4-FFF2-40B4-BE49-F238E27FC236}">
-                  <a16:creationId xmlns:a16="http://schemas.microsoft.com/office/drawing/2014/main" xmlns="" id="{BFC5DBDA-2B32-374E-2937-C6D4CC105E04}"/>
+                  <a16:creationId xmlns="" xmlns:a16="http://schemas.microsoft.com/office/drawing/2014/main" id="{BFC5DBDA-2B32-374E-2937-C6D4CC105E04}"/>
                 </a:ext>
               </a:extLst>
             </p:cNvPr>
@@ -35432,7 +35468,7 @@
               <p:cNvPr id="18" name="CaixaDeTexto 17">
                 <a:extLst>
                   <a:ext uri="{FF2B5EF4-FFF2-40B4-BE49-F238E27FC236}">
-                    <a16:creationId xmlns:a16="http://schemas.microsoft.com/office/drawing/2014/main" xmlns="" id="{DD20CBB2-FDAA-391D-A50B-D2D2B6FB1278}"/>
+                    <a16:creationId xmlns="" xmlns:a16="http://schemas.microsoft.com/office/drawing/2014/main" id="{DD20CBB2-FDAA-391D-A50B-D2D2B6FB1278}"/>
                   </a:ext>
                 </a:extLst>
               </p:cNvPr>
@@ -35607,7 +35643,7 @@
           <p:cNvPr id="19" name="Chave Direita 18">
             <a:extLst>
               <a:ext uri="{FF2B5EF4-FFF2-40B4-BE49-F238E27FC236}">
-                <a16:creationId xmlns:a16="http://schemas.microsoft.com/office/drawing/2014/main" xmlns="" id="{B6B6FEBB-31F4-7252-312B-0E7FCA16E244}"/>
+                <a16:creationId xmlns="" xmlns:a16="http://schemas.microsoft.com/office/drawing/2014/main" id="{B6B6FEBB-31F4-7252-312B-0E7FCA16E244}"/>
               </a:ext>
             </a:extLst>
           </p:cNvPr>
